--- a/skills/doc/skills-final.pptx
+++ b/skills/doc/skills-final.pptx
@@ -5,7 +5,7 @@
     <p:sldMasterId id="2147483648" r:id="rId1"/>
   </p:sldMasterIdLst>
   <p:notesMasterIdLst>
-    <p:notesMasterId r:id="rId21"/>
+    <p:notesMasterId r:id="rId23"/>
   </p:notesMasterIdLst>
   <p:sldIdLst>
     <p:sldId id="256" r:id="rId2"/>
@@ -14,38 +14,40 @@
     <p:sldId id="277" r:id="rId5"/>
     <p:sldId id="275" r:id="rId6"/>
     <p:sldId id="276" r:id="rId7"/>
-    <p:sldId id="278" r:id="rId8"/>
-    <p:sldId id="274" r:id="rId9"/>
-    <p:sldId id="279" r:id="rId10"/>
-    <p:sldId id="286" r:id="rId11"/>
-    <p:sldId id="287" r:id="rId12"/>
-    <p:sldId id="288" r:id="rId13"/>
-    <p:sldId id="281" r:id="rId14"/>
-    <p:sldId id="283" r:id="rId15"/>
-    <p:sldId id="282" r:id="rId16"/>
-    <p:sldId id="284" r:id="rId17"/>
-    <p:sldId id="285" r:id="rId18"/>
-    <p:sldId id="270" r:id="rId19"/>
-    <p:sldId id="271" r:id="rId20"/>
+    <p:sldId id="290" r:id="rId8"/>
+    <p:sldId id="289" r:id="rId9"/>
+    <p:sldId id="278" r:id="rId10"/>
+    <p:sldId id="274" r:id="rId11"/>
+    <p:sldId id="279" r:id="rId12"/>
+    <p:sldId id="286" r:id="rId13"/>
+    <p:sldId id="287" r:id="rId14"/>
+    <p:sldId id="288" r:id="rId15"/>
+    <p:sldId id="281" r:id="rId16"/>
+    <p:sldId id="283" r:id="rId17"/>
+    <p:sldId id="282" r:id="rId18"/>
+    <p:sldId id="284" r:id="rId19"/>
+    <p:sldId id="285" r:id="rId20"/>
+    <p:sldId id="270" r:id="rId21"/>
+    <p:sldId id="271" r:id="rId22"/>
   </p:sldIdLst>
   <p:sldSz cx="12192000" cy="6858000"/>
   <p:notesSz cx="7099300" cy="10234613"/>
   <p:embeddedFontLst>
     <p:embeddedFont>
       <p:font typeface="Helvetica Neue" panose="02020500000000000000" charset="0"/>
-      <p:regular r:id="rId22"/>
-      <p:bold r:id="rId23"/>
-      <p:italic r:id="rId24"/>
-      <p:boldItalic r:id="rId25"/>
+      <p:regular r:id="rId24"/>
+      <p:bold r:id="rId25"/>
+      <p:italic r:id="rId26"/>
+      <p:boldItalic r:id="rId27"/>
     </p:embeddedFont>
     <p:embeddedFont>
       <p:font typeface="微軟正黑體" panose="020B0604030504040204" pitchFamily="34" charset="-120"/>
-      <p:regular r:id="rId26"/>
-      <p:bold r:id="rId27"/>
+      <p:regular r:id="rId28"/>
+      <p:bold r:id="rId29"/>
     </p:embeddedFont>
     <p:embeddedFont>
       <p:font typeface="標楷體" panose="03000509000000000000" pitchFamily="65" charset="-120"/>
-      <p:regular r:id="rId28"/>
+      <p:regular r:id="rId30"/>
     </p:embeddedFont>
   </p:embeddedFontLst>
   <p:defaultTextStyle>
@@ -282,7 +284,7 @@
       <p15:sldGuideLst xmlns:p15="http://schemas.microsoft.com/office/powerpoint/2012/main"/>
     </p:ext>
     <p:ext uri="GoogleSlidesCustomDataVersion2">
-      <go:slidesCustomData xmlns:go="http://customooxmlschemas.google.com/" xmlns:ahyp="http://schemas.microsoft.com/office/drawing/2018/hyperlinkcolor" xmlns:p15="http://schemas.microsoft.com/office/powerpoint/2012/main" xmlns:p14="http://schemas.microsoft.com/office/powerpoint/2010/main" xmlns:com="http://schemas.openxmlformats.org/drawingml/2006/compatibility" xmlns:pvml="urn:schemas-microsoft-com:office:powerpoint" xmlns:v="urn:schemas-microsoft-com:vml" xmlns:o="urn:schemas-microsoft-com:office:office" xmlns:dgm="http://schemas.openxmlformats.org/drawingml/2006/diagram" xmlns:c="http://schemas.openxmlformats.org/drawingml/2006/chart" xmlns:mv="urn:schemas-microsoft-com:mac:vml" xmlns:mc="http://schemas.openxmlformats.org/markup-compatibility/2006" xmlns="" r:id="rId29" roundtripDataSignature="AMtx7mjVYWe9aou/H3Yj/jOOLoPiCa0o6w=="/>
+      <go:slidesCustomData xmlns="" xmlns:mc="http://schemas.openxmlformats.org/markup-compatibility/2006" xmlns:mv="urn:schemas-microsoft-com:mac:vml" xmlns:c="http://schemas.openxmlformats.org/drawingml/2006/chart" xmlns:dgm="http://schemas.openxmlformats.org/drawingml/2006/diagram" xmlns:o="urn:schemas-microsoft-com:office:office" xmlns:v="urn:schemas-microsoft-com:vml" xmlns:pvml="urn:schemas-microsoft-com:office:powerpoint" xmlns:com="http://schemas.openxmlformats.org/drawingml/2006/compatibility" xmlns:p14="http://schemas.microsoft.com/office/powerpoint/2010/main" xmlns:p15="http://schemas.microsoft.com/office/powerpoint/2012/main" xmlns:ahyp="http://schemas.microsoft.com/office/drawing/2018/hyperlinkcolor" xmlns:go="http://customooxmlschemas.google.com/" r:id="rId31" roundtripDataSignature="AMtx7mjVYWe9aou/H3Yj/jOOLoPiCa0o6w=="/>
     </p:ext>
   </p:extLst>
 </p:presentation>
@@ -1659,6 +1661,400 @@
         <p:cNvPr id="1" name="Shape 92">
           <a:extLst>
             <a:ext uri="{FF2B5EF4-FFF2-40B4-BE49-F238E27FC236}">
+              <a16:creationId xmlns:a16="http://schemas.microsoft.com/office/drawing/2014/main" id="{1FC71CAE-1A5C-FFAB-0BF7-3F1E9EEAEE6C}"/>
+            </a:ext>
+          </a:extLst>
+        </p:cNvPr>
+        <p:cNvGrpSpPr/>
+        <p:nvPr/>
+      </p:nvGrpSpPr>
+      <p:grpSpPr>
+        <a:xfrm>
+          <a:off x="0" y="0"/>
+          <a:ext cx="0" cy="0"/>
+          <a:chOff x="0" y="0"/>
+          <a:chExt cx="0" cy="0"/>
+        </a:xfrm>
+      </p:grpSpPr>
+      <p:sp>
+        <p:nvSpPr>
+          <p:cNvPr id="93" name="Google Shape;93;p2:notes">
+            <a:extLst>
+              <a:ext uri="{FF2B5EF4-FFF2-40B4-BE49-F238E27FC236}">
+                <a16:creationId xmlns:a16="http://schemas.microsoft.com/office/drawing/2014/main" id="{5B47EB58-4055-8407-CCFF-BDD7739A0EED}"/>
+              </a:ext>
+            </a:extLst>
+          </p:cNvPr>
+          <p:cNvSpPr>
+            <a:spLocks noGrp="1" noRot="1" noChangeAspect="1"/>
+          </p:cNvSpPr>
+          <p:nvPr>
+            <p:ph type="sldImg" idx="2"/>
+          </p:nvPr>
+        </p:nvSpPr>
+        <p:spPr>
+          <a:xfrm>
+            <a:off x="139700" y="768350"/>
+            <a:ext cx="6819900" cy="3836988"/>
+          </a:xfrm>
+          <a:custGeom>
+            <a:avLst/>
+            <a:gdLst/>
+            <a:ahLst/>
+            <a:cxnLst/>
+            <a:rect l="l" t="t" r="r" b="b"/>
+            <a:pathLst>
+              <a:path w="120000" h="120000" extrusionOk="0">
+                <a:moveTo>
+                  <a:pt x="0" y="0"/>
+                </a:moveTo>
+                <a:lnTo>
+                  <a:pt x="120000" y="0"/>
+                </a:lnTo>
+                <a:lnTo>
+                  <a:pt x="120000" y="120000"/>
+                </a:lnTo>
+                <a:lnTo>
+                  <a:pt x="0" y="120000"/>
+                </a:lnTo>
+                <a:close/>
+              </a:path>
+            </a:pathLst>
+          </a:custGeom>
+          <a:noFill/>
+          <a:ln w="12700" cap="flat" cmpd="sng">
+            <a:solidFill>
+              <a:srgbClr val="000000"/>
+            </a:solidFill>
+            <a:prstDash val="solid"/>
+            <a:round/>
+            <a:headEnd type="none" w="sm" len="sm"/>
+            <a:tailEnd type="none" w="sm" len="sm"/>
+          </a:ln>
+        </p:spPr>
+      </p:sp>
+      <p:sp>
+        <p:nvSpPr>
+          <p:cNvPr id="94" name="Google Shape;94;p2:notes">
+            <a:extLst>
+              <a:ext uri="{FF2B5EF4-FFF2-40B4-BE49-F238E27FC236}">
+                <a16:creationId xmlns:a16="http://schemas.microsoft.com/office/drawing/2014/main" id="{AE27E2EA-2253-5F45-7335-18BC7247B8B8}"/>
+              </a:ext>
+            </a:extLst>
+          </p:cNvPr>
+          <p:cNvSpPr txBox="1">
+            <a:spLocks noGrp="1"/>
+          </p:cNvSpPr>
+          <p:nvPr>
+            <p:ph type="body" idx="1"/>
+          </p:nvPr>
+        </p:nvSpPr>
+        <p:spPr>
+          <a:xfrm>
+            <a:off x="709613" y="4860925"/>
+            <a:ext cx="5680075" cy="4605338"/>
+          </a:xfrm>
+          <a:prstGeom prst="rect">
+            <a:avLst/>
+          </a:prstGeom>
+          <a:noFill/>
+          <a:ln>
+            <a:noFill/>
+          </a:ln>
+        </p:spPr>
+        <p:txBody>
+          <a:bodyPr spcFirstLastPara="1" wrap="square" lIns="99025" tIns="49500" rIns="99025" bIns="49500" anchor="t" anchorCtr="0">
+            <a:normAutofit/>
+          </a:bodyPr>
+          <a:lstStyle/>
+          <a:p>
+            <a:r>
+              <a:rPr lang="en-US" altLang="zh-TW" dirty="0"/>
+              <a:t>Category 1 </a:t>
+            </a:r>
+            <a:r>
+              <a:rPr lang="zh-TW" altLang="en-US" dirty="0"/>
+              <a:t>是為了創造一致、高品質的輸出 。</a:t>
+            </a:r>
+            <a:endParaRPr lang="zh-TW" altLang="en-US" sz="1200" b="0" i="0" u="none" strike="noStrike" cap="none" dirty="0">
+              <a:solidFill>
+                <a:schemeClr val="dk1"/>
+              </a:solidFill>
+              <a:effectLst/>
+              <a:latin typeface="Calibri"/>
+              <a:ea typeface="Calibri"/>
+              <a:cs typeface="Calibri"/>
+              <a:sym typeface="Calibri"/>
+            </a:endParaRPr>
+          </a:p>
+        </p:txBody>
+      </p:sp>
+      <p:sp>
+        <p:nvSpPr>
+          <p:cNvPr id="95" name="Google Shape;95;p2:notes">
+            <a:extLst>
+              <a:ext uri="{FF2B5EF4-FFF2-40B4-BE49-F238E27FC236}">
+                <a16:creationId xmlns:a16="http://schemas.microsoft.com/office/drawing/2014/main" id="{A3A93D0F-1150-9731-6CBD-A305F3966409}"/>
+              </a:ext>
+            </a:extLst>
+          </p:cNvPr>
+          <p:cNvSpPr txBox="1">
+            <a:spLocks noGrp="1"/>
+          </p:cNvSpPr>
+          <p:nvPr>
+            <p:ph type="sldNum" idx="12"/>
+          </p:nvPr>
+        </p:nvSpPr>
+        <p:spPr>
+          <a:xfrm>
+            <a:off x="4021138" y="9721850"/>
+            <a:ext cx="3076575" cy="511175"/>
+          </a:xfrm>
+          <a:prstGeom prst="rect">
+            <a:avLst/>
+          </a:prstGeom>
+          <a:noFill/>
+          <a:ln>
+            <a:noFill/>
+          </a:ln>
+        </p:spPr>
+        <p:txBody>
+          <a:bodyPr spcFirstLastPara="1" wrap="square" lIns="99025" tIns="49500" rIns="99025" bIns="49500" anchor="b" anchorCtr="0">
+            <a:noAutofit/>
+          </a:bodyPr>
+          <a:lstStyle/>
+          <a:p>
+            <a:pPr marL="0" lvl="0" indent="0" algn="r" rtl="0">
+              <a:spcBef>
+                <a:spcPts val="0"/>
+              </a:spcBef>
+              <a:spcAft>
+                <a:spcPts val="0"/>
+              </a:spcAft>
+              <a:buNone/>
+            </a:pPr>
+            <a:fld id="{00000000-1234-1234-1234-123412341234}" type="slidenum">
+              <a:rPr lang="en-US"/>
+              <a:t>10</a:t>
+            </a:fld>
+            <a:endParaRPr/>
+          </a:p>
+        </p:txBody>
+      </p:sp>
+    </p:spTree>
+    <p:extLst>
+      <p:ext uri="{BB962C8B-B14F-4D97-AF65-F5344CB8AC3E}">
+        <p14:creationId xmlns:p14="http://schemas.microsoft.com/office/powerpoint/2010/main" val="3509895589"/>
+      </p:ext>
+    </p:extLst>
+  </p:cSld>
+  <p:clrMapOvr>
+    <a:masterClrMapping/>
+  </p:clrMapOvr>
+</p:notes>
+</file>
+
+<file path=ppt/notesSlides/notesSlide11.xml><?xml version="1.0" encoding="utf-8"?>
+<p:notes xmlns:a="http://schemas.openxmlformats.org/drawingml/2006/main" xmlns:r="http://schemas.openxmlformats.org/officeDocument/2006/relationships" xmlns:p="http://schemas.openxmlformats.org/presentationml/2006/main" showMasterSp="0" showMasterPhAnim="0">
+  <p:cSld>
+    <p:spTree>
+      <p:nvGrpSpPr>
+        <p:cNvPr id="1" name="Shape 92">
+          <a:extLst>
+            <a:ext uri="{FF2B5EF4-FFF2-40B4-BE49-F238E27FC236}">
+              <a16:creationId xmlns:a16="http://schemas.microsoft.com/office/drawing/2014/main" id="{7053855B-6178-234D-B969-57DF775BB7FF}"/>
+            </a:ext>
+          </a:extLst>
+        </p:cNvPr>
+        <p:cNvGrpSpPr/>
+        <p:nvPr/>
+      </p:nvGrpSpPr>
+      <p:grpSpPr>
+        <a:xfrm>
+          <a:off x="0" y="0"/>
+          <a:ext cx="0" cy="0"/>
+          <a:chOff x="0" y="0"/>
+          <a:chExt cx="0" cy="0"/>
+        </a:xfrm>
+      </p:grpSpPr>
+      <p:sp>
+        <p:nvSpPr>
+          <p:cNvPr id="93" name="Google Shape;93;p2:notes">
+            <a:extLst>
+              <a:ext uri="{FF2B5EF4-FFF2-40B4-BE49-F238E27FC236}">
+                <a16:creationId xmlns:a16="http://schemas.microsoft.com/office/drawing/2014/main" id="{D2C78820-642F-4AE9-2003-15CAE1E00AAD}"/>
+              </a:ext>
+            </a:extLst>
+          </p:cNvPr>
+          <p:cNvSpPr>
+            <a:spLocks noGrp="1" noRot="1" noChangeAspect="1"/>
+          </p:cNvSpPr>
+          <p:nvPr>
+            <p:ph type="sldImg" idx="2"/>
+          </p:nvPr>
+        </p:nvSpPr>
+        <p:spPr>
+          <a:xfrm>
+            <a:off x="139700" y="768350"/>
+            <a:ext cx="6819900" cy="3836988"/>
+          </a:xfrm>
+          <a:custGeom>
+            <a:avLst/>
+            <a:gdLst/>
+            <a:ahLst/>
+            <a:cxnLst/>
+            <a:rect l="l" t="t" r="r" b="b"/>
+            <a:pathLst>
+              <a:path w="120000" h="120000" extrusionOk="0">
+                <a:moveTo>
+                  <a:pt x="0" y="0"/>
+                </a:moveTo>
+                <a:lnTo>
+                  <a:pt x="120000" y="0"/>
+                </a:lnTo>
+                <a:lnTo>
+                  <a:pt x="120000" y="120000"/>
+                </a:lnTo>
+                <a:lnTo>
+                  <a:pt x="0" y="120000"/>
+                </a:lnTo>
+                <a:close/>
+              </a:path>
+            </a:pathLst>
+          </a:custGeom>
+          <a:noFill/>
+          <a:ln w="12700" cap="flat" cmpd="sng">
+            <a:solidFill>
+              <a:srgbClr val="000000"/>
+            </a:solidFill>
+            <a:prstDash val="solid"/>
+            <a:round/>
+            <a:headEnd type="none" w="sm" len="sm"/>
+            <a:tailEnd type="none" w="sm" len="sm"/>
+          </a:ln>
+        </p:spPr>
+      </p:sp>
+      <p:sp>
+        <p:nvSpPr>
+          <p:cNvPr id="94" name="Google Shape;94;p2:notes">
+            <a:extLst>
+              <a:ext uri="{FF2B5EF4-FFF2-40B4-BE49-F238E27FC236}">
+                <a16:creationId xmlns:a16="http://schemas.microsoft.com/office/drawing/2014/main" id="{7216A5FC-A31C-6A62-D4BB-720A59DE268E}"/>
+              </a:ext>
+            </a:extLst>
+          </p:cNvPr>
+          <p:cNvSpPr txBox="1">
+            <a:spLocks noGrp="1"/>
+          </p:cNvSpPr>
+          <p:nvPr>
+            <p:ph type="body" idx="1"/>
+          </p:nvPr>
+        </p:nvSpPr>
+        <p:spPr>
+          <a:xfrm>
+            <a:off x="709613" y="4860925"/>
+            <a:ext cx="5680075" cy="4605338"/>
+          </a:xfrm>
+          <a:prstGeom prst="rect">
+            <a:avLst/>
+          </a:prstGeom>
+          <a:noFill/>
+          <a:ln>
+            <a:noFill/>
+          </a:ln>
+        </p:spPr>
+        <p:txBody>
+          <a:bodyPr spcFirstLastPara="1" wrap="square" lIns="99025" tIns="49500" rIns="99025" bIns="49500" anchor="t" anchorCtr="0">
+            <a:normAutofit/>
+          </a:bodyPr>
+          <a:lstStyle/>
+          <a:p>
+            <a:endParaRPr lang="zh-TW" altLang="en-US" sz="1200" b="0" i="0" u="none" strike="noStrike" cap="none" dirty="0">
+              <a:solidFill>
+                <a:schemeClr val="dk1"/>
+              </a:solidFill>
+              <a:effectLst/>
+              <a:latin typeface="Calibri"/>
+              <a:ea typeface="Calibri"/>
+              <a:cs typeface="Calibri"/>
+              <a:sym typeface="Calibri"/>
+            </a:endParaRPr>
+          </a:p>
+        </p:txBody>
+      </p:sp>
+      <p:sp>
+        <p:nvSpPr>
+          <p:cNvPr id="95" name="Google Shape;95;p2:notes">
+            <a:extLst>
+              <a:ext uri="{FF2B5EF4-FFF2-40B4-BE49-F238E27FC236}">
+                <a16:creationId xmlns:a16="http://schemas.microsoft.com/office/drawing/2014/main" id="{226C62A5-5AEC-FA1F-ECAD-EC28F6F9B3A7}"/>
+              </a:ext>
+            </a:extLst>
+          </p:cNvPr>
+          <p:cNvSpPr txBox="1">
+            <a:spLocks noGrp="1"/>
+          </p:cNvSpPr>
+          <p:nvPr>
+            <p:ph type="sldNum" idx="12"/>
+          </p:nvPr>
+        </p:nvSpPr>
+        <p:spPr>
+          <a:xfrm>
+            <a:off x="4021138" y="9721850"/>
+            <a:ext cx="3076575" cy="511175"/>
+          </a:xfrm>
+          <a:prstGeom prst="rect">
+            <a:avLst/>
+          </a:prstGeom>
+          <a:noFill/>
+          <a:ln>
+            <a:noFill/>
+          </a:ln>
+        </p:spPr>
+        <p:txBody>
+          <a:bodyPr spcFirstLastPara="1" wrap="square" lIns="99025" tIns="49500" rIns="99025" bIns="49500" anchor="b" anchorCtr="0">
+            <a:noAutofit/>
+          </a:bodyPr>
+          <a:lstStyle/>
+          <a:p>
+            <a:pPr marL="0" lvl="0" indent="0" algn="r" rtl="0">
+              <a:spcBef>
+                <a:spcPts val="0"/>
+              </a:spcBef>
+              <a:spcAft>
+                <a:spcPts val="0"/>
+              </a:spcAft>
+              <a:buNone/>
+            </a:pPr>
+            <a:fld id="{00000000-1234-1234-1234-123412341234}" type="slidenum">
+              <a:rPr lang="en-US"/>
+              <a:t>11</a:t>
+            </a:fld>
+            <a:endParaRPr/>
+          </a:p>
+        </p:txBody>
+      </p:sp>
+    </p:spTree>
+    <p:extLst>
+      <p:ext uri="{BB962C8B-B14F-4D97-AF65-F5344CB8AC3E}">
+        <p14:creationId xmlns:p14="http://schemas.microsoft.com/office/powerpoint/2010/main" val="3916870764"/>
+      </p:ext>
+    </p:extLst>
+  </p:cSld>
+  <p:clrMapOvr>
+    <a:masterClrMapping/>
+  </p:clrMapOvr>
+</p:notes>
+</file>
+
+<file path=ppt/notesSlides/notesSlide12.xml><?xml version="1.0" encoding="utf-8"?>
+<p:notes xmlns:a="http://schemas.openxmlformats.org/drawingml/2006/main" xmlns:r="http://schemas.openxmlformats.org/officeDocument/2006/relationships" xmlns:p="http://schemas.openxmlformats.org/presentationml/2006/main" showMasterSp="0" showMasterPhAnim="0">
+  <p:cSld>
+    <p:spTree>
+      <p:nvGrpSpPr>
+        <p:cNvPr id="1" name="Shape 92">
+          <a:extLst>
+            <a:ext uri="{FF2B5EF4-FFF2-40B4-BE49-F238E27FC236}">
               <a16:creationId xmlns:a16="http://schemas.microsoft.com/office/drawing/2014/main" id="{CE43878A-DFBA-4C09-0CD2-B69608F95CBD}"/>
             </a:ext>
           </a:extLst>
@@ -2114,7 +2510,7 @@
             </a:pPr>
             <a:fld id="{00000000-1234-1234-1234-123412341234}" type="slidenum">
               <a:rPr lang="en-US"/>
-              <a:t>10</a:t>
+              <a:t>12</a:t>
             </a:fld>
             <a:endParaRPr/>
           </a:p>
@@ -2133,7 +2529,7 @@
 </p:notes>
 </file>
 
-<file path=ppt/notesSlides/notesSlide11.xml><?xml version="1.0" encoding="utf-8"?>
+<file path=ppt/notesSlides/notesSlide13.xml><?xml version="1.0" encoding="utf-8"?>
 <p:notes xmlns:a="http://schemas.openxmlformats.org/drawingml/2006/main" xmlns:r="http://schemas.openxmlformats.org/officeDocument/2006/relationships" xmlns:p="http://schemas.openxmlformats.org/presentationml/2006/main" showMasterSp="0" showMasterPhAnim="0">
   <p:cSld>
     <p:spTree>
@@ -2505,7 +2901,7 @@
             </a:pPr>
             <a:fld id="{00000000-1234-1234-1234-123412341234}" type="slidenum">
               <a:rPr lang="en-US"/>
-              <a:t>11</a:t>
+              <a:t>13</a:t>
             </a:fld>
             <a:endParaRPr/>
           </a:p>
@@ -2524,7 +2920,7 @@
 </p:notes>
 </file>
 
-<file path=ppt/notesSlides/notesSlide12.xml><?xml version="1.0" encoding="utf-8"?>
+<file path=ppt/notesSlides/notesSlide14.xml><?xml version="1.0" encoding="utf-8"?>
 <p:notes xmlns:a="http://schemas.openxmlformats.org/drawingml/2006/main" xmlns:r="http://schemas.openxmlformats.org/officeDocument/2006/relationships" xmlns:p="http://schemas.openxmlformats.org/presentationml/2006/main" showMasterSp="0" showMasterPhAnim="0">
   <p:cSld>
     <p:spTree>
@@ -3016,7 +3412,7 @@
             </a:pPr>
             <a:fld id="{00000000-1234-1234-1234-123412341234}" type="slidenum">
               <a:rPr lang="en-US"/>
-              <a:t>12</a:t>
+              <a:t>14</a:t>
             </a:fld>
             <a:endParaRPr/>
           </a:p>
@@ -3035,7 +3431,7 @@
 </p:notes>
 </file>
 
-<file path=ppt/notesSlides/notesSlide13.xml><?xml version="1.0" encoding="utf-8"?>
+<file path=ppt/notesSlides/notesSlide15.xml><?xml version="1.0" encoding="utf-8"?>
 <p:notes xmlns:a="http://schemas.openxmlformats.org/drawingml/2006/main" xmlns:r="http://schemas.openxmlformats.org/officeDocument/2006/relationships" xmlns:p="http://schemas.openxmlformats.org/presentationml/2006/main" showMasterSp="0" showMasterPhAnim="0">
   <p:cSld>
     <p:spTree>
@@ -3424,7 +3820,7 @@
             </a:pPr>
             <a:fld id="{00000000-1234-1234-1234-123412341234}" type="slidenum">
               <a:rPr lang="en-US"/>
-              <a:t>13</a:t>
+              <a:t>15</a:t>
             </a:fld>
             <a:endParaRPr/>
           </a:p>
@@ -3443,7 +3839,7 @@
 </p:notes>
 </file>
 
-<file path=ppt/notesSlides/notesSlide14.xml><?xml version="1.0" encoding="utf-8"?>
+<file path=ppt/notesSlides/notesSlide16.xml><?xml version="1.0" encoding="utf-8"?>
 <p:notes xmlns:a="http://schemas.openxmlformats.org/drawingml/2006/main" xmlns:r="http://schemas.openxmlformats.org/officeDocument/2006/relationships" xmlns:p="http://schemas.openxmlformats.org/presentationml/2006/main" showMasterSp="0" showMasterPhAnim="0">
   <p:cSld>
     <p:spTree>
@@ -3554,7 +3950,7 @@
         </p:spPr>
         <p:txBody>
           <a:bodyPr spcFirstLastPara="1" wrap="square" lIns="99025" tIns="49500" rIns="99025" bIns="49500" anchor="t" anchorCtr="0">
-            <a:normAutofit fontScale="92500" lnSpcReduction="10000"/>
+            <a:normAutofit/>
           </a:bodyPr>
           <a:lstStyle/>
           <a:p>
@@ -3617,7 +4013,7 @@
             </a:pPr>
             <a:fld id="{00000000-1234-1234-1234-123412341234}" type="slidenum">
               <a:rPr lang="en-US"/>
-              <a:t>14</a:t>
+              <a:t>16</a:t>
             </a:fld>
             <a:endParaRPr/>
           </a:p>
@@ -3636,7 +4032,7 @@
 </p:notes>
 </file>
 
-<file path=ppt/notesSlides/notesSlide15.xml><?xml version="1.0" encoding="utf-8"?>
+<file path=ppt/notesSlides/notesSlide17.xml><?xml version="1.0" encoding="utf-8"?>
 <p:notes xmlns:a="http://schemas.openxmlformats.org/drawingml/2006/main" xmlns:r="http://schemas.openxmlformats.org/officeDocument/2006/relationships" xmlns:p="http://schemas.openxmlformats.org/presentationml/2006/main" showMasterSp="0" showMasterPhAnim="0">
   <p:cSld>
     <p:spTree>
@@ -3810,7 +4206,7 @@
             </a:pPr>
             <a:fld id="{00000000-1234-1234-1234-123412341234}" type="slidenum">
               <a:rPr lang="en-US"/>
-              <a:t>15</a:t>
+              <a:t>17</a:t>
             </a:fld>
             <a:endParaRPr/>
           </a:p>
@@ -3829,7 +4225,7 @@
 </p:notes>
 </file>
 
-<file path=ppt/notesSlides/notesSlide16.xml><?xml version="1.0" encoding="utf-8"?>
+<file path=ppt/notesSlides/notesSlide18.xml><?xml version="1.0" encoding="utf-8"?>
 <p:notes xmlns:a="http://schemas.openxmlformats.org/drawingml/2006/main" xmlns:r="http://schemas.openxmlformats.org/officeDocument/2006/relationships" xmlns:p="http://schemas.openxmlformats.org/presentationml/2006/main" showMasterSp="0" showMasterPhAnim="0">
   <p:cSld>
     <p:spTree>
@@ -4003,7 +4399,7 @@
             </a:pPr>
             <a:fld id="{00000000-1234-1234-1234-123412341234}" type="slidenum">
               <a:rPr lang="en-US"/>
-              <a:t>16</a:t>
+              <a:t>18</a:t>
             </a:fld>
             <a:endParaRPr/>
           </a:p>
@@ -4022,7 +4418,7 @@
 </p:notes>
 </file>
 
-<file path=ppt/notesSlides/notesSlide17.xml><?xml version="1.0" encoding="utf-8"?>
+<file path=ppt/notesSlides/notesSlide19.xml><?xml version="1.0" encoding="utf-8"?>
 <p:notes xmlns:a="http://schemas.openxmlformats.org/drawingml/2006/main" xmlns:r="http://schemas.openxmlformats.org/officeDocument/2006/relationships" xmlns:p="http://schemas.openxmlformats.org/presentationml/2006/main" showMasterSp="0" showMasterPhAnim="0">
   <p:cSld>
     <p:spTree>
@@ -4542,7 +4938,7 @@
             </a:pPr>
             <a:fld id="{00000000-1234-1234-1234-123412341234}" type="slidenum">
               <a:rPr lang="en-US"/>
-              <a:t>17</a:t>
+              <a:t>19</a:t>
             </a:fld>
             <a:endParaRPr/>
           </a:p>
@@ -4554,214 +4950,6 @@
         <p14:creationId xmlns:p14="http://schemas.microsoft.com/office/powerpoint/2010/main" val="300924431"/>
       </p:ext>
     </p:extLst>
-  </p:cSld>
-  <p:clrMapOvr>
-    <a:masterClrMapping/>
-  </p:clrMapOvr>
-</p:notes>
-</file>
-
-<file path=ppt/notesSlides/notesSlide18.xml><?xml version="1.0" encoding="utf-8"?>
-<p:notes xmlns:a="http://schemas.openxmlformats.org/drawingml/2006/main" xmlns:r="http://schemas.openxmlformats.org/officeDocument/2006/relationships" xmlns:p="http://schemas.openxmlformats.org/presentationml/2006/main" showMasterSp="0" showMasterPhAnim="0">
-  <p:cSld>
-    <p:spTree>
-      <p:nvGrpSpPr>
-        <p:cNvPr id="1" name="Shape 218"/>
-        <p:cNvGrpSpPr/>
-        <p:nvPr/>
-      </p:nvGrpSpPr>
-      <p:grpSpPr>
-        <a:xfrm>
-          <a:off x="0" y="0"/>
-          <a:ext cx="0" cy="0"/>
-          <a:chOff x="0" y="0"/>
-          <a:chExt cx="0" cy="0"/>
-        </a:xfrm>
-      </p:grpSpPr>
-      <p:sp>
-        <p:nvSpPr>
-          <p:cNvPr id="219" name="Google Shape;219;p15:notes"/>
-          <p:cNvSpPr txBox="1">
-            <a:spLocks noGrp="1"/>
-          </p:cNvSpPr>
-          <p:nvPr>
-            <p:ph type="body" idx="1"/>
-          </p:nvPr>
-        </p:nvSpPr>
-        <p:spPr>
-          <a:xfrm>
-            <a:off x="709613" y="4860925"/>
-            <a:ext cx="5680075" cy="4605338"/>
-          </a:xfrm>
-          <a:prstGeom prst="rect">
-            <a:avLst/>
-          </a:prstGeom>
-        </p:spPr>
-        <p:txBody>
-          <a:bodyPr spcFirstLastPara="1" wrap="square" lIns="99025" tIns="49500" rIns="99025" bIns="49500" anchor="t" anchorCtr="0">
-            <a:noAutofit/>
-          </a:bodyPr>
-          <a:lstStyle/>
-          <a:p>
-            <a:pPr marL="0" lvl="0" indent="0" algn="l" rtl="0">
-              <a:spcBef>
-                <a:spcPts val="360"/>
-              </a:spcBef>
-              <a:spcAft>
-                <a:spcPts val="0"/>
-              </a:spcAft>
-              <a:buNone/>
-            </a:pPr>
-            <a:endParaRPr dirty="0"/>
-          </a:p>
-        </p:txBody>
-      </p:sp>
-      <p:sp>
-        <p:nvSpPr>
-          <p:cNvPr id="220" name="Google Shape;220;p15:notes"/>
-          <p:cNvSpPr>
-            <a:spLocks noGrp="1" noRot="1" noChangeAspect="1"/>
-          </p:cNvSpPr>
-          <p:nvPr>
-            <p:ph type="sldImg" idx="2"/>
-          </p:nvPr>
-        </p:nvSpPr>
-        <p:spPr>
-          <a:xfrm>
-            <a:off x="139700" y="768350"/>
-            <a:ext cx="6819900" cy="3836988"/>
-          </a:xfrm>
-          <a:custGeom>
-            <a:avLst/>
-            <a:gdLst/>
-            <a:ahLst/>
-            <a:cxnLst/>
-            <a:rect l="l" t="t" r="r" b="b"/>
-            <a:pathLst>
-              <a:path w="120000" h="120000" extrusionOk="0">
-                <a:moveTo>
-                  <a:pt x="0" y="0"/>
-                </a:moveTo>
-                <a:lnTo>
-                  <a:pt x="120000" y="0"/>
-                </a:lnTo>
-                <a:lnTo>
-                  <a:pt x="120000" y="120000"/>
-                </a:lnTo>
-                <a:lnTo>
-                  <a:pt x="0" y="120000"/>
-                </a:lnTo>
-                <a:close/>
-              </a:path>
-            </a:pathLst>
-          </a:custGeom>
-        </p:spPr>
-      </p:sp>
-    </p:spTree>
-  </p:cSld>
-  <p:clrMapOvr>
-    <a:masterClrMapping/>
-  </p:clrMapOvr>
-</p:notes>
-</file>
-
-<file path=ppt/notesSlides/notesSlide19.xml><?xml version="1.0" encoding="utf-8"?>
-<p:notes xmlns:a="http://schemas.openxmlformats.org/drawingml/2006/main" xmlns:r="http://schemas.openxmlformats.org/officeDocument/2006/relationships" xmlns:p="http://schemas.openxmlformats.org/presentationml/2006/main" showMasterSp="0" showMasterPhAnim="0">
-  <p:cSld>
-    <p:spTree>
-      <p:nvGrpSpPr>
-        <p:cNvPr id="1" name="Shape 227"/>
-        <p:cNvGrpSpPr/>
-        <p:nvPr/>
-      </p:nvGrpSpPr>
-      <p:grpSpPr>
-        <a:xfrm>
-          <a:off x="0" y="0"/>
-          <a:ext cx="0" cy="0"/>
-          <a:chOff x="0" y="0"/>
-          <a:chExt cx="0" cy="0"/>
-        </a:xfrm>
-      </p:grpSpPr>
-      <p:sp>
-        <p:nvSpPr>
-          <p:cNvPr id="228" name="Google Shape;228;p16:notes"/>
-          <p:cNvSpPr txBox="1">
-            <a:spLocks noGrp="1"/>
-          </p:cNvSpPr>
-          <p:nvPr>
-            <p:ph type="body" idx="1"/>
-          </p:nvPr>
-        </p:nvSpPr>
-        <p:spPr>
-          <a:xfrm>
-            <a:off x="709613" y="4860925"/>
-            <a:ext cx="5680075" cy="4605338"/>
-          </a:xfrm>
-          <a:prstGeom prst="rect">
-            <a:avLst/>
-          </a:prstGeom>
-        </p:spPr>
-        <p:txBody>
-          <a:bodyPr spcFirstLastPara="1" wrap="square" lIns="99025" tIns="49500" rIns="99025" bIns="49500" anchor="t" anchorCtr="0">
-            <a:noAutofit/>
-          </a:bodyPr>
-          <a:lstStyle/>
-          <a:p>
-            <a:pPr marL="0" lvl="0" indent="0" algn="l" rtl="0">
-              <a:spcBef>
-                <a:spcPts val="360"/>
-              </a:spcBef>
-              <a:spcAft>
-                <a:spcPts val="0"/>
-              </a:spcAft>
-              <a:buNone/>
-            </a:pPr>
-            <a:endParaRPr/>
-          </a:p>
-        </p:txBody>
-      </p:sp>
-      <p:sp>
-        <p:nvSpPr>
-          <p:cNvPr id="229" name="Google Shape;229;p16:notes"/>
-          <p:cNvSpPr>
-            <a:spLocks noGrp="1" noRot="1" noChangeAspect="1"/>
-          </p:cNvSpPr>
-          <p:nvPr>
-            <p:ph type="sldImg" idx="2"/>
-          </p:nvPr>
-        </p:nvSpPr>
-        <p:spPr>
-          <a:xfrm>
-            <a:off x="139700" y="768350"/>
-            <a:ext cx="6819900" cy="3836988"/>
-          </a:xfrm>
-          <a:custGeom>
-            <a:avLst/>
-            <a:gdLst/>
-            <a:ahLst/>
-            <a:cxnLst/>
-            <a:rect l="l" t="t" r="r" b="b"/>
-            <a:pathLst>
-              <a:path w="120000" h="120000" extrusionOk="0">
-                <a:moveTo>
-                  <a:pt x="0" y="0"/>
-                </a:moveTo>
-                <a:lnTo>
-                  <a:pt x="120000" y="0"/>
-                </a:lnTo>
-                <a:lnTo>
-                  <a:pt x="120000" y="120000"/>
-                </a:lnTo>
-                <a:lnTo>
-                  <a:pt x="0" y="120000"/>
-                </a:lnTo>
-                <a:close/>
-              </a:path>
-            </a:pathLst>
-          </a:custGeom>
-        </p:spPr>
-      </p:sp>
-    </p:spTree>
   </p:cSld>
   <p:clrMapOvr>
     <a:masterClrMapping/>
@@ -4924,6 +5112,214 @@
             <a:endParaRPr/>
           </a:p>
         </p:txBody>
+      </p:sp>
+    </p:spTree>
+  </p:cSld>
+  <p:clrMapOvr>
+    <a:masterClrMapping/>
+  </p:clrMapOvr>
+</p:notes>
+</file>
+
+<file path=ppt/notesSlides/notesSlide20.xml><?xml version="1.0" encoding="utf-8"?>
+<p:notes xmlns:a="http://schemas.openxmlformats.org/drawingml/2006/main" xmlns:r="http://schemas.openxmlformats.org/officeDocument/2006/relationships" xmlns:p="http://schemas.openxmlformats.org/presentationml/2006/main" showMasterSp="0" showMasterPhAnim="0">
+  <p:cSld>
+    <p:spTree>
+      <p:nvGrpSpPr>
+        <p:cNvPr id="1" name="Shape 218"/>
+        <p:cNvGrpSpPr/>
+        <p:nvPr/>
+      </p:nvGrpSpPr>
+      <p:grpSpPr>
+        <a:xfrm>
+          <a:off x="0" y="0"/>
+          <a:ext cx="0" cy="0"/>
+          <a:chOff x="0" y="0"/>
+          <a:chExt cx="0" cy="0"/>
+        </a:xfrm>
+      </p:grpSpPr>
+      <p:sp>
+        <p:nvSpPr>
+          <p:cNvPr id="219" name="Google Shape;219;p15:notes"/>
+          <p:cNvSpPr txBox="1">
+            <a:spLocks noGrp="1"/>
+          </p:cNvSpPr>
+          <p:nvPr>
+            <p:ph type="body" idx="1"/>
+          </p:nvPr>
+        </p:nvSpPr>
+        <p:spPr>
+          <a:xfrm>
+            <a:off x="709613" y="4860925"/>
+            <a:ext cx="5680075" cy="4605338"/>
+          </a:xfrm>
+          <a:prstGeom prst="rect">
+            <a:avLst/>
+          </a:prstGeom>
+        </p:spPr>
+        <p:txBody>
+          <a:bodyPr spcFirstLastPara="1" wrap="square" lIns="99025" tIns="49500" rIns="99025" bIns="49500" anchor="t" anchorCtr="0">
+            <a:noAutofit/>
+          </a:bodyPr>
+          <a:lstStyle/>
+          <a:p>
+            <a:pPr marL="0" lvl="0" indent="0" algn="l" rtl="0">
+              <a:spcBef>
+                <a:spcPts val="360"/>
+              </a:spcBef>
+              <a:spcAft>
+                <a:spcPts val="0"/>
+              </a:spcAft>
+              <a:buNone/>
+            </a:pPr>
+            <a:endParaRPr dirty="0"/>
+          </a:p>
+        </p:txBody>
+      </p:sp>
+      <p:sp>
+        <p:nvSpPr>
+          <p:cNvPr id="220" name="Google Shape;220;p15:notes"/>
+          <p:cNvSpPr>
+            <a:spLocks noGrp="1" noRot="1" noChangeAspect="1"/>
+          </p:cNvSpPr>
+          <p:nvPr>
+            <p:ph type="sldImg" idx="2"/>
+          </p:nvPr>
+        </p:nvSpPr>
+        <p:spPr>
+          <a:xfrm>
+            <a:off x="139700" y="768350"/>
+            <a:ext cx="6819900" cy="3836988"/>
+          </a:xfrm>
+          <a:custGeom>
+            <a:avLst/>
+            <a:gdLst/>
+            <a:ahLst/>
+            <a:cxnLst/>
+            <a:rect l="l" t="t" r="r" b="b"/>
+            <a:pathLst>
+              <a:path w="120000" h="120000" extrusionOk="0">
+                <a:moveTo>
+                  <a:pt x="0" y="0"/>
+                </a:moveTo>
+                <a:lnTo>
+                  <a:pt x="120000" y="0"/>
+                </a:lnTo>
+                <a:lnTo>
+                  <a:pt x="120000" y="120000"/>
+                </a:lnTo>
+                <a:lnTo>
+                  <a:pt x="0" y="120000"/>
+                </a:lnTo>
+                <a:close/>
+              </a:path>
+            </a:pathLst>
+          </a:custGeom>
+        </p:spPr>
+      </p:sp>
+    </p:spTree>
+  </p:cSld>
+  <p:clrMapOvr>
+    <a:masterClrMapping/>
+  </p:clrMapOvr>
+</p:notes>
+</file>
+
+<file path=ppt/notesSlides/notesSlide21.xml><?xml version="1.0" encoding="utf-8"?>
+<p:notes xmlns:a="http://schemas.openxmlformats.org/drawingml/2006/main" xmlns:r="http://schemas.openxmlformats.org/officeDocument/2006/relationships" xmlns:p="http://schemas.openxmlformats.org/presentationml/2006/main" showMasterSp="0" showMasterPhAnim="0">
+  <p:cSld>
+    <p:spTree>
+      <p:nvGrpSpPr>
+        <p:cNvPr id="1" name="Shape 227"/>
+        <p:cNvGrpSpPr/>
+        <p:nvPr/>
+      </p:nvGrpSpPr>
+      <p:grpSpPr>
+        <a:xfrm>
+          <a:off x="0" y="0"/>
+          <a:ext cx="0" cy="0"/>
+          <a:chOff x="0" y="0"/>
+          <a:chExt cx="0" cy="0"/>
+        </a:xfrm>
+      </p:grpSpPr>
+      <p:sp>
+        <p:nvSpPr>
+          <p:cNvPr id="228" name="Google Shape;228;p16:notes"/>
+          <p:cNvSpPr txBox="1">
+            <a:spLocks noGrp="1"/>
+          </p:cNvSpPr>
+          <p:nvPr>
+            <p:ph type="body" idx="1"/>
+          </p:nvPr>
+        </p:nvSpPr>
+        <p:spPr>
+          <a:xfrm>
+            <a:off x="709613" y="4860925"/>
+            <a:ext cx="5680075" cy="4605338"/>
+          </a:xfrm>
+          <a:prstGeom prst="rect">
+            <a:avLst/>
+          </a:prstGeom>
+        </p:spPr>
+        <p:txBody>
+          <a:bodyPr spcFirstLastPara="1" wrap="square" lIns="99025" tIns="49500" rIns="99025" bIns="49500" anchor="t" anchorCtr="0">
+            <a:noAutofit/>
+          </a:bodyPr>
+          <a:lstStyle/>
+          <a:p>
+            <a:pPr marL="0" lvl="0" indent="0" algn="l" rtl="0">
+              <a:spcBef>
+                <a:spcPts val="360"/>
+              </a:spcBef>
+              <a:spcAft>
+                <a:spcPts val="0"/>
+              </a:spcAft>
+              <a:buNone/>
+            </a:pPr>
+            <a:endParaRPr/>
+          </a:p>
+        </p:txBody>
+      </p:sp>
+      <p:sp>
+        <p:nvSpPr>
+          <p:cNvPr id="229" name="Google Shape;229;p16:notes"/>
+          <p:cNvSpPr>
+            <a:spLocks noGrp="1" noRot="1" noChangeAspect="1"/>
+          </p:cNvSpPr>
+          <p:nvPr>
+            <p:ph type="sldImg" idx="2"/>
+          </p:nvPr>
+        </p:nvSpPr>
+        <p:spPr>
+          <a:xfrm>
+            <a:off x="139700" y="768350"/>
+            <a:ext cx="6819900" cy="3836988"/>
+          </a:xfrm>
+          <a:custGeom>
+            <a:avLst/>
+            <a:gdLst/>
+            <a:ahLst/>
+            <a:cxnLst/>
+            <a:rect l="l" t="t" r="r" b="b"/>
+            <a:pathLst>
+              <a:path w="120000" h="120000" extrusionOk="0">
+                <a:moveTo>
+                  <a:pt x="0" y="0"/>
+                </a:moveTo>
+                <a:lnTo>
+                  <a:pt x="120000" y="0"/>
+                </a:lnTo>
+                <a:lnTo>
+                  <a:pt x="120000" y="120000"/>
+                </a:lnTo>
+                <a:lnTo>
+                  <a:pt x="0" y="120000"/>
+                </a:lnTo>
+                <a:close/>
+              </a:path>
+            </a:pathLst>
+          </a:custGeom>
+        </p:spPr>
       </p:sp>
     </p:spTree>
   </p:cSld>
@@ -6577,6 +6973,392 @@
         <p:cNvPr id="1" name="Shape 92">
           <a:extLst>
             <a:ext uri="{FF2B5EF4-FFF2-40B4-BE49-F238E27FC236}">
+              <a16:creationId xmlns:a16="http://schemas.microsoft.com/office/drawing/2014/main" id="{D65EEB3A-AE83-E6EF-7FEF-97E71BCA8197}"/>
+            </a:ext>
+          </a:extLst>
+        </p:cNvPr>
+        <p:cNvGrpSpPr/>
+        <p:nvPr/>
+      </p:nvGrpSpPr>
+      <p:grpSpPr>
+        <a:xfrm>
+          <a:off x="0" y="0"/>
+          <a:ext cx="0" cy="0"/>
+          <a:chOff x="0" y="0"/>
+          <a:chExt cx="0" cy="0"/>
+        </a:xfrm>
+      </p:grpSpPr>
+      <p:sp>
+        <p:nvSpPr>
+          <p:cNvPr id="93" name="Google Shape;93;p2:notes">
+            <a:extLst>
+              <a:ext uri="{FF2B5EF4-FFF2-40B4-BE49-F238E27FC236}">
+                <a16:creationId xmlns:a16="http://schemas.microsoft.com/office/drawing/2014/main" id="{6E08B3A8-267C-B5AD-F681-2BC48F0F51A3}"/>
+              </a:ext>
+            </a:extLst>
+          </p:cNvPr>
+          <p:cNvSpPr>
+            <a:spLocks noGrp="1" noRot="1" noChangeAspect="1"/>
+          </p:cNvSpPr>
+          <p:nvPr>
+            <p:ph type="sldImg" idx="2"/>
+          </p:nvPr>
+        </p:nvSpPr>
+        <p:spPr>
+          <a:xfrm>
+            <a:off x="139700" y="768350"/>
+            <a:ext cx="6819900" cy="3836988"/>
+          </a:xfrm>
+          <a:custGeom>
+            <a:avLst/>
+            <a:gdLst/>
+            <a:ahLst/>
+            <a:cxnLst/>
+            <a:rect l="l" t="t" r="r" b="b"/>
+            <a:pathLst>
+              <a:path w="120000" h="120000" extrusionOk="0">
+                <a:moveTo>
+                  <a:pt x="0" y="0"/>
+                </a:moveTo>
+                <a:lnTo>
+                  <a:pt x="120000" y="0"/>
+                </a:lnTo>
+                <a:lnTo>
+                  <a:pt x="120000" y="120000"/>
+                </a:lnTo>
+                <a:lnTo>
+                  <a:pt x="0" y="120000"/>
+                </a:lnTo>
+                <a:close/>
+              </a:path>
+            </a:pathLst>
+          </a:custGeom>
+          <a:noFill/>
+          <a:ln w="12700" cap="flat" cmpd="sng">
+            <a:solidFill>
+              <a:srgbClr val="000000"/>
+            </a:solidFill>
+            <a:prstDash val="solid"/>
+            <a:round/>
+            <a:headEnd type="none" w="sm" len="sm"/>
+            <a:tailEnd type="none" w="sm" len="sm"/>
+          </a:ln>
+        </p:spPr>
+      </p:sp>
+      <p:sp>
+        <p:nvSpPr>
+          <p:cNvPr id="94" name="Google Shape;94;p2:notes">
+            <a:extLst>
+              <a:ext uri="{FF2B5EF4-FFF2-40B4-BE49-F238E27FC236}">
+                <a16:creationId xmlns:a16="http://schemas.microsoft.com/office/drawing/2014/main" id="{5E2CE153-7F3C-06F6-4451-010A6C463733}"/>
+              </a:ext>
+            </a:extLst>
+          </p:cNvPr>
+          <p:cNvSpPr txBox="1">
+            <a:spLocks noGrp="1"/>
+          </p:cNvSpPr>
+          <p:nvPr>
+            <p:ph type="body" idx="1"/>
+          </p:nvPr>
+        </p:nvSpPr>
+        <p:spPr>
+          <a:xfrm>
+            <a:off x="709613" y="4860925"/>
+            <a:ext cx="5680075" cy="4605338"/>
+          </a:xfrm>
+          <a:prstGeom prst="rect">
+            <a:avLst/>
+          </a:prstGeom>
+          <a:noFill/>
+          <a:ln>
+            <a:noFill/>
+          </a:ln>
+        </p:spPr>
+        <p:txBody>
+          <a:bodyPr spcFirstLastPara="1" wrap="square" lIns="99025" tIns="49500" rIns="99025" bIns="49500" anchor="t" anchorCtr="0">
+            <a:normAutofit/>
+          </a:bodyPr>
+          <a:lstStyle/>
+          <a:p>
+            <a:endParaRPr lang="zh-TW" altLang="en-US" sz="1200" b="0" i="0" u="none" strike="noStrike" cap="none" dirty="0">
+              <a:solidFill>
+                <a:schemeClr val="dk1"/>
+              </a:solidFill>
+              <a:effectLst/>
+              <a:latin typeface="Calibri"/>
+              <a:ea typeface="Calibri"/>
+              <a:cs typeface="Calibri"/>
+              <a:sym typeface="Calibri"/>
+            </a:endParaRPr>
+          </a:p>
+        </p:txBody>
+      </p:sp>
+      <p:sp>
+        <p:nvSpPr>
+          <p:cNvPr id="95" name="Google Shape;95;p2:notes">
+            <a:extLst>
+              <a:ext uri="{FF2B5EF4-FFF2-40B4-BE49-F238E27FC236}">
+                <a16:creationId xmlns:a16="http://schemas.microsoft.com/office/drawing/2014/main" id="{5DFE1FA7-5C29-4A4F-7918-DA11B507E9CB}"/>
+              </a:ext>
+            </a:extLst>
+          </p:cNvPr>
+          <p:cNvSpPr txBox="1">
+            <a:spLocks noGrp="1"/>
+          </p:cNvSpPr>
+          <p:nvPr>
+            <p:ph type="sldNum" idx="12"/>
+          </p:nvPr>
+        </p:nvSpPr>
+        <p:spPr>
+          <a:xfrm>
+            <a:off x="4021138" y="9721850"/>
+            <a:ext cx="3076575" cy="511175"/>
+          </a:xfrm>
+          <a:prstGeom prst="rect">
+            <a:avLst/>
+          </a:prstGeom>
+          <a:noFill/>
+          <a:ln>
+            <a:noFill/>
+          </a:ln>
+        </p:spPr>
+        <p:txBody>
+          <a:bodyPr spcFirstLastPara="1" wrap="square" lIns="99025" tIns="49500" rIns="99025" bIns="49500" anchor="b" anchorCtr="0">
+            <a:noAutofit/>
+          </a:bodyPr>
+          <a:lstStyle/>
+          <a:p>
+            <a:pPr marL="0" lvl="0" indent="0" algn="r" rtl="0">
+              <a:spcBef>
+                <a:spcPts val="0"/>
+              </a:spcBef>
+              <a:spcAft>
+                <a:spcPts val="0"/>
+              </a:spcAft>
+              <a:buNone/>
+            </a:pPr>
+            <a:fld id="{00000000-1234-1234-1234-123412341234}" type="slidenum">
+              <a:rPr lang="en-US"/>
+              <a:t>7</a:t>
+            </a:fld>
+            <a:endParaRPr/>
+          </a:p>
+        </p:txBody>
+      </p:sp>
+    </p:spTree>
+    <p:extLst>
+      <p:ext uri="{BB962C8B-B14F-4D97-AF65-F5344CB8AC3E}">
+        <p14:creationId xmlns:p14="http://schemas.microsoft.com/office/powerpoint/2010/main" val="3857527665"/>
+      </p:ext>
+    </p:extLst>
+  </p:cSld>
+  <p:clrMapOvr>
+    <a:masterClrMapping/>
+  </p:clrMapOvr>
+</p:notes>
+</file>
+
+<file path=ppt/notesSlides/notesSlide8.xml><?xml version="1.0" encoding="utf-8"?>
+<p:notes xmlns:a="http://schemas.openxmlformats.org/drawingml/2006/main" xmlns:r="http://schemas.openxmlformats.org/officeDocument/2006/relationships" xmlns:p="http://schemas.openxmlformats.org/presentationml/2006/main" showMasterSp="0" showMasterPhAnim="0">
+  <p:cSld>
+    <p:spTree>
+      <p:nvGrpSpPr>
+        <p:cNvPr id="1" name="Shape 92">
+          <a:extLst>
+            <a:ext uri="{FF2B5EF4-FFF2-40B4-BE49-F238E27FC236}">
+              <a16:creationId xmlns:a16="http://schemas.microsoft.com/office/drawing/2014/main" id="{08F64D72-C30B-6A8A-F57E-C43225E9C74A}"/>
+            </a:ext>
+          </a:extLst>
+        </p:cNvPr>
+        <p:cNvGrpSpPr/>
+        <p:nvPr/>
+      </p:nvGrpSpPr>
+      <p:grpSpPr>
+        <a:xfrm>
+          <a:off x="0" y="0"/>
+          <a:ext cx="0" cy="0"/>
+          <a:chOff x="0" y="0"/>
+          <a:chExt cx="0" cy="0"/>
+        </a:xfrm>
+      </p:grpSpPr>
+      <p:sp>
+        <p:nvSpPr>
+          <p:cNvPr id="93" name="Google Shape;93;p2:notes">
+            <a:extLst>
+              <a:ext uri="{FF2B5EF4-FFF2-40B4-BE49-F238E27FC236}">
+                <a16:creationId xmlns:a16="http://schemas.microsoft.com/office/drawing/2014/main" id="{51B1FD69-3F14-A795-83D8-0946306844C0}"/>
+              </a:ext>
+            </a:extLst>
+          </p:cNvPr>
+          <p:cNvSpPr>
+            <a:spLocks noGrp="1" noRot="1" noChangeAspect="1"/>
+          </p:cNvSpPr>
+          <p:nvPr>
+            <p:ph type="sldImg" idx="2"/>
+          </p:nvPr>
+        </p:nvSpPr>
+        <p:spPr>
+          <a:xfrm>
+            <a:off x="139700" y="768350"/>
+            <a:ext cx="6819900" cy="3836988"/>
+          </a:xfrm>
+          <a:custGeom>
+            <a:avLst/>
+            <a:gdLst/>
+            <a:ahLst/>
+            <a:cxnLst/>
+            <a:rect l="l" t="t" r="r" b="b"/>
+            <a:pathLst>
+              <a:path w="120000" h="120000" extrusionOk="0">
+                <a:moveTo>
+                  <a:pt x="0" y="0"/>
+                </a:moveTo>
+                <a:lnTo>
+                  <a:pt x="120000" y="0"/>
+                </a:lnTo>
+                <a:lnTo>
+                  <a:pt x="120000" y="120000"/>
+                </a:lnTo>
+                <a:lnTo>
+                  <a:pt x="0" y="120000"/>
+                </a:lnTo>
+                <a:close/>
+              </a:path>
+            </a:pathLst>
+          </a:custGeom>
+          <a:noFill/>
+          <a:ln w="12700" cap="flat" cmpd="sng">
+            <a:solidFill>
+              <a:srgbClr val="000000"/>
+            </a:solidFill>
+            <a:prstDash val="solid"/>
+            <a:round/>
+            <a:headEnd type="none" w="sm" len="sm"/>
+            <a:tailEnd type="none" w="sm" len="sm"/>
+          </a:ln>
+        </p:spPr>
+      </p:sp>
+      <p:sp>
+        <p:nvSpPr>
+          <p:cNvPr id="94" name="Google Shape;94;p2:notes">
+            <a:extLst>
+              <a:ext uri="{FF2B5EF4-FFF2-40B4-BE49-F238E27FC236}">
+                <a16:creationId xmlns:a16="http://schemas.microsoft.com/office/drawing/2014/main" id="{253A1DFE-2497-0C78-A5FE-320E4612B0EA}"/>
+              </a:ext>
+            </a:extLst>
+          </p:cNvPr>
+          <p:cNvSpPr txBox="1">
+            <a:spLocks noGrp="1"/>
+          </p:cNvSpPr>
+          <p:nvPr>
+            <p:ph type="body" idx="1"/>
+          </p:nvPr>
+        </p:nvSpPr>
+        <p:spPr>
+          <a:xfrm>
+            <a:off x="709613" y="4860925"/>
+            <a:ext cx="5680075" cy="4605338"/>
+          </a:xfrm>
+          <a:prstGeom prst="rect">
+            <a:avLst/>
+          </a:prstGeom>
+          <a:noFill/>
+          <a:ln>
+            <a:noFill/>
+          </a:ln>
+        </p:spPr>
+        <p:txBody>
+          <a:bodyPr spcFirstLastPara="1" wrap="square" lIns="99025" tIns="49500" rIns="99025" bIns="49500" anchor="t" anchorCtr="0">
+            <a:normAutofit/>
+          </a:bodyPr>
+          <a:lstStyle/>
+          <a:p>
+            <a:endParaRPr lang="zh-TW" altLang="en-US" sz="1200" b="0" i="0" u="none" strike="noStrike" cap="none" dirty="0">
+              <a:solidFill>
+                <a:schemeClr val="dk1"/>
+              </a:solidFill>
+              <a:effectLst/>
+              <a:latin typeface="Calibri"/>
+              <a:ea typeface="Calibri"/>
+              <a:cs typeface="Calibri"/>
+              <a:sym typeface="Calibri"/>
+            </a:endParaRPr>
+          </a:p>
+        </p:txBody>
+      </p:sp>
+      <p:sp>
+        <p:nvSpPr>
+          <p:cNvPr id="95" name="Google Shape;95;p2:notes">
+            <a:extLst>
+              <a:ext uri="{FF2B5EF4-FFF2-40B4-BE49-F238E27FC236}">
+                <a16:creationId xmlns:a16="http://schemas.microsoft.com/office/drawing/2014/main" id="{6956C94E-CB45-0932-F854-6026DC033791}"/>
+              </a:ext>
+            </a:extLst>
+          </p:cNvPr>
+          <p:cNvSpPr txBox="1">
+            <a:spLocks noGrp="1"/>
+          </p:cNvSpPr>
+          <p:nvPr>
+            <p:ph type="sldNum" idx="12"/>
+          </p:nvPr>
+        </p:nvSpPr>
+        <p:spPr>
+          <a:xfrm>
+            <a:off x="4021138" y="9721850"/>
+            <a:ext cx="3076575" cy="511175"/>
+          </a:xfrm>
+          <a:prstGeom prst="rect">
+            <a:avLst/>
+          </a:prstGeom>
+          <a:noFill/>
+          <a:ln>
+            <a:noFill/>
+          </a:ln>
+        </p:spPr>
+        <p:txBody>
+          <a:bodyPr spcFirstLastPara="1" wrap="square" lIns="99025" tIns="49500" rIns="99025" bIns="49500" anchor="b" anchorCtr="0">
+            <a:noAutofit/>
+          </a:bodyPr>
+          <a:lstStyle/>
+          <a:p>
+            <a:pPr marL="0" lvl="0" indent="0" algn="r" rtl="0">
+              <a:spcBef>
+                <a:spcPts val="0"/>
+              </a:spcBef>
+              <a:spcAft>
+                <a:spcPts val="0"/>
+              </a:spcAft>
+              <a:buNone/>
+            </a:pPr>
+            <a:fld id="{00000000-1234-1234-1234-123412341234}" type="slidenum">
+              <a:rPr lang="en-US"/>
+              <a:t>8</a:t>
+            </a:fld>
+            <a:endParaRPr/>
+          </a:p>
+        </p:txBody>
+      </p:sp>
+    </p:spTree>
+    <p:extLst>
+      <p:ext uri="{BB962C8B-B14F-4D97-AF65-F5344CB8AC3E}">
+        <p14:creationId xmlns:p14="http://schemas.microsoft.com/office/powerpoint/2010/main" val="3595908420"/>
+      </p:ext>
+    </p:extLst>
+  </p:cSld>
+  <p:clrMapOvr>
+    <a:masterClrMapping/>
+  </p:clrMapOvr>
+</p:notes>
+</file>
+
+<file path=ppt/notesSlides/notesSlide9.xml><?xml version="1.0" encoding="utf-8"?>
+<p:notes xmlns:a="http://schemas.openxmlformats.org/drawingml/2006/main" xmlns:r="http://schemas.openxmlformats.org/officeDocument/2006/relationships" xmlns:p="http://schemas.openxmlformats.org/presentationml/2006/main" showMasterSp="0" showMasterPhAnim="0">
+  <p:cSld>
+    <p:spTree>
+      <p:nvGrpSpPr>
+        <p:cNvPr id="1" name="Shape 92">
+          <a:extLst>
+            <a:ext uri="{FF2B5EF4-FFF2-40B4-BE49-F238E27FC236}">
               <a16:creationId xmlns:a16="http://schemas.microsoft.com/office/drawing/2014/main" id="{A1AB4463-E742-60C1-BE79-056A16CE67F8}"/>
             </a:ext>
           </a:extLst>
@@ -6743,7 +7525,7 @@
             </a:pPr>
             <a:fld id="{00000000-1234-1234-1234-123412341234}" type="slidenum">
               <a:rPr lang="en-US"/>
-              <a:t>7</a:t>
+              <a:t>9</a:t>
             </a:fld>
             <a:endParaRPr/>
           </a:p>
@@ -6753,400 +7535,6 @@
     <p:extLst>
       <p:ext uri="{BB962C8B-B14F-4D97-AF65-F5344CB8AC3E}">
         <p14:creationId xmlns:p14="http://schemas.microsoft.com/office/powerpoint/2010/main" val="4275051073"/>
-      </p:ext>
-    </p:extLst>
-  </p:cSld>
-  <p:clrMapOvr>
-    <a:masterClrMapping/>
-  </p:clrMapOvr>
-</p:notes>
-</file>
-
-<file path=ppt/notesSlides/notesSlide8.xml><?xml version="1.0" encoding="utf-8"?>
-<p:notes xmlns:a="http://schemas.openxmlformats.org/drawingml/2006/main" xmlns:r="http://schemas.openxmlformats.org/officeDocument/2006/relationships" xmlns:p="http://schemas.openxmlformats.org/presentationml/2006/main" showMasterSp="0" showMasterPhAnim="0">
-  <p:cSld>
-    <p:spTree>
-      <p:nvGrpSpPr>
-        <p:cNvPr id="1" name="Shape 92">
-          <a:extLst>
-            <a:ext uri="{FF2B5EF4-FFF2-40B4-BE49-F238E27FC236}">
-              <a16:creationId xmlns:a16="http://schemas.microsoft.com/office/drawing/2014/main" id="{1FC71CAE-1A5C-FFAB-0BF7-3F1E9EEAEE6C}"/>
-            </a:ext>
-          </a:extLst>
-        </p:cNvPr>
-        <p:cNvGrpSpPr/>
-        <p:nvPr/>
-      </p:nvGrpSpPr>
-      <p:grpSpPr>
-        <a:xfrm>
-          <a:off x="0" y="0"/>
-          <a:ext cx="0" cy="0"/>
-          <a:chOff x="0" y="0"/>
-          <a:chExt cx="0" cy="0"/>
-        </a:xfrm>
-      </p:grpSpPr>
-      <p:sp>
-        <p:nvSpPr>
-          <p:cNvPr id="93" name="Google Shape;93;p2:notes">
-            <a:extLst>
-              <a:ext uri="{FF2B5EF4-FFF2-40B4-BE49-F238E27FC236}">
-                <a16:creationId xmlns:a16="http://schemas.microsoft.com/office/drawing/2014/main" id="{5B47EB58-4055-8407-CCFF-BDD7739A0EED}"/>
-              </a:ext>
-            </a:extLst>
-          </p:cNvPr>
-          <p:cNvSpPr>
-            <a:spLocks noGrp="1" noRot="1" noChangeAspect="1"/>
-          </p:cNvSpPr>
-          <p:nvPr>
-            <p:ph type="sldImg" idx="2"/>
-          </p:nvPr>
-        </p:nvSpPr>
-        <p:spPr>
-          <a:xfrm>
-            <a:off x="139700" y="768350"/>
-            <a:ext cx="6819900" cy="3836988"/>
-          </a:xfrm>
-          <a:custGeom>
-            <a:avLst/>
-            <a:gdLst/>
-            <a:ahLst/>
-            <a:cxnLst/>
-            <a:rect l="l" t="t" r="r" b="b"/>
-            <a:pathLst>
-              <a:path w="120000" h="120000" extrusionOk="0">
-                <a:moveTo>
-                  <a:pt x="0" y="0"/>
-                </a:moveTo>
-                <a:lnTo>
-                  <a:pt x="120000" y="0"/>
-                </a:lnTo>
-                <a:lnTo>
-                  <a:pt x="120000" y="120000"/>
-                </a:lnTo>
-                <a:lnTo>
-                  <a:pt x="0" y="120000"/>
-                </a:lnTo>
-                <a:close/>
-              </a:path>
-            </a:pathLst>
-          </a:custGeom>
-          <a:noFill/>
-          <a:ln w="12700" cap="flat" cmpd="sng">
-            <a:solidFill>
-              <a:srgbClr val="000000"/>
-            </a:solidFill>
-            <a:prstDash val="solid"/>
-            <a:round/>
-            <a:headEnd type="none" w="sm" len="sm"/>
-            <a:tailEnd type="none" w="sm" len="sm"/>
-          </a:ln>
-        </p:spPr>
-      </p:sp>
-      <p:sp>
-        <p:nvSpPr>
-          <p:cNvPr id="94" name="Google Shape;94;p2:notes">
-            <a:extLst>
-              <a:ext uri="{FF2B5EF4-FFF2-40B4-BE49-F238E27FC236}">
-                <a16:creationId xmlns:a16="http://schemas.microsoft.com/office/drawing/2014/main" id="{AE27E2EA-2253-5F45-7335-18BC7247B8B8}"/>
-              </a:ext>
-            </a:extLst>
-          </p:cNvPr>
-          <p:cNvSpPr txBox="1">
-            <a:spLocks noGrp="1"/>
-          </p:cNvSpPr>
-          <p:nvPr>
-            <p:ph type="body" idx="1"/>
-          </p:nvPr>
-        </p:nvSpPr>
-        <p:spPr>
-          <a:xfrm>
-            <a:off x="709613" y="4860925"/>
-            <a:ext cx="5680075" cy="4605338"/>
-          </a:xfrm>
-          <a:prstGeom prst="rect">
-            <a:avLst/>
-          </a:prstGeom>
-          <a:noFill/>
-          <a:ln>
-            <a:noFill/>
-          </a:ln>
-        </p:spPr>
-        <p:txBody>
-          <a:bodyPr spcFirstLastPara="1" wrap="square" lIns="99025" tIns="49500" rIns="99025" bIns="49500" anchor="t" anchorCtr="0">
-            <a:normAutofit/>
-          </a:bodyPr>
-          <a:lstStyle/>
-          <a:p>
-            <a:r>
-              <a:rPr lang="en-US" altLang="zh-TW" dirty="0"/>
-              <a:t>Category 1 </a:t>
-            </a:r>
-            <a:r>
-              <a:rPr lang="zh-TW" altLang="en-US" dirty="0"/>
-              <a:t>是為了創造一致、高品質的輸出 。</a:t>
-            </a:r>
-            <a:endParaRPr lang="zh-TW" altLang="en-US" sz="1200" b="0" i="0" u="none" strike="noStrike" cap="none" dirty="0">
-              <a:solidFill>
-                <a:schemeClr val="dk1"/>
-              </a:solidFill>
-              <a:effectLst/>
-              <a:latin typeface="Calibri"/>
-              <a:ea typeface="Calibri"/>
-              <a:cs typeface="Calibri"/>
-              <a:sym typeface="Calibri"/>
-            </a:endParaRPr>
-          </a:p>
-        </p:txBody>
-      </p:sp>
-      <p:sp>
-        <p:nvSpPr>
-          <p:cNvPr id="95" name="Google Shape;95;p2:notes">
-            <a:extLst>
-              <a:ext uri="{FF2B5EF4-FFF2-40B4-BE49-F238E27FC236}">
-                <a16:creationId xmlns:a16="http://schemas.microsoft.com/office/drawing/2014/main" id="{A3A93D0F-1150-9731-6CBD-A305F3966409}"/>
-              </a:ext>
-            </a:extLst>
-          </p:cNvPr>
-          <p:cNvSpPr txBox="1">
-            <a:spLocks noGrp="1"/>
-          </p:cNvSpPr>
-          <p:nvPr>
-            <p:ph type="sldNum" idx="12"/>
-          </p:nvPr>
-        </p:nvSpPr>
-        <p:spPr>
-          <a:xfrm>
-            <a:off x="4021138" y="9721850"/>
-            <a:ext cx="3076575" cy="511175"/>
-          </a:xfrm>
-          <a:prstGeom prst="rect">
-            <a:avLst/>
-          </a:prstGeom>
-          <a:noFill/>
-          <a:ln>
-            <a:noFill/>
-          </a:ln>
-        </p:spPr>
-        <p:txBody>
-          <a:bodyPr spcFirstLastPara="1" wrap="square" lIns="99025" tIns="49500" rIns="99025" bIns="49500" anchor="b" anchorCtr="0">
-            <a:noAutofit/>
-          </a:bodyPr>
-          <a:lstStyle/>
-          <a:p>
-            <a:pPr marL="0" lvl="0" indent="0" algn="r" rtl="0">
-              <a:spcBef>
-                <a:spcPts val="0"/>
-              </a:spcBef>
-              <a:spcAft>
-                <a:spcPts val="0"/>
-              </a:spcAft>
-              <a:buNone/>
-            </a:pPr>
-            <a:fld id="{00000000-1234-1234-1234-123412341234}" type="slidenum">
-              <a:rPr lang="en-US"/>
-              <a:t>8</a:t>
-            </a:fld>
-            <a:endParaRPr/>
-          </a:p>
-        </p:txBody>
-      </p:sp>
-    </p:spTree>
-    <p:extLst>
-      <p:ext uri="{BB962C8B-B14F-4D97-AF65-F5344CB8AC3E}">
-        <p14:creationId xmlns:p14="http://schemas.microsoft.com/office/powerpoint/2010/main" val="3509895589"/>
-      </p:ext>
-    </p:extLst>
-  </p:cSld>
-  <p:clrMapOvr>
-    <a:masterClrMapping/>
-  </p:clrMapOvr>
-</p:notes>
-</file>
-
-<file path=ppt/notesSlides/notesSlide9.xml><?xml version="1.0" encoding="utf-8"?>
-<p:notes xmlns:a="http://schemas.openxmlformats.org/drawingml/2006/main" xmlns:r="http://schemas.openxmlformats.org/officeDocument/2006/relationships" xmlns:p="http://schemas.openxmlformats.org/presentationml/2006/main" showMasterSp="0" showMasterPhAnim="0">
-  <p:cSld>
-    <p:spTree>
-      <p:nvGrpSpPr>
-        <p:cNvPr id="1" name="Shape 92">
-          <a:extLst>
-            <a:ext uri="{FF2B5EF4-FFF2-40B4-BE49-F238E27FC236}">
-              <a16:creationId xmlns:a16="http://schemas.microsoft.com/office/drawing/2014/main" id="{7053855B-6178-234D-B969-57DF775BB7FF}"/>
-            </a:ext>
-          </a:extLst>
-        </p:cNvPr>
-        <p:cNvGrpSpPr/>
-        <p:nvPr/>
-      </p:nvGrpSpPr>
-      <p:grpSpPr>
-        <a:xfrm>
-          <a:off x="0" y="0"/>
-          <a:ext cx="0" cy="0"/>
-          <a:chOff x="0" y="0"/>
-          <a:chExt cx="0" cy="0"/>
-        </a:xfrm>
-      </p:grpSpPr>
-      <p:sp>
-        <p:nvSpPr>
-          <p:cNvPr id="93" name="Google Shape;93;p2:notes">
-            <a:extLst>
-              <a:ext uri="{FF2B5EF4-FFF2-40B4-BE49-F238E27FC236}">
-                <a16:creationId xmlns:a16="http://schemas.microsoft.com/office/drawing/2014/main" id="{D2C78820-642F-4AE9-2003-15CAE1E00AAD}"/>
-              </a:ext>
-            </a:extLst>
-          </p:cNvPr>
-          <p:cNvSpPr>
-            <a:spLocks noGrp="1" noRot="1" noChangeAspect="1"/>
-          </p:cNvSpPr>
-          <p:nvPr>
-            <p:ph type="sldImg" idx="2"/>
-          </p:nvPr>
-        </p:nvSpPr>
-        <p:spPr>
-          <a:xfrm>
-            <a:off x="139700" y="768350"/>
-            <a:ext cx="6819900" cy="3836988"/>
-          </a:xfrm>
-          <a:custGeom>
-            <a:avLst/>
-            <a:gdLst/>
-            <a:ahLst/>
-            <a:cxnLst/>
-            <a:rect l="l" t="t" r="r" b="b"/>
-            <a:pathLst>
-              <a:path w="120000" h="120000" extrusionOk="0">
-                <a:moveTo>
-                  <a:pt x="0" y="0"/>
-                </a:moveTo>
-                <a:lnTo>
-                  <a:pt x="120000" y="0"/>
-                </a:lnTo>
-                <a:lnTo>
-                  <a:pt x="120000" y="120000"/>
-                </a:lnTo>
-                <a:lnTo>
-                  <a:pt x="0" y="120000"/>
-                </a:lnTo>
-                <a:close/>
-              </a:path>
-            </a:pathLst>
-          </a:custGeom>
-          <a:noFill/>
-          <a:ln w="12700" cap="flat" cmpd="sng">
-            <a:solidFill>
-              <a:srgbClr val="000000"/>
-            </a:solidFill>
-            <a:prstDash val="solid"/>
-            <a:round/>
-            <a:headEnd type="none" w="sm" len="sm"/>
-            <a:tailEnd type="none" w="sm" len="sm"/>
-          </a:ln>
-        </p:spPr>
-      </p:sp>
-      <p:sp>
-        <p:nvSpPr>
-          <p:cNvPr id="94" name="Google Shape;94;p2:notes">
-            <a:extLst>
-              <a:ext uri="{FF2B5EF4-FFF2-40B4-BE49-F238E27FC236}">
-                <a16:creationId xmlns:a16="http://schemas.microsoft.com/office/drawing/2014/main" id="{7216A5FC-A31C-6A62-D4BB-720A59DE268E}"/>
-              </a:ext>
-            </a:extLst>
-          </p:cNvPr>
-          <p:cNvSpPr txBox="1">
-            <a:spLocks noGrp="1"/>
-          </p:cNvSpPr>
-          <p:nvPr>
-            <p:ph type="body" idx="1"/>
-          </p:nvPr>
-        </p:nvSpPr>
-        <p:spPr>
-          <a:xfrm>
-            <a:off x="709613" y="4860925"/>
-            <a:ext cx="5680075" cy="4605338"/>
-          </a:xfrm>
-          <a:prstGeom prst="rect">
-            <a:avLst/>
-          </a:prstGeom>
-          <a:noFill/>
-          <a:ln>
-            <a:noFill/>
-          </a:ln>
-        </p:spPr>
-        <p:txBody>
-          <a:bodyPr spcFirstLastPara="1" wrap="square" lIns="99025" tIns="49500" rIns="99025" bIns="49500" anchor="t" anchorCtr="0">
-            <a:normAutofit/>
-          </a:bodyPr>
-          <a:lstStyle/>
-          <a:p>
-            <a:endParaRPr lang="zh-TW" altLang="en-US" sz="1200" b="0" i="0" u="none" strike="noStrike" cap="none" dirty="0">
-              <a:solidFill>
-                <a:schemeClr val="dk1"/>
-              </a:solidFill>
-              <a:effectLst/>
-              <a:latin typeface="Calibri"/>
-              <a:ea typeface="Calibri"/>
-              <a:cs typeface="Calibri"/>
-              <a:sym typeface="Calibri"/>
-            </a:endParaRPr>
-          </a:p>
-        </p:txBody>
-      </p:sp>
-      <p:sp>
-        <p:nvSpPr>
-          <p:cNvPr id="95" name="Google Shape;95;p2:notes">
-            <a:extLst>
-              <a:ext uri="{FF2B5EF4-FFF2-40B4-BE49-F238E27FC236}">
-                <a16:creationId xmlns:a16="http://schemas.microsoft.com/office/drawing/2014/main" id="{226C62A5-5AEC-FA1F-ECAD-EC28F6F9B3A7}"/>
-              </a:ext>
-            </a:extLst>
-          </p:cNvPr>
-          <p:cNvSpPr txBox="1">
-            <a:spLocks noGrp="1"/>
-          </p:cNvSpPr>
-          <p:nvPr>
-            <p:ph type="sldNum" idx="12"/>
-          </p:nvPr>
-        </p:nvSpPr>
-        <p:spPr>
-          <a:xfrm>
-            <a:off x="4021138" y="9721850"/>
-            <a:ext cx="3076575" cy="511175"/>
-          </a:xfrm>
-          <a:prstGeom prst="rect">
-            <a:avLst/>
-          </a:prstGeom>
-          <a:noFill/>
-          <a:ln>
-            <a:noFill/>
-          </a:ln>
-        </p:spPr>
-        <p:txBody>
-          <a:bodyPr spcFirstLastPara="1" wrap="square" lIns="99025" tIns="49500" rIns="99025" bIns="49500" anchor="b" anchorCtr="0">
-            <a:noAutofit/>
-          </a:bodyPr>
-          <a:lstStyle/>
-          <a:p>
-            <a:pPr marL="0" lvl="0" indent="0" algn="r" rtl="0">
-              <a:spcBef>
-                <a:spcPts val="0"/>
-              </a:spcBef>
-              <a:spcAft>
-                <a:spcPts val="0"/>
-              </a:spcAft>
-              <a:buNone/>
-            </a:pPr>
-            <a:fld id="{00000000-1234-1234-1234-123412341234}" type="slidenum">
-              <a:rPr lang="en-US"/>
-              <a:t>9</a:t>
-            </a:fld>
-            <a:endParaRPr/>
-          </a:p>
-        </p:txBody>
-      </p:sp>
-    </p:spTree>
-    <p:extLst>
-      <p:ext uri="{BB962C8B-B14F-4D97-AF65-F5344CB8AC3E}">
-        <p14:creationId xmlns:p14="http://schemas.microsoft.com/office/powerpoint/2010/main" val="3916870764"/>
       </p:ext>
     </p:extLst>
   </p:cSld>
@@ -18453,6 +18841,956 @@
         <p:cNvPr id="1" name="Shape 96">
           <a:extLst>
             <a:ext uri="{FF2B5EF4-FFF2-40B4-BE49-F238E27FC236}">
+              <a16:creationId xmlns:a16="http://schemas.microsoft.com/office/drawing/2014/main" id="{2AE80049-1707-06C5-213E-D93DA334F4CA}"/>
+            </a:ext>
+          </a:extLst>
+        </p:cNvPr>
+        <p:cNvGrpSpPr/>
+        <p:nvPr/>
+      </p:nvGrpSpPr>
+      <p:grpSpPr>
+        <a:xfrm>
+          <a:off x="0" y="0"/>
+          <a:ext cx="0" cy="0"/>
+          <a:chOff x="0" y="0"/>
+          <a:chExt cx="0" cy="0"/>
+        </a:xfrm>
+      </p:grpSpPr>
+      <p:sp>
+        <p:nvSpPr>
+          <p:cNvPr id="97" name="Google Shape;97;p2">
+            <a:extLst>
+              <a:ext uri="{FF2B5EF4-FFF2-40B4-BE49-F238E27FC236}">
+                <a16:creationId xmlns:a16="http://schemas.microsoft.com/office/drawing/2014/main" id="{ED722555-D2CF-5A6A-CC0B-A05A22AE1AD3}"/>
+              </a:ext>
+            </a:extLst>
+          </p:cNvPr>
+          <p:cNvSpPr txBox="1">
+            <a:spLocks noGrp="1"/>
+          </p:cNvSpPr>
+          <p:nvPr>
+            <p:ph type="sldNum" idx="12"/>
+          </p:nvPr>
+        </p:nvSpPr>
+        <p:spPr>
+          <a:xfrm>
+            <a:off x="8737600" y="6356351"/>
+            <a:ext cx="2844800" cy="365125"/>
+          </a:xfrm>
+          <a:prstGeom prst="rect">
+            <a:avLst/>
+          </a:prstGeom>
+          <a:noFill/>
+          <a:ln>
+            <a:noFill/>
+          </a:ln>
+        </p:spPr>
+        <p:txBody>
+          <a:bodyPr spcFirstLastPara="1" wrap="square" lIns="91425" tIns="45700" rIns="91425" bIns="45700" anchor="ctr" anchorCtr="0">
+            <a:noAutofit/>
+          </a:bodyPr>
+          <a:lstStyle/>
+          <a:p>
+            <a:pPr marL="0" marR="0" lvl="0" indent="0" algn="r" rtl="0">
+              <a:spcBef>
+                <a:spcPts val="0"/>
+              </a:spcBef>
+              <a:spcAft>
+                <a:spcPts val="0"/>
+              </a:spcAft>
+              <a:buNone/>
+            </a:pPr>
+            <a:fld id="{00000000-1234-1234-1234-123412341234}" type="slidenum">
+              <a:rPr lang="en-US" sz="1200" b="0" i="0" u="none" strike="noStrike" cap="none">
+                <a:solidFill>
+                  <a:srgbClr val="10253F"/>
+                </a:solidFill>
+                <a:latin typeface="Calibri"/>
+                <a:ea typeface="Calibri"/>
+                <a:cs typeface="Calibri"/>
+                <a:sym typeface="Calibri"/>
+              </a:rPr>
+              <a:t>10</a:t>
+            </a:fld>
+            <a:endParaRPr sz="1200" b="0" i="0" u="none" strike="noStrike" cap="none" dirty="0">
+              <a:solidFill>
+                <a:srgbClr val="10253F"/>
+              </a:solidFill>
+              <a:latin typeface="Calibri"/>
+              <a:ea typeface="Calibri"/>
+              <a:cs typeface="Calibri"/>
+              <a:sym typeface="Calibri"/>
+            </a:endParaRPr>
+          </a:p>
+        </p:txBody>
+      </p:sp>
+      <p:sp>
+        <p:nvSpPr>
+          <p:cNvPr id="98" name="Google Shape;98;p2">
+            <a:extLst>
+              <a:ext uri="{FF2B5EF4-FFF2-40B4-BE49-F238E27FC236}">
+                <a16:creationId xmlns:a16="http://schemas.microsoft.com/office/drawing/2014/main" id="{7F4895DA-8AFC-82F3-F130-62D73482F06F}"/>
+              </a:ext>
+            </a:extLst>
+          </p:cNvPr>
+          <p:cNvSpPr txBox="1">
+            <a:spLocks noGrp="1"/>
+          </p:cNvSpPr>
+          <p:nvPr>
+            <p:ph type="dt" idx="10"/>
+          </p:nvPr>
+        </p:nvSpPr>
+        <p:spPr>
+          <a:xfrm>
+            <a:off x="609600" y="6356351"/>
+            <a:ext cx="2844800" cy="365125"/>
+          </a:xfrm>
+          <a:prstGeom prst="rect">
+            <a:avLst/>
+          </a:prstGeom>
+          <a:noFill/>
+          <a:ln>
+            <a:noFill/>
+          </a:ln>
+        </p:spPr>
+        <p:txBody>
+          <a:bodyPr spcFirstLastPara="1" wrap="square" lIns="91425" tIns="45700" rIns="91425" bIns="45700" anchor="ctr" anchorCtr="0">
+            <a:noAutofit/>
+          </a:bodyPr>
+          <a:lstStyle/>
+          <a:p>
+            <a:pPr lvl="0"/>
+            <a:r>
+              <a:rPr lang="en-US" altLang="zh-TW" dirty="0"/>
+              <a:t>2025/11/25</a:t>
+            </a:r>
+          </a:p>
+        </p:txBody>
+      </p:sp>
+      <p:sp>
+        <p:nvSpPr>
+          <p:cNvPr id="99" name="Google Shape;99;p2">
+            <a:extLst>
+              <a:ext uri="{FF2B5EF4-FFF2-40B4-BE49-F238E27FC236}">
+                <a16:creationId xmlns:a16="http://schemas.microsoft.com/office/drawing/2014/main" id="{0AE457D0-2A56-E3E3-A8E2-526949371D29}"/>
+              </a:ext>
+            </a:extLst>
+          </p:cNvPr>
+          <p:cNvSpPr txBox="1">
+            <a:spLocks noGrp="1"/>
+          </p:cNvSpPr>
+          <p:nvPr>
+            <p:ph type="ftr" idx="11"/>
+          </p:nvPr>
+        </p:nvSpPr>
+        <p:spPr>
+          <a:xfrm>
+            <a:off x="4165600" y="6356351"/>
+            <a:ext cx="3860800" cy="365125"/>
+          </a:xfrm>
+          <a:prstGeom prst="rect">
+            <a:avLst/>
+          </a:prstGeom>
+          <a:noFill/>
+          <a:ln>
+            <a:noFill/>
+          </a:ln>
+        </p:spPr>
+        <p:txBody>
+          <a:bodyPr spcFirstLastPara="1" wrap="square" lIns="91425" tIns="45700" rIns="91425" bIns="45700" anchor="ctr" anchorCtr="0">
+            <a:noAutofit/>
+          </a:bodyPr>
+          <a:lstStyle/>
+          <a:p>
+            <a:pPr marL="0" lvl="0" indent="0" algn="ctr" rtl="0">
+              <a:spcBef>
+                <a:spcPts val="0"/>
+              </a:spcBef>
+              <a:spcAft>
+                <a:spcPts val="0"/>
+              </a:spcAft>
+              <a:buNone/>
+            </a:pPr>
+            <a:r>
+              <a:rPr lang="en-US" dirty="0" err="1"/>
+              <a:t>軟體系統實驗室</a:t>
+            </a:r>
+            <a:endParaRPr dirty="0"/>
+          </a:p>
+        </p:txBody>
+      </p:sp>
+      <p:sp>
+        <p:nvSpPr>
+          <p:cNvPr id="7" name="Google Shape;100;p2">
+            <a:extLst>
+              <a:ext uri="{FF2B5EF4-FFF2-40B4-BE49-F238E27FC236}">
+                <a16:creationId xmlns:a16="http://schemas.microsoft.com/office/drawing/2014/main" id="{59C2EDC7-DD00-D1FD-EC94-9A42B1A7AC0D}"/>
+              </a:ext>
+            </a:extLst>
+          </p:cNvPr>
+          <p:cNvSpPr txBox="1">
+            <a:spLocks noGrp="1"/>
+          </p:cNvSpPr>
+          <p:nvPr>
+            <p:ph type="title"/>
+          </p:nvPr>
+        </p:nvSpPr>
+        <p:spPr>
+          <a:xfrm>
+            <a:off x="609600" y="274638"/>
+            <a:ext cx="10972800" cy="1143000"/>
+          </a:xfrm>
+          <a:prstGeom prst="rect">
+            <a:avLst/>
+          </a:prstGeom>
+          <a:noFill/>
+          <a:ln>
+            <a:noFill/>
+          </a:ln>
+        </p:spPr>
+        <p:txBody>
+          <a:bodyPr spcFirstLastPara="1" wrap="square" lIns="91425" tIns="45700" rIns="91425" bIns="45700" anchor="ctr" anchorCtr="0">
+            <a:noAutofit/>
+          </a:bodyPr>
+          <a:lstStyle/>
+          <a:p>
+            <a:r>
+              <a:rPr lang="en-US" altLang="zh-TW" dirty="0">
+                <a:latin typeface="Times New Roman" panose="02020603050405020304" pitchFamily="18" charset="0"/>
+                <a:ea typeface="標楷體" panose="03000509000000000000" pitchFamily="65" charset="-120"/>
+                <a:cs typeface="Times New Roman" panose="02020603050405020304" pitchFamily="18" charset="0"/>
+              </a:rPr>
+              <a:t>Common </a:t>
+            </a:r>
+            <a:r>
+              <a:rPr lang="en-US" altLang="zh-TW" dirty="0" err="1">
+                <a:latin typeface="Times New Roman" panose="02020603050405020304" pitchFamily="18" charset="0"/>
+                <a:ea typeface="標楷體" panose="03000509000000000000" pitchFamily="65" charset="-120"/>
+                <a:cs typeface="Times New Roman" panose="02020603050405020304" pitchFamily="18" charset="0"/>
+              </a:rPr>
+              <a:t>UseCase</a:t>
+            </a:r>
+            <a:endParaRPr dirty="0">
+              <a:latin typeface="Times New Roman" panose="02020603050405020304" pitchFamily="18" charset="0"/>
+              <a:ea typeface="標楷體" panose="03000509000000000000" pitchFamily="65" charset="-120"/>
+              <a:cs typeface="Times New Roman" panose="02020603050405020304" pitchFamily="18" charset="0"/>
+            </a:endParaRPr>
+          </a:p>
+        </p:txBody>
+      </p:sp>
+      <p:pic>
+        <p:nvPicPr>
+          <p:cNvPr id="11" name="圖片 10">
+            <a:extLst>
+              <a:ext uri="{FF2B5EF4-FFF2-40B4-BE49-F238E27FC236}">
+                <a16:creationId xmlns:a16="http://schemas.microsoft.com/office/drawing/2014/main" id="{25DC425D-77C1-93F0-07C9-9DDEB71B4F6B}"/>
+              </a:ext>
+            </a:extLst>
+          </p:cNvPr>
+          <p:cNvPicPr>
+            <a:picLocks noChangeAspect="1"/>
+          </p:cNvPicPr>
+          <p:nvPr/>
+        </p:nvPicPr>
+        <p:blipFill>
+          <a:blip r:embed="rId3"/>
+          <a:stretch>
+            <a:fillRect/>
+          </a:stretch>
+        </p:blipFill>
+        <p:spPr>
+          <a:xfrm>
+            <a:off x="609600" y="1417638"/>
+            <a:ext cx="11015713" cy="4938713"/>
+          </a:xfrm>
+          <a:prstGeom prst="rect">
+            <a:avLst/>
+          </a:prstGeom>
+        </p:spPr>
+      </p:pic>
+      <p:sp>
+        <p:nvSpPr>
+          <p:cNvPr id="2" name="矩形 1">
+            <a:extLst>
+              <a:ext uri="{FF2B5EF4-FFF2-40B4-BE49-F238E27FC236}">
+                <a16:creationId xmlns:a16="http://schemas.microsoft.com/office/drawing/2014/main" id="{09A204A5-8391-FB87-1F87-6CF64CACF63D}"/>
+              </a:ext>
+            </a:extLst>
+          </p:cNvPr>
+          <p:cNvSpPr/>
+          <p:nvPr/>
+        </p:nvSpPr>
+        <p:spPr>
+          <a:xfrm>
+            <a:off x="1210235" y="2160494"/>
+            <a:ext cx="10219765" cy="2985247"/>
+          </a:xfrm>
+          <a:prstGeom prst="rect">
+            <a:avLst/>
+          </a:prstGeom>
+          <a:noFill/>
+          <a:ln>
+            <a:solidFill>
+              <a:srgbClr val="FF0000"/>
+            </a:solidFill>
+          </a:ln>
+        </p:spPr>
+        <p:style>
+          <a:lnRef idx="2">
+            <a:schemeClr val="accent1">
+              <a:shade val="15000"/>
+            </a:schemeClr>
+          </a:lnRef>
+          <a:fillRef idx="1">
+            <a:schemeClr val="accent1"/>
+          </a:fillRef>
+          <a:effectRef idx="0">
+            <a:schemeClr val="accent1"/>
+          </a:effectRef>
+          <a:fontRef idx="minor">
+            <a:schemeClr val="lt1"/>
+          </a:fontRef>
+        </p:style>
+        <p:txBody>
+          <a:bodyPr rtlCol="0" anchor="ctr"/>
+          <a:lstStyle/>
+          <a:p>
+            <a:pPr algn="ctr"/>
+            <a:endParaRPr lang="zh-TW" altLang="en-US"/>
+          </a:p>
+        </p:txBody>
+      </p:sp>
+    </p:spTree>
+    <p:extLst>
+      <p:ext uri="{BB962C8B-B14F-4D97-AF65-F5344CB8AC3E}">
+        <p14:creationId xmlns:p14="http://schemas.microsoft.com/office/powerpoint/2010/main" val="3270234014"/>
+      </p:ext>
+    </p:extLst>
+  </p:cSld>
+  <p:clrMapOvr>
+    <a:masterClrMapping/>
+  </p:clrMapOvr>
+</p:sld>
+</file>
+
+<file path=ppt/slides/slide11.xml><?xml version="1.0" encoding="utf-8"?>
+<p:sld xmlns:a="http://schemas.openxmlformats.org/drawingml/2006/main" xmlns:r="http://schemas.openxmlformats.org/officeDocument/2006/relationships" xmlns:p="http://schemas.openxmlformats.org/presentationml/2006/main">
+  <p:cSld>
+    <p:spTree>
+      <p:nvGrpSpPr>
+        <p:cNvPr id="1" name="Shape 96">
+          <a:extLst>
+            <a:ext uri="{FF2B5EF4-FFF2-40B4-BE49-F238E27FC236}">
+              <a16:creationId xmlns:a16="http://schemas.microsoft.com/office/drawing/2014/main" id="{51035089-A22E-1110-97B3-D57180398E34}"/>
+            </a:ext>
+          </a:extLst>
+        </p:cNvPr>
+        <p:cNvGrpSpPr/>
+        <p:nvPr/>
+      </p:nvGrpSpPr>
+      <p:grpSpPr>
+        <a:xfrm>
+          <a:off x="0" y="0"/>
+          <a:ext cx="0" cy="0"/>
+          <a:chOff x="0" y="0"/>
+          <a:chExt cx="0" cy="0"/>
+        </a:xfrm>
+      </p:grpSpPr>
+      <p:sp>
+        <p:nvSpPr>
+          <p:cNvPr id="97" name="Google Shape;97;p2">
+            <a:extLst>
+              <a:ext uri="{FF2B5EF4-FFF2-40B4-BE49-F238E27FC236}">
+                <a16:creationId xmlns:a16="http://schemas.microsoft.com/office/drawing/2014/main" id="{880E4470-4A11-9DF3-BBDD-9CBCFD3F3012}"/>
+              </a:ext>
+            </a:extLst>
+          </p:cNvPr>
+          <p:cNvSpPr txBox="1">
+            <a:spLocks noGrp="1"/>
+          </p:cNvSpPr>
+          <p:nvPr>
+            <p:ph type="sldNum" idx="12"/>
+          </p:nvPr>
+        </p:nvSpPr>
+        <p:spPr>
+          <a:xfrm>
+            <a:off x="8737600" y="6356351"/>
+            <a:ext cx="2844800" cy="365125"/>
+          </a:xfrm>
+          <a:prstGeom prst="rect">
+            <a:avLst/>
+          </a:prstGeom>
+          <a:noFill/>
+          <a:ln>
+            <a:noFill/>
+          </a:ln>
+        </p:spPr>
+        <p:txBody>
+          <a:bodyPr spcFirstLastPara="1" wrap="square" lIns="91425" tIns="45700" rIns="91425" bIns="45700" anchor="ctr" anchorCtr="0">
+            <a:noAutofit/>
+          </a:bodyPr>
+          <a:lstStyle/>
+          <a:p>
+            <a:pPr marL="0" marR="0" lvl="0" indent="0" algn="r" rtl="0">
+              <a:spcBef>
+                <a:spcPts val="0"/>
+              </a:spcBef>
+              <a:spcAft>
+                <a:spcPts val="0"/>
+              </a:spcAft>
+              <a:buNone/>
+            </a:pPr>
+            <a:fld id="{00000000-1234-1234-1234-123412341234}" type="slidenum">
+              <a:rPr lang="en-US" sz="1200" b="0" i="0" u="none" strike="noStrike" cap="none">
+                <a:solidFill>
+                  <a:srgbClr val="10253F"/>
+                </a:solidFill>
+                <a:latin typeface="Calibri"/>
+                <a:ea typeface="Calibri"/>
+                <a:cs typeface="Calibri"/>
+                <a:sym typeface="Calibri"/>
+              </a:rPr>
+              <a:t>11</a:t>
+            </a:fld>
+            <a:endParaRPr sz="1200" b="0" i="0" u="none" strike="noStrike" cap="none" dirty="0">
+              <a:solidFill>
+                <a:srgbClr val="10253F"/>
+              </a:solidFill>
+              <a:latin typeface="Calibri"/>
+              <a:ea typeface="Calibri"/>
+              <a:cs typeface="Calibri"/>
+              <a:sym typeface="Calibri"/>
+            </a:endParaRPr>
+          </a:p>
+        </p:txBody>
+      </p:sp>
+      <p:sp>
+        <p:nvSpPr>
+          <p:cNvPr id="98" name="Google Shape;98;p2">
+            <a:extLst>
+              <a:ext uri="{FF2B5EF4-FFF2-40B4-BE49-F238E27FC236}">
+                <a16:creationId xmlns:a16="http://schemas.microsoft.com/office/drawing/2014/main" id="{7BA1DAF5-3161-C3F3-1B89-57294AB613B9}"/>
+              </a:ext>
+            </a:extLst>
+          </p:cNvPr>
+          <p:cNvSpPr txBox="1">
+            <a:spLocks noGrp="1"/>
+          </p:cNvSpPr>
+          <p:nvPr>
+            <p:ph type="dt" idx="10"/>
+          </p:nvPr>
+        </p:nvSpPr>
+        <p:spPr>
+          <a:xfrm>
+            <a:off x="609600" y="6356351"/>
+            <a:ext cx="2844800" cy="365125"/>
+          </a:xfrm>
+          <a:prstGeom prst="rect">
+            <a:avLst/>
+          </a:prstGeom>
+          <a:noFill/>
+          <a:ln>
+            <a:noFill/>
+          </a:ln>
+        </p:spPr>
+        <p:txBody>
+          <a:bodyPr spcFirstLastPara="1" wrap="square" lIns="91425" tIns="45700" rIns="91425" bIns="45700" anchor="ctr" anchorCtr="0">
+            <a:noAutofit/>
+          </a:bodyPr>
+          <a:lstStyle/>
+          <a:p>
+            <a:pPr lvl="0"/>
+            <a:r>
+              <a:rPr lang="en-US" altLang="zh-TW" dirty="0"/>
+              <a:t>2025/11/25</a:t>
+            </a:r>
+          </a:p>
+        </p:txBody>
+      </p:sp>
+      <p:sp>
+        <p:nvSpPr>
+          <p:cNvPr id="99" name="Google Shape;99;p2">
+            <a:extLst>
+              <a:ext uri="{FF2B5EF4-FFF2-40B4-BE49-F238E27FC236}">
+                <a16:creationId xmlns:a16="http://schemas.microsoft.com/office/drawing/2014/main" id="{0A57FA6E-9CCB-4382-32D0-B8A8CDB45004}"/>
+              </a:ext>
+            </a:extLst>
+          </p:cNvPr>
+          <p:cNvSpPr txBox="1">
+            <a:spLocks noGrp="1"/>
+          </p:cNvSpPr>
+          <p:nvPr>
+            <p:ph type="ftr" idx="11"/>
+          </p:nvPr>
+        </p:nvSpPr>
+        <p:spPr>
+          <a:xfrm>
+            <a:off x="4165600" y="6356351"/>
+            <a:ext cx="3860800" cy="365125"/>
+          </a:xfrm>
+          <a:prstGeom prst="rect">
+            <a:avLst/>
+          </a:prstGeom>
+          <a:noFill/>
+          <a:ln>
+            <a:noFill/>
+          </a:ln>
+        </p:spPr>
+        <p:txBody>
+          <a:bodyPr spcFirstLastPara="1" wrap="square" lIns="91425" tIns="45700" rIns="91425" bIns="45700" anchor="ctr" anchorCtr="0">
+            <a:noAutofit/>
+          </a:bodyPr>
+          <a:lstStyle/>
+          <a:p>
+            <a:pPr marL="0" lvl="0" indent="0" algn="ctr" rtl="0">
+              <a:spcBef>
+                <a:spcPts val="0"/>
+              </a:spcBef>
+              <a:spcAft>
+                <a:spcPts val="0"/>
+              </a:spcAft>
+              <a:buNone/>
+            </a:pPr>
+            <a:r>
+              <a:rPr lang="en-US" dirty="0" err="1"/>
+              <a:t>軟體系統實驗室</a:t>
+            </a:r>
+            <a:endParaRPr dirty="0"/>
+          </a:p>
+        </p:txBody>
+      </p:sp>
+      <p:sp>
+        <p:nvSpPr>
+          <p:cNvPr id="100" name="Google Shape;100;p2">
+            <a:extLst>
+              <a:ext uri="{FF2B5EF4-FFF2-40B4-BE49-F238E27FC236}">
+                <a16:creationId xmlns:a16="http://schemas.microsoft.com/office/drawing/2014/main" id="{77D25056-EDA4-FF60-C0AB-1E212B3AF624}"/>
+              </a:ext>
+            </a:extLst>
+          </p:cNvPr>
+          <p:cNvSpPr txBox="1">
+            <a:spLocks noGrp="1"/>
+          </p:cNvSpPr>
+          <p:nvPr>
+            <p:ph type="title"/>
+          </p:nvPr>
+        </p:nvSpPr>
+        <p:spPr>
+          <a:xfrm>
+            <a:off x="609600" y="274638"/>
+            <a:ext cx="10972800" cy="1143000"/>
+          </a:xfrm>
+          <a:prstGeom prst="rect">
+            <a:avLst/>
+          </a:prstGeom>
+          <a:noFill/>
+          <a:ln>
+            <a:noFill/>
+          </a:ln>
+        </p:spPr>
+        <p:txBody>
+          <a:bodyPr spcFirstLastPara="1" wrap="square" lIns="91425" tIns="45700" rIns="91425" bIns="45700" anchor="ctr" anchorCtr="0">
+            <a:noAutofit/>
+          </a:bodyPr>
+          <a:lstStyle/>
+          <a:p>
+            <a:r>
+              <a:rPr lang="en-US" altLang="zh-TW" dirty="0">
+                <a:latin typeface="Times New Roman" panose="02020603050405020304" pitchFamily="18" charset="0"/>
+                <a:ea typeface="標楷體" panose="03000509000000000000" pitchFamily="65" charset="-120"/>
+                <a:cs typeface="Times New Roman" panose="02020603050405020304" pitchFamily="18" charset="0"/>
+              </a:rPr>
+              <a:t>Common </a:t>
+            </a:r>
+            <a:r>
+              <a:rPr lang="en-US" altLang="zh-TW" dirty="0" err="1">
+                <a:latin typeface="Times New Roman" panose="02020603050405020304" pitchFamily="18" charset="0"/>
+                <a:ea typeface="標楷體" panose="03000509000000000000" pitchFamily="65" charset="-120"/>
+                <a:cs typeface="Times New Roman" panose="02020603050405020304" pitchFamily="18" charset="0"/>
+              </a:rPr>
+              <a:t>UseCase</a:t>
+            </a:r>
+            <a:endParaRPr dirty="0">
+              <a:latin typeface="Times New Roman" panose="02020603050405020304" pitchFamily="18" charset="0"/>
+              <a:ea typeface="標楷體" panose="03000509000000000000" pitchFamily="65" charset="-120"/>
+              <a:cs typeface="Times New Roman" panose="02020603050405020304" pitchFamily="18" charset="0"/>
+            </a:endParaRPr>
+          </a:p>
+        </p:txBody>
+      </p:sp>
+      <p:sp>
+        <p:nvSpPr>
+          <p:cNvPr id="2" name="內容版面配置區 8">
+            <a:extLst>
+              <a:ext uri="{FF2B5EF4-FFF2-40B4-BE49-F238E27FC236}">
+                <a16:creationId xmlns:a16="http://schemas.microsoft.com/office/drawing/2014/main" id="{B18C19EF-2DCB-D023-AFFC-6D353758BE8D}"/>
+              </a:ext>
+            </a:extLst>
+          </p:cNvPr>
+          <p:cNvSpPr txBox="1">
+            <a:spLocks/>
+          </p:cNvSpPr>
+          <p:nvPr/>
+        </p:nvSpPr>
+        <p:spPr>
+          <a:xfrm>
+            <a:off x="609600" y="1500766"/>
+            <a:ext cx="10972800" cy="4525963"/>
+          </a:xfrm>
+          <a:prstGeom prst="rect">
+            <a:avLst/>
+          </a:prstGeom>
+          <a:noFill/>
+          <a:ln>
+            <a:noFill/>
+          </a:ln>
+        </p:spPr>
+        <p:txBody>
+          <a:bodyPr spcFirstLastPara="1" wrap="square" lIns="91425" tIns="45700" rIns="91425" bIns="45700" anchor="t" anchorCtr="0">
+            <a:noAutofit/>
+          </a:bodyPr>
+          <a:lstStyle>
+            <a:defPPr marR="0" lvl="0" algn="l" rtl="0">
+              <a:lnSpc>
+                <a:spcPct val="100000"/>
+              </a:lnSpc>
+              <a:spcBef>
+                <a:spcPts val="0"/>
+              </a:spcBef>
+              <a:spcAft>
+                <a:spcPts val="0"/>
+              </a:spcAft>
+            </a:defPPr>
+            <a:lvl1pPr marL="457200" marR="0" lvl="0" indent="-431800" algn="l" rtl="0">
+              <a:lnSpc>
+                <a:spcPct val="100000"/>
+              </a:lnSpc>
+              <a:spcBef>
+                <a:spcPts val="640"/>
+              </a:spcBef>
+              <a:spcAft>
+                <a:spcPts val="0"/>
+              </a:spcAft>
+              <a:buClr>
+                <a:srgbClr val="0F243E"/>
+              </a:buClr>
+              <a:buSzPts val="3200"/>
+              <a:buFont typeface="Arial"/>
+              <a:buChar char="•"/>
+              <a:defRPr sz="3200" b="0" i="0" u="none" strike="noStrike" cap="none">
+                <a:solidFill>
+                  <a:srgbClr val="0F243E"/>
+                </a:solidFill>
+                <a:latin typeface="Times New Roman"/>
+                <a:ea typeface="Times New Roman"/>
+                <a:cs typeface="Times New Roman"/>
+                <a:sym typeface="Times New Roman"/>
+              </a:defRPr>
+            </a:lvl1pPr>
+            <a:lvl2pPr marL="914400" marR="0" lvl="1" indent="-406400" algn="l" rtl="0">
+              <a:lnSpc>
+                <a:spcPct val="100000"/>
+              </a:lnSpc>
+              <a:spcBef>
+                <a:spcPts val="560"/>
+              </a:spcBef>
+              <a:spcAft>
+                <a:spcPts val="0"/>
+              </a:spcAft>
+              <a:buClr>
+                <a:srgbClr val="0F243E"/>
+              </a:buClr>
+              <a:buSzPts val="2800"/>
+              <a:buFont typeface="Arial"/>
+              <a:buChar char="–"/>
+              <a:defRPr sz="2800" b="0" i="0" u="none" strike="noStrike" cap="none">
+                <a:solidFill>
+                  <a:srgbClr val="0F243E"/>
+                </a:solidFill>
+                <a:latin typeface="Times New Roman"/>
+                <a:ea typeface="Times New Roman"/>
+                <a:cs typeface="Times New Roman"/>
+                <a:sym typeface="Times New Roman"/>
+              </a:defRPr>
+            </a:lvl2pPr>
+            <a:lvl3pPr marL="1371600" marR="0" lvl="2" indent="-381000" algn="l" rtl="0">
+              <a:lnSpc>
+                <a:spcPct val="100000"/>
+              </a:lnSpc>
+              <a:spcBef>
+                <a:spcPts val="480"/>
+              </a:spcBef>
+              <a:spcAft>
+                <a:spcPts val="0"/>
+              </a:spcAft>
+              <a:buClr>
+                <a:srgbClr val="0F243E"/>
+              </a:buClr>
+              <a:buSzPts val="2400"/>
+              <a:buFont typeface="Arial"/>
+              <a:buChar char="•"/>
+              <a:defRPr sz="2400" b="0" i="0" u="none" strike="noStrike" cap="none">
+                <a:solidFill>
+                  <a:srgbClr val="0F243E"/>
+                </a:solidFill>
+                <a:latin typeface="Times New Roman"/>
+                <a:ea typeface="Times New Roman"/>
+                <a:cs typeface="Times New Roman"/>
+                <a:sym typeface="Times New Roman"/>
+              </a:defRPr>
+            </a:lvl3pPr>
+            <a:lvl4pPr marL="1828800" marR="0" lvl="3" indent="-355600" algn="l" rtl="0">
+              <a:lnSpc>
+                <a:spcPct val="100000"/>
+              </a:lnSpc>
+              <a:spcBef>
+                <a:spcPts val="400"/>
+              </a:spcBef>
+              <a:spcAft>
+                <a:spcPts val="0"/>
+              </a:spcAft>
+              <a:buClr>
+                <a:srgbClr val="0F243E"/>
+              </a:buClr>
+              <a:buSzPts val="2000"/>
+              <a:buFont typeface="Arial"/>
+              <a:buChar char="–"/>
+              <a:defRPr sz="2000" b="0" i="0" u="none" strike="noStrike" cap="none">
+                <a:solidFill>
+                  <a:srgbClr val="0F243E"/>
+                </a:solidFill>
+                <a:latin typeface="Times New Roman"/>
+                <a:ea typeface="Times New Roman"/>
+                <a:cs typeface="Times New Roman"/>
+                <a:sym typeface="Times New Roman"/>
+              </a:defRPr>
+            </a:lvl4pPr>
+            <a:lvl5pPr marL="2286000" marR="0" lvl="4" indent="-355600" algn="l" rtl="0">
+              <a:lnSpc>
+                <a:spcPct val="100000"/>
+              </a:lnSpc>
+              <a:spcBef>
+                <a:spcPts val="400"/>
+              </a:spcBef>
+              <a:spcAft>
+                <a:spcPts val="0"/>
+              </a:spcAft>
+              <a:buClr>
+                <a:srgbClr val="0F243E"/>
+              </a:buClr>
+              <a:buSzPts val="2000"/>
+              <a:buFont typeface="Arial"/>
+              <a:buChar char="»"/>
+              <a:defRPr sz="2000" b="0" i="0" u="none" strike="noStrike" cap="none">
+                <a:solidFill>
+                  <a:srgbClr val="0F243E"/>
+                </a:solidFill>
+                <a:latin typeface="Times New Roman"/>
+                <a:ea typeface="Times New Roman"/>
+                <a:cs typeface="Times New Roman"/>
+                <a:sym typeface="Times New Roman"/>
+              </a:defRPr>
+            </a:lvl5pPr>
+            <a:lvl6pPr marL="2743200" marR="0" lvl="5" indent="-342900" algn="l" rtl="0">
+              <a:lnSpc>
+                <a:spcPct val="100000"/>
+              </a:lnSpc>
+              <a:spcBef>
+                <a:spcPts val="360"/>
+              </a:spcBef>
+              <a:spcAft>
+                <a:spcPts val="0"/>
+              </a:spcAft>
+              <a:buClr>
+                <a:schemeClr val="dk1"/>
+              </a:buClr>
+              <a:buSzPts val="1800"/>
+              <a:buFont typeface="Arial"/>
+              <a:buChar char="•"/>
+              <a:defRPr sz="2000" b="0" i="0" u="none" strike="noStrike" cap="none">
+                <a:solidFill>
+                  <a:schemeClr val="dk1"/>
+                </a:solidFill>
+                <a:latin typeface="Calibri"/>
+                <a:ea typeface="Calibri"/>
+                <a:cs typeface="Calibri"/>
+                <a:sym typeface="Calibri"/>
+              </a:defRPr>
+            </a:lvl6pPr>
+            <a:lvl7pPr marL="3200400" marR="0" lvl="6" indent="-342900" algn="l" rtl="0">
+              <a:lnSpc>
+                <a:spcPct val="100000"/>
+              </a:lnSpc>
+              <a:spcBef>
+                <a:spcPts val="360"/>
+              </a:spcBef>
+              <a:spcAft>
+                <a:spcPts val="0"/>
+              </a:spcAft>
+              <a:buClr>
+                <a:schemeClr val="dk1"/>
+              </a:buClr>
+              <a:buSzPts val="1800"/>
+              <a:buFont typeface="Arial"/>
+              <a:buChar char="•"/>
+              <a:defRPr sz="2000" b="0" i="0" u="none" strike="noStrike" cap="none">
+                <a:solidFill>
+                  <a:schemeClr val="dk1"/>
+                </a:solidFill>
+                <a:latin typeface="Calibri"/>
+                <a:ea typeface="Calibri"/>
+                <a:cs typeface="Calibri"/>
+                <a:sym typeface="Calibri"/>
+              </a:defRPr>
+            </a:lvl7pPr>
+            <a:lvl8pPr marL="3657600" marR="0" lvl="7" indent="-342900" algn="l" rtl="0">
+              <a:lnSpc>
+                <a:spcPct val="100000"/>
+              </a:lnSpc>
+              <a:spcBef>
+                <a:spcPts val="360"/>
+              </a:spcBef>
+              <a:spcAft>
+                <a:spcPts val="0"/>
+              </a:spcAft>
+              <a:buClr>
+                <a:schemeClr val="dk1"/>
+              </a:buClr>
+              <a:buSzPts val="1800"/>
+              <a:buFont typeface="Arial"/>
+              <a:buChar char="•"/>
+              <a:defRPr sz="2000" b="0" i="0" u="none" strike="noStrike" cap="none">
+                <a:solidFill>
+                  <a:schemeClr val="dk1"/>
+                </a:solidFill>
+                <a:latin typeface="Calibri"/>
+                <a:ea typeface="Calibri"/>
+                <a:cs typeface="Calibri"/>
+                <a:sym typeface="Calibri"/>
+              </a:defRPr>
+            </a:lvl8pPr>
+            <a:lvl9pPr marL="4114800" marR="0" lvl="8" indent="-342900" algn="l" rtl="0">
+              <a:lnSpc>
+                <a:spcPct val="100000"/>
+              </a:lnSpc>
+              <a:spcBef>
+                <a:spcPts val="360"/>
+              </a:spcBef>
+              <a:spcAft>
+                <a:spcPts val="0"/>
+              </a:spcAft>
+              <a:buClr>
+                <a:schemeClr val="dk1"/>
+              </a:buClr>
+              <a:buSzPts val="1800"/>
+              <a:buFont typeface="Arial"/>
+              <a:buChar char="•"/>
+              <a:defRPr sz="2000" b="0" i="0" u="none" strike="noStrike" cap="none">
+                <a:solidFill>
+                  <a:schemeClr val="dk1"/>
+                </a:solidFill>
+                <a:latin typeface="Calibri"/>
+                <a:ea typeface="Calibri"/>
+                <a:cs typeface="Calibri"/>
+                <a:sym typeface="Calibri"/>
+              </a:defRPr>
+            </a:lvl9pPr>
+          </a:lstStyle>
+          <a:p>
+            <a:pPr marL="25400" indent="0">
+              <a:buNone/>
+              <a:defRPr/>
+            </a:pPr>
+            <a:r>
+              <a:rPr lang="en-US" altLang="zh-TW" dirty="0">
+                <a:ea typeface="標楷體" panose="03000509000000000000" pitchFamily="65" charset="-120"/>
+              </a:rPr>
+              <a:t>Category2:Workflow Automation</a:t>
+            </a:r>
+          </a:p>
+          <a:p>
+            <a:pPr marL="25400" indent="0">
+              <a:buNone/>
+              <a:defRPr/>
+            </a:pPr>
+            <a:endParaRPr lang="en-US" altLang="zh-TW" dirty="0">
+              <a:ea typeface="標楷體" panose="03000509000000000000" pitchFamily="65" charset="-120"/>
+            </a:endParaRPr>
+          </a:p>
+          <a:p>
+            <a:r>
+              <a:rPr lang="zh-TW" altLang="en-US" b="1" dirty="0">
+                <a:ea typeface="標楷體" panose="03000509000000000000" pitchFamily="65" charset="-120"/>
+              </a:rPr>
+              <a:t>目標</a:t>
+            </a:r>
+            <a:r>
+              <a:rPr lang="zh-TW" altLang="en-US" dirty="0">
+                <a:ea typeface="標楷體" panose="03000509000000000000" pitchFamily="65" charset="-120"/>
+              </a:rPr>
+              <a:t>：針對需要多步驟、嚴謹邏輯的任務，提供一套帶有驗證機制的流程 。</a:t>
+            </a:r>
+            <a:endParaRPr lang="en-US" altLang="zh-TW" dirty="0">
+              <a:ea typeface="標楷體" panose="03000509000000000000" pitchFamily="65" charset="-120"/>
+            </a:endParaRPr>
+          </a:p>
+          <a:p>
+            <a:r>
+              <a:rPr lang="zh-TW" altLang="en-US" b="1" dirty="0">
+                <a:ea typeface="標楷體" panose="03000509000000000000" pitchFamily="65" charset="-120"/>
+              </a:rPr>
+              <a:t>關鍵技巧</a:t>
+            </a:r>
+            <a:r>
+              <a:rPr lang="zh-TW" altLang="en-US" dirty="0">
+                <a:ea typeface="標楷體" panose="03000509000000000000" pitchFamily="65" charset="-120"/>
+              </a:rPr>
+              <a:t>：建立帶有驗證門檻 </a:t>
+            </a:r>
+            <a:r>
+              <a:rPr lang="en-US" altLang="zh-TW" dirty="0">
+                <a:ea typeface="標楷體" panose="03000509000000000000" pitchFamily="65" charset="-120"/>
+              </a:rPr>
+              <a:t>(Validation Gates) </a:t>
+            </a:r>
+            <a:r>
+              <a:rPr lang="zh-TW" altLang="en-US" dirty="0">
+                <a:ea typeface="標楷體" panose="03000509000000000000" pitchFamily="65" charset="-120"/>
+              </a:rPr>
+              <a:t>的步驟化流程、內建審核與改進建議。</a:t>
+            </a:r>
+            <a:endParaRPr lang="en-US" altLang="zh-TW" dirty="0">
+              <a:ea typeface="標楷體" panose="03000509000000000000" pitchFamily="65" charset="-120"/>
+            </a:endParaRPr>
+          </a:p>
+          <a:p>
+            <a:endParaRPr lang="en-US" altLang="zh-TW" dirty="0">
+              <a:ea typeface="標楷體" panose="03000509000000000000" pitchFamily="65" charset="-120"/>
+            </a:endParaRPr>
+          </a:p>
+        </p:txBody>
+      </p:sp>
+    </p:spTree>
+    <p:extLst>
+      <p:ext uri="{BB962C8B-B14F-4D97-AF65-F5344CB8AC3E}">
+        <p14:creationId xmlns:p14="http://schemas.microsoft.com/office/powerpoint/2010/main" val="1589128819"/>
+      </p:ext>
+    </p:extLst>
+  </p:cSld>
+  <p:clrMapOvr>
+    <a:masterClrMapping/>
+  </p:clrMapOvr>
+</p:sld>
+</file>
+
+<file path=ppt/slides/slide12.xml><?xml version="1.0" encoding="utf-8"?>
+<p:sld xmlns:a="http://schemas.openxmlformats.org/drawingml/2006/main" xmlns:r="http://schemas.openxmlformats.org/officeDocument/2006/relationships" xmlns:p="http://schemas.openxmlformats.org/presentationml/2006/main">
+  <p:cSld>
+    <p:spTree>
+      <p:nvGrpSpPr>
+        <p:cNvPr id="1" name="Shape 96">
+          <a:extLst>
+            <a:ext uri="{FF2B5EF4-FFF2-40B4-BE49-F238E27FC236}">
               <a16:creationId xmlns:a16="http://schemas.microsoft.com/office/drawing/2014/main" id="{58591AA8-42F7-EE19-158B-583ADC6FE07C}"/>
             </a:ext>
           </a:extLst>
@@ -18522,7 +19860,7 @@
                 <a:cs typeface="Calibri"/>
                 <a:sym typeface="Calibri"/>
               </a:rPr>
-              <a:t>10</a:t>
+              <a:t>12</a:t>
             </a:fld>
             <a:endParaRPr sz="1200" b="0" i="0" u="none" strike="noStrike" cap="none" dirty="0">
               <a:solidFill>
@@ -19045,7 +20383,7 @@
 </p:sld>
 </file>
 
-<file path=ppt/slides/slide11.xml><?xml version="1.0" encoding="utf-8"?>
+<file path=ppt/slides/slide13.xml><?xml version="1.0" encoding="utf-8"?>
 <p:sld xmlns:a="http://schemas.openxmlformats.org/drawingml/2006/main" xmlns:r="http://schemas.openxmlformats.org/officeDocument/2006/relationships" xmlns:p="http://schemas.openxmlformats.org/presentationml/2006/main">
   <p:cSld>
     <p:spTree>
@@ -19122,7 +20460,7 @@
                 <a:cs typeface="Calibri"/>
                 <a:sym typeface="Calibri"/>
               </a:rPr>
-              <a:t>11</a:t>
+              <a:t>13</a:t>
             </a:fld>
             <a:endParaRPr sz="1200" b="0" i="0" u="none" strike="noStrike" cap="none" dirty="0">
               <a:solidFill>
@@ -19718,7 +21056,7 @@
 </p:sld>
 </file>
 
-<file path=ppt/slides/slide12.xml><?xml version="1.0" encoding="utf-8"?>
+<file path=ppt/slides/slide14.xml><?xml version="1.0" encoding="utf-8"?>
 <p:sld xmlns:a="http://schemas.openxmlformats.org/drawingml/2006/main" xmlns:r="http://schemas.openxmlformats.org/officeDocument/2006/relationships" xmlns:p="http://schemas.openxmlformats.org/presentationml/2006/main">
   <p:cSld>
     <p:spTree>
@@ -19795,7 +21133,7 @@
                 <a:cs typeface="Calibri"/>
                 <a:sym typeface="Calibri"/>
               </a:rPr>
-              <a:t>12</a:t>
+              <a:t>14</a:t>
             </a:fld>
             <a:endParaRPr sz="1200" b="0" i="0" u="none" strike="noStrike" cap="none" dirty="0">
               <a:solidFill>
@@ -20006,7 +21344,7 @@
 </p:sld>
 </file>
 
-<file path=ppt/slides/slide13.xml><?xml version="1.0" encoding="utf-8"?>
+<file path=ppt/slides/slide15.xml><?xml version="1.0" encoding="utf-8"?>
 <p:sld xmlns:a="http://schemas.openxmlformats.org/drawingml/2006/main" xmlns:r="http://schemas.openxmlformats.org/officeDocument/2006/relationships" xmlns:p="http://schemas.openxmlformats.org/presentationml/2006/main">
   <p:cSld>
     <p:spTree>
@@ -20083,7 +21421,7 @@
                 <a:cs typeface="Calibri"/>
                 <a:sym typeface="Calibri"/>
               </a:rPr>
-              <a:t>13</a:t>
+              <a:t>15</a:t>
             </a:fld>
             <a:endParaRPr sz="1200" b="0" i="0" u="none" strike="noStrike" cap="none" dirty="0">
               <a:solidFill>
@@ -20233,7 +21571,7 @@
                 <a:ea typeface="標楷體" panose="03000509000000000000" pitchFamily="65" charset="-120"/>
                 <a:cs typeface="Times New Roman" panose="02020603050405020304" pitchFamily="18" charset="0"/>
               </a:rPr>
-              <a:t>Testing and Iteration</a:t>
+              <a:t>Iteration</a:t>
             </a:r>
             <a:endParaRPr dirty="0">
               <a:latin typeface="Times New Roman" panose="02020603050405020304" pitchFamily="18" charset="0"/>
@@ -20522,7 +21860,7 @@
             </a:lvl9pPr>
           </a:lstStyle>
           <a:p>
-            <a:pPr marL="25400" indent="0">
+            <a:pPr marL="25400" indent="0" algn="just">
               <a:buNone/>
               <a:defRPr/>
             </a:pPr>
@@ -20537,7 +21875,7 @@
             </a:r>
           </a:p>
           <a:p>
-            <a:pPr marL="25400" indent="0">
+            <a:pPr marL="25400" indent="0" algn="just">
               <a:buNone/>
               <a:defRPr/>
             </a:pPr>
@@ -20575,7 +21913,7 @@
                 </a:solidFill>
                 <a:ea typeface="標楷體" panose="03000509000000000000" pitchFamily="65" charset="-120"/>
               </a:rPr>
-              <a:t>不是寫完就丟著的死程式碼，而是會隨時間進化的活文件 </a:t>
+              <a:t>不是寫完就丟的資料，而是會隨時間進化的活文件 </a:t>
             </a:r>
             <a:r>
               <a:rPr lang="en-US" altLang="zh-TW" sz="2800" dirty="0">
@@ -20803,7 +22141,7 @@
 </p:sld>
 </file>
 
-<file path=ppt/slides/slide14.xml><?xml version="1.0" encoding="utf-8"?>
+<file path=ppt/slides/slide16.xml><?xml version="1.0" encoding="utf-8"?>
 <p:sld xmlns:a="http://schemas.openxmlformats.org/drawingml/2006/main" xmlns:r="http://schemas.openxmlformats.org/officeDocument/2006/relationships" xmlns:p="http://schemas.openxmlformats.org/presentationml/2006/main">
   <p:cSld>
     <p:spTree>
@@ -20880,7 +22218,7 @@
                 <a:cs typeface="Calibri"/>
                 <a:sym typeface="Calibri"/>
               </a:rPr>
-              <a:t>14</a:t>
+              <a:t>16</a:t>
             </a:fld>
             <a:endParaRPr sz="1200" b="0" i="0" u="none" strike="noStrike" cap="none" dirty="0">
               <a:solidFill>
@@ -20991,57 +22329,6 @@
       </p:sp>
       <p:sp>
         <p:nvSpPr>
-          <p:cNvPr id="100" name="Google Shape;100;p2">
-            <a:extLst>
-              <a:ext uri="{FF2B5EF4-FFF2-40B4-BE49-F238E27FC236}">
-                <a16:creationId xmlns:a16="http://schemas.microsoft.com/office/drawing/2014/main" id="{C0711DE1-0B4D-9ACE-4845-ACF6C9359491}"/>
-              </a:ext>
-            </a:extLst>
-          </p:cNvPr>
-          <p:cNvSpPr txBox="1">
-            <a:spLocks noGrp="1"/>
-          </p:cNvSpPr>
-          <p:nvPr>
-            <p:ph type="title"/>
-          </p:nvPr>
-        </p:nvSpPr>
-        <p:spPr>
-          <a:xfrm>
-            <a:off x="609600" y="274638"/>
-            <a:ext cx="10972800" cy="1143000"/>
-          </a:xfrm>
-          <a:prstGeom prst="rect">
-            <a:avLst/>
-          </a:prstGeom>
-          <a:noFill/>
-          <a:ln>
-            <a:noFill/>
-          </a:ln>
-        </p:spPr>
-        <p:txBody>
-          <a:bodyPr spcFirstLastPara="1" wrap="square" lIns="91425" tIns="45700" rIns="91425" bIns="45700" anchor="ctr" anchorCtr="0">
-            <a:noAutofit/>
-          </a:bodyPr>
-          <a:lstStyle/>
-          <a:p>
-            <a:r>
-              <a:rPr lang="en-US" altLang="zh-TW" dirty="0">
-                <a:latin typeface="Times New Roman" panose="02020603050405020304" pitchFamily="18" charset="0"/>
-                <a:ea typeface="標楷體" panose="03000509000000000000" pitchFamily="65" charset="-120"/>
-                <a:cs typeface="Times New Roman" panose="02020603050405020304" pitchFamily="18" charset="0"/>
-              </a:rPr>
-              <a:t>Testing and Iteration</a:t>
-            </a:r>
-            <a:endParaRPr dirty="0">
-              <a:latin typeface="Times New Roman" panose="02020603050405020304" pitchFamily="18" charset="0"/>
-              <a:ea typeface="標楷體" panose="03000509000000000000" pitchFamily="65" charset="-120"/>
-              <a:cs typeface="Times New Roman" panose="02020603050405020304" pitchFamily="18" charset="0"/>
-            </a:endParaRPr>
-          </a:p>
-        </p:txBody>
-      </p:sp>
-      <p:sp>
-        <p:nvSpPr>
           <p:cNvPr id="2" name="內容版面配置區 8">
             <a:extLst>
               <a:ext uri="{FF2B5EF4-FFF2-40B4-BE49-F238E27FC236}">
@@ -21667,6 +22954,57 @@
           </a:p>
         </p:txBody>
       </p:sp>
+      <p:sp>
+        <p:nvSpPr>
+          <p:cNvPr id="6" name="Google Shape;100;p2">
+            <a:extLst>
+              <a:ext uri="{FF2B5EF4-FFF2-40B4-BE49-F238E27FC236}">
+                <a16:creationId xmlns:a16="http://schemas.microsoft.com/office/drawing/2014/main" id="{33E267E5-E908-C4CC-4187-81708F7188E0}"/>
+              </a:ext>
+            </a:extLst>
+          </p:cNvPr>
+          <p:cNvSpPr txBox="1">
+            <a:spLocks noGrp="1"/>
+          </p:cNvSpPr>
+          <p:nvPr>
+            <p:ph type="title"/>
+          </p:nvPr>
+        </p:nvSpPr>
+        <p:spPr>
+          <a:xfrm>
+            <a:off x="609600" y="274638"/>
+            <a:ext cx="10972800" cy="1143000"/>
+          </a:xfrm>
+          <a:prstGeom prst="rect">
+            <a:avLst/>
+          </a:prstGeom>
+          <a:noFill/>
+          <a:ln>
+            <a:noFill/>
+          </a:ln>
+        </p:spPr>
+        <p:txBody>
+          <a:bodyPr spcFirstLastPara="1" wrap="square" lIns="91425" tIns="45700" rIns="91425" bIns="45700" anchor="ctr" anchorCtr="0">
+            <a:noAutofit/>
+          </a:bodyPr>
+          <a:lstStyle/>
+          <a:p>
+            <a:r>
+              <a:rPr lang="en-US" altLang="zh-TW" dirty="0">
+                <a:latin typeface="Times New Roman" panose="02020603050405020304" pitchFamily="18" charset="0"/>
+                <a:ea typeface="標楷體" panose="03000509000000000000" pitchFamily="65" charset="-120"/>
+                <a:cs typeface="Times New Roman" panose="02020603050405020304" pitchFamily="18" charset="0"/>
+              </a:rPr>
+              <a:t>Iteration</a:t>
+            </a:r>
+            <a:endParaRPr dirty="0">
+              <a:latin typeface="Times New Roman" panose="02020603050405020304" pitchFamily="18" charset="0"/>
+              <a:ea typeface="標楷體" panose="03000509000000000000" pitchFamily="65" charset="-120"/>
+              <a:cs typeface="Times New Roman" panose="02020603050405020304" pitchFamily="18" charset="0"/>
+            </a:endParaRPr>
+          </a:p>
+        </p:txBody>
+      </p:sp>
     </p:spTree>
     <p:extLst>
       <p:ext uri="{BB962C8B-B14F-4D97-AF65-F5344CB8AC3E}">
@@ -21680,7 +23018,7 @@
 </p:sld>
 </file>
 
-<file path=ppt/slides/slide15.xml><?xml version="1.0" encoding="utf-8"?>
+<file path=ppt/slides/slide17.xml><?xml version="1.0" encoding="utf-8"?>
 <p:sld xmlns:a="http://schemas.openxmlformats.org/drawingml/2006/main" xmlns:r="http://schemas.openxmlformats.org/officeDocument/2006/relationships" xmlns:p="http://schemas.openxmlformats.org/presentationml/2006/main">
   <p:cSld>
     <p:spTree>
@@ -21757,7 +23095,7 @@
                 <a:cs typeface="Calibri"/>
                 <a:sym typeface="Calibri"/>
               </a:rPr>
-              <a:t>15</a:t>
+              <a:t>17</a:t>
             </a:fld>
             <a:endParaRPr sz="1200" b="0" i="0" u="none" strike="noStrike" cap="none" dirty="0">
               <a:solidFill>
@@ -21868,57 +23206,6 @@
       </p:sp>
       <p:sp>
         <p:nvSpPr>
-          <p:cNvPr id="100" name="Google Shape;100;p2">
-            <a:extLst>
-              <a:ext uri="{FF2B5EF4-FFF2-40B4-BE49-F238E27FC236}">
-                <a16:creationId xmlns:a16="http://schemas.microsoft.com/office/drawing/2014/main" id="{42B10D96-B603-9A66-1C1C-13AD3CF4D48E}"/>
-              </a:ext>
-            </a:extLst>
-          </p:cNvPr>
-          <p:cNvSpPr txBox="1">
-            <a:spLocks noGrp="1"/>
-          </p:cNvSpPr>
-          <p:nvPr>
-            <p:ph type="title"/>
-          </p:nvPr>
-        </p:nvSpPr>
-        <p:spPr>
-          <a:xfrm>
-            <a:off x="609600" y="274638"/>
-            <a:ext cx="10972800" cy="1143000"/>
-          </a:xfrm>
-          <a:prstGeom prst="rect">
-            <a:avLst/>
-          </a:prstGeom>
-          <a:noFill/>
-          <a:ln>
-            <a:noFill/>
-          </a:ln>
-        </p:spPr>
-        <p:txBody>
-          <a:bodyPr spcFirstLastPara="1" wrap="square" lIns="91425" tIns="45700" rIns="91425" bIns="45700" anchor="ctr" anchorCtr="0">
-            <a:noAutofit/>
-          </a:bodyPr>
-          <a:lstStyle/>
-          <a:p>
-            <a:r>
-              <a:rPr lang="en-US" altLang="zh-TW" dirty="0">
-                <a:latin typeface="Times New Roman" panose="02020603050405020304" pitchFamily="18" charset="0"/>
-                <a:ea typeface="標楷體" panose="03000509000000000000" pitchFamily="65" charset="-120"/>
-                <a:cs typeface="Times New Roman" panose="02020603050405020304" pitchFamily="18" charset="0"/>
-              </a:rPr>
-              <a:t>Testing and Iteration</a:t>
-            </a:r>
-            <a:endParaRPr dirty="0">
-              <a:latin typeface="Times New Roman" panose="02020603050405020304" pitchFamily="18" charset="0"/>
-              <a:ea typeface="標楷體" panose="03000509000000000000" pitchFamily="65" charset="-120"/>
-              <a:cs typeface="Times New Roman" panose="02020603050405020304" pitchFamily="18" charset="0"/>
-            </a:endParaRPr>
-          </a:p>
-        </p:txBody>
-      </p:sp>
-      <p:sp>
-        <p:nvSpPr>
           <p:cNvPr id="2" name="內容版面配置區 8">
             <a:extLst>
               <a:ext uri="{FF2B5EF4-FFF2-40B4-BE49-F238E27FC236}">
@@ -22407,6 +23694,57 @@
           </a:p>
         </p:txBody>
       </p:sp>
+      <p:sp>
+        <p:nvSpPr>
+          <p:cNvPr id="5" name="Google Shape;100;p2">
+            <a:extLst>
+              <a:ext uri="{FF2B5EF4-FFF2-40B4-BE49-F238E27FC236}">
+                <a16:creationId xmlns:a16="http://schemas.microsoft.com/office/drawing/2014/main" id="{8DC9970A-AE2C-C591-6EB6-C8654F0DBFB5}"/>
+              </a:ext>
+            </a:extLst>
+          </p:cNvPr>
+          <p:cNvSpPr txBox="1">
+            <a:spLocks noGrp="1"/>
+          </p:cNvSpPr>
+          <p:nvPr>
+            <p:ph type="title"/>
+          </p:nvPr>
+        </p:nvSpPr>
+        <p:spPr>
+          <a:xfrm>
+            <a:off x="609600" y="274638"/>
+            <a:ext cx="10972800" cy="1143000"/>
+          </a:xfrm>
+          <a:prstGeom prst="rect">
+            <a:avLst/>
+          </a:prstGeom>
+          <a:noFill/>
+          <a:ln>
+            <a:noFill/>
+          </a:ln>
+        </p:spPr>
+        <p:txBody>
+          <a:bodyPr spcFirstLastPara="1" wrap="square" lIns="91425" tIns="45700" rIns="91425" bIns="45700" anchor="ctr" anchorCtr="0">
+            <a:noAutofit/>
+          </a:bodyPr>
+          <a:lstStyle/>
+          <a:p>
+            <a:r>
+              <a:rPr lang="en-US" altLang="zh-TW" dirty="0">
+                <a:latin typeface="Times New Roman" panose="02020603050405020304" pitchFamily="18" charset="0"/>
+                <a:ea typeface="標楷體" panose="03000509000000000000" pitchFamily="65" charset="-120"/>
+                <a:cs typeface="Times New Roman" panose="02020603050405020304" pitchFamily="18" charset="0"/>
+              </a:rPr>
+              <a:t>Iteration</a:t>
+            </a:r>
+            <a:endParaRPr dirty="0">
+              <a:latin typeface="Times New Roman" panose="02020603050405020304" pitchFamily="18" charset="0"/>
+              <a:ea typeface="標楷體" panose="03000509000000000000" pitchFamily="65" charset="-120"/>
+              <a:cs typeface="Times New Roman" panose="02020603050405020304" pitchFamily="18" charset="0"/>
+            </a:endParaRPr>
+          </a:p>
+        </p:txBody>
+      </p:sp>
     </p:spTree>
     <p:extLst>
       <p:ext uri="{BB962C8B-B14F-4D97-AF65-F5344CB8AC3E}">
@@ -22420,7 +23758,7 @@
 </p:sld>
 </file>
 
-<file path=ppt/slides/slide16.xml><?xml version="1.0" encoding="utf-8"?>
+<file path=ppt/slides/slide18.xml><?xml version="1.0" encoding="utf-8"?>
 <p:sld xmlns:a="http://schemas.openxmlformats.org/drawingml/2006/main" xmlns:r="http://schemas.openxmlformats.org/officeDocument/2006/relationships" xmlns:p="http://schemas.openxmlformats.org/presentationml/2006/main">
   <p:cSld>
     <p:spTree>
@@ -22497,7 +23835,7 @@
                 <a:cs typeface="Calibri"/>
                 <a:sym typeface="Calibri"/>
               </a:rPr>
-              <a:t>16</a:t>
+              <a:t>18</a:t>
             </a:fld>
             <a:endParaRPr sz="1200" b="0" i="0" u="none" strike="noStrike" cap="none" dirty="0">
               <a:solidFill>
@@ -22608,57 +23946,6 @@
       </p:sp>
       <p:sp>
         <p:nvSpPr>
-          <p:cNvPr id="100" name="Google Shape;100;p2">
-            <a:extLst>
-              <a:ext uri="{FF2B5EF4-FFF2-40B4-BE49-F238E27FC236}">
-                <a16:creationId xmlns:a16="http://schemas.microsoft.com/office/drawing/2014/main" id="{094BE0F1-35A6-BE38-2D6D-B9521CCA93AF}"/>
-              </a:ext>
-            </a:extLst>
-          </p:cNvPr>
-          <p:cNvSpPr txBox="1">
-            <a:spLocks noGrp="1"/>
-          </p:cNvSpPr>
-          <p:nvPr>
-            <p:ph type="title"/>
-          </p:nvPr>
-        </p:nvSpPr>
-        <p:spPr>
-          <a:xfrm>
-            <a:off x="609600" y="274638"/>
-            <a:ext cx="10972800" cy="1143000"/>
-          </a:xfrm>
-          <a:prstGeom prst="rect">
-            <a:avLst/>
-          </a:prstGeom>
-          <a:noFill/>
-          <a:ln>
-            <a:noFill/>
-          </a:ln>
-        </p:spPr>
-        <p:txBody>
-          <a:bodyPr spcFirstLastPara="1" wrap="square" lIns="91425" tIns="45700" rIns="91425" bIns="45700" anchor="ctr" anchorCtr="0">
-            <a:noAutofit/>
-          </a:bodyPr>
-          <a:lstStyle/>
-          <a:p>
-            <a:r>
-              <a:rPr lang="en-US" altLang="zh-TW" dirty="0">
-                <a:latin typeface="Times New Roman" panose="02020603050405020304" pitchFamily="18" charset="0"/>
-                <a:ea typeface="標楷體" panose="03000509000000000000" pitchFamily="65" charset="-120"/>
-                <a:cs typeface="Times New Roman" panose="02020603050405020304" pitchFamily="18" charset="0"/>
-              </a:rPr>
-              <a:t>Testing and Iteration</a:t>
-            </a:r>
-            <a:endParaRPr dirty="0">
-              <a:latin typeface="Times New Roman" panose="02020603050405020304" pitchFamily="18" charset="0"/>
-              <a:ea typeface="標楷體" panose="03000509000000000000" pitchFamily="65" charset="-120"/>
-              <a:cs typeface="Times New Roman" panose="02020603050405020304" pitchFamily="18" charset="0"/>
-            </a:endParaRPr>
-          </a:p>
-        </p:txBody>
-      </p:sp>
-      <p:sp>
-        <p:nvSpPr>
           <p:cNvPr id="2" name="內容版面配置區 8">
             <a:extLst>
               <a:ext uri="{FF2B5EF4-FFF2-40B4-BE49-F238E27FC236}">
@@ -23083,7 +24370,7 @@
                 </a:solidFill>
                 <a:ea typeface="標楷體" panose="03000509000000000000" pitchFamily="65" charset="-120"/>
               </a:rPr>
-              <a:t>。需要把語句寫得更強烈、提供防呆條件，或加入錯誤處理 </a:t>
+              <a:t>。可以把語句寫得更強烈、提供防呆條件，或加入錯誤處理 </a:t>
             </a:r>
             <a:r>
               <a:rPr lang="en-US" altLang="zh-TW" sz="2800" dirty="0">
@@ -23257,6 +24544,57 @@
                 <a:schemeClr val="tx1"/>
               </a:solidFill>
               <a:ea typeface="標楷體" panose="03000509000000000000" pitchFamily="65" charset="-120"/>
+            </a:endParaRPr>
+          </a:p>
+        </p:txBody>
+      </p:sp>
+      <p:sp>
+        <p:nvSpPr>
+          <p:cNvPr id="5" name="Google Shape;100;p2">
+            <a:extLst>
+              <a:ext uri="{FF2B5EF4-FFF2-40B4-BE49-F238E27FC236}">
+                <a16:creationId xmlns:a16="http://schemas.microsoft.com/office/drawing/2014/main" id="{82D4AC8F-581E-382E-E728-BB4DA9BABCD0}"/>
+              </a:ext>
+            </a:extLst>
+          </p:cNvPr>
+          <p:cNvSpPr txBox="1">
+            <a:spLocks noGrp="1"/>
+          </p:cNvSpPr>
+          <p:nvPr>
+            <p:ph type="title"/>
+          </p:nvPr>
+        </p:nvSpPr>
+        <p:spPr>
+          <a:xfrm>
+            <a:off x="609600" y="274638"/>
+            <a:ext cx="10972800" cy="1143000"/>
+          </a:xfrm>
+          <a:prstGeom prst="rect">
+            <a:avLst/>
+          </a:prstGeom>
+          <a:noFill/>
+          <a:ln>
+            <a:noFill/>
+          </a:ln>
+        </p:spPr>
+        <p:txBody>
+          <a:bodyPr spcFirstLastPara="1" wrap="square" lIns="91425" tIns="45700" rIns="91425" bIns="45700" anchor="ctr" anchorCtr="0">
+            <a:noAutofit/>
+          </a:bodyPr>
+          <a:lstStyle/>
+          <a:p>
+            <a:r>
+              <a:rPr lang="en-US" altLang="zh-TW" dirty="0">
+                <a:latin typeface="Times New Roman" panose="02020603050405020304" pitchFamily="18" charset="0"/>
+                <a:ea typeface="標楷體" panose="03000509000000000000" pitchFamily="65" charset="-120"/>
+                <a:cs typeface="Times New Roman" panose="02020603050405020304" pitchFamily="18" charset="0"/>
+              </a:rPr>
+              <a:t>Iteration</a:t>
+            </a:r>
+            <a:endParaRPr dirty="0">
+              <a:latin typeface="Times New Roman" panose="02020603050405020304" pitchFamily="18" charset="0"/>
+              <a:ea typeface="標楷體" panose="03000509000000000000" pitchFamily="65" charset="-120"/>
+              <a:cs typeface="Times New Roman" panose="02020603050405020304" pitchFamily="18" charset="0"/>
             </a:endParaRPr>
           </a:p>
         </p:txBody>
@@ -23274,7 +24612,7 @@
 </p:sld>
 </file>
 
-<file path=ppt/slides/slide17.xml><?xml version="1.0" encoding="utf-8"?>
+<file path=ppt/slides/slide19.xml><?xml version="1.0" encoding="utf-8"?>
 <p:sld xmlns:a="http://schemas.openxmlformats.org/drawingml/2006/main" xmlns:r="http://schemas.openxmlformats.org/officeDocument/2006/relationships" xmlns:p="http://schemas.openxmlformats.org/presentationml/2006/main">
   <p:cSld>
     <p:spTree>
@@ -23351,7 +24689,7 @@
                 <a:cs typeface="Calibri"/>
                 <a:sym typeface="Calibri"/>
               </a:rPr>
-              <a:t>17</a:t>
+              <a:t>19</a:t>
             </a:fld>
             <a:endParaRPr sz="1200" b="0" i="0" u="none" strike="noStrike" cap="none" dirty="0">
               <a:solidFill>
@@ -23826,7 +25164,16 @@
                 </a:solidFill>
                 <a:ea typeface="標楷體" panose="03000509000000000000" pitchFamily="65" charset="-120"/>
               </a:rPr>
-              <a:t>三層漸進式揭露：平衡</a:t>
+              <a:t>三層漸進式揭露：JIT</a:t>
+            </a:r>
+            <a:r>
+              <a:rPr lang="zh-TW" altLang="en-US" dirty="0">
+                <a:solidFill>
+                  <a:schemeClr val="tx1"/>
+                </a:solidFill>
+                <a:ea typeface="標楷體" panose="03000509000000000000" pitchFamily="65" charset="-120"/>
+              </a:rPr>
+              <a:t>機制減少</a:t>
             </a:r>
             <a:r>
               <a:rPr lang="en-US" altLang="zh-TW" dirty="0">
@@ -23835,16 +25182,25 @@
                 </a:solidFill>
                 <a:ea typeface="標楷體" panose="03000509000000000000" pitchFamily="65" charset="-120"/>
               </a:rPr>
-              <a:t> Token </a:t>
-            </a:r>
-            <a:r>
-              <a:rPr lang="en-US" altLang="zh-TW" dirty="0" err="1">
+              <a:t>Token</a:t>
+            </a:r>
+            <a:r>
+              <a:rPr lang="zh-TW" altLang="en-US" dirty="0">
                 <a:solidFill>
                   <a:schemeClr val="tx1"/>
                 </a:solidFill>
                 <a:ea typeface="標楷體" panose="03000509000000000000" pitchFamily="65" charset="-120"/>
               </a:rPr>
-              <a:t>效率與</a:t>
+              <a:t>消耗</a:t>
+            </a:r>
+            <a:r>
+              <a:rPr lang="en-US" altLang="zh-TW" dirty="0">
+                <a:solidFill>
+                  <a:schemeClr val="tx1"/>
+                </a:solidFill>
+                <a:ea typeface="標楷體" panose="03000509000000000000" pitchFamily="65" charset="-120"/>
+              </a:rPr>
+              <a:t>與</a:t>
             </a:r>
             <a:r>
               <a:rPr lang="zh-TW" altLang="en-US" dirty="0">
@@ -24065,643 +25421,6 @@
         <p14:creationId xmlns:p14="http://schemas.microsoft.com/office/powerpoint/2010/main" val="739506005"/>
       </p:ext>
     </p:extLst>
-  </p:cSld>
-  <p:clrMapOvr>
-    <a:masterClrMapping/>
-  </p:clrMapOvr>
-</p:sld>
-</file>
-
-<file path=ppt/slides/slide18.xml><?xml version="1.0" encoding="utf-8"?>
-<p:sld xmlns:a="http://schemas.openxmlformats.org/drawingml/2006/main" xmlns:r="http://schemas.openxmlformats.org/officeDocument/2006/relationships" xmlns:p="http://schemas.openxmlformats.org/presentationml/2006/main">
-  <p:cSld>
-    <p:spTree>
-      <p:nvGrpSpPr>
-        <p:cNvPr id="1" name="Shape 221"/>
-        <p:cNvGrpSpPr/>
-        <p:nvPr/>
-      </p:nvGrpSpPr>
-      <p:grpSpPr>
-        <a:xfrm>
-          <a:off x="0" y="0"/>
-          <a:ext cx="0" cy="0"/>
-          <a:chOff x="0" y="0"/>
-          <a:chExt cx="0" cy="0"/>
-        </a:xfrm>
-      </p:grpSpPr>
-      <p:sp>
-        <p:nvSpPr>
-          <p:cNvPr id="222" name="Google Shape;222;p15"/>
-          <p:cNvSpPr txBox="1">
-            <a:spLocks noGrp="1"/>
-          </p:cNvSpPr>
-          <p:nvPr>
-            <p:ph type="dt" idx="10"/>
-          </p:nvPr>
-        </p:nvSpPr>
-        <p:spPr>
-          <a:xfrm>
-            <a:off x="609600" y="6356351"/>
-            <a:ext cx="2844800" cy="365125"/>
-          </a:xfrm>
-          <a:prstGeom prst="rect">
-            <a:avLst/>
-          </a:prstGeom>
-          <a:noFill/>
-          <a:ln>
-            <a:noFill/>
-          </a:ln>
-        </p:spPr>
-        <p:txBody>
-          <a:bodyPr spcFirstLastPara="1" wrap="square" lIns="91425" tIns="45700" rIns="91425" bIns="45700" anchor="ctr" anchorCtr="0">
-            <a:noAutofit/>
-          </a:bodyPr>
-          <a:lstStyle/>
-          <a:p>
-            <a:pPr marL="0" lvl="0" indent="0" algn="l" rtl="0">
-              <a:spcBef>
-                <a:spcPts val="0"/>
-              </a:spcBef>
-              <a:spcAft>
-                <a:spcPts val="0"/>
-              </a:spcAft>
-              <a:buNone/>
-            </a:pPr>
-            <a:r>
-              <a:rPr lang="en-US" dirty="0"/>
-              <a:t>2025/11/25</a:t>
-            </a:r>
-            <a:endParaRPr dirty="0"/>
-          </a:p>
-        </p:txBody>
-      </p:sp>
-      <p:sp>
-        <p:nvSpPr>
-          <p:cNvPr id="223" name="Google Shape;223;p15"/>
-          <p:cNvSpPr txBox="1">
-            <a:spLocks noGrp="1"/>
-          </p:cNvSpPr>
-          <p:nvPr>
-            <p:ph type="ftr" idx="11"/>
-          </p:nvPr>
-        </p:nvSpPr>
-        <p:spPr>
-          <a:xfrm>
-            <a:off x="4165600" y="6356351"/>
-            <a:ext cx="3860800" cy="365125"/>
-          </a:xfrm>
-          <a:prstGeom prst="rect">
-            <a:avLst/>
-          </a:prstGeom>
-          <a:noFill/>
-          <a:ln>
-            <a:noFill/>
-          </a:ln>
-        </p:spPr>
-        <p:txBody>
-          <a:bodyPr spcFirstLastPara="1" wrap="square" lIns="91425" tIns="45700" rIns="91425" bIns="45700" anchor="ctr" anchorCtr="0">
-            <a:noAutofit/>
-          </a:bodyPr>
-          <a:lstStyle/>
-          <a:p>
-            <a:pPr marL="0" lvl="0" indent="0" algn="ctr" rtl="0">
-              <a:spcBef>
-                <a:spcPts val="0"/>
-              </a:spcBef>
-              <a:spcAft>
-                <a:spcPts val="0"/>
-              </a:spcAft>
-              <a:buNone/>
-            </a:pPr>
-            <a:r>
-              <a:rPr lang="en-US"/>
-              <a:t>軟體系統實驗室</a:t>
-            </a:r>
-            <a:endParaRPr/>
-          </a:p>
-        </p:txBody>
-      </p:sp>
-      <p:sp>
-        <p:nvSpPr>
-          <p:cNvPr id="224" name="Google Shape;224;p15"/>
-          <p:cNvSpPr txBox="1">
-            <a:spLocks noGrp="1"/>
-          </p:cNvSpPr>
-          <p:nvPr>
-            <p:ph type="sldNum" idx="12"/>
-          </p:nvPr>
-        </p:nvSpPr>
-        <p:spPr>
-          <a:xfrm>
-            <a:off x="8737600" y="6356351"/>
-            <a:ext cx="2844800" cy="365125"/>
-          </a:xfrm>
-          <a:prstGeom prst="rect">
-            <a:avLst/>
-          </a:prstGeom>
-          <a:noFill/>
-          <a:ln>
-            <a:noFill/>
-          </a:ln>
-        </p:spPr>
-        <p:txBody>
-          <a:bodyPr spcFirstLastPara="1" wrap="square" lIns="91425" tIns="45700" rIns="91425" bIns="45700" anchor="ctr" anchorCtr="0">
-            <a:noAutofit/>
-          </a:bodyPr>
-          <a:lstStyle/>
-          <a:p>
-            <a:pPr marL="0" lvl="0" indent="0" algn="r" rtl="0">
-              <a:spcBef>
-                <a:spcPts val="0"/>
-              </a:spcBef>
-              <a:spcAft>
-                <a:spcPts val="0"/>
-              </a:spcAft>
-              <a:buNone/>
-            </a:pPr>
-            <a:fld id="{00000000-1234-1234-1234-123412341234}" type="slidenum">
-              <a:rPr lang="en-US"/>
-              <a:t>18</a:t>
-            </a:fld>
-            <a:endParaRPr/>
-          </a:p>
-        </p:txBody>
-      </p:sp>
-      <p:sp>
-        <p:nvSpPr>
-          <p:cNvPr id="225" name="Google Shape;225;p15"/>
-          <p:cNvSpPr txBox="1">
-            <a:spLocks noGrp="1"/>
-          </p:cNvSpPr>
-          <p:nvPr>
-            <p:ph type="title"/>
-          </p:nvPr>
-        </p:nvSpPr>
-        <p:spPr>
-          <a:xfrm>
-            <a:off x="609600" y="274638"/>
-            <a:ext cx="10972800" cy="1143000"/>
-          </a:xfrm>
-          <a:prstGeom prst="rect">
-            <a:avLst/>
-          </a:prstGeom>
-          <a:noFill/>
-          <a:ln>
-            <a:noFill/>
-          </a:ln>
-        </p:spPr>
-        <p:txBody>
-          <a:bodyPr spcFirstLastPara="1" wrap="square" lIns="91425" tIns="45700" rIns="91425" bIns="45700" anchor="ctr" anchorCtr="0">
-            <a:noAutofit/>
-          </a:bodyPr>
-          <a:lstStyle/>
-          <a:p>
-            <a:pPr marL="0" lvl="0" indent="0" algn="ctr" rtl="0">
-              <a:spcBef>
-                <a:spcPts val="0"/>
-              </a:spcBef>
-              <a:spcAft>
-                <a:spcPts val="0"/>
-              </a:spcAft>
-              <a:buNone/>
-            </a:pPr>
-            <a:r>
-              <a:rPr lang="en-US" dirty="0">
-                <a:latin typeface="Times New Roman" panose="02020603050405020304" pitchFamily="18" charset="0"/>
-                <a:cs typeface="Times New Roman" panose="02020603050405020304" pitchFamily="18" charset="0"/>
-              </a:rPr>
-              <a:t>Reference</a:t>
-            </a:r>
-            <a:endParaRPr dirty="0">
-              <a:latin typeface="Times New Roman" panose="02020603050405020304" pitchFamily="18" charset="0"/>
-              <a:cs typeface="Times New Roman" panose="02020603050405020304" pitchFamily="18" charset="0"/>
-            </a:endParaRPr>
-          </a:p>
-        </p:txBody>
-      </p:sp>
-      <p:sp>
-        <p:nvSpPr>
-          <p:cNvPr id="226" name="Google Shape;226;p15"/>
-          <p:cNvSpPr txBox="1">
-            <a:spLocks noGrp="1"/>
-          </p:cNvSpPr>
-          <p:nvPr>
-            <p:ph type="body" idx="1"/>
-          </p:nvPr>
-        </p:nvSpPr>
-        <p:spPr>
-          <a:xfrm>
-            <a:off x="737327" y="1557745"/>
-            <a:ext cx="10717345" cy="2736304"/>
-          </a:xfrm>
-          <a:prstGeom prst="rect">
-            <a:avLst/>
-          </a:prstGeom>
-          <a:noFill/>
-          <a:ln>
-            <a:noFill/>
-          </a:ln>
-        </p:spPr>
-        <p:txBody>
-          <a:bodyPr spcFirstLastPara="1" wrap="square" lIns="91425" tIns="45700" rIns="91425" bIns="45700" anchor="t" anchorCtr="0">
-            <a:noAutofit/>
-          </a:bodyPr>
-          <a:lstStyle/>
-          <a:p>
-            <a:r>
-              <a:rPr lang="en-US" altLang="zh-TW" dirty="0">
-                <a:ea typeface="標楷體" panose="03000509000000000000" pitchFamily="65" charset="-120"/>
-                <a:hlinkClick r:id="rId3"/>
-              </a:rPr>
-              <a:t>The Complete Guide to Building Skills for Claude</a:t>
-            </a:r>
-          </a:p>
-          <a:p>
-            <a:r>
-              <a:rPr lang="zh-TW" altLang="en-US" dirty="0">
-                <a:ea typeface="標楷體" panose="03000509000000000000" pitchFamily="65" charset="-120"/>
-                <a:hlinkClick r:id="rId4"/>
-              </a:rPr>
-              <a:t>什麼是 </a:t>
-            </a:r>
-            <a:r>
-              <a:rPr lang="en-US" altLang="zh-TW" dirty="0">
-                <a:ea typeface="標楷體" panose="03000509000000000000" pitchFamily="65" charset="-120"/>
-                <a:hlinkClick r:id="rId4"/>
-              </a:rPr>
-              <a:t>ETL</a:t>
-            </a:r>
-            <a:r>
-              <a:rPr lang="zh-TW" altLang="en-US" dirty="0">
-                <a:ea typeface="標楷體" panose="03000509000000000000" pitchFamily="65" charset="-120"/>
-                <a:hlinkClick r:id="rId4"/>
-              </a:rPr>
-              <a:t>？</a:t>
-            </a:r>
-            <a:endParaRPr lang="zh-TW" altLang="en-US" dirty="0">
-              <a:ea typeface="標楷體" panose="03000509000000000000" pitchFamily="65" charset="-120"/>
-            </a:endParaRPr>
-          </a:p>
-          <a:p>
-            <a:r>
-              <a:rPr lang="en-US" altLang="zh-TW" dirty="0">
-                <a:ea typeface="標楷體" panose="03000509000000000000" pitchFamily="65" charset="-120"/>
-                <a:hlinkClick r:id="rId5"/>
-              </a:rPr>
-              <a:t>https://github.com/anthropics/skills</a:t>
-            </a:r>
-            <a:endParaRPr lang="en-US" altLang="zh-TW" u="sng" dirty="0">
-              <a:solidFill>
-                <a:schemeClr val="hlink"/>
-              </a:solidFill>
-              <a:ea typeface="標楷體" panose="03000509000000000000" pitchFamily="65" charset="-120"/>
-            </a:endParaRPr>
-          </a:p>
-          <a:p>
-            <a:r>
-              <a:rPr lang="en-US" altLang="zh-TW" dirty="0">
-                <a:ea typeface="標楷體" panose="03000509000000000000" pitchFamily="65" charset="-120"/>
-                <a:hlinkClick r:id="rId6"/>
-              </a:rPr>
-              <a:t>Claude API Docs -- Agent Skills</a:t>
-            </a:r>
-            <a:endParaRPr lang="en-US" altLang="zh-TW" dirty="0">
-              <a:ea typeface="標楷體" panose="03000509000000000000" pitchFamily="65" charset="-120"/>
-            </a:endParaRPr>
-          </a:p>
-          <a:p>
-            <a:pPr marL="342900" lvl="0" indent="-342900" algn="just" rtl="0">
-              <a:spcBef>
-                <a:spcPts val="640"/>
-              </a:spcBef>
-              <a:spcAft>
-                <a:spcPts val="0"/>
-              </a:spcAft>
-              <a:buClr>
-                <a:srgbClr val="0F243E"/>
-              </a:buClr>
-              <a:buSzPts val="3200"/>
-              <a:buChar char="•"/>
-            </a:pPr>
-            <a:endParaRPr lang="zh-TW" altLang="en-US" dirty="0"/>
-          </a:p>
-          <a:p>
-            <a:pPr marL="342900" lvl="0" indent="-139700" algn="just" rtl="0">
-              <a:spcBef>
-                <a:spcPts val="640"/>
-              </a:spcBef>
-              <a:spcAft>
-                <a:spcPts val="0"/>
-              </a:spcAft>
-              <a:buClr>
-                <a:srgbClr val="0F243E"/>
-              </a:buClr>
-              <a:buSzPts val="3200"/>
-              <a:buNone/>
-            </a:pPr>
-            <a:endParaRPr lang="zh-TW" altLang="en-US" i="0" dirty="0">
-              <a:solidFill>
-                <a:srgbClr val="000100"/>
-              </a:solidFill>
-              <a:latin typeface="Helvetica Neue"/>
-              <a:ea typeface="Helvetica Neue"/>
-              <a:cs typeface="Helvetica Neue"/>
-              <a:sym typeface="Helvetica Neue"/>
-            </a:endParaRPr>
-          </a:p>
-          <a:p>
-            <a:pPr marL="342900" lvl="0" indent="-139700" algn="l" rtl="0">
-              <a:spcBef>
-                <a:spcPts val="1050"/>
-              </a:spcBef>
-              <a:spcAft>
-                <a:spcPts val="0"/>
-              </a:spcAft>
-              <a:buClr>
-                <a:srgbClr val="0F243E"/>
-              </a:buClr>
-              <a:buSzPts val="3200"/>
-              <a:buNone/>
-            </a:pPr>
-            <a:endParaRPr lang="zh-TW" altLang="en-US" b="1" i="0" dirty="0">
-              <a:solidFill>
-                <a:srgbClr val="000100"/>
-              </a:solidFill>
-              <a:latin typeface="Helvetica Neue"/>
-              <a:ea typeface="Helvetica Neue"/>
-              <a:cs typeface="Helvetica Neue"/>
-              <a:sym typeface="Helvetica Neue"/>
-            </a:endParaRPr>
-          </a:p>
-          <a:p>
-            <a:pPr marL="342900" lvl="0" indent="-139700" algn="l" rtl="0">
-              <a:spcBef>
-                <a:spcPts val="1800"/>
-              </a:spcBef>
-              <a:spcAft>
-                <a:spcPts val="0"/>
-              </a:spcAft>
-              <a:buClr>
-                <a:srgbClr val="0F243E"/>
-              </a:buClr>
-              <a:buSzPts val="3200"/>
-              <a:buNone/>
-            </a:pPr>
-            <a:endParaRPr lang="zh-TW" altLang="en-US" b="1" i="0" dirty="0">
-              <a:solidFill>
-                <a:srgbClr val="000100"/>
-              </a:solidFill>
-              <a:latin typeface="Helvetica Neue"/>
-              <a:ea typeface="Helvetica Neue"/>
-              <a:cs typeface="Helvetica Neue"/>
-              <a:sym typeface="Helvetica Neue"/>
-            </a:endParaRPr>
-          </a:p>
-        </p:txBody>
-      </p:sp>
-    </p:spTree>
-  </p:cSld>
-  <p:clrMapOvr>
-    <a:masterClrMapping/>
-  </p:clrMapOvr>
-</p:sld>
-</file>
-
-<file path=ppt/slides/slide19.xml><?xml version="1.0" encoding="utf-8"?>
-<p:sld xmlns:a="http://schemas.openxmlformats.org/drawingml/2006/main" xmlns:r="http://schemas.openxmlformats.org/officeDocument/2006/relationships" xmlns:p="http://schemas.openxmlformats.org/presentationml/2006/main">
-  <p:cSld>
-    <p:spTree>
-      <p:nvGrpSpPr>
-        <p:cNvPr id="1" name="Shape 230"/>
-        <p:cNvGrpSpPr/>
-        <p:nvPr/>
-      </p:nvGrpSpPr>
-      <p:grpSpPr>
-        <a:xfrm>
-          <a:off x="0" y="0"/>
-          <a:ext cx="0" cy="0"/>
-          <a:chOff x="0" y="0"/>
-          <a:chExt cx="0" cy="0"/>
-        </a:xfrm>
-      </p:grpSpPr>
-      <p:sp>
-        <p:nvSpPr>
-          <p:cNvPr id="231" name="Google Shape;231;p16"/>
-          <p:cNvSpPr txBox="1">
-            <a:spLocks noGrp="1"/>
-          </p:cNvSpPr>
-          <p:nvPr>
-            <p:ph type="ctrTitle"/>
-          </p:nvPr>
-        </p:nvSpPr>
-        <p:spPr>
-          <a:xfrm>
-            <a:off x="914400" y="620688"/>
-            <a:ext cx="10363200" cy="1470025"/>
-          </a:xfrm>
-          <a:prstGeom prst="rect">
-            <a:avLst/>
-          </a:prstGeom>
-          <a:noFill/>
-          <a:ln>
-            <a:noFill/>
-          </a:ln>
-        </p:spPr>
-        <p:txBody>
-          <a:bodyPr spcFirstLastPara="1" wrap="square" lIns="91425" tIns="45700" rIns="91425" bIns="45700" anchor="ctr" anchorCtr="0">
-            <a:noAutofit/>
-          </a:bodyPr>
-          <a:lstStyle/>
-          <a:p>
-            <a:pPr marL="0" lvl="0" indent="0" algn="l" rtl="0">
-              <a:spcBef>
-                <a:spcPts val="0"/>
-              </a:spcBef>
-              <a:spcAft>
-                <a:spcPts val="0"/>
-              </a:spcAft>
-              <a:buNone/>
-            </a:pPr>
-            <a:r>
-              <a:rPr lang="en-US" sz="5000" dirty="0">
-                <a:latin typeface="Times New Roman" panose="02020603050405020304" pitchFamily="18" charset="0"/>
-                <a:cs typeface="Times New Roman" panose="02020603050405020304" pitchFamily="18" charset="0"/>
-              </a:rPr>
-              <a:t>Thanks for listening</a:t>
-            </a:r>
-            <a:endParaRPr sz="5000" dirty="0">
-              <a:latin typeface="Times New Roman" panose="02020603050405020304" pitchFamily="18" charset="0"/>
-              <a:cs typeface="Times New Roman" panose="02020603050405020304" pitchFamily="18" charset="0"/>
-            </a:endParaRPr>
-          </a:p>
-        </p:txBody>
-      </p:sp>
-      <p:sp>
-        <p:nvSpPr>
-          <p:cNvPr id="232" name="Google Shape;232;p16"/>
-          <p:cNvSpPr txBox="1">
-            <a:spLocks noGrp="1"/>
-          </p:cNvSpPr>
-          <p:nvPr>
-            <p:ph type="dt" idx="10"/>
-          </p:nvPr>
-        </p:nvSpPr>
-        <p:spPr>
-          <a:xfrm>
-            <a:off x="609600" y="6356351"/>
-            <a:ext cx="2844800" cy="365125"/>
-          </a:xfrm>
-          <a:prstGeom prst="rect">
-            <a:avLst/>
-          </a:prstGeom>
-          <a:noFill/>
-          <a:ln>
-            <a:noFill/>
-          </a:ln>
-        </p:spPr>
-        <p:txBody>
-          <a:bodyPr spcFirstLastPara="1" wrap="square" lIns="91425" tIns="45700" rIns="91425" bIns="45700" anchor="ctr" anchorCtr="0">
-            <a:noAutofit/>
-          </a:bodyPr>
-          <a:lstStyle/>
-          <a:p>
-            <a:pPr marL="0" lvl="0" indent="0" algn="l" rtl="0">
-              <a:spcBef>
-                <a:spcPts val="0"/>
-              </a:spcBef>
-              <a:spcAft>
-                <a:spcPts val="0"/>
-              </a:spcAft>
-              <a:buNone/>
-            </a:pPr>
-            <a:r>
-              <a:rPr lang="en-US" dirty="0"/>
-              <a:t>2025/11/25</a:t>
-            </a:r>
-            <a:endParaRPr dirty="0"/>
-          </a:p>
-        </p:txBody>
-      </p:sp>
-      <p:sp>
-        <p:nvSpPr>
-          <p:cNvPr id="233" name="Google Shape;233;p16"/>
-          <p:cNvSpPr txBox="1">
-            <a:spLocks noGrp="1"/>
-          </p:cNvSpPr>
-          <p:nvPr>
-            <p:ph type="ftr" idx="11"/>
-          </p:nvPr>
-        </p:nvSpPr>
-        <p:spPr>
-          <a:xfrm>
-            <a:off x="4165600" y="6356351"/>
-            <a:ext cx="3860800" cy="365125"/>
-          </a:xfrm>
-          <a:prstGeom prst="rect">
-            <a:avLst/>
-          </a:prstGeom>
-          <a:noFill/>
-          <a:ln>
-            <a:noFill/>
-          </a:ln>
-        </p:spPr>
-        <p:txBody>
-          <a:bodyPr spcFirstLastPara="1" wrap="square" lIns="91425" tIns="45700" rIns="91425" bIns="45700" anchor="ctr" anchorCtr="0">
-            <a:noAutofit/>
-          </a:bodyPr>
-          <a:lstStyle/>
-          <a:p>
-            <a:pPr marL="0" lvl="0" indent="0" algn="ctr" rtl="0">
-              <a:spcBef>
-                <a:spcPts val="0"/>
-              </a:spcBef>
-              <a:spcAft>
-                <a:spcPts val="0"/>
-              </a:spcAft>
-              <a:buNone/>
-            </a:pPr>
-            <a:r>
-              <a:rPr lang="en-US"/>
-              <a:t>軟體系統實驗室</a:t>
-            </a:r>
-            <a:endParaRPr/>
-          </a:p>
-        </p:txBody>
-      </p:sp>
-      <p:sp>
-        <p:nvSpPr>
-          <p:cNvPr id="234" name="Google Shape;234;p16"/>
-          <p:cNvSpPr txBox="1">
-            <a:spLocks noGrp="1"/>
-          </p:cNvSpPr>
-          <p:nvPr>
-            <p:ph type="sldNum" idx="12"/>
-          </p:nvPr>
-        </p:nvSpPr>
-        <p:spPr>
-          <a:xfrm>
-            <a:off x="8737600" y="6356351"/>
-            <a:ext cx="2844800" cy="365125"/>
-          </a:xfrm>
-          <a:prstGeom prst="rect">
-            <a:avLst/>
-          </a:prstGeom>
-          <a:noFill/>
-          <a:ln>
-            <a:noFill/>
-          </a:ln>
-        </p:spPr>
-        <p:txBody>
-          <a:bodyPr spcFirstLastPara="1" wrap="square" lIns="91425" tIns="45700" rIns="91425" bIns="45700" anchor="ctr" anchorCtr="0">
-            <a:noAutofit/>
-          </a:bodyPr>
-          <a:lstStyle/>
-          <a:p>
-            <a:pPr marL="0" lvl="0" indent="0" algn="r" rtl="0">
-              <a:spcBef>
-                <a:spcPts val="0"/>
-              </a:spcBef>
-              <a:spcAft>
-                <a:spcPts val="0"/>
-              </a:spcAft>
-              <a:buNone/>
-            </a:pPr>
-            <a:fld id="{00000000-1234-1234-1234-123412341234}" type="slidenum">
-              <a:rPr lang="en-US"/>
-              <a:t>19</a:t>
-            </a:fld>
-            <a:endParaRPr/>
-          </a:p>
-        </p:txBody>
-      </p:sp>
-      <p:pic>
-        <p:nvPicPr>
-          <p:cNvPr id="236" name="Google Shape;236;p16" descr="耀西- 維基百科，自由的百科全書"/>
-          <p:cNvPicPr preferRelativeResize="0"/>
-          <p:nvPr/>
-        </p:nvPicPr>
-        <p:blipFill rotWithShape="1">
-          <a:blip r:embed="rId3">
-            <a:alphaModFix/>
-          </a:blip>
-          <a:srcRect/>
-          <a:stretch/>
-        </p:blipFill>
-        <p:spPr>
-          <a:xfrm flipH="1">
-            <a:off x="9912424" y="2492896"/>
-            <a:ext cx="943103" cy="1403338"/>
-          </a:xfrm>
-          <a:prstGeom prst="rect">
-            <a:avLst/>
-          </a:prstGeom>
-          <a:noFill/>
-          <a:ln>
-            <a:noFill/>
-          </a:ln>
-        </p:spPr>
-      </p:pic>
-    </p:spTree>
   </p:cSld>
   <p:clrMapOvr>
     <a:masterClrMapping/>
@@ -24939,7 +25658,7 @@
         </p:nvSpPr>
         <p:spPr>
           <a:xfrm>
-            <a:off x="609600" y="1624013"/>
+            <a:off x="609600" y="1417638"/>
             <a:ext cx="10972800" cy="4525963"/>
           </a:xfrm>
           <a:prstGeom prst="rect">
@@ -25202,15 +25921,13 @@
             </a:lvl9pPr>
           </a:lstStyle>
           <a:p>
-            <a:pPr>
-              <a:buFont typeface="Arial" charset="0"/>
-              <a:buChar char="•"/>
+            <a:pPr marL="25400" indent="0">
+              <a:buNone/>
               <a:defRPr/>
             </a:pPr>
-            <a:r>
-              <a:rPr lang="en-US" altLang="zh-TW" sz="4400" dirty="0"/>
-              <a:t>Introduction</a:t>
-            </a:r>
+            <a:endParaRPr lang="en-US" altLang="zh-TW" sz="3600" dirty="0">
+              <a:ea typeface="標楷體" panose="03000509000000000000" pitchFamily="65" charset="-120"/>
+            </a:endParaRPr>
           </a:p>
           <a:p>
             <a:pPr>
@@ -25219,8 +25936,10 @@
               <a:defRPr/>
             </a:pPr>
             <a:r>
-              <a:rPr lang="en-US" altLang="zh-TW" sz="4400" dirty="0"/>
-              <a:t>Fundamentals</a:t>
+              <a:rPr lang="en-US" altLang="zh-TW" sz="3600" dirty="0">
+                <a:ea typeface="標楷體" panose="03000509000000000000" pitchFamily="65" charset="-120"/>
+              </a:rPr>
+              <a:t>Introduction</a:t>
             </a:r>
           </a:p>
           <a:p>
@@ -25230,14 +25949,20 @@
               <a:defRPr/>
             </a:pPr>
             <a:r>
-              <a:rPr lang="en-US" altLang="zh-TW" sz="4400" dirty="0"/>
-              <a:t>Common </a:t>
-            </a:r>
-            <a:r>
-              <a:rPr lang="en-US" altLang="zh-TW" sz="4400" dirty="0" err="1"/>
-              <a:t>UseCase</a:t>
-            </a:r>
-            <a:endParaRPr lang="en-US" altLang="zh-TW" sz="4400" dirty="0"/>
+              <a:rPr lang="en-US" altLang="zh-TW" sz="3600" dirty="0">
+                <a:ea typeface="標楷體" panose="03000509000000000000" pitchFamily="65" charset="-120"/>
+              </a:rPr>
+              <a:t>Fundamentals—</a:t>
+            </a:r>
+            <a:r>
+              <a:rPr lang="zh-TW" altLang="en-US" sz="3600" dirty="0">
+                <a:ea typeface="標楷體" panose="03000509000000000000" pitchFamily="65" charset="-120"/>
+              </a:rPr>
+              <a:t>基本原理與結構</a:t>
+            </a:r>
+            <a:endParaRPr lang="en-US" altLang="zh-TW" sz="3600" dirty="0">
+              <a:ea typeface="標楷體" panose="03000509000000000000" pitchFamily="65" charset="-120"/>
+            </a:endParaRPr>
           </a:p>
           <a:p>
             <a:pPr>
@@ -25246,17 +25971,32 @@
               <a:defRPr/>
             </a:pPr>
             <a:r>
-              <a:rPr lang="en-US" altLang="zh-TW" sz="4400" dirty="0"/>
-              <a:t>Testing</a:t>
-            </a:r>
-            <a:r>
-              <a:rPr lang="zh-TW" altLang="en-US" sz="4400" dirty="0"/>
-              <a:t> </a:t>
-            </a:r>
-            <a:r>
-              <a:rPr lang="en-US" altLang="zh-TW" sz="4400" dirty="0"/>
-              <a:t>and iteration</a:t>
-            </a:r>
+              <a:rPr lang="en-US" altLang="zh-TW" sz="3600" dirty="0">
+                <a:ea typeface="標楷體" panose="03000509000000000000" pitchFamily="65" charset="-120"/>
+              </a:rPr>
+              <a:t>Common </a:t>
+            </a:r>
+            <a:r>
+              <a:rPr lang="en-US" altLang="zh-TW" sz="3600" dirty="0" err="1">
+                <a:ea typeface="標楷體" panose="03000509000000000000" pitchFamily="65" charset="-120"/>
+              </a:rPr>
+              <a:t>UseCase</a:t>
+            </a:r>
+            <a:r>
+              <a:rPr lang="en-US" altLang="zh-TW" sz="3600" dirty="0">
+                <a:ea typeface="標楷體" panose="03000509000000000000" pitchFamily="65" charset="-120"/>
+              </a:rPr>
+              <a:t> —</a:t>
+            </a:r>
+            <a:r>
+              <a:rPr lang="zh-TW" altLang="en-US" sz="3600" dirty="0">
+                <a:ea typeface="標楷體" panose="03000509000000000000" pitchFamily="65" charset="-120"/>
+              </a:rPr>
+              <a:t>適合用來解決哪些類型的問題？</a:t>
+            </a:r>
+            <a:endParaRPr lang="en-US" altLang="zh-TW" sz="3600" dirty="0">
+              <a:ea typeface="標楷體" panose="03000509000000000000" pitchFamily="65" charset="-120"/>
+            </a:endParaRPr>
           </a:p>
           <a:p>
             <a:pPr>
@@ -25265,8 +26005,22 @@
               <a:defRPr/>
             </a:pPr>
             <a:r>
-              <a:rPr lang="en-US" altLang="zh-TW" sz="4400" dirty="0"/>
-              <a:t>Conclusion</a:t>
+              <a:rPr lang="en-US" altLang="zh-TW" sz="3600" dirty="0">
+                <a:ea typeface="標楷體" panose="03000509000000000000" pitchFamily="65" charset="-120"/>
+              </a:rPr>
+              <a:t>Iteration —</a:t>
+            </a:r>
+            <a:r>
+              <a:rPr lang="zh-TW" altLang="en-US" sz="3600" dirty="0">
+                <a:ea typeface="標楷體" panose="03000509000000000000" pitchFamily="65" charset="-120"/>
+              </a:rPr>
+              <a:t>如何知道何時需要修正</a:t>
+            </a:r>
+            <a:r>
+              <a:rPr lang="en-US" altLang="zh-TW" sz="3600" dirty="0">
+                <a:ea typeface="標楷體" panose="03000509000000000000" pitchFamily="65" charset="-120"/>
+              </a:rPr>
+              <a:t>Skill</a:t>
             </a:r>
           </a:p>
           <a:p>
@@ -25275,10 +26029,662 @@
               <a:buChar char="•"/>
               <a:defRPr/>
             </a:pPr>
-            <a:endParaRPr lang="zh-TW" altLang="en-US" dirty="0"/>
+            <a:r>
+              <a:rPr lang="en-US" altLang="zh-TW" sz="3600" dirty="0">
+                <a:ea typeface="標楷體" panose="03000509000000000000" pitchFamily="65" charset="-120"/>
+              </a:rPr>
+              <a:t>Conclusion</a:t>
+            </a:r>
+          </a:p>
+          <a:p>
+            <a:pPr>
+              <a:buFont typeface="Arial" charset="0"/>
+              <a:buChar char="•"/>
+              <a:defRPr/>
+            </a:pPr>
+            <a:endParaRPr lang="zh-TW" altLang="en-US" dirty="0">
+              <a:ea typeface="標楷體" panose="03000509000000000000" pitchFamily="65" charset="-120"/>
+            </a:endParaRPr>
           </a:p>
         </p:txBody>
       </p:sp>
+    </p:spTree>
+  </p:cSld>
+  <p:clrMapOvr>
+    <a:masterClrMapping/>
+  </p:clrMapOvr>
+</p:sld>
+</file>
+
+<file path=ppt/slides/slide20.xml><?xml version="1.0" encoding="utf-8"?>
+<p:sld xmlns:a="http://schemas.openxmlformats.org/drawingml/2006/main" xmlns:r="http://schemas.openxmlformats.org/officeDocument/2006/relationships" xmlns:p="http://schemas.openxmlformats.org/presentationml/2006/main">
+  <p:cSld>
+    <p:spTree>
+      <p:nvGrpSpPr>
+        <p:cNvPr id="1" name="Shape 221"/>
+        <p:cNvGrpSpPr/>
+        <p:nvPr/>
+      </p:nvGrpSpPr>
+      <p:grpSpPr>
+        <a:xfrm>
+          <a:off x="0" y="0"/>
+          <a:ext cx="0" cy="0"/>
+          <a:chOff x="0" y="0"/>
+          <a:chExt cx="0" cy="0"/>
+        </a:xfrm>
+      </p:grpSpPr>
+      <p:sp>
+        <p:nvSpPr>
+          <p:cNvPr id="222" name="Google Shape;222;p15"/>
+          <p:cNvSpPr txBox="1">
+            <a:spLocks noGrp="1"/>
+          </p:cNvSpPr>
+          <p:nvPr>
+            <p:ph type="dt" idx="10"/>
+          </p:nvPr>
+        </p:nvSpPr>
+        <p:spPr>
+          <a:xfrm>
+            <a:off x="609600" y="6356351"/>
+            <a:ext cx="2844800" cy="365125"/>
+          </a:xfrm>
+          <a:prstGeom prst="rect">
+            <a:avLst/>
+          </a:prstGeom>
+          <a:noFill/>
+          <a:ln>
+            <a:noFill/>
+          </a:ln>
+        </p:spPr>
+        <p:txBody>
+          <a:bodyPr spcFirstLastPara="1" wrap="square" lIns="91425" tIns="45700" rIns="91425" bIns="45700" anchor="ctr" anchorCtr="0">
+            <a:noAutofit/>
+          </a:bodyPr>
+          <a:lstStyle/>
+          <a:p>
+            <a:pPr marL="0" lvl="0" indent="0" algn="l" rtl="0">
+              <a:spcBef>
+                <a:spcPts val="0"/>
+              </a:spcBef>
+              <a:spcAft>
+                <a:spcPts val="0"/>
+              </a:spcAft>
+              <a:buNone/>
+            </a:pPr>
+            <a:r>
+              <a:rPr lang="en-US" dirty="0"/>
+              <a:t>2025/11/25</a:t>
+            </a:r>
+            <a:endParaRPr dirty="0"/>
+          </a:p>
+        </p:txBody>
+      </p:sp>
+      <p:sp>
+        <p:nvSpPr>
+          <p:cNvPr id="223" name="Google Shape;223;p15"/>
+          <p:cNvSpPr txBox="1">
+            <a:spLocks noGrp="1"/>
+          </p:cNvSpPr>
+          <p:nvPr>
+            <p:ph type="ftr" idx="11"/>
+          </p:nvPr>
+        </p:nvSpPr>
+        <p:spPr>
+          <a:xfrm>
+            <a:off x="4165600" y="6356351"/>
+            <a:ext cx="3860800" cy="365125"/>
+          </a:xfrm>
+          <a:prstGeom prst="rect">
+            <a:avLst/>
+          </a:prstGeom>
+          <a:noFill/>
+          <a:ln>
+            <a:noFill/>
+          </a:ln>
+        </p:spPr>
+        <p:txBody>
+          <a:bodyPr spcFirstLastPara="1" wrap="square" lIns="91425" tIns="45700" rIns="91425" bIns="45700" anchor="ctr" anchorCtr="0">
+            <a:noAutofit/>
+          </a:bodyPr>
+          <a:lstStyle/>
+          <a:p>
+            <a:pPr marL="0" lvl="0" indent="0" algn="ctr" rtl="0">
+              <a:spcBef>
+                <a:spcPts val="0"/>
+              </a:spcBef>
+              <a:spcAft>
+                <a:spcPts val="0"/>
+              </a:spcAft>
+              <a:buNone/>
+            </a:pPr>
+            <a:r>
+              <a:rPr lang="en-US"/>
+              <a:t>軟體系統實驗室</a:t>
+            </a:r>
+            <a:endParaRPr/>
+          </a:p>
+        </p:txBody>
+      </p:sp>
+      <p:sp>
+        <p:nvSpPr>
+          <p:cNvPr id="224" name="Google Shape;224;p15"/>
+          <p:cNvSpPr txBox="1">
+            <a:spLocks noGrp="1"/>
+          </p:cNvSpPr>
+          <p:nvPr>
+            <p:ph type="sldNum" idx="12"/>
+          </p:nvPr>
+        </p:nvSpPr>
+        <p:spPr>
+          <a:xfrm>
+            <a:off x="8737600" y="6356351"/>
+            <a:ext cx="2844800" cy="365125"/>
+          </a:xfrm>
+          <a:prstGeom prst="rect">
+            <a:avLst/>
+          </a:prstGeom>
+          <a:noFill/>
+          <a:ln>
+            <a:noFill/>
+          </a:ln>
+        </p:spPr>
+        <p:txBody>
+          <a:bodyPr spcFirstLastPara="1" wrap="square" lIns="91425" tIns="45700" rIns="91425" bIns="45700" anchor="ctr" anchorCtr="0">
+            <a:noAutofit/>
+          </a:bodyPr>
+          <a:lstStyle/>
+          <a:p>
+            <a:pPr marL="0" lvl="0" indent="0" algn="r" rtl="0">
+              <a:spcBef>
+                <a:spcPts val="0"/>
+              </a:spcBef>
+              <a:spcAft>
+                <a:spcPts val="0"/>
+              </a:spcAft>
+              <a:buNone/>
+            </a:pPr>
+            <a:fld id="{00000000-1234-1234-1234-123412341234}" type="slidenum">
+              <a:rPr lang="en-US"/>
+              <a:t>20</a:t>
+            </a:fld>
+            <a:endParaRPr/>
+          </a:p>
+        </p:txBody>
+      </p:sp>
+      <p:sp>
+        <p:nvSpPr>
+          <p:cNvPr id="225" name="Google Shape;225;p15"/>
+          <p:cNvSpPr txBox="1">
+            <a:spLocks noGrp="1"/>
+          </p:cNvSpPr>
+          <p:nvPr>
+            <p:ph type="title"/>
+          </p:nvPr>
+        </p:nvSpPr>
+        <p:spPr>
+          <a:xfrm>
+            <a:off x="609600" y="274638"/>
+            <a:ext cx="10972800" cy="1143000"/>
+          </a:xfrm>
+          <a:prstGeom prst="rect">
+            <a:avLst/>
+          </a:prstGeom>
+          <a:noFill/>
+          <a:ln>
+            <a:noFill/>
+          </a:ln>
+        </p:spPr>
+        <p:txBody>
+          <a:bodyPr spcFirstLastPara="1" wrap="square" lIns="91425" tIns="45700" rIns="91425" bIns="45700" anchor="ctr" anchorCtr="0">
+            <a:noAutofit/>
+          </a:bodyPr>
+          <a:lstStyle/>
+          <a:p>
+            <a:pPr marL="0" lvl="0" indent="0" algn="ctr" rtl="0">
+              <a:spcBef>
+                <a:spcPts val="0"/>
+              </a:spcBef>
+              <a:spcAft>
+                <a:spcPts val="0"/>
+              </a:spcAft>
+              <a:buNone/>
+            </a:pPr>
+            <a:r>
+              <a:rPr lang="en-US" dirty="0">
+                <a:latin typeface="Times New Roman" panose="02020603050405020304" pitchFamily="18" charset="0"/>
+                <a:cs typeface="Times New Roman" panose="02020603050405020304" pitchFamily="18" charset="0"/>
+              </a:rPr>
+              <a:t>Reference</a:t>
+            </a:r>
+            <a:endParaRPr dirty="0">
+              <a:latin typeface="Times New Roman" panose="02020603050405020304" pitchFamily="18" charset="0"/>
+              <a:cs typeface="Times New Roman" panose="02020603050405020304" pitchFamily="18" charset="0"/>
+            </a:endParaRPr>
+          </a:p>
+        </p:txBody>
+      </p:sp>
+      <p:sp>
+        <p:nvSpPr>
+          <p:cNvPr id="226" name="Google Shape;226;p15"/>
+          <p:cNvSpPr txBox="1">
+            <a:spLocks noGrp="1"/>
+          </p:cNvSpPr>
+          <p:nvPr>
+            <p:ph type="body" idx="1"/>
+          </p:nvPr>
+        </p:nvSpPr>
+        <p:spPr>
+          <a:xfrm>
+            <a:off x="737327" y="1557745"/>
+            <a:ext cx="10717345" cy="2736304"/>
+          </a:xfrm>
+          <a:prstGeom prst="rect">
+            <a:avLst/>
+          </a:prstGeom>
+          <a:noFill/>
+          <a:ln>
+            <a:noFill/>
+          </a:ln>
+        </p:spPr>
+        <p:txBody>
+          <a:bodyPr spcFirstLastPara="1" wrap="square" lIns="91425" tIns="45700" rIns="91425" bIns="45700" anchor="t" anchorCtr="0">
+            <a:noAutofit/>
+          </a:bodyPr>
+          <a:lstStyle/>
+          <a:p>
+            <a:r>
+              <a:rPr lang="en-US" altLang="zh-TW" dirty="0">
+                <a:ea typeface="標楷體" panose="03000509000000000000" pitchFamily="65" charset="-120"/>
+                <a:hlinkClick r:id="rId3"/>
+              </a:rPr>
+              <a:t>The Complete Guide to Building Skills for Claude</a:t>
+            </a:r>
+          </a:p>
+          <a:p>
+            <a:r>
+              <a:rPr lang="zh-TW" altLang="en-US" dirty="0">
+                <a:ea typeface="標楷體" panose="03000509000000000000" pitchFamily="65" charset="-120"/>
+                <a:hlinkClick r:id="rId4"/>
+              </a:rPr>
+              <a:t>什麼是 </a:t>
+            </a:r>
+            <a:r>
+              <a:rPr lang="en-US" altLang="zh-TW" dirty="0">
+                <a:ea typeface="標楷體" panose="03000509000000000000" pitchFamily="65" charset="-120"/>
+                <a:hlinkClick r:id="rId4"/>
+              </a:rPr>
+              <a:t>ETL</a:t>
+            </a:r>
+            <a:r>
+              <a:rPr lang="zh-TW" altLang="en-US" dirty="0">
+                <a:ea typeface="標楷體" panose="03000509000000000000" pitchFamily="65" charset="-120"/>
+                <a:hlinkClick r:id="rId4"/>
+              </a:rPr>
+              <a:t>？</a:t>
+            </a:r>
+            <a:endParaRPr lang="zh-TW" altLang="en-US" dirty="0">
+              <a:ea typeface="標楷體" panose="03000509000000000000" pitchFamily="65" charset="-120"/>
+            </a:endParaRPr>
+          </a:p>
+          <a:p>
+            <a:r>
+              <a:rPr lang="en-US" altLang="zh-TW" dirty="0">
+                <a:ea typeface="標楷體" panose="03000509000000000000" pitchFamily="65" charset="-120"/>
+                <a:hlinkClick r:id="rId5"/>
+              </a:rPr>
+              <a:t>https://github.com/anthropics/skills</a:t>
+            </a:r>
+            <a:endParaRPr lang="en-US" altLang="zh-TW" u="sng" dirty="0">
+              <a:solidFill>
+                <a:schemeClr val="hlink"/>
+              </a:solidFill>
+              <a:ea typeface="標楷體" panose="03000509000000000000" pitchFamily="65" charset="-120"/>
+            </a:endParaRPr>
+          </a:p>
+          <a:p>
+            <a:r>
+              <a:rPr lang="en-US" altLang="zh-TW" dirty="0">
+                <a:ea typeface="標楷體" panose="03000509000000000000" pitchFamily="65" charset="-120"/>
+                <a:hlinkClick r:id="rId6"/>
+              </a:rPr>
+              <a:t>Claude API Docs -- Agent Skills</a:t>
+            </a:r>
+            <a:endParaRPr lang="en-US" altLang="zh-TW" dirty="0">
+              <a:ea typeface="標楷體" panose="03000509000000000000" pitchFamily="65" charset="-120"/>
+            </a:endParaRPr>
+          </a:p>
+          <a:p>
+            <a:pPr marL="342900" lvl="0" indent="-342900" algn="just" rtl="0">
+              <a:spcBef>
+                <a:spcPts val="640"/>
+              </a:spcBef>
+              <a:spcAft>
+                <a:spcPts val="0"/>
+              </a:spcAft>
+              <a:buClr>
+                <a:srgbClr val="0F243E"/>
+              </a:buClr>
+              <a:buSzPts val="3200"/>
+              <a:buChar char="•"/>
+            </a:pPr>
+            <a:endParaRPr lang="zh-TW" altLang="en-US" dirty="0"/>
+          </a:p>
+          <a:p>
+            <a:pPr marL="342900" lvl="0" indent="-139700" algn="just" rtl="0">
+              <a:spcBef>
+                <a:spcPts val="640"/>
+              </a:spcBef>
+              <a:spcAft>
+                <a:spcPts val="0"/>
+              </a:spcAft>
+              <a:buClr>
+                <a:srgbClr val="0F243E"/>
+              </a:buClr>
+              <a:buSzPts val="3200"/>
+              <a:buNone/>
+            </a:pPr>
+            <a:endParaRPr lang="zh-TW" altLang="en-US" i="0" dirty="0">
+              <a:solidFill>
+                <a:srgbClr val="000100"/>
+              </a:solidFill>
+              <a:latin typeface="Helvetica Neue"/>
+              <a:ea typeface="Helvetica Neue"/>
+              <a:cs typeface="Helvetica Neue"/>
+              <a:sym typeface="Helvetica Neue"/>
+            </a:endParaRPr>
+          </a:p>
+          <a:p>
+            <a:pPr marL="342900" lvl="0" indent="-139700" algn="l" rtl="0">
+              <a:spcBef>
+                <a:spcPts val="1050"/>
+              </a:spcBef>
+              <a:spcAft>
+                <a:spcPts val="0"/>
+              </a:spcAft>
+              <a:buClr>
+                <a:srgbClr val="0F243E"/>
+              </a:buClr>
+              <a:buSzPts val="3200"/>
+              <a:buNone/>
+            </a:pPr>
+            <a:endParaRPr lang="zh-TW" altLang="en-US" b="1" i="0" dirty="0">
+              <a:solidFill>
+                <a:srgbClr val="000100"/>
+              </a:solidFill>
+              <a:latin typeface="Helvetica Neue"/>
+              <a:ea typeface="Helvetica Neue"/>
+              <a:cs typeface="Helvetica Neue"/>
+              <a:sym typeface="Helvetica Neue"/>
+            </a:endParaRPr>
+          </a:p>
+          <a:p>
+            <a:pPr marL="342900" lvl="0" indent="-139700" algn="l" rtl="0">
+              <a:spcBef>
+                <a:spcPts val="1800"/>
+              </a:spcBef>
+              <a:spcAft>
+                <a:spcPts val="0"/>
+              </a:spcAft>
+              <a:buClr>
+                <a:srgbClr val="0F243E"/>
+              </a:buClr>
+              <a:buSzPts val="3200"/>
+              <a:buNone/>
+            </a:pPr>
+            <a:endParaRPr lang="zh-TW" altLang="en-US" b="1" i="0" dirty="0">
+              <a:solidFill>
+                <a:srgbClr val="000100"/>
+              </a:solidFill>
+              <a:latin typeface="Helvetica Neue"/>
+              <a:ea typeface="Helvetica Neue"/>
+              <a:cs typeface="Helvetica Neue"/>
+              <a:sym typeface="Helvetica Neue"/>
+            </a:endParaRPr>
+          </a:p>
+        </p:txBody>
+      </p:sp>
+    </p:spTree>
+  </p:cSld>
+  <p:clrMapOvr>
+    <a:masterClrMapping/>
+  </p:clrMapOvr>
+</p:sld>
+</file>
+
+<file path=ppt/slides/slide21.xml><?xml version="1.0" encoding="utf-8"?>
+<p:sld xmlns:a="http://schemas.openxmlformats.org/drawingml/2006/main" xmlns:r="http://schemas.openxmlformats.org/officeDocument/2006/relationships" xmlns:p="http://schemas.openxmlformats.org/presentationml/2006/main">
+  <p:cSld>
+    <p:spTree>
+      <p:nvGrpSpPr>
+        <p:cNvPr id="1" name="Shape 230"/>
+        <p:cNvGrpSpPr/>
+        <p:nvPr/>
+      </p:nvGrpSpPr>
+      <p:grpSpPr>
+        <a:xfrm>
+          <a:off x="0" y="0"/>
+          <a:ext cx="0" cy="0"/>
+          <a:chOff x="0" y="0"/>
+          <a:chExt cx="0" cy="0"/>
+        </a:xfrm>
+      </p:grpSpPr>
+      <p:sp>
+        <p:nvSpPr>
+          <p:cNvPr id="231" name="Google Shape;231;p16"/>
+          <p:cNvSpPr txBox="1">
+            <a:spLocks noGrp="1"/>
+          </p:cNvSpPr>
+          <p:nvPr>
+            <p:ph type="ctrTitle"/>
+          </p:nvPr>
+        </p:nvSpPr>
+        <p:spPr>
+          <a:xfrm>
+            <a:off x="914400" y="620688"/>
+            <a:ext cx="10363200" cy="1470025"/>
+          </a:xfrm>
+          <a:prstGeom prst="rect">
+            <a:avLst/>
+          </a:prstGeom>
+          <a:noFill/>
+          <a:ln>
+            <a:noFill/>
+          </a:ln>
+        </p:spPr>
+        <p:txBody>
+          <a:bodyPr spcFirstLastPara="1" wrap="square" lIns="91425" tIns="45700" rIns="91425" bIns="45700" anchor="ctr" anchorCtr="0">
+            <a:noAutofit/>
+          </a:bodyPr>
+          <a:lstStyle/>
+          <a:p>
+            <a:pPr marL="0" lvl="0" indent="0" algn="l" rtl="0">
+              <a:spcBef>
+                <a:spcPts val="0"/>
+              </a:spcBef>
+              <a:spcAft>
+                <a:spcPts val="0"/>
+              </a:spcAft>
+              <a:buNone/>
+            </a:pPr>
+            <a:r>
+              <a:rPr lang="en-US" sz="5000" dirty="0">
+                <a:latin typeface="Times New Roman" panose="02020603050405020304" pitchFamily="18" charset="0"/>
+                <a:cs typeface="Times New Roman" panose="02020603050405020304" pitchFamily="18" charset="0"/>
+              </a:rPr>
+              <a:t>Thanks for listening</a:t>
+            </a:r>
+            <a:endParaRPr sz="5000" dirty="0">
+              <a:latin typeface="Times New Roman" panose="02020603050405020304" pitchFamily="18" charset="0"/>
+              <a:cs typeface="Times New Roman" panose="02020603050405020304" pitchFamily="18" charset="0"/>
+            </a:endParaRPr>
+          </a:p>
+        </p:txBody>
+      </p:sp>
+      <p:sp>
+        <p:nvSpPr>
+          <p:cNvPr id="232" name="Google Shape;232;p16"/>
+          <p:cNvSpPr txBox="1">
+            <a:spLocks noGrp="1"/>
+          </p:cNvSpPr>
+          <p:nvPr>
+            <p:ph type="dt" idx="10"/>
+          </p:nvPr>
+        </p:nvSpPr>
+        <p:spPr>
+          <a:xfrm>
+            <a:off x="609600" y="6356351"/>
+            <a:ext cx="2844800" cy="365125"/>
+          </a:xfrm>
+          <a:prstGeom prst="rect">
+            <a:avLst/>
+          </a:prstGeom>
+          <a:noFill/>
+          <a:ln>
+            <a:noFill/>
+          </a:ln>
+        </p:spPr>
+        <p:txBody>
+          <a:bodyPr spcFirstLastPara="1" wrap="square" lIns="91425" tIns="45700" rIns="91425" bIns="45700" anchor="ctr" anchorCtr="0">
+            <a:noAutofit/>
+          </a:bodyPr>
+          <a:lstStyle/>
+          <a:p>
+            <a:pPr marL="0" lvl="0" indent="0" algn="l" rtl="0">
+              <a:spcBef>
+                <a:spcPts val="0"/>
+              </a:spcBef>
+              <a:spcAft>
+                <a:spcPts val="0"/>
+              </a:spcAft>
+              <a:buNone/>
+            </a:pPr>
+            <a:r>
+              <a:rPr lang="en-US" dirty="0"/>
+              <a:t>2025/11/25</a:t>
+            </a:r>
+            <a:endParaRPr dirty="0"/>
+          </a:p>
+        </p:txBody>
+      </p:sp>
+      <p:sp>
+        <p:nvSpPr>
+          <p:cNvPr id="233" name="Google Shape;233;p16"/>
+          <p:cNvSpPr txBox="1">
+            <a:spLocks noGrp="1"/>
+          </p:cNvSpPr>
+          <p:nvPr>
+            <p:ph type="ftr" idx="11"/>
+          </p:nvPr>
+        </p:nvSpPr>
+        <p:spPr>
+          <a:xfrm>
+            <a:off x="4165600" y="6356351"/>
+            <a:ext cx="3860800" cy="365125"/>
+          </a:xfrm>
+          <a:prstGeom prst="rect">
+            <a:avLst/>
+          </a:prstGeom>
+          <a:noFill/>
+          <a:ln>
+            <a:noFill/>
+          </a:ln>
+        </p:spPr>
+        <p:txBody>
+          <a:bodyPr spcFirstLastPara="1" wrap="square" lIns="91425" tIns="45700" rIns="91425" bIns="45700" anchor="ctr" anchorCtr="0">
+            <a:noAutofit/>
+          </a:bodyPr>
+          <a:lstStyle/>
+          <a:p>
+            <a:pPr marL="0" lvl="0" indent="0" algn="ctr" rtl="0">
+              <a:spcBef>
+                <a:spcPts val="0"/>
+              </a:spcBef>
+              <a:spcAft>
+                <a:spcPts val="0"/>
+              </a:spcAft>
+              <a:buNone/>
+            </a:pPr>
+            <a:r>
+              <a:rPr lang="en-US"/>
+              <a:t>軟體系統實驗室</a:t>
+            </a:r>
+            <a:endParaRPr/>
+          </a:p>
+        </p:txBody>
+      </p:sp>
+      <p:sp>
+        <p:nvSpPr>
+          <p:cNvPr id="234" name="Google Shape;234;p16"/>
+          <p:cNvSpPr txBox="1">
+            <a:spLocks noGrp="1"/>
+          </p:cNvSpPr>
+          <p:nvPr>
+            <p:ph type="sldNum" idx="12"/>
+          </p:nvPr>
+        </p:nvSpPr>
+        <p:spPr>
+          <a:xfrm>
+            <a:off x="8737600" y="6356351"/>
+            <a:ext cx="2844800" cy="365125"/>
+          </a:xfrm>
+          <a:prstGeom prst="rect">
+            <a:avLst/>
+          </a:prstGeom>
+          <a:noFill/>
+          <a:ln>
+            <a:noFill/>
+          </a:ln>
+        </p:spPr>
+        <p:txBody>
+          <a:bodyPr spcFirstLastPara="1" wrap="square" lIns="91425" tIns="45700" rIns="91425" bIns="45700" anchor="ctr" anchorCtr="0">
+            <a:noAutofit/>
+          </a:bodyPr>
+          <a:lstStyle/>
+          <a:p>
+            <a:pPr marL="0" lvl="0" indent="0" algn="r" rtl="0">
+              <a:spcBef>
+                <a:spcPts val="0"/>
+              </a:spcBef>
+              <a:spcAft>
+                <a:spcPts val="0"/>
+              </a:spcAft>
+              <a:buNone/>
+            </a:pPr>
+            <a:fld id="{00000000-1234-1234-1234-123412341234}" type="slidenum">
+              <a:rPr lang="en-US"/>
+              <a:t>21</a:t>
+            </a:fld>
+            <a:endParaRPr/>
+          </a:p>
+        </p:txBody>
+      </p:sp>
+      <p:pic>
+        <p:nvPicPr>
+          <p:cNvPr id="236" name="Google Shape;236;p16" descr="耀西- 維基百科，自由的百科全書"/>
+          <p:cNvPicPr preferRelativeResize="0"/>
+          <p:nvPr/>
+        </p:nvPicPr>
+        <p:blipFill rotWithShape="1">
+          <a:blip r:embed="rId3">
+            <a:alphaModFix/>
+          </a:blip>
+          <a:srcRect/>
+          <a:stretch/>
+        </p:blipFill>
+        <p:spPr>
+          <a:xfrm flipH="1">
+            <a:off x="9912424" y="2492896"/>
+            <a:ext cx="943103" cy="1403338"/>
+          </a:xfrm>
+          <a:prstGeom prst="rect">
+            <a:avLst/>
+          </a:prstGeom>
+          <a:noFill/>
+          <a:ln>
+            <a:noFill/>
+          </a:ln>
+        </p:spPr>
+      </p:pic>
     </p:spTree>
   </p:cSld>
   <p:clrMapOvr>
@@ -26273,7 +27679,7 @@
           <a:lstStyle/>
           <a:p>
             <a:pPr algn="ctr"/>
-            <a:endParaRPr lang="zh-TW" altLang="en-US"/>
+            <a:endParaRPr lang="zh-TW" altLang="en-US" dirty="0"/>
           </a:p>
         </p:txBody>
       </p:sp>
@@ -26308,7 +27714,7 @@
                             </p:stCondLst>
                             <p:childTnLst>
                               <p:par>
-                                <p:cTn id="5" presetID="1" presetClass="entr" presetSubtype="0" fill="hold" grpId="0" nodeType="clickEffect">
+                                <p:cTn id="5" presetID="2" presetClass="entr" presetSubtype="4" fill="hold" grpId="0" nodeType="clickEffect">
                                   <p:stCondLst>
                                     <p:cond delay="0"/>
                                   </p:stCondLst>
@@ -26331,6 +27737,52 @@
                                         <p:strVal val="visible"/>
                                       </p:to>
                                     </p:set>
+                                    <p:anim calcmode="lin" valueType="num">
+                                      <p:cBhvr additive="base">
+                                        <p:cTn id="7" dur="500" fill="hold"/>
+                                        <p:tgtEl>
+                                          <p:spTgt spid="2"/>
+                                        </p:tgtEl>
+                                        <p:attrNameLst>
+                                          <p:attrName>ppt_x</p:attrName>
+                                        </p:attrNameLst>
+                                      </p:cBhvr>
+                                      <p:tavLst>
+                                        <p:tav tm="0">
+                                          <p:val>
+                                            <p:strVal val="#ppt_x"/>
+                                          </p:val>
+                                        </p:tav>
+                                        <p:tav tm="100000">
+                                          <p:val>
+                                            <p:strVal val="#ppt_x"/>
+                                          </p:val>
+                                        </p:tav>
+                                      </p:tavLst>
+                                    </p:anim>
+                                    <p:anim calcmode="lin" valueType="num">
+                                      <p:cBhvr additive="base">
+                                        <p:cTn id="8" dur="500" fill="hold"/>
+                                        <p:tgtEl>
+                                          <p:spTgt spid="2"/>
+                                        </p:tgtEl>
+                                        <p:attrNameLst>
+                                          <p:attrName>ppt_y</p:attrName>
+                                        </p:attrNameLst>
+                                      </p:cBhvr>
+                                      <p:tavLst>
+                                        <p:tav tm="0">
+                                          <p:val>
+                                            <p:strVal val="1+#ppt_h/2"/>
+                                          </p:val>
+                                        </p:tav>
+                                        <p:tav tm="100000">
+                                          <p:val>
+                                            <p:strVal val="#ppt_y"/>
+                                          </p:val>
+                                        </p:tav>
+                                      </p:tavLst>
+                                    </p:anim>
                                   </p:childTnLst>
                                 </p:cTn>
                               </p:par>
@@ -26341,26 +27793,26 @@
                     </p:cTn>
                   </p:par>
                   <p:par>
-                    <p:cTn id="7" fill="hold">
+                    <p:cTn id="9" fill="hold">
                       <p:stCondLst>
                         <p:cond delay="indefinite"/>
                       </p:stCondLst>
                       <p:childTnLst>
                         <p:par>
-                          <p:cTn id="8" fill="hold">
+                          <p:cTn id="10" fill="hold">
                             <p:stCondLst>
                               <p:cond delay="0"/>
                             </p:stCondLst>
                             <p:childTnLst>
                               <p:par>
-                                <p:cTn id="9" presetID="1" presetClass="entr" presetSubtype="0" fill="hold" grpId="0" nodeType="clickEffect">
+                                <p:cTn id="11" presetID="2" presetClass="entr" presetSubtype="4" fill="hold" grpId="0" nodeType="clickEffect">
                                   <p:stCondLst>
                                     <p:cond delay="0"/>
                                   </p:stCondLst>
                                   <p:childTnLst>
                                     <p:set>
                                       <p:cBhvr>
-                                        <p:cTn id="10" dur="1" fill="hold">
+                                        <p:cTn id="12" dur="1" fill="hold">
                                           <p:stCondLst>
                                             <p:cond delay="0"/>
                                           </p:stCondLst>
@@ -26376,6 +27828,52 @@
                                         <p:strVal val="visible"/>
                                       </p:to>
                                     </p:set>
+                                    <p:anim calcmode="lin" valueType="num">
+                                      <p:cBhvr additive="base">
+                                        <p:cTn id="13" dur="500" fill="hold"/>
+                                        <p:tgtEl>
+                                          <p:spTgt spid="4"/>
+                                        </p:tgtEl>
+                                        <p:attrNameLst>
+                                          <p:attrName>ppt_x</p:attrName>
+                                        </p:attrNameLst>
+                                      </p:cBhvr>
+                                      <p:tavLst>
+                                        <p:tav tm="0">
+                                          <p:val>
+                                            <p:strVal val="#ppt_x"/>
+                                          </p:val>
+                                        </p:tav>
+                                        <p:tav tm="100000">
+                                          <p:val>
+                                            <p:strVal val="#ppt_x"/>
+                                          </p:val>
+                                        </p:tav>
+                                      </p:tavLst>
+                                    </p:anim>
+                                    <p:anim calcmode="lin" valueType="num">
+                                      <p:cBhvr additive="base">
+                                        <p:cTn id="14" dur="500" fill="hold"/>
+                                        <p:tgtEl>
+                                          <p:spTgt spid="4"/>
+                                        </p:tgtEl>
+                                        <p:attrNameLst>
+                                          <p:attrName>ppt_y</p:attrName>
+                                        </p:attrNameLst>
+                                      </p:cBhvr>
+                                      <p:tavLst>
+                                        <p:tav tm="0">
+                                          <p:val>
+                                            <p:strVal val="1+#ppt_h/2"/>
+                                          </p:val>
+                                        </p:tav>
+                                        <p:tav tm="100000">
+                                          <p:val>
+                                            <p:strVal val="#ppt_y"/>
+                                          </p:val>
+                                        </p:tav>
+                                      </p:tavLst>
+                                    </p:anim>
                                   </p:childTnLst>
                                 </p:cTn>
                               </p:par>
@@ -27028,6 +28526,811 @@
         <p:cNvPr id="1" name="Shape 96">
           <a:extLst>
             <a:ext uri="{FF2B5EF4-FFF2-40B4-BE49-F238E27FC236}">
+              <a16:creationId xmlns:a16="http://schemas.microsoft.com/office/drawing/2014/main" id="{E18B61D4-A018-1069-E6EE-F5885E8A1F88}"/>
+            </a:ext>
+          </a:extLst>
+        </p:cNvPr>
+        <p:cNvGrpSpPr/>
+        <p:nvPr/>
+      </p:nvGrpSpPr>
+      <p:grpSpPr>
+        <a:xfrm>
+          <a:off x="0" y="0"/>
+          <a:ext cx="0" cy="0"/>
+          <a:chOff x="0" y="0"/>
+          <a:chExt cx="0" cy="0"/>
+        </a:xfrm>
+      </p:grpSpPr>
+      <p:sp>
+        <p:nvSpPr>
+          <p:cNvPr id="97" name="Google Shape;97;p2">
+            <a:extLst>
+              <a:ext uri="{FF2B5EF4-FFF2-40B4-BE49-F238E27FC236}">
+                <a16:creationId xmlns:a16="http://schemas.microsoft.com/office/drawing/2014/main" id="{23678788-646D-F1CB-0BBA-0737859315D4}"/>
+              </a:ext>
+            </a:extLst>
+          </p:cNvPr>
+          <p:cNvSpPr txBox="1">
+            <a:spLocks noGrp="1"/>
+          </p:cNvSpPr>
+          <p:nvPr>
+            <p:ph type="sldNum" idx="12"/>
+          </p:nvPr>
+        </p:nvSpPr>
+        <p:spPr>
+          <a:xfrm>
+            <a:off x="8737600" y="6356351"/>
+            <a:ext cx="2844800" cy="365125"/>
+          </a:xfrm>
+          <a:prstGeom prst="rect">
+            <a:avLst/>
+          </a:prstGeom>
+          <a:noFill/>
+          <a:ln>
+            <a:noFill/>
+          </a:ln>
+        </p:spPr>
+        <p:txBody>
+          <a:bodyPr spcFirstLastPara="1" wrap="square" lIns="91425" tIns="45700" rIns="91425" bIns="45700" anchor="ctr" anchorCtr="0">
+            <a:noAutofit/>
+          </a:bodyPr>
+          <a:lstStyle/>
+          <a:p>
+            <a:pPr marL="0" marR="0" lvl="0" indent="0" algn="r" rtl="0">
+              <a:spcBef>
+                <a:spcPts val="0"/>
+              </a:spcBef>
+              <a:spcAft>
+                <a:spcPts val="0"/>
+              </a:spcAft>
+              <a:buNone/>
+            </a:pPr>
+            <a:fld id="{00000000-1234-1234-1234-123412341234}" type="slidenum">
+              <a:rPr lang="en-US" sz="1200" b="0" i="0" u="none" strike="noStrike" cap="none">
+                <a:solidFill>
+                  <a:srgbClr val="10253F"/>
+                </a:solidFill>
+                <a:latin typeface="Calibri"/>
+                <a:ea typeface="Calibri"/>
+                <a:cs typeface="Calibri"/>
+                <a:sym typeface="Calibri"/>
+              </a:rPr>
+              <a:t>7</a:t>
+            </a:fld>
+            <a:endParaRPr sz="1200" b="0" i="0" u="none" strike="noStrike" cap="none" dirty="0">
+              <a:solidFill>
+                <a:srgbClr val="10253F"/>
+              </a:solidFill>
+              <a:latin typeface="Calibri"/>
+              <a:ea typeface="Calibri"/>
+              <a:cs typeface="Calibri"/>
+              <a:sym typeface="Calibri"/>
+            </a:endParaRPr>
+          </a:p>
+        </p:txBody>
+      </p:sp>
+      <p:sp>
+        <p:nvSpPr>
+          <p:cNvPr id="98" name="Google Shape;98;p2">
+            <a:extLst>
+              <a:ext uri="{FF2B5EF4-FFF2-40B4-BE49-F238E27FC236}">
+                <a16:creationId xmlns:a16="http://schemas.microsoft.com/office/drawing/2014/main" id="{81E557C8-531D-7E44-129B-55EBC71FE7B7}"/>
+              </a:ext>
+            </a:extLst>
+          </p:cNvPr>
+          <p:cNvSpPr txBox="1">
+            <a:spLocks noGrp="1"/>
+          </p:cNvSpPr>
+          <p:nvPr>
+            <p:ph type="dt" idx="10"/>
+          </p:nvPr>
+        </p:nvSpPr>
+        <p:spPr>
+          <a:xfrm>
+            <a:off x="609600" y="6356351"/>
+            <a:ext cx="2844800" cy="365125"/>
+          </a:xfrm>
+          <a:prstGeom prst="rect">
+            <a:avLst/>
+          </a:prstGeom>
+          <a:noFill/>
+          <a:ln>
+            <a:noFill/>
+          </a:ln>
+        </p:spPr>
+        <p:txBody>
+          <a:bodyPr spcFirstLastPara="1" wrap="square" lIns="91425" tIns="45700" rIns="91425" bIns="45700" anchor="ctr" anchorCtr="0">
+            <a:noAutofit/>
+          </a:bodyPr>
+          <a:lstStyle/>
+          <a:p>
+            <a:pPr lvl="0"/>
+            <a:r>
+              <a:rPr lang="en-US" altLang="zh-TW" dirty="0"/>
+              <a:t>2025/11/25</a:t>
+            </a:r>
+          </a:p>
+        </p:txBody>
+      </p:sp>
+      <p:sp>
+        <p:nvSpPr>
+          <p:cNvPr id="99" name="Google Shape;99;p2">
+            <a:extLst>
+              <a:ext uri="{FF2B5EF4-FFF2-40B4-BE49-F238E27FC236}">
+                <a16:creationId xmlns:a16="http://schemas.microsoft.com/office/drawing/2014/main" id="{79482F73-34D9-7690-4BFA-E9EF1BC4C77E}"/>
+              </a:ext>
+            </a:extLst>
+          </p:cNvPr>
+          <p:cNvSpPr txBox="1">
+            <a:spLocks noGrp="1"/>
+          </p:cNvSpPr>
+          <p:nvPr>
+            <p:ph type="ftr" idx="11"/>
+          </p:nvPr>
+        </p:nvSpPr>
+        <p:spPr>
+          <a:xfrm>
+            <a:off x="4165600" y="6356351"/>
+            <a:ext cx="3860800" cy="365125"/>
+          </a:xfrm>
+          <a:prstGeom prst="rect">
+            <a:avLst/>
+          </a:prstGeom>
+          <a:noFill/>
+          <a:ln>
+            <a:noFill/>
+          </a:ln>
+        </p:spPr>
+        <p:txBody>
+          <a:bodyPr spcFirstLastPara="1" wrap="square" lIns="91425" tIns="45700" rIns="91425" bIns="45700" anchor="ctr" anchorCtr="0">
+            <a:noAutofit/>
+          </a:bodyPr>
+          <a:lstStyle/>
+          <a:p>
+            <a:pPr marL="0" lvl="0" indent="0" algn="ctr" rtl="0">
+              <a:spcBef>
+                <a:spcPts val="0"/>
+              </a:spcBef>
+              <a:spcAft>
+                <a:spcPts val="0"/>
+              </a:spcAft>
+              <a:buNone/>
+            </a:pPr>
+            <a:r>
+              <a:rPr lang="en-US" dirty="0" err="1"/>
+              <a:t>軟體系統實驗室</a:t>
+            </a:r>
+            <a:endParaRPr dirty="0"/>
+          </a:p>
+        </p:txBody>
+      </p:sp>
+      <p:sp>
+        <p:nvSpPr>
+          <p:cNvPr id="100" name="Google Shape;100;p2">
+            <a:extLst>
+              <a:ext uri="{FF2B5EF4-FFF2-40B4-BE49-F238E27FC236}">
+                <a16:creationId xmlns:a16="http://schemas.microsoft.com/office/drawing/2014/main" id="{7EBE6929-E55A-6DF2-DABC-0A6D3CCAA2DA}"/>
+              </a:ext>
+            </a:extLst>
+          </p:cNvPr>
+          <p:cNvSpPr txBox="1">
+            <a:spLocks noGrp="1"/>
+          </p:cNvSpPr>
+          <p:nvPr>
+            <p:ph type="title"/>
+          </p:nvPr>
+        </p:nvSpPr>
+        <p:spPr>
+          <a:xfrm>
+            <a:off x="609600" y="274638"/>
+            <a:ext cx="10972800" cy="1143000"/>
+          </a:xfrm>
+          <a:prstGeom prst="rect">
+            <a:avLst/>
+          </a:prstGeom>
+          <a:noFill/>
+          <a:ln>
+            <a:noFill/>
+          </a:ln>
+        </p:spPr>
+        <p:txBody>
+          <a:bodyPr spcFirstLastPara="1" wrap="square" lIns="91425" tIns="45700" rIns="91425" bIns="45700" anchor="ctr" anchorCtr="0">
+            <a:noAutofit/>
+          </a:bodyPr>
+          <a:lstStyle/>
+          <a:p>
+            <a:r>
+              <a:rPr lang="en-US" altLang="zh-TW" dirty="0">
+                <a:latin typeface="Times New Roman" panose="02020603050405020304" pitchFamily="18" charset="0"/>
+                <a:cs typeface="Times New Roman" panose="02020603050405020304" pitchFamily="18" charset="0"/>
+              </a:rPr>
+              <a:t>Fundamentals</a:t>
+            </a:r>
+            <a:endParaRPr dirty="0">
+              <a:latin typeface="Times New Roman" panose="02020603050405020304" pitchFamily="18" charset="0"/>
+              <a:ea typeface="標楷體" panose="03000509000000000000" pitchFamily="65" charset="-120"/>
+              <a:cs typeface="Times New Roman" panose="02020603050405020304" pitchFamily="18" charset="0"/>
+            </a:endParaRPr>
+          </a:p>
+        </p:txBody>
+      </p:sp>
+      <p:sp>
+        <p:nvSpPr>
+          <p:cNvPr id="2" name="文字方塊 1">
+            <a:extLst>
+              <a:ext uri="{FF2B5EF4-FFF2-40B4-BE49-F238E27FC236}">
+                <a16:creationId xmlns:a16="http://schemas.microsoft.com/office/drawing/2014/main" id="{E61DA1D6-0E7C-73AB-5BE5-26439B82D797}"/>
+              </a:ext>
+            </a:extLst>
+          </p:cNvPr>
+          <p:cNvSpPr txBox="1"/>
+          <p:nvPr/>
+        </p:nvSpPr>
+        <p:spPr>
+          <a:xfrm>
+            <a:off x="318246" y="1417638"/>
+            <a:ext cx="11555506" cy="769441"/>
+          </a:xfrm>
+          <a:prstGeom prst="rect">
+            <a:avLst/>
+          </a:prstGeom>
+          <a:noFill/>
+        </p:spPr>
+        <p:txBody>
+          <a:bodyPr wrap="square">
+            <a:spAutoFit/>
+          </a:bodyPr>
+          <a:lstStyle/>
+          <a:p>
+            <a:r>
+              <a:rPr lang="en-US" altLang="zh-TW" sz="2200" dirty="0">
+                <a:latin typeface="Times New Roman" panose="02020603050405020304" pitchFamily="18" charset="0"/>
+                <a:ea typeface="標楷體" panose="03000509000000000000" pitchFamily="65" charset="-120"/>
+                <a:cs typeface="Times New Roman" panose="02020603050405020304" pitchFamily="18" charset="0"/>
+              </a:rPr>
+              <a:t>YAML frontmatter: The most important part</a:t>
+            </a:r>
+            <a:endParaRPr lang="zh-TW" altLang="en-US" sz="2200" dirty="0">
+              <a:latin typeface="Times New Roman" panose="02020603050405020304" pitchFamily="18" charset="0"/>
+              <a:ea typeface="標楷體" panose="03000509000000000000" pitchFamily="65" charset="-120"/>
+              <a:cs typeface="Times New Roman" panose="02020603050405020304" pitchFamily="18" charset="0"/>
+            </a:endParaRPr>
+          </a:p>
+          <a:p>
+            <a:pPr>
+              <a:buNone/>
+            </a:pPr>
+            <a:r>
+              <a:rPr lang="en-US" altLang="zh-TW" sz="2200" dirty="0">
+                <a:latin typeface="Times New Roman" panose="02020603050405020304" pitchFamily="18" charset="0"/>
+                <a:ea typeface="標楷體" panose="03000509000000000000" pitchFamily="65" charset="-120"/>
+                <a:cs typeface="Times New Roman" panose="02020603050405020304" pitchFamily="18" charset="0"/>
+              </a:rPr>
+              <a:t>The YAML frontmatter is how Claude decides whether to load your skill. Get this right.</a:t>
+            </a:r>
+            <a:endParaRPr lang="zh-TW" altLang="en-US" sz="2200" dirty="0">
+              <a:latin typeface="Times New Roman" panose="02020603050405020304" pitchFamily="18" charset="0"/>
+              <a:ea typeface="標楷體" panose="03000509000000000000" pitchFamily="65" charset="-120"/>
+              <a:cs typeface="Times New Roman" panose="02020603050405020304" pitchFamily="18" charset="0"/>
+            </a:endParaRPr>
+          </a:p>
+        </p:txBody>
+      </p:sp>
+      <p:pic>
+        <p:nvPicPr>
+          <p:cNvPr id="5" name="圖片 4">
+            <a:extLst>
+              <a:ext uri="{FF2B5EF4-FFF2-40B4-BE49-F238E27FC236}">
+                <a16:creationId xmlns:a16="http://schemas.microsoft.com/office/drawing/2014/main" id="{71331E61-503B-313D-EDC4-B80CE66705FC}"/>
+              </a:ext>
+            </a:extLst>
+          </p:cNvPr>
+          <p:cNvPicPr>
+            <a:picLocks noChangeAspect="1"/>
+          </p:cNvPicPr>
+          <p:nvPr/>
+        </p:nvPicPr>
+        <p:blipFill>
+          <a:blip r:embed="rId3"/>
+          <a:stretch>
+            <a:fillRect/>
+          </a:stretch>
+        </p:blipFill>
+        <p:spPr>
+          <a:xfrm>
+            <a:off x="434787" y="3330079"/>
+            <a:ext cx="6339716" cy="1613369"/>
+          </a:xfrm>
+          <a:prstGeom prst="rect">
+            <a:avLst/>
+          </a:prstGeom>
+        </p:spPr>
+      </p:pic>
+      <p:pic>
+        <p:nvPicPr>
+          <p:cNvPr id="8" name="圖片 7">
+            <a:extLst>
+              <a:ext uri="{FF2B5EF4-FFF2-40B4-BE49-F238E27FC236}">
+                <a16:creationId xmlns:a16="http://schemas.microsoft.com/office/drawing/2014/main" id="{29FA0304-E054-F639-DA35-6DBB57A7A60E}"/>
+              </a:ext>
+            </a:extLst>
+          </p:cNvPr>
+          <p:cNvPicPr>
+            <a:picLocks noChangeAspect="1"/>
+          </p:cNvPicPr>
+          <p:nvPr/>
+        </p:nvPicPr>
+        <p:blipFill>
+          <a:blip r:embed="rId4"/>
+          <a:stretch>
+            <a:fillRect/>
+          </a:stretch>
+        </p:blipFill>
+        <p:spPr>
+          <a:xfrm>
+            <a:off x="7318068" y="2206076"/>
+            <a:ext cx="2581635" cy="1524213"/>
+          </a:xfrm>
+          <a:prstGeom prst="rect">
+            <a:avLst/>
+          </a:prstGeom>
+        </p:spPr>
+      </p:pic>
+      <p:pic>
+        <p:nvPicPr>
+          <p:cNvPr id="10" name="圖片 9">
+            <a:extLst>
+              <a:ext uri="{FF2B5EF4-FFF2-40B4-BE49-F238E27FC236}">
+                <a16:creationId xmlns:a16="http://schemas.microsoft.com/office/drawing/2014/main" id="{39C42BFD-434F-F438-1737-C97BCC1FA9FA}"/>
+              </a:ext>
+            </a:extLst>
+          </p:cNvPr>
+          <p:cNvPicPr>
+            <a:picLocks noChangeAspect="1"/>
+          </p:cNvPicPr>
+          <p:nvPr/>
+        </p:nvPicPr>
+        <p:blipFill>
+          <a:blip r:embed="rId5"/>
+          <a:stretch>
+            <a:fillRect/>
+          </a:stretch>
+        </p:blipFill>
+        <p:spPr>
+          <a:xfrm>
+            <a:off x="7318068" y="3820726"/>
+            <a:ext cx="3429479" cy="2762636"/>
+          </a:xfrm>
+          <a:prstGeom prst="rect">
+            <a:avLst/>
+          </a:prstGeom>
+        </p:spPr>
+      </p:pic>
+      <p:cxnSp>
+        <p:nvCxnSpPr>
+          <p:cNvPr id="12" name="直線單箭頭接點 11">
+            <a:extLst>
+              <a:ext uri="{FF2B5EF4-FFF2-40B4-BE49-F238E27FC236}">
+                <a16:creationId xmlns:a16="http://schemas.microsoft.com/office/drawing/2014/main" id="{4F9EC9EF-6FC3-5B55-94E2-099575E2F92A}"/>
+              </a:ext>
+            </a:extLst>
+          </p:cNvPr>
+          <p:cNvCxnSpPr>
+            <a:cxnSpLocks/>
+          </p:cNvCxnSpPr>
+          <p:nvPr/>
+        </p:nvCxnSpPr>
+        <p:spPr>
+          <a:xfrm flipV="1">
+            <a:off x="3173506" y="3048000"/>
+            <a:ext cx="4034118" cy="837352"/>
+          </a:xfrm>
+          <a:prstGeom prst="straightConnector1">
+            <a:avLst/>
+          </a:prstGeom>
+          <a:ln>
+            <a:tailEnd type="triangle"/>
+          </a:ln>
+        </p:spPr>
+        <p:style>
+          <a:lnRef idx="1">
+            <a:schemeClr val="accent2"/>
+          </a:lnRef>
+          <a:fillRef idx="0">
+            <a:schemeClr val="accent2"/>
+          </a:fillRef>
+          <a:effectRef idx="0">
+            <a:schemeClr val="accent2"/>
+          </a:effectRef>
+          <a:fontRef idx="minor">
+            <a:schemeClr val="tx1"/>
+          </a:fontRef>
+        </p:style>
+      </p:cxnSp>
+      <p:cxnSp>
+        <p:nvCxnSpPr>
+          <p:cNvPr id="15" name="直線單箭頭接點 14">
+            <a:extLst>
+              <a:ext uri="{FF2B5EF4-FFF2-40B4-BE49-F238E27FC236}">
+                <a16:creationId xmlns:a16="http://schemas.microsoft.com/office/drawing/2014/main" id="{98247D35-1C49-D723-42E5-C93478F7AEAB}"/>
+              </a:ext>
+            </a:extLst>
+          </p:cNvPr>
+          <p:cNvCxnSpPr/>
+          <p:nvPr/>
+        </p:nvCxnSpPr>
+        <p:spPr>
+          <a:xfrm>
+            <a:off x="6284259" y="4312024"/>
+            <a:ext cx="905435" cy="268941"/>
+          </a:xfrm>
+          <a:prstGeom prst="straightConnector1">
+            <a:avLst/>
+          </a:prstGeom>
+          <a:ln>
+            <a:tailEnd type="triangle"/>
+          </a:ln>
+        </p:spPr>
+        <p:style>
+          <a:lnRef idx="1">
+            <a:schemeClr val="accent2"/>
+          </a:lnRef>
+          <a:fillRef idx="0">
+            <a:schemeClr val="accent2"/>
+          </a:fillRef>
+          <a:effectRef idx="0">
+            <a:schemeClr val="accent2"/>
+          </a:effectRef>
+          <a:fontRef idx="minor">
+            <a:schemeClr val="tx1"/>
+          </a:fontRef>
+        </p:style>
+      </p:cxnSp>
+    </p:spTree>
+    <p:extLst>
+      <p:ext uri="{BB962C8B-B14F-4D97-AF65-F5344CB8AC3E}">
+        <p14:creationId xmlns:p14="http://schemas.microsoft.com/office/powerpoint/2010/main" val="2167654207"/>
+      </p:ext>
+    </p:extLst>
+  </p:cSld>
+  <p:clrMapOvr>
+    <a:masterClrMapping/>
+  </p:clrMapOvr>
+</p:sld>
+</file>
+
+<file path=ppt/slides/slide8.xml><?xml version="1.0" encoding="utf-8"?>
+<p:sld xmlns:a="http://schemas.openxmlformats.org/drawingml/2006/main" xmlns:r="http://schemas.openxmlformats.org/officeDocument/2006/relationships" xmlns:p="http://schemas.openxmlformats.org/presentationml/2006/main">
+  <p:cSld>
+    <p:spTree>
+      <p:nvGrpSpPr>
+        <p:cNvPr id="1" name="Shape 96">
+          <a:extLst>
+            <a:ext uri="{FF2B5EF4-FFF2-40B4-BE49-F238E27FC236}">
+              <a16:creationId xmlns:a16="http://schemas.microsoft.com/office/drawing/2014/main" id="{032DCAF7-4575-CEB3-520A-D3BAD2EC4BDA}"/>
+            </a:ext>
+          </a:extLst>
+        </p:cNvPr>
+        <p:cNvGrpSpPr/>
+        <p:nvPr/>
+      </p:nvGrpSpPr>
+      <p:grpSpPr>
+        <a:xfrm>
+          <a:off x="0" y="0"/>
+          <a:ext cx="0" cy="0"/>
+          <a:chOff x="0" y="0"/>
+          <a:chExt cx="0" cy="0"/>
+        </a:xfrm>
+      </p:grpSpPr>
+      <p:sp>
+        <p:nvSpPr>
+          <p:cNvPr id="97" name="Google Shape;97;p2">
+            <a:extLst>
+              <a:ext uri="{FF2B5EF4-FFF2-40B4-BE49-F238E27FC236}">
+                <a16:creationId xmlns:a16="http://schemas.microsoft.com/office/drawing/2014/main" id="{57E7AF9A-DD62-D697-B6B7-DABF45AD10F7}"/>
+              </a:ext>
+            </a:extLst>
+          </p:cNvPr>
+          <p:cNvSpPr txBox="1">
+            <a:spLocks noGrp="1"/>
+          </p:cNvSpPr>
+          <p:nvPr>
+            <p:ph type="sldNum" idx="12"/>
+          </p:nvPr>
+        </p:nvSpPr>
+        <p:spPr>
+          <a:xfrm>
+            <a:off x="8737600" y="6356351"/>
+            <a:ext cx="2844800" cy="365125"/>
+          </a:xfrm>
+          <a:prstGeom prst="rect">
+            <a:avLst/>
+          </a:prstGeom>
+          <a:noFill/>
+          <a:ln>
+            <a:noFill/>
+          </a:ln>
+        </p:spPr>
+        <p:txBody>
+          <a:bodyPr spcFirstLastPara="1" wrap="square" lIns="91425" tIns="45700" rIns="91425" bIns="45700" anchor="ctr" anchorCtr="0">
+            <a:noAutofit/>
+          </a:bodyPr>
+          <a:lstStyle/>
+          <a:p>
+            <a:pPr marL="0" marR="0" lvl="0" indent="0" algn="r" rtl="0">
+              <a:spcBef>
+                <a:spcPts val="0"/>
+              </a:spcBef>
+              <a:spcAft>
+                <a:spcPts val="0"/>
+              </a:spcAft>
+              <a:buNone/>
+            </a:pPr>
+            <a:fld id="{00000000-1234-1234-1234-123412341234}" type="slidenum">
+              <a:rPr lang="en-US" sz="1200" b="0" i="0" u="none" strike="noStrike" cap="none">
+                <a:solidFill>
+                  <a:srgbClr val="10253F"/>
+                </a:solidFill>
+                <a:latin typeface="Calibri"/>
+                <a:ea typeface="Calibri"/>
+                <a:cs typeface="Calibri"/>
+                <a:sym typeface="Calibri"/>
+              </a:rPr>
+              <a:t>8</a:t>
+            </a:fld>
+            <a:endParaRPr sz="1200" b="0" i="0" u="none" strike="noStrike" cap="none" dirty="0">
+              <a:solidFill>
+                <a:srgbClr val="10253F"/>
+              </a:solidFill>
+              <a:latin typeface="Calibri"/>
+              <a:ea typeface="Calibri"/>
+              <a:cs typeface="Calibri"/>
+              <a:sym typeface="Calibri"/>
+            </a:endParaRPr>
+          </a:p>
+        </p:txBody>
+      </p:sp>
+      <p:sp>
+        <p:nvSpPr>
+          <p:cNvPr id="98" name="Google Shape;98;p2">
+            <a:extLst>
+              <a:ext uri="{FF2B5EF4-FFF2-40B4-BE49-F238E27FC236}">
+                <a16:creationId xmlns:a16="http://schemas.microsoft.com/office/drawing/2014/main" id="{9A557A37-29EC-91F6-32CD-A1BC4AB9AED3}"/>
+              </a:ext>
+            </a:extLst>
+          </p:cNvPr>
+          <p:cNvSpPr txBox="1">
+            <a:spLocks noGrp="1"/>
+          </p:cNvSpPr>
+          <p:nvPr>
+            <p:ph type="dt" idx="10"/>
+          </p:nvPr>
+        </p:nvSpPr>
+        <p:spPr>
+          <a:xfrm>
+            <a:off x="609600" y="6356351"/>
+            <a:ext cx="2844800" cy="365125"/>
+          </a:xfrm>
+          <a:prstGeom prst="rect">
+            <a:avLst/>
+          </a:prstGeom>
+          <a:noFill/>
+          <a:ln>
+            <a:noFill/>
+          </a:ln>
+        </p:spPr>
+        <p:txBody>
+          <a:bodyPr spcFirstLastPara="1" wrap="square" lIns="91425" tIns="45700" rIns="91425" bIns="45700" anchor="ctr" anchorCtr="0">
+            <a:noAutofit/>
+          </a:bodyPr>
+          <a:lstStyle/>
+          <a:p>
+            <a:pPr lvl="0"/>
+            <a:r>
+              <a:rPr lang="en-US" altLang="zh-TW" dirty="0"/>
+              <a:t>2025/11/25</a:t>
+            </a:r>
+          </a:p>
+        </p:txBody>
+      </p:sp>
+      <p:sp>
+        <p:nvSpPr>
+          <p:cNvPr id="99" name="Google Shape;99;p2">
+            <a:extLst>
+              <a:ext uri="{FF2B5EF4-FFF2-40B4-BE49-F238E27FC236}">
+                <a16:creationId xmlns:a16="http://schemas.microsoft.com/office/drawing/2014/main" id="{5193EBCC-AE01-E435-C57C-6CA84CA29CDA}"/>
+              </a:ext>
+            </a:extLst>
+          </p:cNvPr>
+          <p:cNvSpPr txBox="1">
+            <a:spLocks noGrp="1"/>
+          </p:cNvSpPr>
+          <p:nvPr>
+            <p:ph type="ftr" idx="11"/>
+          </p:nvPr>
+        </p:nvSpPr>
+        <p:spPr>
+          <a:xfrm>
+            <a:off x="4165600" y="6356351"/>
+            <a:ext cx="3860800" cy="365125"/>
+          </a:xfrm>
+          <a:prstGeom prst="rect">
+            <a:avLst/>
+          </a:prstGeom>
+          <a:noFill/>
+          <a:ln>
+            <a:noFill/>
+          </a:ln>
+        </p:spPr>
+        <p:txBody>
+          <a:bodyPr spcFirstLastPara="1" wrap="square" lIns="91425" tIns="45700" rIns="91425" bIns="45700" anchor="ctr" anchorCtr="0">
+            <a:noAutofit/>
+          </a:bodyPr>
+          <a:lstStyle/>
+          <a:p>
+            <a:pPr marL="0" lvl="0" indent="0" algn="ctr" rtl="0">
+              <a:spcBef>
+                <a:spcPts val="0"/>
+              </a:spcBef>
+              <a:spcAft>
+                <a:spcPts val="0"/>
+              </a:spcAft>
+              <a:buNone/>
+            </a:pPr>
+            <a:r>
+              <a:rPr lang="en-US" dirty="0" err="1"/>
+              <a:t>軟體系統實驗室</a:t>
+            </a:r>
+            <a:endParaRPr dirty="0"/>
+          </a:p>
+        </p:txBody>
+      </p:sp>
+      <p:sp>
+        <p:nvSpPr>
+          <p:cNvPr id="100" name="Google Shape;100;p2">
+            <a:extLst>
+              <a:ext uri="{FF2B5EF4-FFF2-40B4-BE49-F238E27FC236}">
+                <a16:creationId xmlns:a16="http://schemas.microsoft.com/office/drawing/2014/main" id="{A8012401-0DB2-E0D0-C697-1A6AF5E5BA7A}"/>
+              </a:ext>
+            </a:extLst>
+          </p:cNvPr>
+          <p:cNvSpPr txBox="1">
+            <a:spLocks noGrp="1"/>
+          </p:cNvSpPr>
+          <p:nvPr>
+            <p:ph type="title"/>
+          </p:nvPr>
+        </p:nvSpPr>
+        <p:spPr>
+          <a:xfrm>
+            <a:off x="609600" y="274638"/>
+            <a:ext cx="10972800" cy="1143000"/>
+          </a:xfrm>
+          <a:prstGeom prst="rect">
+            <a:avLst/>
+          </a:prstGeom>
+          <a:noFill/>
+          <a:ln>
+            <a:noFill/>
+          </a:ln>
+        </p:spPr>
+        <p:txBody>
+          <a:bodyPr spcFirstLastPara="1" wrap="square" lIns="91425" tIns="45700" rIns="91425" bIns="45700" anchor="ctr" anchorCtr="0">
+            <a:noAutofit/>
+          </a:bodyPr>
+          <a:lstStyle/>
+          <a:p>
+            <a:r>
+              <a:rPr lang="en-US" altLang="zh-TW" dirty="0">
+                <a:latin typeface="Times New Roman" panose="02020603050405020304" pitchFamily="18" charset="0"/>
+                <a:cs typeface="Times New Roman" panose="02020603050405020304" pitchFamily="18" charset="0"/>
+              </a:rPr>
+              <a:t>Fundamentals</a:t>
+            </a:r>
+            <a:endParaRPr dirty="0">
+              <a:latin typeface="Times New Roman" panose="02020603050405020304" pitchFamily="18" charset="0"/>
+              <a:ea typeface="標楷體" panose="03000509000000000000" pitchFamily="65" charset="-120"/>
+              <a:cs typeface="Times New Roman" panose="02020603050405020304" pitchFamily="18" charset="0"/>
+            </a:endParaRPr>
+          </a:p>
+        </p:txBody>
+      </p:sp>
+      <p:sp>
+        <p:nvSpPr>
+          <p:cNvPr id="6" name="文字方塊 5">
+            <a:extLst>
+              <a:ext uri="{FF2B5EF4-FFF2-40B4-BE49-F238E27FC236}">
+                <a16:creationId xmlns:a16="http://schemas.microsoft.com/office/drawing/2014/main" id="{CDC6F7EE-2FD4-73C0-249A-2D80DE7EE744}"/>
+              </a:ext>
+            </a:extLst>
+          </p:cNvPr>
+          <p:cNvSpPr txBox="1"/>
+          <p:nvPr/>
+        </p:nvSpPr>
+        <p:spPr>
+          <a:xfrm>
+            <a:off x="609600" y="1418295"/>
+            <a:ext cx="11555506" cy="430887"/>
+          </a:xfrm>
+          <a:prstGeom prst="rect">
+            <a:avLst/>
+          </a:prstGeom>
+          <a:noFill/>
+        </p:spPr>
+        <p:txBody>
+          <a:bodyPr wrap="square">
+            <a:spAutoFit/>
+          </a:bodyPr>
+          <a:lstStyle/>
+          <a:p>
+            <a:pPr>
+              <a:buNone/>
+            </a:pPr>
+            <a:r>
+              <a:rPr lang="en-US" altLang="zh-TW" sz="2200" dirty="0">
+                <a:latin typeface="Times New Roman" panose="02020603050405020304" pitchFamily="18" charset="0"/>
+                <a:ea typeface="標楷體" panose="03000509000000000000" pitchFamily="65" charset="-120"/>
+              </a:rPr>
+              <a:t>File structure</a:t>
+            </a:r>
+            <a:endParaRPr lang="zh-TW" altLang="en-US" sz="2200" dirty="0">
+              <a:latin typeface="Times New Roman" panose="02020603050405020304" pitchFamily="18" charset="0"/>
+              <a:ea typeface="標楷體" panose="03000509000000000000" pitchFamily="65" charset="-120"/>
+            </a:endParaRPr>
+          </a:p>
+        </p:txBody>
+      </p:sp>
+      <p:pic>
+        <p:nvPicPr>
+          <p:cNvPr id="4" name="圖片 3">
+            <a:extLst>
+              <a:ext uri="{FF2B5EF4-FFF2-40B4-BE49-F238E27FC236}">
+                <a16:creationId xmlns:a16="http://schemas.microsoft.com/office/drawing/2014/main" id="{53FD0FB9-175D-AA99-879D-70D38AE0298A}"/>
+              </a:ext>
+            </a:extLst>
+          </p:cNvPr>
+          <p:cNvPicPr>
+            <a:picLocks noChangeAspect="1"/>
+          </p:cNvPicPr>
+          <p:nvPr/>
+        </p:nvPicPr>
+        <p:blipFill>
+          <a:blip r:embed="rId3"/>
+          <a:stretch>
+            <a:fillRect/>
+          </a:stretch>
+        </p:blipFill>
+        <p:spPr>
+          <a:xfrm>
+            <a:off x="2208445" y="2071498"/>
+            <a:ext cx="7611505" cy="3746596"/>
+          </a:xfrm>
+          <a:prstGeom prst="rect">
+            <a:avLst/>
+          </a:prstGeom>
+        </p:spPr>
+      </p:pic>
+    </p:spTree>
+    <p:extLst>
+      <p:ext uri="{BB962C8B-B14F-4D97-AF65-F5344CB8AC3E}">
+        <p14:creationId xmlns:p14="http://schemas.microsoft.com/office/powerpoint/2010/main" val="1624660288"/>
+      </p:ext>
+    </p:extLst>
+  </p:cSld>
+  <p:clrMapOvr>
+    <a:masterClrMapping/>
+  </p:clrMapOvr>
+</p:sld>
+</file>
+
+<file path=ppt/slides/slide9.xml><?xml version="1.0" encoding="utf-8"?>
+<p:sld xmlns:a="http://schemas.openxmlformats.org/drawingml/2006/main" xmlns:r="http://schemas.openxmlformats.org/officeDocument/2006/relationships" xmlns:p="http://schemas.openxmlformats.org/presentationml/2006/main">
+  <p:cSld>
+    <p:spTree>
+      <p:nvGrpSpPr>
+        <p:cNvPr id="1" name="Shape 96">
+          <a:extLst>
+            <a:ext uri="{FF2B5EF4-FFF2-40B4-BE49-F238E27FC236}">
               <a16:creationId xmlns:a16="http://schemas.microsoft.com/office/drawing/2014/main" id="{4630410B-FA5B-EDB1-4629-DE090363E701}"/>
             </a:ext>
           </a:extLst>
@@ -27097,7 +29400,7 @@
                 <a:cs typeface="Calibri"/>
                 <a:sym typeface="Calibri"/>
               </a:rPr>
-              <a:t>7</a:t>
+              <a:t>9</a:t>
             </a:fld>
             <a:endParaRPr sz="1200" b="0" i="0" u="none" strike="noStrike" cap="none" dirty="0">
               <a:solidFill>
@@ -27663,956 +29966,6 @@
     <p:extLst>
       <p:ext uri="{BB962C8B-B14F-4D97-AF65-F5344CB8AC3E}">
         <p14:creationId xmlns:p14="http://schemas.microsoft.com/office/powerpoint/2010/main" val="212039844"/>
-      </p:ext>
-    </p:extLst>
-  </p:cSld>
-  <p:clrMapOvr>
-    <a:masterClrMapping/>
-  </p:clrMapOvr>
-</p:sld>
-</file>
-
-<file path=ppt/slides/slide8.xml><?xml version="1.0" encoding="utf-8"?>
-<p:sld xmlns:a="http://schemas.openxmlformats.org/drawingml/2006/main" xmlns:r="http://schemas.openxmlformats.org/officeDocument/2006/relationships" xmlns:p="http://schemas.openxmlformats.org/presentationml/2006/main">
-  <p:cSld>
-    <p:spTree>
-      <p:nvGrpSpPr>
-        <p:cNvPr id="1" name="Shape 96">
-          <a:extLst>
-            <a:ext uri="{FF2B5EF4-FFF2-40B4-BE49-F238E27FC236}">
-              <a16:creationId xmlns:a16="http://schemas.microsoft.com/office/drawing/2014/main" id="{2AE80049-1707-06C5-213E-D93DA334F4CA}"/>
-            </a:ext>
-          </a:extLst>
-        </p:cNvPr>
-        <p:cNvGrpSpPr/>
-        <p:nvPr/>
-      </p:nvGrpSpPr>
-      <p:grpSpPr>
-        <a:xfrm>
-          <a:off x="0" y="0"/>
-          <a:ext cx="0" cy="0"/>
-          <a:chOff x="0" y="0"/>
-          <a:chExt cx="0" cy="0"/>
-        </a:xfrm>
-      </p:grpSpPr>
-      <p:sp>
-        <p:nvSpPr>
-          <p:cNvPr id="97" name="Google Shape;97;p2">
-            <a:extLst>
-              <a:ext uri="{FF2B5EF4-FFF2-40B4-BE49-F238E27FC236}">
-                <a16:creationId xmlns:a16="http://schemas.microsoft.com/office/drawing/2014/main" id="{ED722555-D2CF-5A6A-CC0B-A05A22AE1AD3}"/>
-              </a:ext>
-            </a:extLst>
-          </p:cNvPr>
-          <p:cNvSpPr txBox="1">
-            <a:spLocks noGrp="1"/>
-          </p:cNvSpPr>
-          <p:nvPr>
-            <p:ph type="sldNum" idx="12"/>
-          </p:nvPr>
-        </p:nvSpPr>
-        <p:spPr>
-          <a:xfrm>
-            <a:off x="8737600" y="6356351"/>
-            <a:ext cx="2844800" cy="365125"/>
-          </a:xfrm>
-          <a:prstGeom prst="rect">
-            <a:avLst/>
-          </a:prstGeom>
-          <a:noFill/>
-          <a:ln>
-            <a:noFill/>
-          </a:ln>
-        </p:spPr>
-        <p:txBody>
-          <a:bodyPr spcFirstLastPara="1" wrap="square" lIns="91425" tIns="45700" rIns="91425" bIns="45700" anchor="ctr" anchorCtr="0">
-            <a:noAutofit/>
-          </a:bodyPr>
-          <a:lstStyle/>
-          <a:p>
-            <a:pPr marL="0" marR="0" lvl="0" indent="0" algn="r" rtl="0">
-              <a:spcBef>
-                <a:spcPts val="0"/>
-              </a:spcBef>
-              <a:spcAft>
-                <a:spcPts val="0"/>
-              </a:spcAft>
-              <a:buNone/>
-            </a:pPr>
-            <a:fld id="{00000000-1234-1234-1234-123412341234}" type="slidenum">
-              <a:rPr lang="en-US" sz="1200" b="0" i="0" u="none" strike="noStrike" cap="none">
-                <a:solidFill>
-                  <a:srgbClr val="10253F"/>
-                </a:solidFill>
-                <a:latin typeface="Calibri"/>
-                <a:ea typeface="Calibri"/>
-                <a:cs typeface="Calibri"/>
-                <a:sym typeface="Calibri"/>
-              </a:rPr>
-              <a:t>8</a:t>
-            </a:fld>
-            <a:endParaRPr sz="1200" b="0" i="0" u="none" strike="noStrike" cap="none" dirty="0">
-              <a:solidFill>
-                <a:srgbClr val="10253F"/>
-              </a:solidFill>
-              <a:latin typeface="Calibri"/>
-              <a:ea typeface="Calibri"/>
-              <a:cs typeface="Calibri"/>
-              <a:sym typeface="Calibri"/>
-            </a:endParaRPr>
-          </a:p>
-        </p:txBody>
-      </p:sp>
-      <p:sp>
-        <p:nvSpPr>
-          <p:cNvPr id="98" name="Google Shape;98;p2">
-            <a:extLst>
-              <a:ext uri="{FF2B5EF4-FFF2-40B4-BE49-F238E27FC236}">
-                <a16:creationId xmlns:a16="http://schemas.microsoft.com/office/drawing/2014/main" id="{7F4895DA-8AFC-82F3-F130-62D73482F06F}"/>
-              </a:ext>
-            </a:extLst>
-          </p:cNvPr>
-          <p:cNvSpPr txBox="1">
-            <a:spLocks noGrp="1"/>
-          </p:cNvSpPr>
-          <p:nvPr>
-            <p:ph type="dt" idx="10"/>
-          </p:nvPr>
-        </p:nvSpPr>
-        <p:spPr>
-          <a:xfrm>
-            <a:off x="609600" y="6356351"/>
-            <a:ext cx="2844800" cy="365125"/>
-          </a:xfrm>
-          <a:prstGeom prst="rect">
-            <a:avLst/>
-          </a:prstGeom>
-          <a:noFill/>
-          <a:ln>
-            <a:noFill/>
-          </a:ln>
-        </p:spPr>
-        <p:txBody>
-          <a:bodyPr spcFirstLastPara="1" wrap="square" lIns="91425" tIns="45700" rIns="91425" bIns="45700" anchor="ctr" anchorCtr="0">
-            <a:noAutofit/>
-          </a:bodyPr>
-          <a:lstStyle/>
-          <a:p>
-            <a:pPr lvl="0"/>
-            <a:r>
-              <a:rPr lang="en-US" altLang="zh-TW" dirty="0"/>
-              <a:t>2025/11/25</a:t>
-            </a:r>
-          </a:p>
-        </p:txBody>
-      </p:sp>
-      <p:sp>
-        <p:nvSpPr>
-          <p:cNvPr id="99" name="Google Shape;99;p2">
-            <a:extLst>
-              <a:ext uri="{FF2B5EF4-FFF2-40B4-BE49-F238E27FC236}">
-                <a16:creationId xmlns:a16="http://schemas.microsoft.com/office/drawing/2014/main" id="{0AE457D0-2A56-E3E3-A8E2-526949371D29}"/>
-              </a:ext>
-            </a:extLst>
-          </p:cNvPr>
-          <p:cNvSpPr txBox="1">
-            <a:spLocks noGrp="1"/>
-          </p:cNvSpPr>
-          <p:nvPr>
-            <p:ph type="ftr" idx="11"/>
-          </p:nvPr>
-        </p:nvSpPr>
-        <p:spPr>
-          <a:xfrm>
-            <a:off x="4165600" y="6356351"/>
-            <a:ext cx="3860800" cy="365125"/>
-          </a:xfrm>
-          <a:prstGeom prst="rect">
-            <a:avLst/>
-          </a:prstGeom>
-          <a:noFill/>
-          <a:ln>
-            <a:noFill/>
-          </a:ln>
-        </p:spPr>
-        <p:txBody>
-          <a:bodyPr spcFirstLastPara="1" wrap="square" lIns="91425" tIns="45700" rIns="91425" bIns="45700" anchor="ctr" anchorCtr="0">
-            <a:noAutofit/>
-          </a:bodyPr>
-          <a:lstStyle/>
-          <a:p>
-            <a:pPr marL="0" lvl="0" indent="0" algn="ctr" rtl="0">
-              <a:spcBef>
-                <a:spcPts val="0"/>
-              </a:spcBef>
-              <a:spcAft>
-                <a:spcPts val="0"/>
-              </a:spcAft>
-              <a:buNone/>
-            </a:pPr>
-            <a:r>
-              <a:rPr lang="en-US" dirty="0" err="1"/>
-              <a:t>軟體系統實驗室</a:t>
-            </a:r>
-            <a:endParaRPr dirty="0"/>
-          </a:p>
-        </p:txBody>
-      </p:sp>
-      <p:sp>
-        <p:nvSpPr>
-          <p:cNvPr id="7" name="Google Shape;100;p2">
-            <a:extLst>
-              <a:ext uri="{FF2B5EF4-FFF2-40B4-BE49-F238E27FC236}">
-                <a16:creationId xmlns:a16="http://schemas.microsoft.com/office/drawing/2014/main" id="{59C2EDC7-DD00-D1FD-EC94-9A42B1A7AC0D}"/>
-              </a:ext>
-            </a:extLst>
-          </p:cNvPr>
-          <p:cNvSpPr txBox="1">
-            <a:spLocks noGrp="1"/>
-          </p:cNvSpPr>
-          <p:nvPr>
-            <p:ph type="title"/>
-          </p:nvPr>
-        </p:nvSpPr>
-        <p:spPr>
-          <a:xfrm>
-            <a:off x="609600" y="274638"/>
-            <a:ext cx="10972800" cy="1143000"/>
-          </a:xfrm>
-          <a:prstGeom prst="rect">
-            <a:avLst/>
-          </a:prstGeom>
-          <a:noFill/>
-          <a:ln>
-            <a:noFill/>
-          </a:ln>
-        </p:spPr>
-        <p:txBody>
-          <a:bodyPr spcFirstLastPara="1" wrap="square" lIns="91425" tIns="45700" rIns="91425" bIns="45700" anchor="ctr" anchorCtr="0">
-            <a:noAutofit/>
-          </a:bodyPr>
-          <a:lstStyle/>
-          <a:p>
-            <a:r>
-              <a:rPr lang="en-US" altLang="zh-TW" dirty="0">
-                <a:latin typeface="Times New Roman" panose="02020603050405020304" pitchFamily="18" charset="0"/>
-                <a:ea typeface="標楷體" panose="03000509000000000000" pitchFamily="65" charset="-120"/>
-                <a:cs typeface="Times New Roman" panose="02020603050405020304" pitchFamily="18" charset="0"/>
-              </a:rPr>
-              <a:t>Common </a:t>
-            </a:r>
-            <a:r>
-              <a:rPr lang="en-US" altLang="zh-TW" dirty="0" err="1">
-                <a:latin typeface="Times New Roman" panose="02020603050405020304" pitchFamily="18" charset="0"/>
-                <a:ea typeface="標楷體" panose="03000509000000000000" pitchFamily="65" charset="-120"/>
-                <a:cs typeface="Times New Roman" panose="02020603050405020304" pitchFamily="18" charset="0"/>
-              </a:rPr>
-              <a:t>UseCase</a:t>
-            </a:r>
-            <a:endParaRPr dirty="0">
-              <a:latin typeface="Times New Roman" panose="02020603050405020304" pitchFamily="18" charset="0"/>
-              <a:ea typeface="標楷體" panose="03000509000000000000" pitchFamily="65" charset="-120"/>
-              <a:cs typeface="Times New Roman" panose="02020603050405020304" pitchFamily="18" charset="0"/>
-            </a:endParaRPr>
-          </a:p>
-        </p:txBody>
-      </p:sp>
-      <p:pic>
-        <p:nvPicPr>
-          <p:cNvPr id="11" name="圖片 10">
-            <a:extLst>
-              <a:ext uri="{FF2B5EF4-FFF2-40B4-BE49-F238E27FC236}">
-                <a16:creationId xmlns:a16="http://schemas.microsoft.com/office/drawing/2014/main" id="{25DC425D-77C1-93F0-07C9-9DDEB71B4F6B}"/>
-              </a:ext>
-            </a:extLst>
-          </p:cNvPr>
-          <p:cNvPicPr>
-            <a:picLocks noChangeAspect="1"/>
-          </p:cNvPicPr>
-          <p:nvPr/>
-        </p:nvPicPr>
-        <p:blipFill>
-          <a:blip r:embed="rId3"/>
-          <a:stretch>
-            <a:fillRect/>
-          </a:stretch>
-        </p:blipFill>
-        <p:spPr>
-          <a:xfrm>
-            <a:off x="609600" y="1417638"/>
-            <a:ext cx="11015713" cy="4938713"/>
-          </a:xfrm>
-          <a:prstGeom prst="rect">
-            <a:avLst/>
-          </a:prstGeom>
-        </p:spPr>
-      </p:pic>
-      <p:sp>
-        <p:nvSpPr>
-          <p:cNvPr id="2" name="矩形 1">
-            <a:extLst>
-              <a:ext uri="{FF2B5EF4-FFF2-40B4-BE49-F238E27FC236}">
-                <a16:creationId xmlns:a16="http://schemas.microsoft.com/office/drawing/2014/main" id="{09A204A5-8391-FB87-1F87-6CF64CACF63D}"/>
-              </a:ext>
-            </a:extLst>
-          </p:cNvPr>
-          <p:cNvSpPr/>
-          <p:nvPr/>
-        </p:nvSpPr>
-        <p:spPr>
-          <a:xfrm>
-            <a:off x="1210235" y="2160494"/>
-            <a:ext cx="10219765" cy="2985247"/>
-          </a:xfrm>
-          <a:prstGeom prst="rect">
-            <a:avLst/>
-          </a:prstGeom>
-          <a:noFill/>
-          <a:ln>
-            <a:solidFill>
-              <a:srgbClr val="FF0000"/>
-            </a:solidFill>
-          </a:ln>
-        </p:spPr>
-        <p:style>
-          <a:lnRef idx="2">
-            <a:schemeClr val="accent1">
-              <a:shade val="15000"/>
-            </a:schemeClr>
-          </a:lnRef>
-          <a:fillRef idx="1">
-            <a:schemeClr val="accent1"/>
-          </a:fillRef>
-          <a:effectRef idx="0">
-            <a:schemeClr val="accent1"/>
-          </a:effectRef>
-          <a:fontRef idx="minor">
-            <a:schemeClr val="lt1"/>
-          </a:fontRef>
-        </p:style>
-        <p:txBody>
-          <a:bodyPr rtlCol="0" anchor="ctr"/>
-          <a:lstStyle/>
-          <a:p>
-            <a:pPr algn="ctr"/>
-            <a:endParaRPr lang="zh-TW" altLang="en-US"/>
-          </a:p>
-        </p:txBody>
-      </p:sp>
-    </p:spTree>
-    <p:extLst>
-      <p:ext uri="{BB962C8B-B14F-4D97-AF65-F5344CB8AC3E}">
-        <p14:creationId xmlns:p14="http://schemas.microsoft.com/office/powerpoint/2010/main" val="3270234014"/>
-      </p:ext>
-    </p:extLst>
-  </p:cSld>
-  <p:clrMapOvr>
-    <a:masterClrMapping/>
-  </p:clrMapOvr>
-</p:sld>
-</file>
-
-<file path=ppt/slides/slide9.xml><?xml version="1.0" encoding="utf-8"?>
-<p:sld xmlns:a="http://schemas.openxmlformats.org/drawingml/2006/main" xmlns:r="http://schemas.openxmlformats.org/officeDocument/2006/relationships" xmlns:p="http://schemas.openxmlformats.org/presentationml/2006/main">
-  <p:cSld>
-    <p:spTree>
-      <p:nvGrpSpPr>
-        <p:cNvPr id="1" name="Shape 96">
-          <a:extLst>
-            <a:ext uri="{FF2B5EF4-FFF2-40B4-BE49-F238E27FC236}">
-              <a16:creationId xmlns:a16="http://schemas.microsoft.com/office/drawing/2014/main" id="{51035089-A22E-1110-97B3-D57180398E34}"/>
-            </a:ext>
-          </a:extLst>
-        </p:cNvPr>
-        <p:cNvGrpSpPr/>
-        <p:nvPr/>
-      </p:nvGrpSpPr>
-      <p:grpSpPr>
-        <a:xfrm>
-          <a:off x="0" y="0"/>
-          <a:ext cx="0" cy="0"/>
-          <a:chOff x="0" y="0"/>
-          <a:chExt cx="0" cy="0"/>
-        </a:xfrm>
-      </p:grpSpPr>
-      <p:sp>
-        <p:nvSpPr>
-          <p:cNvPr id="97" name="Google Shape;97;p2">
-            <a:extLst>
-              <a:ext uri="{FF2B5EF4-FFF2-40B4-BE49-F238E27FC236}">
-                <a16:creationId xmlns:a16="http://schemas.microsoft.com/office/drawing/2014/main" id="{880E4470-4A11-9DF3-BBDD-9CBCFD3F3012}"/>
-              </a:ext>
-            </a:extLst>
-          </p:cNvPr>
-          <p:cNvSpPr txBox="1">
-            <a:spLocks noGrp="1"/>
-          </p:cNvSpPr>
-          <p:nvPr>
-            <p:ph type="sldNum" idx="12"/>
-          </p:nvPr>
-        </p:nvSpPr>
-        <p:spPr>
-          <a:xfrm>
-            <a:off x="8737600" y="6356351"/>
-            <a:ext cx="2844800" cy="365125"/>
-          </a:xfrm>
-          <a:prstGeom prst="rect">
-            <a:avLst/>
-          </a:prstGeom>
-          <a:noFill/>
-          <a:ln>
-            <a:noFill/>
-          </a:ln>
-        </p:spPr>
-        <p:txBody>
-          <a:bodyPr spcFirstLastPara="1" wrap="square" lIns="91425" tIns="45700" rIns="91425" bIns="45700" anchor="ctr" anchorCtr="0">
-            <a:noAutofit/>
-          </a:bodyPr>
-          <a:lstStyle/>
-          <a:p>
-            <a:pPr marL="0" marR="0" lvl="0" indent="0" algn="r" rtl="0">
-              <a:spcBef>
-                <a:spcPts val="0"/>
-              </a:spcBef>
-              <a:spcAft>
-                <a:spcPts val="0"/>
-              </a:spcAft>
-              <a:buNone/>
-            </a:pPr>
-            <a:fld id="{00000000-1234-1234-1234-123412341234}" type="slidenum">
-              <a:rPr lang="en-US" sz="1200" b="0" i="0" u="none" strike="noStrike" cap="none">
-                <a:solidFill>
-                  <a:srgbClr val="10253F"/>
-                </a:solidFill>
-                <a:latin typeface="Calibri"/>
-                <a:ea typeface="Calibri"/>
-                <a:cs typeface="Calibri"/>
-                <a:sym typeface="Calibri"/>
-              </a:rPr>
-              <a:t>9</a:t>
-            </a:fld>
-            <a:endParaRPr sz="1200" b="0" i="0" u="none" strike="noStrike" cap="none" dirty="0">
-              <a:solidFill>
-                <a:srgbClr val="10253F"/>
-              </a:solidFill>
-              <a:latin typeface="Calibri"/>
-              <a:ea typeface="Calibri"/>
-              <a:cs typeface="Calibri"/>
-              <a:sym typeface="Calibri"/>
-            </a:endParaRPr>
-          </a:p>
-        </p:txBody>
-      </p:sp>
-      <p:sp>
-        <p:nvSpPr>
-          <p:cNvPr id="98" name="Google Shape;98;p2">
-            <a:extLst>
-              <a:ext uri="{FF2B5EF4-FFF2-40B4-BE49-F238E27FC236}">
-                <a16:creationId xmlns:a16="http://schemas.microsoft.com/office/drawing/2014/main" id="{7BA1DAF5-3161-C3F3-1B89-57294AB613B9}"/>
-              </a:ext>
-            </a:extLst>
-          </p:cNvPr>
-          <p:cNvSpPr txBox="1">
-            <a:spLocks noGrp="1"/>
-          </p:cNvSpPr>
-          <p:nvPr>
-            <p:ph type="dt" idx="10"/>
-          </p:nvPr>
-        </p:nvSpPr>
-        <p:spPr>
-          <a:xfrm>
-            <a:off x="609600" y="6356351"/>
-            <a:ext cx="2844800" cy="365125"/>
-          </a:xfrm>
-          <a:prstGeom prst="rect">
-            <a:avLst/>
-          </a:prstGeom>
-          <a:noFill/>
-          <a:ln>
-            <a:noFill/>
-          </a:ln>
-        </p:spPr>
-        <p:txBody>
-          <a:bodyPr spcFirstLastPara="1" wrap="square" lIns="91425" tIns="45700" rIns="91425" bIns="45700" anchor="ctr" anchorCtr="0">
-            <a:noAutofit/>
-          </a:bodyPr>
-          <a:lstStyle/>
-          <a:p>
-            <a:pPr lvl="0"/>
-            <a:r>
-              <a:rPr lang="en-US" altLang="zh-TW" dirty="0"/>
-              <a:t>2025/11/25</a:t>
-            </a:r>
-          </a:p>
-        </p:txBody>
-      </p:sp>
-      <p:sp>
-        <p:nvSpPr>
-          <p:cNvPr id="99" name="Google Shape;99;p2">
-            <a:extLst>
-              <a:ext uri="{FF2B5EF4-FFF2-40B4-BE49-F238E27FC236}">
-                <a16:creationId xmlns:a16="http://schemas.microsoft.com/office/drawing/2014/main" id="{0A57FA6E-9CCB-4382-32D0-B8A8CDB45004}"/>
-              </a:ext>
-            </a:extLst>
-          </p:cNvPr>
-          <p:cNvSpPr txBox="1">
-            <a:spLocks noGrp="1"/>
-          </p:cNvSpPr>
-          <p:nvPr>
-            <p:ph type="ftr" idx="11"/>
-          </p:nvPr>
-        </p:nvSpPr>
-        <p:spPr>
-          <a:xfrm>
-            <a:off x="4165600" y="6356351"/>
-            <a:ext cx="3860800" cy="365125"/>
-          </a:xfrm>
-          <a:prstGeom prst="rect">
-            <a:avLst/>
-          </a:prstGeom>
-          <a:noFill/>
-          <a:ln>
-            <a:noFill/>
-          </a:ln>
-        </p:spPr>
-        <p:txBody>
-          <a:bodyPr spcFirstLastPara="1" wrap="square" lIns="91425" tIns="45700" rIns="91425" bIns="45700" anchor="ctr" anchorCtr="0">
-            <a:noAutofit/>
-          </a:bodyPr>
-          <a:lstStyle/>
-          <a:p>
-            <a:pPr marL="0" lvl="0" indent="0" algn="ctr" rtl="0">
-              <a:spcBef>
-                <a:spcPts val="0"/>
-              </a:spcBef>
-              <a:spcAft>
-                <a:spcPts val="0"/>
-              </a:spcAft>
-              <a:buNone/>
-            </a:pPr>
-            <a:r>
-              <a:rPr lang="en-US" dirty="0" err="1"/>
-              <a:t>軟體系統實驗室</a:t>
-            </a:r>
-            <a:endParaRPr dirty="0"/>
-          </a:p>
-        </p:txBody>
-      </p:sp>
-      <p:sp>
-        <p:nvSpPr>
-          <p:cNvPr id="100" name="Google Shape;100;p2">
-            <a:extLst>
-              <a:ext uri="{FF2B5EF4-FFF2-40B4-BE49-F238E27FC236}">
-                <a16:creationId xmlns:a16="http://schemas.microsoft.com/office/drawing/2014/main" id="{77D25056-EDA4-FF60-C0AB-1E212B3AF624}"/>
-              </a:ext>
-            </a:extLst>
-          </p:cNvPr>
-          <p:cNvSpPr txBox="1">
-            <a:spLocks noGrp="1"/>
-          </p:cNvSpPr>
-          <p:nvPr>
-            <p:ph type="title"/>
-          </p:nvPr>
-        </p:nvSpPr>
-        <p:spPr>
-          <a:xfrm>
-            <a:off x="609600" y="274638"/>
-            <a:ext cx="10972800" cy="1143000"/>
-          </a:xfrm>
-          <a:prstGeom prst="rect">
-            <a:avLst/>
-          </a:prstGeom>
-          <a:noFill/>
-          <a:ln>
-            <a:noFill/>
-          </a:ln>
-        </p:spPr>
-        <p:txBody>
-          <a:bodyPr spcFirstLastPara="1" wrap="square" lIns="91425" tIns="45700" rIns="91425" bIns="45700" anchor="ctr" anchorCtr="0">
-            <a:noAutofit/>
-          </a:bodyPr>
-          <a:lstStyle/>
-          <a:p>
-            <a:r>
-              <a:rPr lang="en-US" altLang="zh-TW" dirty="0">
-                <a:latin typeface="Times New Roman" panose="02020603050405020304" pitchFamily="18" charset="0"/>
-                <a:ea typeface="標楷體" panose="03000509000000000000" pitchFamily="65" charset="-120"/>
-                <a:cs typeface="Times New Roman" panose="02020603050405020304" pitchFamily="18" charset="0"/>
-              </a:rPr>
-              <a:t>Common </a:t>
-            </a:r>
-            <a:r>
-              <a:rPr lang="en-US" altLang="zh-TW" dirty="0" err="1">
-                <a:latin typeface="Times New Roman" panose="02020603050405020304" pitchFamily="18" charset="0"/>
-                <a:ea typeface="標楷體" panose="03000509000000000000" pitchFamily="65" charset="-120"/>
-                <a:cs typeface="Times New Roman" panose="02020603050405020304" pitchFamily="18" charset="0"/>
-              </a:rPr>
-              <a:t>UseCase</a:t>
-            </a:r>
-            <a:endParaRPr dirty="0">
-              <a:latin typeface="Times New Roman" panose="02020603050405020304" pitchFamily="18" charset="0"/>
-              <a:ea typeface="標楷體" panose="03000509000000000000" pitchFamily="65" charset="-120"/>
-              <a:cs typeface="Times New Roman" panose="02020603050405020304" pitchFamily="18" charset="0"/>
-            </a:endParaRPr>
-          </a:p>
-        </p:txBody>
-      </p:sp>
-      <p:sp>
-        <p:nvSpPr>
-          <p:cNvPr id="2" name="內容版面配置區 8">
-            <a:extLst>
-              <a:ext uri="{FF2B5EF4-FFF2-40B4-BE49-F238E27FC236}">
-                <a16:creationId xmlns:a16="http://schemas.microsoft.com/office/drawing/2014/main" id="{B18C19EF-2DCB-D023-AFFC-6D353758BE8D}"/>
-              </a:ext>
-            </a:extLst>
-          </p:cNvPr>
-          <p:cNvSpPr txBox="1">
-            <a:spLocks/>
-          </p:cNvSpPr>
-          <p:nvPr/>
-        </p:nvSpPr>
-        <p:spPr>
-          <a:xfrm>
-            <a:off x="609600" y="1500766"/>
-            <a:ext cx="10972800" cy="4525963"/>
-          </a:xfrm>
-          <a:prstGeom prst="rect">
-            <a:avLst/>
-          </a:prstGeom>
-          <a:noFill/>
-          <a:ln>
-            <a:noFill/>
-          </a:ln>
-        </p:spPr>
-        <p:txBody>
-          <a:bodyPr spcFirstLastPara="1" wrap="square" lIns="91425" tIns="45700" rIns="91425" bIns="45700" anchor="t" anchorCtr="0">
-            <a:noAutofit/>
-          </a:bodyPr>
-          <a:lstStyle>
-            <a:defPPr marR="0" lvl="0" algn="l" rtl="0">
-              <a:lnSpc>
-                <a:spcPct val="100000"/>
-              </a:lnSpc>
-              <a:spcBef>
-                <a:spcPts val="0"/>
-              </a:spcBef>
-              <a:spcAft>
-                <a:spcPts val="0"/>
-              </a:spcAft>
-            </a:defPPr>
-            <a:lvl1pPr marL="457200" marR="0" lvl="0" indent="-431800" algn="l" rtl="0">
-              <a:lnSpc>
-                <a:spcPct val="100000"/>
-              </a:lnSpc>
-              <a:spcBef>
-                <a:spcPts val="640"/>
-              </a:spcBef>
-              <a:spcAft>
-                <a:spcPts val="0"/>
-              </a:spcAft>
-              <a:buClr>
-                <a:srgbClr val="0F243E"/>
-              </a:buClr>
-              <a:buSzPts val="3200"/>
-              <a:buFont typeface="Arial"/>
-              <a:buChar char="•"/>
-              <a:defRPr sz="3200" b="0" i="0" u="none" strike="noStrike" cap="none">
-                <a:solidFill>
-                  <a:srgbClr val="0F243E"/>
-                </a:solidFill>
-                <a:latin typeface="Times New Roman"/>
-                <a:ea typeface="Times New Roman"/>
-                <a:cs typeface="Times New Roman"/>
-                <a:sym typeface="Times New Roman"/>
-              </a:defRPr>
-            </a:lvl1pPr>
-            <a:lvl2pPr marL="914400" marR="0" lvl="1" indent="-406400" algn="l" rtl="0">
-              <a:lnSpc>
-                <a:spcPct val="100000"/>
-              </a:lnSpc>
-              <a:spcBef>
-                <a:spcPts val="560"/>
-              </a:spcBef>
-              <a:spcAft>
-                <a:spcPts val="0"/>
-              </a:spcAft>
-              <a:buClr>
-                <a:srgbClr val="0F243E"/>
-              </a:buClr>
-              <a:buSzPts val="2800"/>
-              <a:buFont typeface="Arial"/>
-              <a:buChar char="–"/>
-              <a:defRPr sz="2800" b="0" i="0" u="none" strike="noStrike" cap="none">
-                <a:solidFill>
-                  <a:srgbClr val="0F243E"/>
-                </a:solidFill>
-                <a:latin typeface="Times New Roman"/>
-                <a:ea typeface="Times New Roman"/>
-                <a:cs typeface="Times New Roman"/>
-                <a:sym typeface="Times New Roman"/>
-              </a:defRPr>
-            </a:lvl2pPr>
-            <a:lvl3pPr marL="1371600" marR="0" lvl="2" indent="-381000" algn="l" rtl="0">
-              <a:lnSpc>
-                <a:spcPct val="100000"/>
-              </a:lnSpc>
-              <a:spcBef>
-                <a:spcPts val="480"/>
-              </a:spcBef>
-              <a:spcAft>
-                <a:spcPts val="0"/>
-              </a:spcAft>
-              <a:buClr>
-                <a:srgbClr val="0F243E"/>
-              </a:buClr>
-              <a:buSzPts val="2400"/>
-              <a:buFont typeface="Arial"/>
-              <a:buChar char="•"/>
-              <a:defRPr sz="2400" b="0" i="0" u="none" strike="noStrike" cap="none">
-                <a:solidFill>
-                  <a:srgbClr val="0F243E"/>
-                </a:solidFill>
-                <a:latin typeface="Times New Roman"/>
-                <a:ea typeface="Times New Roman"/>
-                <a:cs typeface="Times New Roman"/>
-                <a:sym typeface="Times New Roman"/>
-              </a:defRPr>
-            </a:lvl3pPr>
-            <a:lvl4pPr marL="1828800" marR="0" lvl="3" indent="-355600" algn="l" rtl="0">
-              <a:lnSpc>
-                <a:spcPct val="100000"/>
-              </a:lnSpc>
-              <a:spcBef>
-                <a:spcPts val="400"/>
-              </a:spcBef>
-              <a:spcAft>
-                <a:spcPts val="0"/>
-              </a:spcAft>
-              <a:buClr>
-                <a:srgbClr val="0F243E"/>
-              </a:buClr>
-              <a:buSzPts val="2000"/>
-              <a:buFont typeface="Arial"/>
-              <a:buChar char="–"/>
-              <a:defRPr sz="2000" b="0" i="0" u="none" strike="noStrike" cap="none">
-                <a:solidFill>
-                  <a:srgbClr val="0F243E"/>
-                </a:solidFill>
-                <a:latin typeface="Times New Roman"/>
-                <a:ea typeface="Times New Roman"/>
-                <a:cs typeface="Times New Roman"/>
-                <a:sym typeface="Times New Roman"/>
-              </a:defRPr>
-            </a:lvl4pPr>
-            <a:lvl5pPr marL="2286000" marR="0" lvl="4" indent="-355600" algn="l" rtl="0">
-              <a:lnSpc>
-                <a:spcPct val="100000"/>
-              </a:lnSpc>
-              <a:spcBef>
-                <a:spcPts val="400"/>
-              </a:spcBef>
-              <a:spcAft>
-                <a:spcPts val="0"/>
-              </a:spcAft>
-              <a:buClr>
-                <a:srgbClr val="0F243E"/>
-              </a:buClr>
-              <a:buSzPts val="2000"/>
-              <a:buFont typeface="Arial"/>
-              <a:buChar char="»"/>
-              <a:defRPr sz="2000" b="0" i="0" u="none" strike="noStrike" cap="none">
-                <a:solidFill>
-                  <a:srgbClr val="0F243E"/>
-                </a:solidFill>
-                <a:latin typeface="Times New Roman"/>
-                <a:ea typeface="Times New Roman"/>
-                <a:cs typeface="Times New Roman"/>
-                <a:sym typeface="Times New Roman"/>
-              </a:defRPr>
-            </a:lvl5pPr>
-            <a:lvl6pPr marL="2743200" marR="0" lvl="5" indent="-342900" algn="l" rtl="0">
-              <a:lnSpc>
-                <a:spcPct val="100000"/>
-              </a:lnSpc>
-              <a:spcBef>
-                <a:spcPts val="360"/>
-              </a:spcBef>
-              <a:spcAft>
-                <a:spcPts val="0"/>
-              </a:spcAft>
-              <a:buClr>
-                <a:schemeClr val="dk1"/>
-              </a:buClr>
-              <a:buSzPts val="1800"/>
-              <a:buFont typeface="Arial"/>
-              <a:buChar char="•"/>
-              <a:defRPr sz="2000" b="0" i="0" u="none" strike="noStrike" cap="none">
-                <a:solidFill>
-                  <a:schemeClr val="dk1"/>
-                </a:solidFill>
-                <a:latin typeface="Calibri"/>
-                <a:ea typeface="Calibri"/>
-                <a:cs typeface="Calibri"/>
-                <a:sym typeface="Calibri"/>
-              </a:defRPr>
-            </a:lvl6pPr>
-            <a:lvl7pPr marL="3200400" marR="0" lvl="6" indent="-342900" algn="l" rtl="0">
-              <a:lnSpc>
-                <a:spcPct val="100000"/>
-              </a:lnSpc>
-              <a:spcBef>
-                <a:spcPts val="360"/>
-              </a:spcBef>
-              <a:spcAft>
-                <a:spcPts val="0"/>
-              </a:spcAft>
-              <a:buClr>
-                <a:schemeClr val="dk1"/>
-              </a:buClr>
-              <a:buSzPts val="1800"/>
-              <a:buFont typeface="Arial"/>
-              <a:buChar char="•"/>
-              <a:defRPr sz="2000" b="0" i="0" u="none" strike="noStrike" cap="none">
-                <a:solidFill>
-                  <a:schemeClr val="dk1"/>
-                </a:solidFill>
-                <a:latin typeface="Calibri"/>
-                <a:ea typeface="Calibri"/>
-                <a:cs typeface="Calibri"/>
-                <a:sym typeface="Calibri"/>
-              </a:defRPr>
-            </a:lvl7pPr>
-            <a:lvl8pPr marL="3657600" marR="0" lvl="7" indent="-342900" algn="l" rtl="0">
-              <a:lnSpc>
-                <a:spcPct val="100000"/>
-              </a:lnSpc>
-              <a:spcBef>
-                <a:spcPts val="360"/>
-              </a:spcBef>
-              <a:spcAft>
-                <a:spcPts val="0"/>
-              </a:spcAft>
-              <a:buClr>
-                <a:schemeClr val="dk1"/>
-              </a:buClr>
-              <a:buSzPts val="1800"/>
-              <a:buFont typeface="Arial"/>
-              <a:buChar char="•"/>
-              <a:defRPr sz="2000" b="0" i="0" u="none" strike="noStrike" cap="none">
-                <a:solidFill>
-                  <a:schemeClr val="dk1"/>
-                </a:solidFill>
-                <a:latin typeface="Calibri"/>
-                <a:ea typeface="Calibri"/>
-                <a:cs typeface="Calibri"/>
-                <a:sym typeface="Calibri"/>
-              </a:defRPr>
-            </a:lvl8pPr>
-            <a:lvl9pPr marL="4114800" marR="0" lvl="8" indent="-342900" algn="l" rtl="0">
-              <a:lnSpc>
-                <a:spcPct val="100000"/>
-              </a:lnSpc>
-              <a:spcBef>
-                <a:spcPts val="360"/>
-              </a:spcBef>
-              <a:spcAft>
-                <a:spcPts val="0"/>
-              </a:spcAft>
-              <a:buClr>
-                <a:schemeClr val="dk1"/>
-              </a:buClr>
-              <a:buSzPts val="1800"/>
-              <a:buFont typeface="Arial"/>
-              <a:buChar char="•"/>
-              <a:defRPr sz="2000" b="0" i="0" u="none" strike="noStrike" cap="none">
-                <a:solidFill>
-                  <a:schemeClr val="dk1"/>
-                </a:solidFill>
-                <a:latin typeface="Calibri"/>
-                <a:ea typeface="Calibri"/>
-                <a:cs typeface="Calibri"/>
-                <a:sym typeface="Calibri"/>
-              </a:defRPr>
-            </a:lvl9pPr>
-          </a:lstStyle>
-          <a:p>
-            <a:pPr marL="25400" indent="0">
-              <a:buNone/>
-              <a:defRPr/>
-            </a:pPr>
-            <a:r>
-              <a:rPr lang="en-US" altLang="zh-TW" dirty="0">
-                <a:ea typeface="標楷體" panose="03000509000000000000" pitchFamily="65" charset="-120"/>
-              </a:rPr>
-              <a:t>Category2:Workflow Automation</a:t>
-            </a:r>
-          </a:p>
-          <a:p>
-            <a:pPr marL="25400" indent="0">
-              <a:buNone/>
-              <a:defRPr/>
-            </a:pPr>
-            <a:endParaRPr lang="en-US" altLang="zh-TW" dirty="0">
-              <a:ea typeface="標楷體" panose="03000509000000000000" pitchFamily="65" charset="-120"/>
-            </a:endParaRPr>
-          </a:p>
-          <a:p>
-            <a:r>
-              <a:rPr lang="zh-TW" altLang="en-US" b="1" dirty="0">
-                <a:ea typeface="標楷體" panose="03000509000000000000" pitchFamily="65" charset="-120"/>
-              </a:rPr>
-              <a:t>目標</a:t>
-            </a:r>
-            <a:r>
-              <a:rPr lang="zh-TW" altLang="en-US" dirty="0">
-                <a:ea typeface="標楷體" panose="03000509000000000000" pitchFamily="65" charset="-120"/>
-              </a:rPr>
-              <a:t>：針對需要多步驟、嚴謹邏輯的任務，提供一套帶有驗證機制的流程 。</a:t>
-            </a:r>
-            <a:endParaRPr lang="en-US" altLang="zh-TW" dirty="0">
-              <a:ea typeface="標楷體" panose="03000509000000000000" pitchFamily="65" charset="-120"/>
-            </a:endParaRPr>
-          </a:p>
-          <a:p>
-            <a:r>
-              <a:rPr lang="zh-TW" altLang="en-US" b="1" dirty="0">
-                <a:ea typeface="標楷體" panose="03000509000000000000" pitchFamily="65" charset="-120"/>
-              </a:rPr>
-              <a:t>關鍵技巧</a:t>
-            </a:r>
-            <a:r>
-              <a:rPr lang="zh-TW" altLang="en-US" dirty="0">
-                <a:ea typeface="標楷體" panose="03000509000000000000" pitchFamily="65" charset="-120"/>
-              </a:rPr>
-              <a:t>：建立帶有驗證門檻 </a:t>
-            </a:r>
-            <a:r>
-              <a:rPr lang="en-US" altLang="zh-TW" dirty="0">
-                <a:ea typeface="標楷體" panose="03000509000000000000" pitchFamily="65" charset="-120"/>
-              </a:rPr>
-              <a:t>(Validation Gates) </a:t>
-            </a:r>
-            <a:r>
-              <a:rPr lang="zh-TW" altLang="en-US" dirty="0">
-                <a:ea typeface="標楷體" panose="03000509000000000000" pitchFamily="65" charset="-120"/>
-              </a:rPr>
-              <a:t>的步驟化流程、內建審核與改進建議。</a:t>
-            </a:r>
-            <a:endParaRPr lang="en-US" altLang="zh-TW" dirty="0">
-              <a:ea typeface="標楷體" panose="03000509000000000000" pitchFamily="65" charset="-120"/>
-            </a:endParaRPr>
-          </a:p>
-          <a:p>
-            <a:endParaRPr lang="en-US" altLang="zh-TW" dirty="0">
-              <a:ea typeface="標楷體" panose="03000509000000000000" pitchFamily="65" charset="-120"/>
-            </a:endParaRPr>
-          </a:p>
-        </p:txBody>
-      </p:sp>
-    </p:spTree>
-    <p:extLst>
-      <p:ext uri="{BB962C8B-B14F-4D97-AF65-F5344CB8AC3E}">
-        <p14:creationId xmlns:p14="http://schemas.microsoft.com/office/powerpoint/2010/main" val="1589128819"/>
       </p:ext>
     </p:extLst>
   </p:cSld>

--- a/skills/doc/skills-final.pptx
+++ b/skills/doc/skills-final.pptx
@@ -5,49 +5,48 @@
     <p:sldMasterId id="2147483648" r:id="rId1"/>
   </p:sldMasterIdLst>
   <p:notesMasterIdLst>
-    <p:notesMasterId r:id="rId23"/>
+    <p:notesMasterId r:id="rId22"/>
   </p:notesMasterIdLst>
   <p:sldIdLst>
     <p:sldId id="256" r:id="rId2"/>
     <p:sldId id="257" r:id="rId3"/>
     <p:sldId id="272" r:id="rId4"/>
-    <p:sldId id="277" r:id="rId5"/>
+    <p:sldId id="289" r:id="rId5"/>
     <p:sldId id="275" r:id="rId6"/>
     <p:sldId id="276" r:id="rId7"/>
     <p:sldId id="290" r:id="rId8"/>
-    <p:sldId id="289" r:id="rId9"/>
-    <p:sldId id="278" r:id="rId10"/>
-    <p:sldId id="274" r:id="rId11"/>
-    <p:sldId id="279" r:id="rId12"/>
-    <p:sldId id="286" r:id="rId13"/>
-    <p:sldId id="287" r:id="rId14"/>
-    <p:sldId id="288" r:id="rId15"/>
-    <p:sldId id="281" r:id="rId16"/>
-    <p:sldId id="283" r:id="rId17"/>
-    <p:sldId id="282" r:id="rId18"/>
-    <p:sldId id="284" r:id="rId19"/>
-    <p:sldId id="285" r:id="rId20"/>
-    <p:sldId id="270" r:id="rId21"/>
-    <p:sldId id="271" r:id="rId22"/>
+    <p:sldId id="278" r:id="rId9"/>
+    <p:sldId id="274" r:id="rId10"/>
+    <p:sldId id="279" r:id="rId11"/>
+    <p:sldId id="286" r:id="rId12"/>
+    <p:sldId id="287" r:id="rId13"/>
+    <p:sldId id="288" r:id="rId14"/>
+    <p:sldId id="281" r:id="rId15"/>
+    <p:sldId id="283" r:id="rId16"/>
+    <p:sldId id="282" r:id="rId17"/>
+    <p:sldId id="284" r:id="rId18"/>
+    <p:sldId id="285" r:id="rId19"/>
+    <p:sldId id="270" r:id="rId20"/>
+    <p:sldId id="271" r:id="rId21"/>
   </p:sldIdLst>
   <p:sldSz cx="12192000" cy="6858000"/>
   <p:notesSz cx="7099300" cy="10234613"/>
   <p:embeddedFontLst>
     <p:embeddedFont>
       <p:font typeface="Helvetica Neue" panose="02020500000000000000" charset="0"/>
-      <p:regular r:id="rId24"/>
-      <p:bold r:id="rId25"/>
-      <p:italic r:id="rId26"/>
-      <p:boldItalic r:id="rId27"/>
+      <p:regular r:id="rId23"/>
+      <p:bold r:id="rId24"/>
+      <p:italic r:id="rId25"/>
+      <p:boldItalic r:id="rId26"/>
     </p:embeddedFont>
     <p:embeddedFont>
       <p:font typeface="微軟正黑體" panose="020B0604030504040204" pitchFamily="34" charset="-120"/>
-      <p:regular r:id="rId28"/>
-      <p:bold r:id="rId29"/>
+      <p:regular r:id="rId27"/>
+      <p:bold r:id="rId28"/>
     </p:embeddedFont>
     <p:embeddedFont>
       <p:font typeface="標楷體" panose="03000509000000000000" pitchFamily="65" charset="-120"/>
-      <p:regular r:id="rId30"/>
+      <p:regular r:id="rId29"/>
     </p:embeddedFont>
   </p:embeddedFontLst>
   <p:defaultTextStyle>
@@ -284,7 +283,7 @@
       <p15:sldGuideLst xmlns:p15="http://schemas.microsoft.com/office/powerpoint/2012/main"/>
     </p:ext>
     <p:ext uri="GoogleSlidesCustomDataVersion2">
-      <go:slidesCustomData xmlns="" xmlns:mc="http://schemas.openxmlformats.org/markup-compatibility/2006" xmlns:mv="urn:schemas-microsoft-com:mac:vml" xmlns:c="http://schemas.openxmlformats.org/drawingml/2006/chart" xmlns:dgm="http://schemas.openxmlformats.org/drawingml/2006/diagram" xmlns:o="urn:schemas-microsoft-com:office:office" xmlns:v="urn:schemas-microsoft-com:vml" xmlns:pvml="urn:schemas-microsoft-com:office:powerpoint" xmlns:com="http://schemas.openxmlformats.org/drawingml/2006/compatibility" xmlns:p14="http://schemas.microsoft.com/office/powerpoint/2010/main" xmlns:p15="http://schemas.microsoft.com/office/powerpoint/2012/main" xmlns:ahyp="http://schemas.microsoft.com/office/drawing/2018/hyperlinkcolor" xmlns:go="http://customooxmlschemas.google.com/" r:id="rId31" roundtripDataSignature="AMtx7mjVYWe9aou/H3Yj/jOOLoPiCa0o6w=="/>
+      <go:slidesCustomData xmlns:go="http://customooxmlschemas.google.com/" xmlns:ahyp="http://schemas.microsoft.com/office/drawing/2018/hyperlinkcolor" xmlns:p15="http://schemas.microsoft.com/office/powerpoint/2012/main" xmlns:p14="http://schemas.microsoft.com/office/powerpoint/2010/main" xmlns:com="http://schemas.openxmlformats.org/drawingml/2006/compatibility" xmlns:pvml="urn:schemas-microsoft-com:office:powerpoint" xmlns:v="urn:schemas-microsoft-com:vml" xmlns:o="urn:schemas-microsoft-com:office:office" xmlns:dgm="http://schemas.openxmlformats.org/drawingml/2006/diagram" xmlns:c="http://schemas.openxmlformats.org/drawingml/2006/chart" xmlns:mv="urn:schemas-microsoft-com:mac:vml" xmlns:mc="http://schemas.openxmlformats.org/markup-compatibility/2006" xmlns="" r:id="rId31" roundtripDataSignature="AMtx7mjVYWe9aou/H3Yj/jOOLoPiCa0o6w=="/>
     </p:ext>
   </p:extLst>
 </p:presentation>
@@ -1661,207 +1660,6 @@
         <p:cNvPr id="1" name="Shape 92">
           <a:extLst>
             <a:ext uri="{FF2B5EF4-FFF2-40B4-BE49-F238E27FC236}">
-              <a16:creationId xmlns:a16="http://schemas.microsoft.com/office/drawing/2014/main" id="{1FC71CAE-1A5C-FFAB-0BF7-3F1E9EEAEE6C}"/>
-            </a:ext>
-          </a:extLst>
-        </p:cNvPr>
-        <p:cNvGrpSpPr/>
-        <p:nvPr/>
-      </p:nvGrpSpPr>
-      <p:grpSpPr>
-        <a:xfrm>
-          <a:off x="0" y="0"/>
-          <a:ext cx="0" cy="0"/>
-          <a:chOff x="0" y="0"/>
-          <a:chExt cx="0" cy="0"/>
-        </a:xfrm>
-      </p:grpSpPr>
-      <p:sp>
-        <p:nvSpPr>
-          <p:cNvPr id="93" name="Google Shape;93;p2:notes">
-            <a:extLst>
-              <a:ext uri="{FF2B5EF4-FFF2-40B4-BE49-F238E27FC236}">
-                <a16:creationId xmlns:a16="http://schemas.microsoft.com/office/drawing/2014/main" id="{5B47EB58-4055-8407-CCFF-BDD7739A0EED}"/>
-              </a:ext>
-            </a:extLst>
-          </p:cNvPr>
-          <p:cNvSpPr>
-            <a:spLocks noGrp="1" noRot="1" noChangeAspect="1"/>
-          </p:cNvSpPr>
-          <p:nvPr>
-            <p:ph type="sldImg" idx="2"/>
-          </p:nvPr>
-        </p:nvSpPr>
-        <p:spPr>
-          <a:xfrm>
-            <a:off x="139700" y="768350"/>
-            <a:ext cx="6819900" cy="3836988"/>
-          </a:xfrm>
-          <a:custGeom>
-            <a:avLst/>
-            <a:gdLst/>
-            <a:ahLst/>
-            <a:cxnLst/>
-            <a:rect l="l" t="t" r="r" b="b"/>
-            <a:pathLst>
-              <a:path w="120000" h="120000" extrusionOk="0">
-                <a:moveTo>
-                  <a:pt x="0" y="0"/>
-                </a:moveTo>
-                <a:lnTo>
-                  <a:pt x="120000" y="0"/>
-                </a:lnTo>
-                <a:lnTo>
-                  <a:pt x="120000" y="120000"/>
-                </a:lnTo>
-                <a:lnTo>
-                  <a:pt x="0" y="120000"/>
-                </a:lnTo>
-                <a:close/>
-              </a:path>
-            </a:pathLst>
-          </a:custGeom>
-          <a:noFill/>
-          <a:ln w="12700" cap="flat" cmpd="sng">
-            <a:solidFill>
-              <a:srgbClr val="000000"/>
-            </a:solidFill>
-            <a:prstDash val="solid"/>
-            <a:round/>
-            <a:headEnd type="none" w="sm" len="sm"/>
-            <a:tailEnd type="none" w="sm" len="sm"/>
-          </a:ln>
-        </p:spPr>
-      </p:sp>
-      <p:sp>
-        <p:nvSpPr>
-          <p:cNvPr id="94" name="Google Shape;94;p2:notes">
-            <a:extLst>
-              <a:ext uri="{FF2B5EF4-FFF2-40B4-BE49-F238E27FC236}">
-                <a16:creationId xmlns:a16="http://schemas.microsoft.com/office/drawing/2014/main" id="{AE27E2EA-2253-5F45-7335-18BC7247B8B8}"/>
-              </a:ext>
-            </a:extLst>
-          </p:cNvPr>
-          <p:cNvSpPr txBox="1">
-            <a:spLocks noGrp="1"/>
-          </p:cNvSpPr>
-          <p:nvPr>
-            <p:ph type="body" idx="1"/>
-          </p:nvPr>
-        </p:nvSpPr>
-        <p:spPr>
-          <a:xfrm>
-            <a:off x="709613" y="4860925"/>
-            <a:ext cx="5680075" cy="4605338"/>
-          </a:xfrm>
-          <a:prstGeom prst="rect">
-            <a:avLst/>
-          </a:prstGeom>
-          <a:noFill/>
-          <a:ln>
-            <a:noFill/>
-          </a:ln>
-        </p:spPr>
-        <p:txBody>
-          <a:bodyPr spcFirstLastPara="1" wrap="square" lIns="99025" tIns="49500" rIns="99025" bIns="49500" anchor="t" anchorCtr="0">
-            <a:normAutofit/>
-          </a:bodyPr>
-          <a:lstStyle/>
-          <a:p>
-            <a:r>
-              <a:rPr lang="en-US" altLang="zh-TW" dirty="0"/>
-              <a:t>Category 1 </a:t>
-            </a:r>
-            <a:r>
-              <a:rPr lang="zh-TW" altLang="en-US" dirty="0"/>
-              <a:t>是為了創造一致、高品質的輸出 。</a:t>
-            </a:r>
-            <a:endParaRPr lang="zh-TW" altLang="en-US" sz="1200" b="0" i="0" u="none" strike="noStrike" cap="none" dirty="0">
-              <a:solidFill>
-                <a:schemeClr val="dk1"/>
-              </a:solidFill>
-              <a:effectLst/>
-              <a:latin typeface="Calibri"/>
-              <a:ea typeface="Calibri"/>
-              <a:cs typeface="Calibri"/>
-              <a:sym typeface="Calibri"/>
-            </a:endParaRPr>
-          </a:p>
-        </p:txBody>
-      </p:sp>
-      <p:sp>
-        <p:nvSpPr>
-          <p:cNvPr id="95" name="Google Shape;95;p2:notes">
-            <a:extLst>
-              <a:ext uri="{FF2B5EF4-FFF2-40B4-BE49-F238E27FC236}">
-                <a16:creationId xmlns:a16="http://schemas.microsoft.com/office/drawing/2014/main" id="{A3A93D0F-1150-9731-6CBD-A305F3966409}"/>
-              </a:ext>
-            </a:extLst>
-          </p:cNvPr>
-          <p:cNvSpPr txBox="1">
-            <a:spLocks noGrp="1"/>
-          </p:cNvSpPr>
-          <p:nvPr>
-            <p:ph type="sldNum" idx="12"/>
-          </p:nvPr>
-        </p:nvSpPr>
-        <p:spPr>
-          <a:xfrm>
-            <a:off x="4021138" y="9721850"/>
-            <a:ext cx="3076575" cy="511175"/>
-          </a:xfrm>
-          <a:prstGeom prst="rect">
-            <a:avLst/>
-          </a:prstGeom>
-          <a:noFill/>
-          <a:ln>
-            <a:noFill/>
-          </a:ln>
-        </p:spPr>
-        <p:txBody>
-          <a:bodyPr spcFirstLastPara="1" wrap="square" lIns="99025" tIns="49500" rIns="99025" bIns="49500" anchor="b" anchorCtr="0">
-            <a:noAutofit/>
-          </a:bodyPr>
-          <a:lstStyle/>
-          <a:p>
-            <a:pPr marL="0" lvl="0" indent="0" algn="r" rtl="0">
-              <a:spcBef>
-                <a:spcPts val="0"/>
-              </a:spcBef>
-              <a:spcAft>
-                <a:spcPts val="0"/>
-              </a:spcAft>
-              <a:buNone/>
-            </a:pPr>
-            <a:fld id="{00000000-1234-1234-1234-123412341234}" type="slidenum">
-              <a:rPr lang="en-US"/>
-              <a:t>10</a:t>
-            </a:fld>
-            <a:endParaRPr/>
-          </a:p>
-        </p:txBody>
-      </p:sp>
-    </p:spTree>
-    <p:extLst>
-      <p:ext uri="{BB962C8B-B14F-4D97-AF65-F5344CB8AC3E}">
-        <p14:creationId xmlns:p14="http://schemas.microsoft.com/office/powerpoint/2010/main" val="3509895589"/>
-      </p:ext>
-    </p:extLst>
-  </p:cSld>
-  <p:clrMapOvr>
-    <a:masterClrMapping/>
-  </p:clrMapOvr>
-</p:notes>
-</file>
-
-<file path=ppt/notesSlides/notesSlide11.xml><?xml version="1.0" encoding="utf-8"?>
-<p:notes xmlns:a="http://schemas.openxmlformats.org/drawingml/2006/main" xmlns:r="http://schemas.openxmlformats.org/officeDocument/2006/relationships" xmlns:p="http://schemas.openxmlformats.org/presentationml/2006/main" showMasterSp="0" showMasterPhAnim="0">
-  <p:cSld>
-    <p:spTree>
-      <p:nvGrpSpPr>
-        <p:cNvPr id="1" name="Shape 92">
-          <a:extLst>
-            <a:ext uri="{FF2B5EF4-FFF2-40B4-BE49-F238E27FC236}">
               <a16:creationId xmlns:a16="http://schemas.microsoft.com/office/drawing/2014/main" id="{7053855B-6178-234D-B969-57DF775BB7FF}"/>
             </a:ext>
           </a:extLst>
@@ -2028,7 +1826,7 @@
             </a:pPr>
             <a:fld id="{00000000-1234-1234-1234-123412341234}" type="slidenum">
               <a:rPr lang="en-US"/>
-              <a:t>11</a:t>
+              <a:t>10</a:t>
             </a:fld>
             <a:endParaRPr/>
           </a:p>
@@ -2047,7 +1845,7 @@
 </p:notes>
 </file>
 
-<file path=ppt/notesSlides/notesSlide12.xml><?xml version="1.0" encoding="utf-8"?>
+<file path=ppt/notesSlides/notesSlide11.xml><?xml version="1.0" encoding="utf-8"?>
 <p:notes xmlns:a="http://schemas.openxmlformats.org/drawingml/2006/main" xmlns:r="http://schemas.openxmlformats.org/officeDocument/2006/relationships" xmlns:p="http://schemas.openxmlformats.org/presentationml/2006/main" showMasterSp="0" showMasterPhAnim="0">
   <p:cSld>
     <p:spTree>
@@ -2510,7 +2308,7 @@
             </a:pPr>
             <a:fld id="{00000000-1234-1234-1234-123412341234}" type="slidenum">
               <a:rPr lang="en-US"/>
-              <a:t>12</a:t>
+              <a:t>11</a:t>
             </a:fld>
             <a:endParaRPr/>
           </a:p>
@@ -2529,7 +2327,7 @@
 </p:notes>
 </file>
 
-<file path=ppt/notesSlides/notesSlide13.xml><?xml version="1.0" encoding="utf-8"?>
+<file path=ppt/notesSlides/notesSlide12.xml><?xml version="1.0" encoding="utf-8"?>
 <p:notes xmlns:a="http://schemas.openxmlformats.org/drawingml/2006/main" xmlns:r="http://schemas.openxmlformats.org/officeDocument/2006/relationships" xmlns:p="http://schemas.openxmlformats.org/presentationml/2006/main" showMasterSp="0" showMasterPhAnim="0">
   <p:cSld>
     <p:spTree>
@@ -2901,7 +2699,7 @@
             </a:pPr>
             <a:fld id="{00000000-1234-1234-1234-123412341234}" type="slidenum">
               <a:rPr lang="en-US"/>
-              <a:t>13</a:t>
+              <a:t>12</a:t>
             </a:fld>
             <a:endParaRPr/>
           </a:p>
@@ -2920,7 +2718,7 @@
 </p:notes>
 </file>
 
-<file path=ppt/notesSlides/notesSlide14.xml><?xml version="1.0" encoding="utf-8"?>
+<file path=ppt/notesSlides/notesSlide13.xml><?xml version="1.0" encoding="utf-8"?>
 <p:notes xmlns:a="http://schemas.openxmlformats.org/drawingml/2006/main" xmlns:r="http://schemas.openxmlformats.org/officeDocument/2006/relationships" xmlns:p="http://schemas.openxmlformats.org/presentationml/2006/main" showMasterSp="0" showMasterPhAnim="0">
   <p:cSld>
     <p:spTree>
@@ -3412,7 +3210,7 @@
             </a:pPr>
             <a:fld id="{00000000-1234-1234-1234-123412341234}" type="slidenum">
               <a:rPr lang="en-US"/>
-              <a:t>14</a:t>
+              <a:t>13</a:t>
             </a:fld>
             <a:endParaRPr/>
           </a:p>
@@ -3431,7 +3229,7 @@
 </p:notes>
 </file>
 
-<file path=ppt/notesSlides/notesSlide15.xml><?xml version="1.0" encoding="utf-8"?>
+<file path=ppt/notesSlides/notesSlide14.xml><?xml version="1.0" encoding="utf-8"?>
 <p:notes xmlns:a="http://schemas.openxmlformats.org/drawingml/2006/main" xmlns:r="http://schemas.openxmlformats.org/officeDocument/2006/relationships" xmlns:p="http://schemas.openxmlformats.org/presentationml/2006/main" showMasterSp="0" showMasterPhAnim="0">
   <p:cSld>
     <p:spTree>
@@ -3820,7 +3618,7 @@
             </a:pPr>
             <a:fld id="{00000000-1234-1234-1234-123412341234}" type="slidenum">
               <a:rPr lang="en-US"/>
-              <a:t>15</a:t>
+              <a:t>14</a:t>
             </a:fld>
             <a:endParaRPr/>
           </a:p>
@@ -3839,7 +3637,7 @@
 </p:notes>
 </file>
 
-<file path=ppt/notesSlides/notesSlide16.xml><?xml version="1.0" encoding="utf-8"?>
+<file path=ppt/notesSlides/notesSlide15.xml><?xml version="1.0" encoding="utf-8"?>
 <p:notes xmlns:a="http://schemas.openxmlformats.org/drawingml/2006/main" xmlns:r="http://schemas.openxmlformats.org/officeDocument/2006/relationships" xmlns:p="http://schemas.openxmlformats.org/presentationml/2006/main" showMasterSp="0" showMasterPhAnim="0">
   <p:cSld>
     <p:spTree>
@@ -4013,7 +3811,7 @@
             </a:pPr>
             <a:fld id="{00000000-1234-1234-1234-123412341234}" type="slidenum">
               <a:rPr lang="en-US"/>
-              <a:t>16</a:t>
+              <a:t>15</a:t>
             </a:fld>
             <a:endParaRPr/>
           </a:p>
@@ -4032,7 +3830,7 @@
 </p:notes>
 </file>
 
-<file path=ppt/notesSlides/notesSlide17.xml><?xml version="1.0" encoding="utf-8"?>
+<file path=ppt/notesSlides/notesSlide16.xml><?xml version="1.0" encoding="utf-8"?>
 <p:notes xmlns:a="http://schemas.openxmlformats.org/drawingml/2006/main" xmlns:r="http://schemas.openxmlformats.org/officeDocument/2006/relationships" xmlns:p="http://schemas.openxmlformats.org/presentationml/2006/main" showMasterSp="0" showMasterPhAnim="0">
   <p:cSld>
     <p:spTree>
@@ -4206,7 +4004,7 @@
             </a:pPr>
             <a:fld id="{00000000-1234-1234-1234-123412341234}" type="slidenum">
               <a:rPr lang="en-US"/>
-              <a:t>17</a:t>
+              <a:t>16</a:t>
             </a:fld>
             <a:endParaRPr/>
           </a:p>
@@ -4225,7 +4023,7 @@
 </p:notes>
 </file>
 
-<file path=ppt/notesSlides/notesSlide18.xml><?xml version="1.0" encoding="utf-8"?>
+<file path=ppt/notesSlides/notesSlide17.xml><?xml version="1.0" encoding="utf-8"?>
 <p:notes xmlns:a="http://schemas.openxmlformats.org/drawingml/2006/main" xmlns:r="http://schemas.openxmlformats.org/officeDocument/2006/relationships" xmlns:p="http://schemas.openxmlformats.org/presentationml/2006/main" showMasterSp="0" showMasterPhAnim="0">
   <p:cSld>
     <p:spTree>
@@ -4399,7 +4197,7 @@
             </a:pPr>
             <a:fld id="{00000000-1234-1234-1234-123412341234}" type="slidenum">
               <a:rPr lang="en-US"/>
-              <a:t>18</a:t>
+              <a:t>17</a:t>
             </a:fld>
             <a:endParaRPr/>
           </a:p>
@@ -4418,7 +4216,7 @@
 </p:notes>
 </file>
 
-<file path=ppt/notesSlides/notesSlide19.xml><?xml version="1.0" encoding="utf-8"?>
+<file path=ppt/notesSlides/notesSlide18.xml><?xml version="1.0" encoding="utf-8"?>
 <p:notes xmlns:a="http://schemas.openxmlformats.org/drawingml/2006/main" xmlns:r="http://schemas.openxmlformats.org/officeDocument/2006/relationships" xmlns:p="http://schemas.openxmlformats.org/presentationml/2006/main" showMasterSp="0" showMasterPhAnim="0">
   <p:cSld>
     <p:spTree>
@@ -4938,7 +4736,7 @@
             </a:pPr>
             <a:fld id="{00000000-1234-1234-1234-123412341234}" type="slidenum">
               <a:rPr lang="en-US"/>
-              <a:t>19</a:t>
+              <a:t>18</a:t>
             </a:fld>
             <a:endParaRPr/>
           </a:p>
@@ -4950,6 +4748,110 @@
         <p14:creationId xmlns:p14="http://schemas.microsoft.com/office/powerpoint/2010/main" val="300924431"/>
       </p:ext>
     </p:extLst>
+  </p:cSld>
+  <p:clrMapOvr>
+    <a:masterClrMapping/>
+  </p:clrMapOvr>
+</p:notes>
+</file>
+
+<file path=ppt/notesSlides/notesSlide19.xml><?xml version="1.0" encoding="utf-8"?>
+<p:notes xmlns:a="http://schemas.openxmlformats.org/drawingml/2006/main" xmlns:r="http://schemas.openxmlformats.org/officeDocument/2006/relationships" xmlns:p="http://schemas.openxmlformats.org/presentationml/2006/main" showMasterSp="0" showMasterPhAnim="0">
+  <p:cSld>
+    <p:spTree>
+      <p:nvGrpSpPr>
+        <p:cNvPr id="1" name="Shape 218"/>
+        <p:cNvGrpSpPr/>
+        <p:nvPr/>
+      </p:nvGrpSpPr>
+      <p:grpSpPr>
+        <a:xfrm>
+          <a:off x="0" y="0"/>
+          <a:ext cx="0" cy="0"/>
+          <a:chOff x="0" y="0"/>
+          <a:chExt cx="0" cy="0"/>
+        </a:xfrm>
+      </p:grpSpPr>
+      <p:sp>
+        <p:nvSpPr>
+          <p:cNvPr id="219" name="Google Shape;219;p15:notes"/>
+          <p:cNvSpPr txBox="1">
+            <a:spLocks noGrp="1"/>
+          </p:cNvSpPr>
+          <p:nvPr>
+            <p:ph type="body" idx="1"/>
+          </p:nvPr>
+        </p:nvSpPr>
+        <p:spPr>
+          <a:xfrm>
+            <a:off x="709613" y="4860925"/>
+            <a:ext cx="5680075" cy="4605338"/>
+          </a:xfrm>
+          <a:prstGeom prst="rect">
+            <a:avLst/>
+          </a:prstGeom>
+        </p:spPr>
+        <p:txBody>
+          <a:bodyPr spcFirstLastPara="1" wrap="square" lIns="99025" tIns="49500" rIns="99025" bIns="49500" anchor="t" anchorCtr="0">
+            <a:noAutofit/>
+          </a:bodyPr>
+          <a:lstStyle/>
+          <a:p>
+            <a:pPr marL="0" lvl="0" indent="0" algn="l" rtl="0">
+              <a:spcBef>
+                <a:spcPts val="360"/>
+              </a:spcBef>
+              <a:spcAft>
+                <a:spcPts val="0"/>
+              </a:spcAft>
+              <a:buNone/>
+            </a:pPr>
+            <a:endParaRPr dirty="0"/>
+          </a:p>
+        </p:txBody>
+      </p:sp>
+      <p:sp>
+        <p:nvSpPr>
+          <p:cNvPr id="220" name="Google Shape;220;p15:notes"/>
+          <p:cNvSpPr>
+            <a:spLocks noGrp="1" noRot="1" noChangeAspect="1"/>
+          </p:cNvSpPr>
+          <p:nvPr>
+            <p:ph type="sldImg" idx="2"/>
+          </p:nvPr>
+        </p:nvSpPr>
+        <p:spPr>
+          <a:xfrm>
+            <a:off x="139700" y="768350"/>
+            <a:ext cx="6819900" cy="3836988"/>
+          </a:xfrm>
+          <a:custGeom>
+            <a:avLst/>
+            <a:gdLst/>
+            <a:ahLst/>
+            <a:cxnLst/>
+            <a:rect l="l" t="t" r="r" b="b"/>
+            <a:pathLst>
+              <a:path w="120000" h="120000" extrusionOk="0">
+                <a:moveTo>
+                  <a:pt x="0" y="0"/>
+                </a:moveTo>
+                <a:lnTo>
+                  <a:pt x="120000" y="0"/>
+                </a:lnTo>
+                <a:lnTo>
+                  <a:pt x="120000" y="120000"/>
+                </a:lnTo>
+                <a:lnTo>
+                  <a:pt x="0" y="120000"/>
+                </a:lnTo>
+                <a:close/>
+              </a:path>
+            </a:pathLst>
+          </a:custGeom>
+        </p:spPr>
+      </p:sp>
+    </p:spTree>
   </p:cSld>
   <p:clrMapOvr>
     <a:masterClrMapping/>
@@ -5122,110 +5024,6 @@
 </file>
 
 <file path=ppt/notesSlides/notesSlide20.xml><?xml version="1.0" encoding="utf-8"?>
-<p:notes xmlns:a="http://schemas.openxmlformats.org/drawingml/2006/main" xmlns:r="http://schemas.openxmlformats.org/officeDocument/2006/relationships" xmlns:p="http://schemas.openxmlformats.org/presentationml/2006/main" showMasterSp="0" showMasterPhAnim="0">
-  <p:cSld>
-    <p:spTree>
-      <p:nvGrpSpPr>
-        <p:cNvPr id="1" name="Shape 218"/>
-        <p:cNvGrpSpPr/>
-        <p:nvPr/>
-      </p:nvGrpSpPr>
-      <p:grpSpPr>
-        <a:xfrm>
-          <a:off x="0" y="0"/>
-          <a:ext cx="0" cy="0"/>
-          <a:chOff x="0" y="0"/>
-          <a:chExt cx="0" cy="0"/>
-        </a:xfrm>
-      </p:grpSpPr>
-      <p:sp>
-        <p:nvSpPr>
-          <p:cNvPr id="219" name="Google Shape;219;p15:notes"/>
-          <p:cNvSpPr txBox="1">
-            <a:spLocks noGrp="1"/>
-          </p:cNvSpPr>
-          <p:nvPr>
-            <p:ph type="body" idx="1"/>
-          </p:nvPr>
-        </p:nvSpPr>
-        <p:spPr>
-          <a:xfrm>
-            <a:off x="709613" y="4860925"/>
-            <a:ext cx="5680075" cy="4605338"/>
-          </a:xfrm>
-          <a:prstGeom prst="rect">
-            <a:avLst/>
-          </a:prstGeom>
-        </p:spPr>
-        <p:txBody>
-          <a:bodyPr spcFirstLastPara="1" wrap="square" lIns="99025" tIns="49500" rIns="99025" bIns="49500" anchor="t" anchorCtr="0">
-            <a:noAutofit/>
-          </a:bodyPr>
-          <a:lstStyle/>
-          <a:p>
-            <a:pPr marL="0" lvl="0" indent="0" algn="l" rtl="0">
-              <a:spcBef>
-                <a:spcPts val="360"/>
-              </a:spcBef>
-              <a:spcAft>
-                <a:spcPts val="0"/>
-              </a:spcAft>
-              <a:buNone/>
-            </a:pPr>
-            <a:endParaRPr dirty="0"/>
-          </a:p>
-        </p:txBody>
-      </p:sp>
-      <p:sp>
-        <p:nvSpPr>
-          <p:cNvPr id="220" name="Google Shape;220;p15:notes"/>
-          <p:cNvSpPr>
-            <a:spLocks noGrp="1" noRot="1" noChangeAspect="1"/>
-          </p:cNvSpPr>
-          <p:nvPr>
-            <p:ph type="sldImg" idx="2"/>
-          </p:nvPr>
-        </p:nvSpPr>
-        <p:spPr>
-          <a:xfrm>
-            <a:off x="139700" y="768350"/>
-            <a:ext cx="6819900" cy="3836988"/>
-          </a:xfrm>
-          <a:custGeom>
-            <a:avLst/>
-            <a:gdLst/>
-            <a:ahLst/>
-            <a:cxnLst/>
-            <a:rect l="l" t="t" r="r" b="b"/>
-            <a:pathLst>
-              <a:path w="120000" h="120000" extrusionOk="0">
-                <a:moveTo>
-                  <a:pt x="0" y="0"/>
-                </a:moveTo>
-                <a:lnTo>
-                  <a:pt x="120000" y="0"/>
-                </a:lnTo>
-                <a:lnTo>
-                  <a:pt x="120000" y="120000"/>
-                </a:lnTo>
-                <a:lnTo>
-                  <a:pt x="0" y="120000"/>
-                </a:lnTo>
-                <a:close/>
-              </a:path>
-            </a:pathLst>
-          </a:custGeom>
-        </p:spPr>
-      </p:sp>
-    </p:spTree>
-  </p:cSld>
-  <p:clrMapOvr>
-    <a:masterClrMapping/>
-  </p:clrMapOvr>
-</p:notes>
-</file>
-
-<file path=ppt/notesSlides/notesSlide21.xml><?xml version="1.0" encoding="utf-8"?>
 <p:notes xmlns:a="http://schemas.openxmlformats.org/drawingml/2006/main" xmlns:r="http://schemas.openxmlformats.org/officeDocument/2006/relationships" xmlns:p="http://schemas.openxmlformats.org/presentationml/2006/main" showMasterSp="0" showMasterPhAnim="0">
   <p:cSld>
     <p:spTree>
@@ -5781,7 +5579,7 @@
         <p:cNvPr id="1" name="Shape 92">
           <a:extLst>
             <a:ext uri="{FF2B5EF4-FFF2-40B4-BE49-F238E27FC236}">
-              <a16:creationId xmlns:a16="http://schemas.microsoft.com/office/drawing/2014/main" id="{C74A8477-B88F-FDCC-A701-5F7099BC76CE}"/>
+              <a16:creationId xmlns:a16="http://schemas.microsoft.com/office/drawing/2014/main" id="{08F64D72-C30B-6A8A-F57E-C43225E9C74A}"/>
             </a:ext>
           </a:extLst>
         </p:cNvPr>
@@ -5801,7 +5599,7 @@
           <p:cNvPr id="93" name="Google Shape;93;p2:notes">
             <a:extLst>
               <a:ext uri="{FF2B5EF4-FFF2-40B4-BE49-F238E27FC236}">
-                <a16:creationId xmlns:a16="http://schemas.microsoft.com/office/drawing/2014/main" id="{15F890DD-D630-59CD-6348-BA79915B0150}"/>
+                <a16:creationId xmlns:a16="http://schemas.microsoft.com/office/drawing/2014/main" id="{51B1FD69-3F14-A795-83D8-0946306844C0}"/>
               </a:ext>
             </a:extLst>
           </p:cNvPr>
@@ -5858,7 +5656,7 @@
           <p:cNvPr id="94" name="Google Shape;94;p2:notes">
             <a:extLst>
               <a:ext uri="{FF2B5EF4-FFF2-40B4-BE49-F238E27FC236}">
-                <a16:creationId xmlns:a16="http://schemas.microsoft.com/office/drawing/2014/main" id="{DF804911-9090-EC13-1D99-50FB59B68683}"/>
+                <a16:creationId xmlns:a16="http://schemas.microsoft.com/office/drawing/2014/main" id="{253A1DFE-2497-0C78-A5FE-320E4612B0EA}"/>
               </a:ext>
             </a:extLst>
           </p:cNvPr>
@@ -5888,28 +5686,6 @@
           </a:bodyPr>
           <a:lstStyle/>
           <a:p>
-            <a:r>
-              <a:rPr lang="en-US" altLang="zh-TW" dirty="0"/>
-              <a:t>• SKILL.md (required): Instructions in Markdown with YAML frontmatter </a:t>
-            </a:r>
-          </a:p>
-          <a:p>
-            <a:r>
-              <a:rPr lang="en-US" altLang="zh-TW" dirty="0"/>
-              <a:t>• scripts/ (optional): Executable code (Python, Bash, etc.) </a:t>
-            </a:r>
-          </a:p>
-          <a:p>
-            <a:r>
-              <a:rPr lang="en-US" altLang="zh-TW" dirty="0"/>
-              <a:t>• references/ (optional): Documentation loaded as needed</a:t>
-            </a:r>
-          </a:p>
-          <a:p>
-            <a:r>
-              <a:rPr lang="en-US" altLang="zh-TW" dirty="0"/>
-              <a:t> • assets/ (optional): Templates, fonts, icons used in output</a:t>
-            </a:r>
             <a:endParaRPr lang="zh-TW" altLang="en-US" sz="1200" b="0" i="0" u="none" strike="noStrike" cap="none" dirty="0">
               <a:solidFill>
                 <a:schemeClr val="dk1"/>
@@ -5928,7 +5704,7 @@
           <p:cNvPr id="95" name="Google Shape;95;p2:notes">
             <a:extLst>
               <a:ext uri="{FF2B5EF4-FFF2-40B4-BE49-F238E27FC236}">
-                <a16:creationId xmlns:a16="http://schemas.microsoft.com/office/drawing/2014/main" id="{7E037D7F-981A-C0FE-851C-990DD00DAC57}"/>
+                <a16:creationId xmlns:a16="http://schemas.microsoft.com/office/drawing/2014/main" id="{6956C94E-CB45-0932-F854-6026DC033791}"/>
               </a:ext>
             </a:extLst>
           </p:cNvPr>
@@ -5978,7 +5754,7 @@
     </p:spTree>
     <p:extLst>
       <p:ext uri="{BB962C8B-B14F-4D97-AF65-F5344CB8AC3E}">
-        <p14:creationId xmlns:p14="http://schemas.microsoft.com/office/powerpoint/2010/main" val="1472319871"/>
+        <p14:creationId xmlns:p14="http://schemas.microsoft.com/office/powerpoint/2010/main" val="3595908420"/>
       </p:ext>
     </p:extLst>
   </p:cSld>
@@ -7166,199 +6942,6 @@
         <p:cNvPr id="1" name="Shape 92">
           <a:extLst>
             <a:ext uri="{FF2B5EF4-FFF2-40B4-BE49-F238E27FC236}">
-              <a16:creationId xmlns:a16="http://schemas.microsoft.com/office/drawing/2014/main" id="{08F64D72-C30B-6A8A-F57E-C43225E9C74A}"/>
-            </a:ext>
-          </a:extLst>
-        </p:cNvPr>
-        <p:cNvGrpSpPr/>
-        <p:nvPr/>
-      </p:nvGrpSpPr>
-      <p:grpSpPr>
-        <a:xfrm>
-          <a:off x="0" y="0"/>
-          <a:ext cx="0" cy="0"/>
-          <a:chOff x="0" y="0"/>
-          <a:chExt cx="0" cy="0"/>
-        </a:xfrm>
-      </p:grpSpPr>
-      <p:sp>
-        <p:nvSpPr>
-          <p:cNvPr id="93" name="Google Shape;93;p2:notes">
-            <a:extLst>
-              <a:ext uri="{FF2B5EF4-FFF2-40B4-BE49-F238E27FC236}">
-                <a16:creationId xmlns:a16="http://schemas.microsoft.com/office/drawing/2014/main" id="{51B1FD69-3F14-A795-83D8-0946306844C0}"/>
-              </a:ext>
-            </a:extLst>
-          </p:cNvPr>
-          <p:cNvSpPr>
-            <a:spLocks noGrp="1" noRot="1" noChangeAspect="1"/>
-          </p:cNvSpPr>
-          <p:nvPr>
-            <p:ph type="sldImg" idx="2"/>
-          </p:nvPr>
-        </p:nvSpPr>
-        <p:spPr>
-          <a:xfrm>
-            <a:off x="139700" y="768350"/>
-            <a:ext cx="6819900" cy="3836988"/>
-          </a:xfrm>
-          <a:custGeom>
-            <a:avLst/>
-            <a:gdLst/>
-            <a:ahLst/>
-            <a:cxnLst/>
-            <a:rect l="l" t="t" r="r" b="b"/>
-            <a:pathLst>
-              <a:path w="120000" h="120000" extrusionOk="0">
-                <a:moveTo>
-                  <a:pt x="0" y="0"/>
-                </a:moveTo>
-                <a:lnTo>
-                  <a:pt x="120000" y="0"/>
-                </a:lnTo>
-                <a:lnTo>
-                  <a:pt x="120000" y="120000"/>
-                </a:lnTo>
-                <a:lnTo>
-                  <a:pt x="0" y="120000"/>
-                </a:lnTo>
-                <a:close/>
-              </a:path>
-            </a:pathLst>
-          </a:custGeom>
-          <a:noFill/>
-          <a:ln w="12700" cap="flat" cmpd="sng">
-            <a:solidFill>
-              <a:srgbClr val="000000"/>
-            </a:solidFill>
-            <a:prstDash val="solid"/>
-            <a:round/>
-            <a:headEnd type="none" w="sm" len="sm"/>
-            <a:tailEnd type="none" w="sm" len="sm"/>
-          </a:ln>
-        </p:spPr>
-      </p:sp>
-      <p:sp>
-        <p:nvSpPr>
-          <p:cNvPr id="94" name="Google Shape;94;p2:notes">
-            <a:extLst>
-              <a:ext uri="{FF2B5EF4-FFF2-40B4-BE49-F238E27FC236}">
-                <a16:creationId xmlns:a16="http://schemas.microsoft.com/office/drawing/2014/main" id="{253A1DFE-2497-0C78-A5FE-320E4612B0EA}"/>
-              </a:ext>
-            </a:extLst>
-          </p:cNvPr>
-          <p:cNvSpPr txBox="1">
-            <a:spLocks noGrp="1"/>
-          </p:cNvSpPr>
-          <p:nvPr>
-            <p:ph type="body" idx="1"/>
-          </p:nvPr>
-        </p:nvSpPr>
-        <p:spPr>
-          <a:xfrm>
-            <a:off x="709613" y="4860925"/>
-            <a:ext cx="5680075" cy="4605338"/>
-          </a:xfrm>
-          <a:prstGeom prst="rect">
-            <a:avLst/>
-          </a:prstGeom>
-          <a:noFill/>
-          <a:ln>
-            <a:noFill/>
-          </a:ln>
-        </p:spPr>
-        <p:txBody>
-          <a:bodyPr spcFirstLastPara="1" wrap="square" lIns="99025" tIns="49500" rIns="99025" bIns="49500" anchor="t" anchorCtr="0">
-            <a:normAutofit/>
-          </a:bodyPr>
-          <a:lstStyle/>
-          <a:p>
-            <a:endParaRPr lang="zh-TW" altLang="en-US" sz="1200" b="0" i="0" u="none" strike="noStrike" cap="none" dirty="0">
-              <a:solidFill>
-                <a:schemeClr val="dk1"/>
-              </a:solidFill>
-              <a:effectLst/>
-              <a:latin typeface="Calibri"/>
-              <a:ea typeface="Calibri"/>
-              <a:cs typeface="Calibri"/>
-              <a:sym typeface="Calibri"/>
-            </a:endParaRPr>
-          </a:p>
-        </p:txBody>
-      </p:sp>
-      <p:sp>
-        <p:nvSpPr>
-          <p:cNvPr id="95" name="Google Shape;95;p2:notes">
-            <a:extLst>
-              <a:ext uri="{FF2B5EF4-FFF2-40B4-BE49-F238E27FC236}">
-                <a16:creationId xmlns:a16="http://schemas.microsoft.com/office/drawing/2014/main" id="{6956C94E-CB45-0932-F854-6026DC033791}"/>
-              </a:ext>
-            </a:extLst>
-          </p:cNvPr>
-          <p:cNvSpPr txBox="1">
-            <a:spLocks noGrp="1"/>
-          </p:cNvSpPr>
-          <p:nvPr>
-            <p:ph type="sldNum" idx="12"/>
-          </p:nvPr>
-        </p:nvSpPr>
-        <p:spPr>
-          <a:xfrm>
-            <a:off x="4021138" y="9721850"/>
-            <a:ext cx="3076575" cy="511175"/>
-          </a:xfrm>
-          <a:prstGeom prst="rect">
-            <a:avLst/>
-          </a:prstGeom>
-          <a:noFill/>
-          <a:ln>
-            <a:noFill/>
-          </a:ln>
-        </p:spPr>
-        <p:txBody>
-          <a:bodyPr spcFirstLastPara="1" wrap="square" lIns="99025" tIns="49500" rIns="99025" bIns="49500" anchor="b" anchorCtr="0">
-            <a:noAutofit/>
-          </a:bodyPr>
-          <a:lstStyle/>
-          <a:p>
-            <a:pPr marL="0" lvl="0" indent="0" algn="r" rtl="0">
-              <a:spcBef>
-                <a:spcPts val="0"/>
-              </a:spcBef>
-              <a:spcAft>
-                <a:spcPts val="0"/>
-              </a:spcAft>
-              <a:buNone/>
-            </a:pPr>
-            <a:fld id="{00000000-1234-1234-1234-123412341234}" type="slidenum">
-              <a:rPr lang="en-US"/>
-              <a:t>8</a:t>
-            </a:fld>
-            <a:endParaRPr/>
-          </a:p>
-        </p:txBody>
-      </p:sp>
-    </p:spTree>
-    <p:extLst>
-      <p:ext uri="{BB962C8B-B14F-4D97-AF65-F5344CB8AC3E}">
-        <p14:creationId xmlns:p14="http://schemas.microsoft.com/office/powerpoint/2010/main" val="3595908420"/>
-      </p:ext>
-    </p:extLst>
-  </p:cSld>
-  <p:clrMapOvr>
-    <a:masterClrMapping/>
-  </p:clrMapOvr>
-</p:notes>
-</file>
-
-<file path=ppt/notesSlides/notesSlide9.xml><?xml version="1.0" encoding="utf-8"?>
-<p:notes xmlns:a="http://schemas.openxmlformats.org/drawingml/2006/main" xmlns:r="http://schemas.openxmlformats.org/officeDocument/2006/relationships" xmlns:p="http://schemas.openxmlformats.org/presentationml/2006/main" showMasterSp="0" showMasterPhAnim="0">
-  <p:cSld>
-    <p:spTree>
-      <p:nvGrpSpPr>
-        <p:cNvPr id="1" name="Shape 92">
-          <a:extLst>
-            <a:ext uri="{FF2B5EF4-FFF2-40B4-BE49-F238E27FC236}">
               <a16:creationId xmlns:a16="http://schemas.microsoft.com/office/drawing/2014/main" id="{A1AB4463-E742-60C1-BE79-056A16CE67F8}"/>
             </a:ext>
           </a:extLst>
@@ -7525,6 +7108,207 @@
             </a:pPr>
             <a:fld id="{00000000-1234-1234-1234-123412341234}" type="slidenum">
               <a:rPr lang="en-US"/>
+              <a:t>8</a:t>
+            </a:fld>
+            <a:endParaRPr/>
+          </a:p>
+        </p:txBody>
+      </p:sp>
+    </p:spTree>
+    <p:extLst>
+      <p:ext uri="{BB962C8B-B14F-4D97-AF65-F5344CB8AC3E}">
+        <p14:creationId xmlns:p14="http://schemas.microsoft.com/office/powerpoint/2010/main" val="4275051073"/>
+      </p:ext>
+    </p:extLst>
+  </p:cSld>
+  <p:clrMapOvr>
+    <a:masterClrMapping/>
+  </p:clrMapOvr>
+</p:notes>
+</file>
+
+<file path=ppt/notesSlides/notesSlide9.xml><?xml version="1.0" encoding="utf-8"?>
+<p:notes xmlns:a="http://schemas.openxmlformats.org/drawingml/2006/main" xmlns:r="http://schemas.openxmlformats.org/officeDocument/2006/relationships" xmlns:p="http://schemas.openxmlformats.org/presentationml/2006/main" showMasterSp="0" showMasterPhAnim="0">
+  <p:cSld>
+    <p:spTree>
+      <p:nvGrpSpPr>
+        <p:cNvPr id="1" name="Shape 92">
+          <a:extLst>
+            <a:ext uri="{FF2B5EF4-FFF2-40B4-BE49-F238E27FC236}">
+              <a16:creationId xmlns:a16="http://schemas.microsoft.com/office/drawing/2014/main" id="{1FC71CAE-1A5C-FFAB-0BF7-3F1E9EEAEE6C}"/>
+            </a:ext>
+          </a:extLst>
+        </p:cNvPr>
+        <p:cNvGrpSpPr/>
+        <p:nvPr/>
+      </p:nvGrpSpPr>
+      <p:grpSpPr>
+        <a:xfrm>
+          <a:off x="0" y="0"/>
+          <a:ext cx="0" cy="0"/>
+          <a:chOff x="0" y="0"/>
+          <a:chExt cx="0" cy="0"/>
+        </a:xfrm>
+      </p:grpSpPr>
+      <p:sp>
+        <p:nvSpPr>
+          <p:cNvPr id="93" name="Google Shape;93;p2:notes">
+            <a:extLst>
+              <a:ext uri="{FF2B5EF4-FFF2-40B4-BE49-F238E27FC236}">
+                <a16:creationId xmlns:a16="http://schemas.microsoft.com/office/drawing/2014/main" id="{5B47EB58-4055-8407-CCFF-BDD7739A0EED}"/>
+              </a:ext>
+            </a:extLst>
+          </p:cNvPr>
+          <p:cNvSpPr>
+            <a:spLocks noGrp="1" noRot="1" noChangeAspect="1"/>
+          </p:cNvSpPr>
+          <p:nvPr>
+            <p:ph type="sldImg" idx="2"/>
+          </p:nvPr>
+        </p:nvSpPr>
+        <p:spPr>
+          <a:xfrm>
+            <a:off x="139700" y="768350"/>
+            <a:ext cx="6819900" cy="3836988"/>
+          </a:xfrm>
+          <a:custGeom>
+            <a:avLst/>
+            <a:gdLst/>
+            <a:ahLst/>
+            <a:cxnLst/>
+            <a:rect l="l" t="t" r="r" b="b"/>
+            <a:pathLst>
+              <a:path w="120000" h="120000" extrusionOk="0">
+                <a:moveTo>
+                  <a:pt x="0" y="0"/>
+                </a:moveTo>
+                <a:lnTo>
+                  <a:pt x="120000" y="0"/>
+                </a:lnTo>
+                <a:lnTo>
+                  <a:pt x="120000" y="120000"/>
+                </a:lnTo>
+                <a:lnTo>
+                  <a:pt x="0" y="120000"/>
+                </a:lnTo>
+                <a:close/>
+              </a:path>
+            </a:pathLst>
+          </a:custGeom>
+          <a:noFill/>
+          <a:ln w="12700" cap="flat" cmpd="sng">
+            <a:solidFill>
+              <a:srgbClr val="000000"/>
+            </a:solidFill>
+            <a:prstDash val="solid"/>
+            <a:round/>
+            <a:headEnd type="none" w="sm" len="sm"/>
+            <a:tailEnd type="none" w="sm" len="sm"/>
+          </a:ln>
+        </p:spPr>
+      </p:sp>
+      <p:sp>
+        <p:nvSpPr>
+          <p:cNvPr id="94" name="Google Shape;94;p2:notes">
+            <a:extLst>
+              <a:ext uri="{FF2B5EF4-FFF2-40B4-BE49-F238E27FC236}">
+                <a16:creationId xmlns:a16="http://schemas.microsoft.com/office/drawing/2014/main" id="{AE27E2EA-2253-5F45-7335-18BC7247B8B8}"/>
+              </a:ext>
+            </a:extLst>
+          </p:cNvPr>
+          <p:cNvSpPr txBox="1">
+            <a:spLocks noGrp="1"/>
+          </p:cNvSpPr>
+          <p:nvPr>
+            <p:ph type="body" idx="1"/>
+          </p:nvPr>
+        </p:nvSpPr>
+        <p:spPr>
+          <a:xfrm>
+            <a:off x="709613" y="4860925"/>
+            <a:ext cx="5680075" cy="4605338"/>
+          </a:xfrm>
+          <a:prstGeom prst="rect">
+            <a:avLst/>
+          </a:prstGeom>
+          <a:noFill/>
+          <a:ln>
+            <a:noFill/>
+          </a:ln>
+        </p:spPr>
+        <p:txBody>
+          <a:bodyPr spcFirstLastPara="1" wrap="square" lIns="99025" tIns="49500" rIns="99025" bIns="49500" anchor="t" anchorCtr="0">
+            <a:normAutofit/>
+          </a:bodyPr>
+          <a:lstStyle/>
+          <a:p>
+            <a:r>
+              <a:rPr lang="en-US" altLang="zh-TW" dirty="0"/>
+              <a:t>Category 1 </a:t>
+            </a:r>
+            <a:r>
+              <a:rPr lang="zh-TW" altLang="en-US" dirty="0"/>
+              <a:t>是為了創造一致、高品質的輸出 。</a:t>
+            </a:r>
+            <a:endParaRPr lang="zh-TW" altLang="en-US" sz="1200" b="0" i="0" u="none" strike="noStrike" cap="none" dirty="0">
+              <a:solidFill>
+                <a:schemeClr val="dk1"/>
+              </a:solidFill>
+              <a:effectLst/>
+              <a:latin typeface="Calibri"/>
+              <a:ea typeface="Calibri"/>
+              <a:cs typeface="Calibri"/>
+              <a:sym typeface="Calibri"/>
+            </a:endParaRPr>
+          </a:p>
+        </p:txBody>
+      </p:sp>
+      <p:sp>
+        <p:nvSpPr>
+          <p:cNvPr id="95" name="Google Shape;95;p2:notes">
+            <a:extLst>
+              <a:ext uri="{FF2B5EF4-FFF2-40B4-BE49-F238E27FC236}">
+                <a16:creationId xmlns:a16="http://schemas.microsoft.com/office/drawing/2014/main" id="{A3A93D0F-1150-9731-6CBD-A305F3966409}"/>
+              </a:ext>
+            </a:extLst>
+          </p:cNvPr>
+          <p:cNvSpPr txBox="1">
+            <a:spLocks noGrp="1"/>
+          </p:cNvSpPr>
+          <p:nvPr>
+            <p:ph type="sldNum" idx="12"/>
+          </p:nvPr>
+        </p:nvSpPr>
+        <p:spPr>
+          <a:xfrm>
+            <a:off x="4021138" y="9721850"/>
+            <a:ext cx="3076575" cy="511175"/>
+          </a:xfrm>
+          <a:prstGeom prst="rect">
+            <a:avLst/>
+          </a:prstGeom>
+          <a:noFill/>
+          <a:ln>
+            <a:noFill/>
+          </a:ln>
+        </p:spPr>
+        <p:txBody>
+          <a:bodyPr spcFirstLastPara="1" wrap="square" lIns="99025" tIns="49500" rIns="99025" bIns="49500" anchor="b" anchorCtr="0">
+            <a:noAutofit/>
+          </a:bodyPr>
+          <a:lstStyle/>
+          <a:p>
+            <a:pPr marL="0" lvl="0" indent="0" algn="r" rtl="0">
+              <a:spcBef>
+                <a:spcPts val="0"/>
+              </a:spcBef>
+              <a:spcAft>
+                <a:spcPts val="0"/>
+              </a:spcAft>
+              <a:buNone/>
+            </a:pPr>
+            <a:fld id="{00000000-1234-1234-1234-123412341234}" type="slidenum">
+              <a:rPr lang="en-US"/>
               <a:t>9</a:t>
             </a:fld>
             <a:endParaRPr/>
@@ -7534,7 +7318,7 @@
     </p:spTree>
     <p:extLst>
       <p:ext uri="{BB962C8B-B14F-4D97-AF65-F5344CB8AC3E}">
-        <p14:creationId xmlns:p14="http://schemas.microsoft.com/office/powerpoint/2010/main" val="4275051073"/>
+        <p14:creationId xmlns:p14="http://schemas.microsoft.com/office/powerpoint/2010/main" val="3509895589"/>
       </p:ext>
     </p:extLst>
   </p:cSld>
@@ -18841,346 +18625,6 @@
         <p:cNvPr id="1" name="Shape 96">
           <a:extLst>
             <a:ext uri="{FF2B5EF4-FFF2-40B4-BE49-F238E27FC236}">
-              <a16:creationId xmlns:a16="http://schemas.microsoft.com/office/drawing/2014/main" id="{2AE80049-1707-06C5-213E-D93DA334F4CA}"/>
-            </a:ext>
-          </a:extLst>
-        </p:cNvPr>
-        <p:cNvGrpSpPr/>
-        <p:nvPr/>
-      </p:nvGrpSpPr>
-      <p:grpSpPr>
-        <a:xfrm>
-          <a:off x="0" y="0"/>
-          <a:ext cx="0" cy="0"/>
-          <a:chOff x="0" y="0"/>
-          <a:chExt cx="0" cy="0"/>
-        </a:xfrm>
-      </p:grpSpPr>
-      <p:sp>
-        <p:nvSpPr>
-          <p:cNvPr id="97" name="Google Shape;97;p2">
-            <a:extLst>
-              <a:ext uri="{FF2B5EF4-FFF2-40B4-BE49-F238E27FC236}">
-                <a16:creationId xmlns:a16="http://schemas.microsoft.com/office/drawing/2014/main" id="{ED722555-D2CF-5A6A-CC0B-A05A22AE1AD3}"/>
-              </a:ext>
-            </a:extLst>
-          </p:cNvPr>
-          <p:cNvSpPr txBox="1">
-            <a:spLocks noGrp="1"/>
-          </p:cNvSpPr>
-          <p:nvPr>
-            <p:ph type="sldNum" idx="12"/>
-          </p:nvPr>
-        </p:nvSpPr>
-        <p:spPr>
-          <a:xfrm>
-            <a:off x="8737600" y="6356351"/>
-            <a:ext cx="2844800" cy="365125"/>
-          </a:xfrm>
-          <a:prstGeom prst="rect">
-            <a:avLst/>
-          </a:prstGeom>
-          <a:noFill/>
-          <a:ln>
-            <a:noFill/>
-          </a:ln>
-        </p:spPr>
-        <p:txBody>
-          <a:bodyPr spcFirstLastPara="1" wrap="square" lIns="91425" tIns="45700" rIns="91425" bIns="45700" anchor="ctr" anchorCtr="0">
-            <a:noAutofit/>
-          </a:bodyPr>
-          <a:lstStyle/>
-          <a:p>
-            <a:pPr marL="0" marR="0" lvl="0" indent="0" algn="r" rtl="0">
-              <a:spcBef>
-                <a:spcPts val="0"/>
-              </a:spcBef>
-              <a:spcAft>
-                <a:spcPts val="0"/>
-              </a:spcAft>
-              <a:buNone/>
-            </a:pPr>
-            <a:fld id="{00000000-1234-1234-1234-123412341234}" type="slidenum">
-              <a:rPr lang="en-US" sz="1200" b="0" i="0" u="none" strike="noStrike" cap="none">
-                <a:solidFill>
-                  <a:srgbClr val="10253F"/>
-                </a:solidFill>
-                <a:latin typeface="Calibri"/>
-                <a:ea typeface="Calibri"/>
-                <a:cs typeface="Calibri"/>
-                <a:sym typeface="Calibri"/>
-              </a:rPr>
-              <a:t>10</a:t>
-            </a:fld>
-            <a:endParaRPr sz="1200" b="0" i="0" u="none" strike="noStrike" cap="none" dirty="0">
-              <a:solidFill>
-                <a:srgbClr val="10253F"/>
-              </a:solidFill>
-              <a:latin typeface="Calibri"/>
-              <a:ea typeface="Calibri"/>
-              <a:cs typeface="Calibri"/>
-              <a:sym typeface="Calibri"/>
-            </a:endParaRPr>
-          </a:p>
-        </p:txBody>
-      </p:sp>
-      <p:sp>
-        <p:nvSpPr>
-          <p:cNvPr id="98" name="Google Shape;98;p2">
-            <a:extLst>
-              <a:ext uri="{FF2B5EF4-FFF2-40B4-BE49-F238E27FC236}">
-                <a16:creationId xmlns:a16="http://schemas.microsoft.com/office/drawing/2014/main" id="{7F4895DA-8AFC-82F3-F130-62D73482F06F}"/>
-              </a:ext>
-            </a:extLst>
-          </p:cNvPr>
-          <p:cNvSpPr txBox="1">
-            <a:spLocks noGrp="1"/>
-          </p:cNvSpPr>
-          <p:nvPr>
-            <p:ph type="dt" idx="10"/>
-          </p:nvPr>
-        </p:nvSpPr>
-        <p:spPr>
-          <a:xfrm>
-            <a:off x="609600" y="6356351"/>
-            <a:ext cx="2844800" cy="365125"/>
-          </a:xfrm>
-          <a:prstGeom prst="rect">
-            <a:avLst/>
-          </a:prstGeom>
-          <a:noFill/>
-          <a:ln>
-            <a:noFill/>
-          </a:ln>
-        </p:spPr>
-        <p:txBody>
-          <a:bodyPr spcFirstLastPara="1" wrap="square" lIns="91425" tIns="45700" rIns="91425" bIns="45700" anchor="ctr" anchorCtr="0">
-            <a:noAutofit/>
-          </a:bodyPr>
-          <a:lstStyle/>
-          <a:p>
-            <a:pPr lvl="0"/>
-            <a:r>
-              <a:rPr lang="en-US" altLang="zh-TW" dirty="0"/>
-              <a:t>2025/11/25</a:t>
-            </a:r>
-          </a:p>
-        </p:txBody>
-      </p:sp>
-      <p:sp>
-        <p:nvSpPr>
-          <p:cNvPr id="99" name="Google Shape;99;p2">
-            <a:extLst>
-              <a:ext uri="{FF2B5EF4-FFF2-40B4-BE49-F238E27FC236}">
-                <a16:creationId xmlns:a16="http://schemas.microsoft.com/office/drawing/2014/main" id="{0AE457D0-2A56-E3E3-A8E2-526949371D29}"/>
-              </a:ext>
-            </a:extLst>
-          </p:cNvPr>
-          <p:cNvSpPr txBox="1">
-            <a:spLocks noGrp="1"/>
-          </p:cNvSpPr>
-          <p:nvPr>
-            <p:ph type="ftr" idx="11"/>
-          </p:nvPr>
-        </p:nvSpPr>
-        <p:spPr>
-          <a:xfrm>
-            <a:off x="4165600" y="6356351"/>
-            <a:ext cx="3860800" cy="365125"/>
-          </a:xfrm>
-          <a:prstGeom prst="rect">
-            <a:avLst/>
-          </a:prstGeom>
-          <a:noFill/>
-          <a:ln>
-            <a:noFill/>
-          </a:ln>
-        </p:spPr>
-        <p:txBody>
-          <a:bodyPr spcFirstLastPara="1" wrap="square" lIns="91425" tIns="45700" rIns="91425" bIns="45700" anchor="ctr" anchorCtr="0">
-            <a:noAutofit/>
-          </a:bodyPr>
-          <a:lstStyle/>
-          <a:p>
-            <a:pPr marL="0" lvl="0" indent="0" algn="ctr" rtl="0">
-              <a:spcBef>
-                <a:spcPts val="0"/>
-              </a:spcBef>
-              <a:spcAft>
-                <a:spcPts val="0"/>
-              </a:spcAft>
-              <a:buNone/>
-            </a:pPr>
-            <a:r>
-              <a:rPr lang="en-US" dirty="0" err="1"/>
-              <a:t>軟體系統實驗室</a:t>
-            </a:r>
-            <a:endParaRPr dirty="0"/>
-          </a:p>
-        </p:txBody>
-      </p:sp>
-      <p:sp>
-        <p:nvSpPr>
-          <p:cNvPr id="7" name="Google Shape;100;p2">
-            <a:extLst>
-              <a:ext uri="{FF2B5EF4-FFF2-40B4-BE49-F238E27FC236}">
-                <a16:creationId xmlns:a16="http://schemas.microsoft.com/office/drawing/2014/main" id="{59C2EDC7-DD00-D1FD-EC94-9A42B1A7AC0D}"/>
-              </a:ext>
-            </a:extLst>
-          </p:cNvPr>
-          <p:cNvSpPr txBox="1">
-            <a:spLocks noGrp="1"/>
-          </p:cNvSpPr>
-          <p:nvPr>
-            <p:ph type="title"/>
-          </p:nvPr>
-        </p:nvSpPr>
-        <p:spPr>
-          <a:xfrm>
-            <a:off x="609600" y="274638"/>
-            <a:ext cx="10972800" cy="1143000"/>
-          </a:xfrm>
-          <a:prstGeom prst="rect">
-            <a:avLst/>
-          </a:prstGeom>
-          <a:noFill/>
-          <a:ln>
-            <a:noFill/>
-          </a:ln>
-        </p:spPr>
-        <p:txBody>
-          <a:bodyPr spcFirstLastPara="1" wrap="square" lIns="91425" tIns="45700" rIns="91425" bIns="45700" anchor="ctr" anchorCtr="0">
-            <a:noAutofit/>
-          </a:bodyPr>
-          <a:lstStyle/>
-          <a:p>
-            <a:r>
-              <a:rPr lang="en-US" altLang="zh-TW" dirty="0">
-                <a:latin typeface="Times New Roman" panose="02020603050405020304" pitchFamily="18" charset="0"/>
-                <a:ea typeface="標楷體" panose="03000509000000000000" pitchFamily="65" charset="-120"/>
-                <a:cs typeface="Times New Roman" panose="02020603050405020304" pitchFamily="18" charset="0"/>
-              </a:rPr>
-              <a:t>Common </a:t>
-            </a:r>
-            <a:r>
-              <a:rPr lang="en-US" altLang="zh-TW" dirty="0" err="1">
-                <a:latin typeface="Times New Roman" panose="02020603050405020304" pitchFamily="18" charset="0"/>
-                <a:ea typeface="標楷體" panose="03000509000000000000" pitchFamily="65" charset="-120"/>
-                <a:cs typeface="Times New Roman" panose="02020603050405020304" pitchFamily="18" charset="0"/>
-              </a:rPr>
-              <a:t>UseCase</a:t>
-            </a:r>
-            <a:endParaRPr dirty="0">
-              <a:latin typeface="Times New Roman" panose="02020603050405020304" pitchFamily="18" charset="0"/>
-              <a:ea typeface="標楷體" panose="03000509000000000000" pitchFamily="65" charset="-120"/>
-              <a:cs typeface="Times New Roman" panose="02020603050405020304" pitchFamily="18" charset="0"/>
-            </a:endParaRPr>
-          </a:p>
-        </p:txBody>
-      </p:sp>
-      <p:pic>
-        <p:nvPicPr>
-          <p:cNvPr id="11" name="圖片 10">
-            <a:extLst>
-              <a:ext uri="{FF2B5EF4-FFF2-40B4-BE49-F238E27FC236}">
-                <a16:creationId xmlns:a16="http://schemas.microsoft.com/office/drawing/2014/main" id="{25DC425D-77C1-93F0-07C9-9DDEB71B4F6B}"/>
-              </a:ext>
-            </a:extLst>
-          </p:cNvPr>
-          <p:cNvPicPr>
-            <a:picLocks noChangeAspect="1"/>
-          </p:cNvPicPr>
-          <p:nvPr/>
-        </p:nvPicPr>
-        <p:blipFill>
-          <a:blip r:embed="rId3"/>
-          <a:stretch>
-            <a:fillRect/>
-          </a:stretch>
-        </p:blipFill>
-        <p:spPr>
-          <a:xfrm>
-            <a:off x="609600" y="1417638"/>
-            <a:ext cx="11015713" cy="4938713"/>
-          </a:xfrm>
-          <a:prstGeom prst="rect">
-            <a:avLst/>
-          </a:prstGeom>
-        </p:spPr>
-      </p:pic>
-      <p:sp>
-        <p:nvSpPr>
-          <p:cNvPr id="2" name="矩形 1">
-            <a:extLst>
-              <a:ext uri="{FF2B5EF4-FFF2-40B4-BE49-F238E27FC236}">
-                <a16:creationId xmlns:a16="http://schemas.microsoft.com/office/drawing/2014/main" id="{09A204A5-8391-FB87-1F87-6CF64CACF63D}"/>
-              </a:ext>
-            </a:extLst>
-          </p:cNvPr>
-          <p:cNvSpPr/>
-          <p:nvPr/>
-        </p:nvSpPr>
-        <p:spPr>
-          <a:xfrm>
-            <a:off x="1210235" y="2160494"/>
-            <a:ext cx="10219765" cy="2985247"/>
-          </a:xfrm>
-          <a:prstGeom prst="rect">
-            <a:avLst/>
-          </a:prstGeom>
-          <a:noFill/>
-          <a:ln>
-            <a:solidFill>
-              <a:srgbClr val="FF0000"/>
-            </a:solidFill>
-          </a:ln>
-        </p:spPr>
-        <p:style>
-          <a:lnRef idx="2">
-            <a:schemeClr val="accent1">
-              <a:shade val="15000"/>
-            </a:schemeClr>
-          </a:lnRef>
-          <a:fillRef idx="1">
-            <a:schemeClr val="accent1"/>
-          </a:fillRef>
-          <a:effectRef idx="0">
-            <a:schemeClr val="accent1"/>
-          </a:effectRef>
-          <a:fontRef idx="minor">
-            <a:schemeClr val="lt1"/>
-          </a:fontRef>
-        </p:style>
-        <p:txBody>
-          <a:bodyPr rtlCol="0" anchor="ctr"/>
-          <a:lstStyle/>
-          <a:p>
-            <a:pPr algn="ctr"/>
-            <a:endParaRPr lang="zh-TW" altLang="en-US"/>
-          </a:p>
-        </p:txBody>
-      </p:sp>
-    </p:spTree>
-    <p:extLst>
-      <p:ext uri="{BB962C8B-B14F-4D97-AF65-F5344CB8AC3E}">
-        <p14:creationId xmlns:p14="http://schemas.microsoft.com/office/powerpoint/2010/main" val="3270234014"/>
-      </p:ext>
-    </p:extLst>
-  </p:cSld>
-  <p:clrMapOvr>
-    <a:masterClrMapping/>
-  </p:clrMapOvr>
-</p:sld>
-</file>
-
-<file path=ppt/slides/slide11.xml><?xml version="1.0" encoding="utf-8"?>
-<p:sld xmlns:a="http://schemas.openxmlformats.org/drawingml/2006/main" xmlns:r="http://schemas.openxmlformats.org/officeDocument/2006/relationships" xmlns:p="http://schemas.openxmlformats.org/presentationml/2006/main">
-  <p:cSld>
-    <p:spTree>
-      <p:nvGrpSpPr>
-        <p:cNvPr id="1" name="Shape 96">
-          <a:extLst>
-            <a:ext uri="{FF2B5EF4-FFF2-40B4-BE49-F238E27FC236}">
               <a16:creationId xmlns:a16="http://schemas.microsoft.com/office/drawing/2014/main" id="{51035089-A22E-1110-97B3-D57180398E34}"/>
             </a:ext>
           </a:extLst>
@@ -19250,7 +18694,7 @@
                 <a:cs typeface="Calibri"/>
                 <a:sym typeface="Calibri"/>
               </a:rPr>
-              <a:t>11</a:t>
+              <a:t>10</a:t>
             </a:fld>
             <a:endParaRPr sz="1200" b="0" i="0" u="none" strike="noStrike" cap="none" dirty="0">
               <a:solidFill>
@@ -19261,49 +18705,6 @@
               <a:cs typeface="Calibri"/>
               <a:sym typeface="Calibri"/>
             </a:endParaRPr>
-          </a:p>
-        </p:txBody>
-      </p:sp>
-      <p:sp>
-        <p:nvSpPr>
-          <p:cNvPr id="98" name="Google Shape;98;p2">
-            <a:extLst>
-              <a:ext uri="{FF2B5EF4-FFF2-40B4-BE49-F238E27FC236}">
-                <a16:creationId xmlns:a16="http://schemas.microsoft.com/office/drawing/2014/main" id="{7BA1DAF5-3161-C3F3-1B89-57294AB613B9}"/>
-              </a:ext>
-            </a:extLst>
-          </p:cNvPr>
-          <p:cNvSpPr txBox="1">
-            <a:spLocks noGrp="1"/>
-          </p:cNvSpPr>
-          <p:nvPr>
-            <p:ph type="dt" idx="10"/>
-          </p:nvPr>
-        </p:nvSpPr>
-        <p:spPr>
-          <a:xfrm>
-            <a:off x="609600" y="6356351"/>
-            <a:ext cx="2844800" cy="365125"/>
-          </a:xfrm>
-          <a:prstGeom prst="rect">
-            <a:avLst/>
-          </a:prstGeom>
-          <a:noFill/>
-          <a:ln>
-            <a:noFill/>
-          </a:ln>
-        </p:spPr>
-        <p:txBody>
-          <a:bodyPr spcFirstLastPara="1" wrap="square" lIns="91425" tIns="45700" rIns="91425" bIns="45700" anchor="ctr" anchorCtr="0">
-            <a:noAutofit/>
-          </a:bodyPr>
-          <a:lstStyle/>
-          <a:p>
-            <a:pPr lvl="0"/>
-            <a:r>
-              <a:rPr lang="en-US" altLang="zh-TW" dirty="0"/>
-              <a:t>2025/11/25</a:t>
-            </a:r>
           </a:p>
         </p:txBody>
       </p:sp>
@@ -19770,6 +19171,49 @@
           </a:p>
         </p:txBody>
       </p:sp>
+      <p:sp>
+        <p:nvSpPr>
+          <p:cNvPr id="3" name="Google Shape;98;p2">
+            <a:extLst>
+              <a:ext uri="{FF2B5EF4-FFF2-40B4-BE49-F238E27FC236}">
+                <a16:creationId xmlns:a16="http://schemas.microsoft.com/office/drawing/2014/main" id="{F0209F28-0CB1-DE17-5B25-CA0F3D3ED1D6}"/>
+              </a:ext>
+            </a:extLst>
+          </p:cNvPr>
+          <p:cNvSpPr txBox="1">
+            <a:spLocks noGrp="1"/>
+          </p:cNvSpPr>
+          <p:nvPr>
+            <p:ph type="dt" idx="10"/>
+          </p:nvPr>
+        </p:nvSpPr>
+        <p:spPr>
+          <a:xfrm>
+            <a:off x="609600" y="6356351"/>
+            <a:ext cx="2844800" cy="365125"/>
+          </a:xfrm>
+          <a:prstGeom prst="rect">
+            <a:avLst/>
+          </a:prstGeom>
+          <a:noFill/>
+          <a:ln>
+            <a:noFill/>
+          </a:ln>
+        </p:spPr>
+        <p:txBody>
+          <a:bodyPr spcFirstLastPara="1" wrap="square" lIns="91425" tIns="45700" rIns="91425" bIns="45700" anchor="ctr" anchorCtr="0">
+            <a:noAutofit/>
+          </a:bodyPr>
+          <a:lstStyle/>
+          <a:p>
+            <a:pPr lvl="0"/>
+            <a:r>
+              <a:rPr lang="en-US" altLang="zh-TW" dirty="0"/>
+              <a:t>2026/03/24</a:t>
+            </a:r>
+          </a:p>
+        </p:txBody>
+      </p:sp>
     </p:spTree>
     <p:extLst>
       <p:ext uri="{BB962C8B-B14F-4D97-AF65-F5344CB8AC3E}">
@@ -19783,7 +19227,7 @@
 </p:sld>
 </file>
 
-<file path=ppt/slides/slide12.xml><?xml version="1.0" encoding="utf-8"?>
+<file path=ppt/slides/slide11.xml><?xml version="1.0" encoding="utf-8"?>
 <p:sld xmlns:a="http://schemas.openxmlformats.org/drawingml/2006/main" xmlns:r="http://schemas.openxmlformats.org/officeDocument/2006/relationships" xmlns:p="http://schemas.openxmlformats.org/presentationml/2006/main">
   <p:cSld>
     <p:spTree>
@@ -19860,7 +19304,7 @@
                 <a:cs typeface="Calibri"/>
                 <a:sym typeface="Calibri"/>
               </a:rPr>
-              <a:t>12</a:t>
+              <a:t>11</a:t>
             </a:fld>
             <a:endParaRPr sz="1200" b="0" i="0" u="none" strike="noStrike" cap="none" dirty="0">
               <a:solidFill>
@@ -19871,49 +19315,6 @@
               <a:cs typeface="Calibri"/>
               <a:sym typeface="Calibri"/>
             </a:endParaRPr>
-          </a:p>
-        </p:txBody>
-      </p:sp>
-      <p:sp>
-        <p:nvSpPr>
-          <p:cNvPr id="98" name="Google Shape;98;p2">
-            <a:extLst>
-              <a:ext uri="{FF2B5EF4-FFF2-40B4-BE49-F238E27FC236}">
-                <a16:creationId xmlns:a16="http://schemas.microsoft.com/office/drawing/2014/main" id="{9FFFBE43-DBD6-5CC4-C4CF-98553D934F2C}"/>
-              </a:ext>
-            </a:extLst>
-          </p:cNvPr>
-          <p:cNvSpPr txBox="1">
-            <a:spLocks noGrp="1"/>
-          </p:cNvSpPr>
-          <p:nvPr>
-            <p:ph type="dt" idx="10"/>
-          </p:nvPr>
-        </p:nvSpPr>
-        <p:spPr>
-          <a:xfrm>
-            <a:off x="609600" y="6356351"/>
-            <a:ext cx="2844800" cy="365125"/>
-          </a:xfrm>
-          <a:prstGeom prst="rect">
-            <a:avLst/>
-          </a:prstGeom>
-          <a:noFill/>
-          <a:ln>
-            <a:noFill/>
-          </a:ln>
-        </p:spPr>
-        <p:txBody>
-          <a:bodyPr spcFirstLastPara="1" wrap="square" lIns="91425" tIns="45700" rIns="91425" bIns="45700" anchor="ctr" anchorCtr="0">
-            <a:noAutofit/>
-          </a:bodyPr>
-          <a:lstStyle/>
-          <a:p>
-            <a:pPr lvl="0"/>
-            <a:r>
-              <a:rPr lang="en-US" altLang="zh-TW" dirty="0"/>
-              <a:t>2025/11/25</a:t>
-            </a:r>
           </a:p>
         </p:txBody>
       </p:sp>
@@ -20151,6 +19552,49 @@
                 <a:srgbClr val="FF0000"/>
               </a:solidFill>
             </a:endParaRPr>
+          </a:p>
+        </p:txBody>
+      </p:sp>
+      <p:sp>
+        <p:nvSpPr>
+          <p:cNvPr id="2" name="Google Shape;98;p2">
+            <a:extLst>
+              <a:ext uri="{FF2B5EF4-FFF2-40B4-BE49-F238E27FC236}">
+                <a16:creationId xmlns:a16="http://schemas.microsoft.com/office/drawing/2014/main" id="{379A932C-106B-E803-1D32-FC7CB95C2E08}"/>
+              </a:ext>
+            </a:extLst>
+          </p:cNvPr>
+          <p:cNvSpPr txBox="1">
+            <a:spLocks noGrp="1"/>
+          </p:cNvSpPr>
+          <p:nvPr>
+            <p:ph type="dt" idx="10"/>
+          </p:nvPr>
+        </p:nvSpPr>
+        <p:spPr>
+          <a:xfrm>
+            <a:off x="609600" y="6356351"/>
+            <a:ext cx="2844800" cy="365125"/>
+          </a:xfrm>
+          <a:prstGeom prst="rect">
+            <a:avLst/>
+          </a:prstGeom>
+          <a:noFill/>
+          <a:ln>
+            <a:noFill/>
+          </a:ln>
+        </p:spPr>
+        <p:txBody>
+          <a:bodyPr spcFirstLastPara="1" wrap="square" lIns="91425" tIns="45700" rIns="91425" bIns="45700" anchor="ctr" anchorCtr="0">
+            <a:noAutofit/>
+          </a:bodyPr>
+          <a:lstStyle/>
+          <a:p>
+            <a:pPr lvl="0"/>
+            <a:r>
+              <a:rPr lang="en-US" altLang="zh-TW" dirty="0"/>
+              <a:t>2026/03/24</a:t>
+            </a:r>
           </a:p>
         </p:txBody>
       </p:sp>
@@ -20383,7 +19827,7 @@
 </p:sld>
 </file>
 
-<file path=ppt/slides/slide13.xml><?xml version="1.0" encoding="utf-8"?>
+<file path=ppt/slides/slide12.xml><?xml version="1.0" encoding="utf-8"?>
 <p:sld xmlns:a="http://schemas.openxmlformats.org/drawingml/2006/main" xmlns:r="http://schemas.openxmlformats.org/officeDocument/2006/relationships" xmlns:p="http://schemas.openxmlformats.org/presentationml/2006/main">
   <p:cSld>
     <p:spTree>
@@ -20460,7 +19904,7 @@
                 <a:cs typeface="Calibri"/>
                 <a:sym typeface="Calibri"/>
               </a:rPr>
-              <a:t>13</a:t>
+              <a:t>12</a:t>
             </a:fld>
             <a:endParaRPr sz="1200" b="0" i="0" u="none" strike="noStrike" cap="none" dirty="0">
               <a:solidFill>
@@ -20471,49 +19915,6 @@
               <a:cs typeface="Calibri"/>
               <a:sym typeface="Calibri"/>
             </a:endParaRPr>
-          </a:p>
-        </p:txBody>
-      </p:sp>
-      <p:sp>
-        <p:nvSpPr>
-          <p:cNvPr id="98" name="Google Shape;98;p2">
-            <a:extLst>
-              <a:ext uri="{FF2B5EF4-FFF2-40B4-BE49-F238E27FC236}">
-                <a16:creationId xmlns:a16="http://schemas.microsoft.com/office/drawing/2014/main" id="{8866542B-FFDF-1328-F632-8D505FD7AAB2}"/>
-              </a:ext>
-            </a:extLst>
-          </p:cNvPr>
-          <p:cNvSpPr txBox="1">
-            <a:spLocks noGrp="1"/>
-          </p:cNvSpPr>
-          <p:nvPr>
-            <p:ph type="dt" idx="10"/>
-          </p:nvPr>
-        </p:nvSpPr>
-        <p:spPr>
-          <a:xfrm>
-            <a:off x="609600" y="6356351"/>
-            <a:ext cx="2844800" cy="365125"/>
-          </a:xfrm>
-          <a:prstGeom prst="rect">
-            <a:avLst/>
-          </a:prstGeom>
-          <a:noFill/>
-          <a:ln>
-            <a:noFill/>
-          </a:ln>
-        </p:spPr>
-        <p:txBody>
-          <a:bodyPr spcFirstLastPara="1" wrap="square" lIns="91425" tIns="45700" rIns="91425" bIns="45700" anchor="ctr" anchorCtr="0">
-            <a:noAutofit/>
-          </a:bodyPr>
-          <a:lstStyle/>
-          <a:p>
-            <a:pPr lvl="0"/>
-            <a:r>
-              <a:rPr lang="en-US" altLang="zh-TW" dirty="0"/>
-              <a:t>2025/11/25</a:t>
-            </a:r>
           </a:p>
         </p:txBody>
       </p:sp>
@@ -21043,6 +20444,49 @@
           </a:p>
         </p:txBody>
       </p:sp>
+      <p:sp>
+        <p:nvSpPr>
+          <p:cNvPr id="3" name="Google Shape;98;p2">
+            <a:extLst>
+              <a:ext uri="{FF2B5EF4-FFF2-40B4-BE49-F238E27FC236}">
+                <a16:creationId xmlns:a16="http://schemas.microsoft.com/office/drawing/2014/main" id="{3DF57FB7-2ED1-4165-D2DF-C2A1B95D7BDB}"/>
+              </a:ext>
+            </a:extLst>
+          </p:cNvPr>
+          <p:cNvSpPr txBox="1">
+            <a:spLocks noGrp="1"/>
+          </p:cNvSpPr>
+          <p:nvPr>
+            <p:ph type="dt" idx="10"/>
+          </p:nvPr>
+        </p:nvSpPr>
+        <p:spPr>
+          <a:xfrm>
+            <a:off x="609600" y="6356351"/>
+            <a:ext cx="2844800" cy="365125"/>
+          </a:xfrm>
+          <a:prstGeom prst="rect">
+            <a:avLst/>
+          </a:prstGeom>
+          <a:noFill/>
+          <a:ln>
+            <a:noFill/>
+          </a:ln>
+        </p:spPr>
+        <p:txBody>
+          <a:bodyPr spcFirstLastPara="1" wrap="square" lIns="91425" tIns="45700" rIns="91425" bIns="45700" anchor="ctr" anchorCtr="0">
+            <a:noAutofit/>
+          </a:bodyPr>
+          <a:lstStyle/>
+          <a:p>
+            <a:pPr lvl="0"/>
+            <a:r>
+              <a:rPr lang="en-US" altLang="zh-TW" dirty="0"/>
+              <a:t>2026/03/24</a:t>
+            </a:r>
+          </a:p>
+        </p:txBody>
+      </p:sp>
     </p:spTree>
     <p:extLst>
       <p:ext uri="{BB962C8B-B14F-4D97-AF65-F5344CB8AC3E}">
@@ -21056,7 +20500,7 @@
 </p:sld>
 </file>
 
-<file path=ppt/slides/slide14.xml><?xml version="1.0" encoding="utf-8"?>
+<file path=ppt/slides/slide13.xml><?xml version="1.0" encoding="utf-8"?>
 <p:sld xmlns:a="http://schemas.openxmlformats.org/drawingml/2006/main" xmlns:r="http://schemas.openxmlformats.org/officeDocument/2006/relationships" xmlns:p="http://schemas.openxmlformats.org/presentationml/2006/main">
   <p:cSld>
     <p:spTree>
@@ -21133,7 +20577,7 @@
                 <a:cs typeface="Calibri"/>
                 <a:sym typeface="Calibri"/>
               </a:rPr>
-              <a:t>14</a:t>
+              <a:t>13</a:t>
             </a:fld>
             <a:endParaRPr sz="1200" b="0" i="0" u="none" strike="noStrike" cap="none" dirty="0">
               <a:solidFill>
@@ -21144,49 +20588,6 @@
               <a:cs typeface="Calibri"/>
               <a:sym typeface="Calibri"/>
             </a:endParaRPr>
-          </a:p>
-        </p:txBody>
-      </p:sp>
-      <p:sp>
-        <p:nvSpPr>
-          <p:cNvPr id="98" name="Google Shape;98;p2">
-            <a:extLst>
-              <a:ext uri="{FF2B5EF4-FFF2-40B4-BE49-F238E27FC236}">
-                <a16:creationId xmlns:a16="http://schemas.microsoft.com/office/drawing/2014/main" id="{E193BE36-AE9D-4A06-3488-2BB7CFF02396}"/>
-              </a:ext>
-            </a:extLst>
-          </p:cNvPr>
-          <p:cNvSpPr txBox="1">
-            <a:spLocks noGrp="1"/>
-          </p:cNvSpPr>
-          <p:nvPr>
-            <p:ph type="dt" idx="10"/>
-          </p:nvPr>
-        </p:nvSpPr>
-        <p:spPr>
-          <a:xfrm>
-            <a:off x="609600" y="6356351"/>
-            <a:ext cx="2844800" cy="365125"/>
-          </a:xfrm>
-          <a:prstGeom prst="rect">
-            <a:avLst/>
-          </a:prstGeom>
-          <a:noFill/>
-          <a:ln>
-            <a:noFill/>
-          </a:ln>
-        </p:spPr>
-        <p:txBody>
-          <a:bodyPr spcFirstLastPara="1" wrap="square" lIns="91425" tIns="45700" rIns="91425" bIns="45700" anchor="ctr" anchorCtr="0">
-            <a:noAutofit/>
-          </a:bodyPr>
-          <a:lstStyle/>
-          <a:p>
-            <a:pPr lvl="0"/>
-            <a:r>
-              <a:rPr lang="en-US" altLang="zh-TW" dirty="0"/>
-              <a:t>2025/11/25</a:t>
-            </a:r>
           </a:p>
         </p:txBody>
       </p:sp>
@@ -21331,6 +20732,49 @@
           </a:prstGeom>
         </p:spPr>
       </p:pic>
+      <p:sp>
+        <p:nvSpPr>
+          <p:cNvPr id="2" name="Google Shape;98;p2">
+            <a:extLst>
+              <a:ext uri="{FF2B5EF4-FFF2-40B4-BE49-F238E27FC236}">
+                <a16:creationId xmlns:a16="http://schemas.microsoft.com/office/drawing/2014/main" id="{8B5D1D9B-8FF5-B4BB-7E59-2B50344A41C6}"/>
+              </a:ext>
+            </a:extLst>
+          </p:cNvPr>
+          <p:cNvSpPr txBox="1">
+            <a:spLocks noGrp="1"/>
+          </p:cNvSpPr>
+          <p:nvPr>
+            <p:ph type="dt" idx="10"/>
+          </p:nvPr>
+        </p:nvSpPr>
+        <p:spPr>
+          <a:xfrm>
+            <a:off x="609600" y="6356351"/>
+            <a:ext cx="2844800" cy="365125"/>
+          </a:xfrm>
+          <a:prstGeom prst="rect">
+            <a:avLst/>
+          </a:prstGeom>
+          <a:noFill/>
+          <a:ln>
+            <a:noFill/>
+          </a:ln>
+        </p:spPr>
+        <p:txBody>
+          <a:bodyPr spcFirstLastPara="1" wrap="square" lIns="91425" tIns="45700" rIns="91425" bIns="45700" anchor="ctr" anchorCtr="0">
+            <a:noAutofit/>
+          </a:bodyPr>
+          <a:lstStyle/>
+          <a:p>
+            <a:pPr lvl="0"/>
+            <a:r>
+              <a:rPr lang="en-US" altLang="zh-TW" dirty="0"/>
+              <a:t>2026/03/24</a:t>
+            </a:r>
+          </a:p>
+        </p:txBody>
+      </p:sp>
     </p:spTree>
     <p:extLst>
       <p:ext uri="{BB962C8B-B14F-4D97-AF65-F5344CB8AC3E}">
@@ -21344,7 +20788,7 @@
 </p:sld>
 </file>
 
-<file path=ppt/slides/slide15.xml><?xml version="1.0" encoding="utf-8"?>
+<file path=ppt/slides/slide14.xml><?xml version="1.0" encoding="utf-8"?>
 <p:sld xmlns:a="http://schemas.openxmlformats.org/drawingml/2006/main" xmlns:r="http://schemas.openxmlformats.org/officeDocument/2006/relationships" xmlns:p="http://schemas.openxmlformats.org/presentationml/2006/main">
   <p:cSld>
     <p:spTree>
@@ -21385,7 +20829,7 @@
         </p:nvSpPr>
         <p:spPr>
           <a:xfrm>
-            <a:off x="8737600" y="6356351"/>
+            <a:off x="9078259" y="6356350"/>
             <a:ext cx="2844800" cy="365125"/>
           </a:xfrm>
           <a:prstGeom prst="rect">
@@ -21421,7 +20865,7 @@
                 <a:cs typeface="Calibri"/>
                 <a:sym typeface="Calibri"/>
               </a:rPr>
-              <a:t>15</a:t>
+              <a:t>14</a:t>
             </a:fld>
             <a:endParaRPr sz="1200" b="0" i="0" u="none" strike="noStrike" cap="none" dirty="0">
               <a:solidFill>
@@ -21432,49 +20876,6 @@
               <a:cs typeface="Calibri"/>
               <a:sym typeface="Calibri"/>
             </a:endParaRPr>
-          </a:p>
-        </p:txBody>
-      </p:sp>
-      <p:sp>
-        <p:nvSpPr>
-          <p:cNvPr id="98" name="Google Shape;98;p2">
-            <a:extLst>
-              <a:ext uri="{FF2B5EF4-FFF2-40B4-BE49-F238E27FC236}">
-                <a16:creationId xmlns:a16="http://schemas.microsoft.com/office/drawing/2014/main" id="{8D528FEE-1988-41A7-DA20-BF0146C89A60}"/>
-              </a:ext>
-            </a:extLst>
-          </p:cNvPr>
-          <p:cNvSpPr txBox="1">
-            <a:spLocks noGrp="1"/>
-          </p:cNvSpPr>
-          <p:nvPr>
-            <p:ph type="dt" idx="10"/>
-          </p:nvPr>
-        </p:nvSpPr>
-        <p:spPr>
-          <a:xfrm>
-            <a:off x="609600" y="6356351"/>
-            <a:ext cx="2844800" cy="365125"/>
-          </a:xfrm>
-          <a:prstGeom prst="rect">
-            <a:avLst/>
-          </a:prstGeom>
-          <a:noFill/>
-          <a:ln>
-            <a:noFill/>
-          </a:ln>
-        </p:spPr>
-        <p:txBody>
-          <a:bodyPr spcFirstLastPara="1" wrap="square" lIns="91425" tIns="45700" rIns="91425" bIns="45700" anchor="ctr" anchorCtr="0">
-            <a:noAutofit/>
-          </a:bodyPr>
-          <a:lstStyle/>
-          <a:p>
-            <a:pPr lvl="0"/>
-            <a:r>
-              <a:rPr lang="en-US" altLang="zh-TW" dirty="0"/>
-              <a:t>2025/11/25</a:t>
-            </a:r>
           </a:p>
         </p:txBody>
       </p:sp>
@@ -21496,7 +20897,7 @@
         </p:nvSpPr>
         <p:spPr>
           <a:xfrm>
-            <a:off x="4165600" y="6356351"/>
+            <a:off x="3063070" y="6365690"/>
             <a:ext cx="3860800" cy="365125"/>
           </a:xfrm>
           <a:prstGeom prst="rect">
@@ -21865,7 +21266,7 @@
               <a:defRPr/>
             </a:pPr>
             <a:r>
-              <a:rPr lang="en-US" altLang="zh-TW" sz="2800" dirty="0">
+              <a:rPr lang="en-US" altLang="zh-TW" sz="2200" dirty="0">
                 <a:solidFill>
                   <a:schemeClr val="tx1"/>
                 </a:solidFill>
@@ -21880,7 +21281,7 @@
               <a:defRPr/>
             </a:pPr>
             <a:r>
-              <a:rPr lang="en-US" altLang="zh-TW" sz="2800" dirty="0">
+              <a:rPr lang="en-US" altLang="zh-TW" sz="2200" dirty="0">
                 <a:solidFill>
                   <a:schemeClr val="tx1"/>
                 </a:solidFill>
@@ -21889,7 +21290,7 @@
               <a:t>	</a:t>
             </a:r>
             <a:r>
-              <a:rPr lang="zh-TW" altLang="en-US" sz="2800" dirty="0">
+              <a:rPr lang="zh-TW" altLang="en-US" sz="2200" dirty="0">
                 <a:solidFill>
                   <a:schemeClr val="tx1"/>
                 </a:solidFill>
@@ -21898,7 +21299,7 @@
               <a:t>「</a:t>
             </a:r>
             <a:r>
-              <a:rPr lang="en-US" altLang="zh-TW" sz="2800" dirty="0">
+              <a:rPr lang="en-US" altLang="zh-TW" sz="2200" dirty="0">
                 <a:solidFill>
                   <a:schemeClr val="tx1"/>
                 </a:solidFill>
@@ -21907,7 +21308,7 @@
               <a:t>Skill </a:t>
             </a:r>
             <a:r>
-              <a:rPr lang="zh-TW" altLang="en-US" sz="2800" dirty="0">
+              <a:rPr lang="zh-TW" altLang="en-US" sz="2200" dirty="0">
                 <a:solidFill>
                   <a:schemeClr val="tx1"/>
                 </a:solidFill>
@@ -21916,7 +21317,7 @@
               <a:t>不是寫完就丟的資料，而是會隨時間進化的活文件 </a:t>
             </a:r>
             <a:r>
-              <a:rPr lang="en-US" altLang="zh-TW" sz="2800" dirty="0">
+              <a:rPr lang="en-US" altLang="zh-TW" sz="2200" dirty="0">
                 <a:solidFill>
                   <a:schemeClr val="tx1"/>
                 </a:solidFill>
@@ -21925,7 +21326,7 @@
               <a:t>(Living documents)</a:t>
             </a:r>
             <a:r>
-              <a:rPr lang="zh-TW" altLang="en-US" sz="2800" dirty="0">
+              <a:rPr lang="zh-TW" altLang="en-US" sz="2200" dirty="0">
                 <a:solidFill>
                   <a:schemeClr val="tx1"/>
                 </a:solidFill>
@@ -21934,7 +21335,7 @@
               <a:t>」，所以建立</a:t>
             </a:r>
             <a:r>
-              <a:rPr lang="en-US" altLang="zh-TW" sz="2800" dirty="0">
+              <a:rPr lang="en-US" altLang="zh-TW" sz="2200" dirty="0">
                 <a:solidFill>
                   <a:schemeClr val="tx1"/>
                 </a:solidFill>
@@ -21943,7 +21344,7 @@
               <a:t>SKILL</a:t>
             </a:r>
             <a:r>
-              <a:rPr lang="zh-TW" altLang="en-US" sz="2800" dirty="0">
+              <a:rPr lang="zh-TW" altLang="en-US" sz="2200" dirty="0">
                 <a:solidFill>
                   <a:schemeClr val="tx1"/>
                 </a:solidFill>
@@ -21952,7 +21353,7 @@
               <a:t>之後，必須觀察</a:t>
             </a:r>
             <a:r>
-              <a:rPr lang="en-US" altLang="zh-TW" sz="2800" dirty="0">
+              <a:rPr lang="en-US" altLang="zh-TW" sz="2200" dirty="0">
                 <a:solidFill>
                   <a:schemeClr val="tx1"/>
                 </a:solidFill>
@@ -21961,7 +21362,7 @@
               <a:t>Claude</a:t>
             </a:r>
             <a:r>
-              <a:rPr lang="zh-TW" altLang="en-US" sz="2800" dirty="0">
+              <a:rPr lang="zh-TW" altLang="en-US" sz="2200" dirty="0">
                 <a:solidFill>
                   <a:schemeClr val="tx1"/>
                 </a:solidFill>
@@ -21970,7 +21371,7 @@
               <a:t>實際執行狀況，透過修改</a:t>
             </a:r>
             <a:r>
-              <a:rPr lang="en-US" altLang="zh-TW" sz="2800" dirty="0">
+              <a:rPr lang="en-US" altLang="zh-TW" sz="2200" dirty="0">
                 <a:solidFill>
                   <a:schemeClr val="tx1"/>
                 </a:solidFill>
@@ -21979,7 +21380,7 @@
               <a:t>SKILL</a:t>
             </a:r>
             <a:r>
-              <a:rPr lang="zh-TW" altLang="en-US" sz="2800" dirty="0">
+              <a:rPr lang="zh-TW" altLang="en-US" sz="2200" dirty="0">
                 <a:solidFill>
                   <a:schemeClr val="tx1"/>
                 </a:solidFill>
@@ -21987,7 +21388,7 @@
               </a:rPr>
               <a:t>內部文件來進行迭代。</a:t>
             </a:r>
-            <a:endParaRPr lang="en-US" altLang="zh-TW" sz="2800" dirty="0">
+            <a:endParaRPr lang="en-US" altLang="zh-TW" sz="2200" dirty="0">
               <a:solidFill>
                 <a:schemeClr val="tx1"/>
               </a:solidFill>
@@ -21999,7 +21400,7 @@
               <a:buNone/>
               <a:defRPr/>
             </a:pPr>
-            <a:endParaRPr lang="en-US" altLang="zh-TW" sz="2800" dirty="0">
+            <a:endParaRPr lang="en-US" altLang="zh-TW" sz="2200" dirty="0">
               <a:solidFill>
                 <a:schemeClr val="tx1"/>
               </a:solidFill>
@@ -22012,7 +21413,7 @@
               <a:defRPr/>
             </a:pPr>
             <a:r>
-              <a:rPr lang="zh-TW" altLang="en-US" sz="2800" dirty="0">
+              <a:rPr lang="zh-TW" altLang="en-US" sz="2200" dirty="0">
                 <a:solidFill>
                   <a:schemeClr val="tx1"/>
                 </a:solidFill>
@@ -22021,7 +21422,7 @@
               <a:t>促使開發者迭代開發</a:t>
             </a:r>
             <a:r>
-              <a:rPr lang="en-US" altLang="zh-TW" sz="2800" dirty="0">
+              <a:rPr lang="en-US" altLang="zh-TW" sz="2200" dirty="0">
                 <a:solidFill>
                   <a:schemeClr val="tx1"/>
                 </a:solidFill>
@@ -22030,7 +21431,7 @@
               <a:t>SKILL</a:t>
             </a:r>
             <a:r>
-              <a:rPr lang="zh-TW" altLang="en-US" sz="2800" dirty="0">
+              <a:rPr lang="zh-TW" altLang="en-US" sz="2200" dirty="0">
                 <a:solidFill>
                   <a:schemeClr val="tx1"/>
                 </a:solidFill>
@@ -22038,7 +21439,7 @@
               </a:rPr>
               <a:t>的原因通常有三種</a:t>
             </a:r>
-            <a:endParaRPr lang="en-US" altLang="zh-TW" sz="2800" dirty="0">
+            <a:endParaRPr lang="en-US" altLang="zh-TW" sz="2200" dirty="0">
               <a:solidFill>
                 <a:schemeClr val="tx1"/>
               </a:solidFill>
@@ -22051,7 +21452,7 @@
               <a:defRPr/>
             </a:pPr>
             <a:r>
-              <a:rPr lang="en-US" altLang="zh-TW" sz="2800" dirty="0">
+              <a:rPr lang="en-US" altLang="zh-TW" sz="2200" dirty="0">
                 <a:solidFill>
                   <a:schemeClr val="tx1"/>
                 </a:solidFill>
@@ -22060,7 +21461,7 @@
               <a:t>1. </a:t>
             </a:r>
             <a:r>
-              <a:rPr lang="en-US" altLang="zh-TW" sz="2800" dirty="0" err="1">
+              <a:rPr lang="en-US" altLang="zh-TW" sz="2200" dirty="0" err="1">
                 <a:solidFill>
                   <a:schemeClr val="tx1"/>
                 </a:solidFill>
@@ -22069,7 +21470,7 @@
               <a:t>Undertriggering</a:t>
             </a:r>
             <a:r>
-              <a:rPr lang="en-US" altLang="zh-TW" sz="2800" dirty="0">
+              <a:rPr lang="en-US" altLang="zh-TW" sz="2200" dirty="0">
                 <a:solidFill>
                   <a:schemeClr val="tx1"/>
                 </a:solidFill>
@@ -22084,7 +21485,7 @@
               <a:defRPr/>
             </a:pPr>
             <a:r>
-              <a:rPr lang="en-US" altLang="zh-TW" sz="2800" dirty="0">
+              <a:rPr lang="en-US" altLang="zh-TW" sz="2200" dirty="0">
                 <a:solidFill>
                   <a:schemeClr val="tx1"/>
                 </a:solidFill>
@@ -22093,7 +21494,7 @@
               <a:t>2. </a:t>
             </a:r>
             <a:r>
-              <a:rPr lang="en-US" altLang="zh-TW" sz="2800" dirty="0" err="1">
+              <a:rPr lang="en-US" altLang="zh-TW" sz="2200" dirty="0" err="1">
                 <a:solidFill>
                   <a:schemeClr val="tx1"/>
                 </a:solidFill>
@@ -22102,7 +21503,7 @@
               <a:t>Overtriggering</a:t>
             </a:r>
             <a:r>
-              <a:rPr lang="en-US" altLang="zh-TW" sz="2800" dirty="0">
+              <a:rPr lang="en-US" altLang="zh-TW" sz="2200" dirty="0">
                 <a:solidFill>
                   <a:schemeClr val="tx1"/>
                 </a:solidFill>
@@ -22117,13 +21518,86 @@
               <a:defRPr/>
             </a:pPr>
             <a:r>
-              <a:rPr lang="en-US" altLang="zh-TW" sz="2800" dirty="0">
+              <a:rPr lang="en-US" altLang="zh-TW" sz="2200" dirty="0">
                 <a:solidFill>
                   <a:schemeClr val="tx1"/>
                 </a:solidFill>
                 <a:ea typeface="標楷體" panose="03000509000000000000" pitchFamily="65" charset="-120"/>
               </a:rPr>
               <a:t>3. Execution issues</a:t>
+            </a:r>
+          </a:p>
+        </p:txBody>
+      </p:sp>
+      <p:pic>
+        <p:nvPicPr>
+          <p:cNvPr id="4" name="圖片 3">
+            <a:extLst>
+              <a:ext uri="{FF2B5EF4-FFF2-40B4-BE49-F238E27FC236}">
+                <a16:creationId xmlns:a16="http://schemas.microsoft.com/office/drawing/2014/main" id="{A9A2C74D-8803-114B-E637-A25586526C21}"/>
+              </a:ext>
+            </a:extLst>
+          </p:cNvPr>
+          <p:cNvPicPr>
+            <a:picLocks noChangeAspect="1"/>
+          </p:cNvPicPr>
+          <p:nvPr/>
+        </p:nvPicPr>
+        <p:blipFill>
+          <a:blip r:embed="rId3"/>
+          <a:stretch>
+            <a:fillRect/>
+          </a:stretch>
+        </p:blipFill>
+        <p:spPr>
+          <a:xfrm>
+            <a:off x="6496683" y="2732181"/>
+            <a:ext cx="4834707" cy="3989294"/>
+          </a:xfrm>
+          <a:prstGeom prst="rect">
+            <a:avLst/>
+          </a:prstGeom>
+        </p:spPr>
+      </p:pic>
+      <p:sp>
+        <p:nvSpPr>
+          <p:cNvPr id="5" name="Google Shape;98;p2">
+            <a:extLst>
+              <a:ext uri="{FF2B5EF4-FFF2-40B4-BE49-F238E27FC236}">
+                <a16:creationId xmlns:a16="http://schemas.microsoft.com/office/drawing/2014/main" id="{D00BC5A3-B3EA-C2B5-4D11-096C170DBFFF}"/>
+              </a:ext>
+            </a:extLst>
+          </p:cNvPr>
+          <p:cNvSpPr txBox="1">
+            <a:spLocks noGrp="1"/>
+          </p:cNvSpPr>
+          <p:nvPr>
+            <p:ph type="dt" idx="10"/>
+          </p:nvPr>
+        </p:nvSpPr>
+        <p:spPr>
+          <a:xfrm>
+            <a:off x="609600" y="6356351"/>
+            <a:ext cx="2844800" cy="365125"/>
+          </a:xfrm>
+          <a:prstGeom prst="rect">
+            <a:avLst/>
+          </a:prstGeom>
+          <a:noFill/>
+          <a:ln>
+            <a:noFill/>
+          </a:ln>
+        </p:spPr>
+        <p:txBody>
+          <a:bodyPr spcFirstLastPara="1" wrap="square" lIns="91425" tIns="45700" rIns="91425" bIns="45700" anchor="ctr" anchorCtr="0">
+            <a:noAutofit/>
+          </a:bodyPr>
+          <a:lstStyle/>
+          <a:p>
+            <a:pPr lvl="0"/>
+            <a:r>
+              <a:rPr lang="en-US" altLang="zh-TW" dirty="0"/>
+              <a:t>2026/03/24</a:t>
             </a:r>
           </a:p>
         </p:txBody>
@@ -22141,7 +21615,7 @@
 </p:sld>
 </file>
 
-<file path=ppt/slides/slide16.xml><?xml version="1.0" encoding="utf-8"?>
+<file path=ppt/slides/slide15.xml><?xml version="1.0" encoding="utf-8"?>
 <p:sld xmlns:a="http://schemas.openxmlformats.org/drawingml/2006/main" xmlns:r="http://schemas.openxmlformats.org/officeDocument/2006/relationships" xmlns:p="http://schemas.openxmlformats.org/presentationml/2006/main">
   <p:cSld>
     <p:spTree>
@@ -22218,7 +21692,7 @@
                 <a:cs typeface="Calibri"/>
                 <a:sym typeface="Calibri"/>
               </a:rPr>
-              <a:t>16</a:t>
+              <a:t>15</a:t>
             </a:fld>
             <a:endParaRPr sz="1200" b="0" i="0" u="none" strike="noStrike" cap="none" dirty="0">
               <a:solidFill>
@@ -22229,49 +21703,6 @@
               <a:cs typeface="Calibri"/>
               <a:sym typeface="Calibri"/>
             </a:endParaRPr>
-          </a:p>
-        </p:txBody>
-      </p:sp>
-      <p:sp>
-        <p:nvSpPr>
-          <p:cNvPr id="98" name="Google Shape;98;p2">
-            <a:extLst>
-              <a:ext uri="{FF2B5EF4-FFF2-40B4-BE49-F238E27FC236}">
-                <a16:creationId xmlns:a16="http://schemas.microsoft.com/office/drawing/2014/main" id="{320D54A0-10B8-D031-F500-30C818A3E359}"/>
-              </a:ext>
-            </a:extLst>
-          </p:cNvPr>
-          <p:cNvSpPr txBox="1">
-            <a:spLocks noGrp="1"/>
-          </p:cNvSpPr>
-          <p:nvPr>
-            <p:ph type="dt" idx="10"/>
-          </p:nvPr>
-        </p:nvSpPr>
-        <p:spPr>
-          <a:xfrm>
-            <a:off x="609600" y="6356351"/>
-            <a:ext cx="2844800" cy="365125"/>
-          </a:xfrm>
-          <a:prstGeom prst="rect">
-            <a:avLst/>
-          </a:prstGeom>
-          <a:noFill/>
-          <a:ln>
-            <a:noFill/>
-          </a:ln>
-        </p:spPr>
-        <p:txBody>
-          <a:bodyPr spcFirstLastPara="1" wrap="square" lIns="91425" tIns="45700" rIns="91425" bIns="45700" anchor="ctr" anchorCtr="0">
-            <a:noAutofit/>
-          </a:bodyPr>
-          <a:lstStyle/>
-          <a:p>
-            <a:pPr lvl="0"/>
-            <a:r>
-              <a:rPr lang="en-US" altLang="zh-TW" dirty="0"/>
-              <a:t>2025/11/25</a:t>
-            </a:r>
           </a:p>
         </p:txBody>
       </p:sp>
@@ -22725,7 +22156,7 @@
                 </a:solidFill>
                 <a:ea typeface="標楷體" panose="03000509000000000000" pitchFamily="65" charset="-120"/>
               </a:rPr>
-              <a:t>卻沒有載入它，用一般對話敷衍你；或者發現團隊成員必須總是要「手動啟用」這個 </a:t>
+              <a:t>卻沒有載入它，用一般對話敷衍你；或者發現團隊成員總是要「手動啟用」這個 </a:t>
             </a:r>
             <a:r>
               <a:rPr lang="en-US" altLang="zh-TW" sz="2800" dirty="0">
@@ -22781,7 +22212,7 @@
                 </a:solidFill>
                 <a:ea typeface="標楷體" panose="03000509000000000000" pitchFamily="65" charset="-120"/>
               </a:rPr>
-              <a:t> 寫得太模糊了。需要補充更多細節與技術名詞。</a:t>
+              <a:t> 寫得太模糊了。需要補充更多細節。</a:t>
             </a:r>
           </a:p>
           <a:p>
@@ -22865,7 +22296,7 @@
                 </a:solidFill>
                 <a:ea typeface="標楷體" panose="03000509000000000000" pitchFamily="65" charset="-120"/>
               </a:rPr>
-              <a:t>可能聽不懂。你要迭代改成：</a:t>
+              <a:t>可能聽不懂。可以在</a:t>
             </a:r>
             <a:r>
               <a:rPr lang="en-US" altLang="zh-TW" dirty="0">
@@ -22874,7 +22305,7 @@
                 </a:solidFill>
                 <a:ea typeface="標楷體" panose="03000509000000000000" pitchFamily="65" charset="-120"/>
               </a:rPr>
-              <a:t>description: </a:t>
+              <a:t>description</a:t>
             </a:r>
             <a:r>
               <a:rPr lang="zh-TW" altLang="en-US" dirty="0">
@@ -22883,6 +22314,24 @@
                 </a:solidFill>
                 <a:ea typeface="標楷體" panose="03000509000000000000" pitchFamily="65" charset="-120"/>
               </a:rPr>
+              <a:t>加上</a:t>
+            </a:r>
+            <a:r>
+              <a:rPr lang="en-US" altLang="zh-TW" dirty="0">
+                <a:solidFill>
+                  <a:schemeClr val="tx1"/>
+                </a:solidFill>
+                <a:ea typeface="標楷體" panose="03000509000000000000" pitchFamily="65" charset="-120"/>
+              </a:rPr>
+              <a:t>”</a:t>
+            </a:r>
+            <a:r>
+              <a:rPr lang="zh-TW" altLang="en-US" dirty="0">
+                <a:solidFill>
+                  <a:schemeClr val="tx1"/>
+                </a:solidFill>
+                <a:ea typeface="標楷體" panose="03000509000000000000" pitchFamily="65" charset="-120"/>
+              </a:rPr>
               <a:t>適用於當使用者</a:t>
             </a:r>
             <a:r>
@@ -22901,7 +22350,7 @@
                 </a:solidFill>
                 <a:ea typeface="標楷體" panose="03000509000000000000" pitchFamily="65" charset="-120"/>
               </a:rPr>
-              <a:t>所有</a:t>
+              <a:t> </a:t>
             </a:r>
             <a:r>
               <a:rPr lang="en-US" altLang="zh-TW" dirty="0">
@@ -22919,7 +22368,7 @@
                 </a:solidFill>
                 <a:ea typeface="標楷體" panose="03000509000000000000" pitchFamily="65" charset="-120"/>
               </a:rPr>
-              <a:t>，並要求寫 </a:t>
+              <a:t>、要求寫 </a:t>
             </a:r>
             <a:r>
               <a:rPr lang="en-US" altLang="zh-TW" dirty="0">
@@ -22937,7 +22386,25 @@
                 </a:solidFill>
                 <a:ea typeface="標楷體" panose="03000509000000000000" pitchFamily="65" charset="-120"/>
               </a:rPr>
-              <a:t>或總結變更時。</a:t>
+              <a:t>或總結變更時</a:t>
+            </a:r>
+            <a:r>
+              <a:rPr lang="en-US" altLang="zh-TW" dirty="0">
+                <a:solidFill>
+                  <a:schemeClr val="tx1"/>
+                </a:solidFill>
+                <a:ea typeface="標楷體" panose="03000509000000000000" pitchFamily="65" charset="-120"/>
+              </a:rPr>
+              <a:t>”</a:t>
+            </a:r>
+            <a:r>
+              <a:rPr lang="zh-TW" altLang="en-US" dirty="0">
+                <a:solidFill>
+                  <a:schemeClr val="tx1"/>
+                </a:solidFill>
+                <a:ea typeface="標楷體" panose="03000509000000000000" pitchFamily="65" charset="-120"/>
+              </a:rPr>
+              <a:t>。</a:t>
             </a:r>
           </a:p>
           <a:p>
@@ -23005,6 +22472,49 @@
           </a:p>
         </p:txBody>
       </p:sp>
+      <p:sp>
+        <p:nvSpPr>
+          <p:cNvPr id="3" name="Google Shape;98;p2">
+            <a:extLst>
+              <a:ext uri="{FF2B5EF4-FFF2-40B4-BE49-F238E27FC236}">
+                <a16:creationId xmlns:a16="http://schemas.microsoft.com/office/drawing/2014/main" id="{DC13D129-3288-78B9-F69C-C7AE6E245B31}"/>
+              </a:ext>
+            </a:extLst>
+          </p:cNvPr>
+          <p:cNvSpPr txBox="1">
+            <a:spLocks noGrp="1"/>
+          </p:cNvSpPr>
+          <p:nvPr>
+            <p:ph type="dt" idx="10"/>
+          </p:nvPr>
+        </p:nvSpPr>
+        <p:spPr>
+          <a:xfrm>
+            <a:off x="609600" y="6356351"/>
+            <a:ext cx="2844800" cy="365125"/>
+          </a:xfrm>
+          <a:prstGeom prst="rect">
+            <a:avLst/>
+          </a:prstGeom>
+          <a:noFill/>
+          <a:ln>
+            <a:noFill/>
+          </a:ln>
+        </p:spPr>
+        <p:txBody>
+          <a:bodyPr spcFirstLastPara="1" wrap="square" lIns="91425" tIns="45700" rIns="91425" bIns="45700" anchor="ctr" anchorCtr="0">
+            <a:noAutofit/>
+          </a:bodyPr>
+          <a:lstStyle/>
+          <a:p>
+            <a:pPr lvl="0"/>
+            <a:r>
+              <a:rPr lang="en-US" altLang="zh-TW" dirty="0"/>
+              <a:t>2026/03/24</a:t>
+            </a:r>
+          </a:p>
+        </p:txBody>
+      </p:sp>
     </p:spTree>
     <p:extLst>
       <p:ext uri="{BB962C8B-B14F-4D97-AF65-F5344CB8AC3E}">
@@ -23018,7 +22528,7 @@
 </p:sld>
 </file>
 
-<file path=ppt/slides/slide17.xml><?xml version="1.0" encoding="utf-8"?>
+<file path=ppt/slides/slide16.xml><?xml version="1.0" encoding="utf-8"?>
 <p:sld xmlns:a="http://schemas.openxmlformats.org/drawingml/2006/main" xmlns:r="http://schemas.openxmlformats.org/officeDocument/2006/relationships" xmlns:p="http://schemas.openxmlformats.org/presentationml/2006/main">
   <p:cSld>
     <p:spTree>
@@ -23095,7 +22605,7 @@
                 <a:cs typeface="Calibri"/>
                 <a:sym typeface="Calibri"/>
               </a:rPr>
-              <a:t>17</a:t>
+              <a:t>16</a:t>
             </a:fld>
             <a:endParaRPr sz="1200" b="0" i="0" u="none" strike="noStrike" cap="none" dirty="0">
               <a:solidFill>
@@ -23106,49 +22616,6 @@
               <a:cs typeface="Calibri"/>
               <a:sym typeface="Calibri"/>
             </a:endParaRPr>
-          </a:p>
-        </p:txBody>
-      </p:sp>
-      <p:sp>
-        <p:nvSpPr>
-          <p:cNvPr id="98" name="Google Shape;98;p2">
-            <a:extLst>
-              <a:ext uri="{FF2B5EF4-FFF2-40B4-BE49-F238E27FC236}">
-                <a16:creationId xmlns:a16="http://schemas.microsoft.com/office/drawing/2014/main" id="{8D534FB1-BBE1-D885-3B8C-9BC3B750899E}"/>
-              </a:ext>
-            </a:extLst>
-          </p:cNvPr>
-          <p:cNvSpPr txBox="1">
-            <a:spLocks noGrp="1"/>
-          </p:cNvSpPr>
-          <p:nvPr>
-            <p:ph type="dt" idx="10"/>
-          </p:nvPr>
-        </p:nvSpPr>
-        <p:spPr>
-          <a:xfrm>
-            <a:off x="609600" y="6356351"/>
-            <a:ext cx="2844800" cy="365125"/>
-          </a:xfrm>
-          <a:prstGeom prst="rect">
-            <a:avLst/>
-          </a:prstGeom>
-          <a:noFill/>
-          <a:ln>
-            <a:noFill/>
-          </a:ln>
-        </p:spPr>
-        <p:txBody>
-          <a:bodyPr spcFirstLastPara="1" wrap="square" lIns="91425" tIns="45700" rIns="91425" bIns="45700" anchor="ctr" anchorCtr="0">
-            <a:noAutofit/>
-          </a:bodyPr>
-          <a:lstStyle/>
-          <a:p>
-            <a:pPr lvl="0"/>
-            <a:r>
-              <a:rPr lang="en-US" altLang="zh-TW" dirty="0"/>
-              <a:t>2025/11/25</a:t>
-            </a:r>
           </a:p>
         </p:txBody>
       </p:sp>
@@ -23671,7 +23138,7 @@
                 </a:solidFill>
                 <a:ea typeface="標楷體" panose="03000509000000000000" pitchFamily="65" charset="-120"/>
               </a:rPr>
-              <a:t>」兩個字它就啟動，你可以迭代改寫加上這句：</a:t>
+              <a:t>」兩個字它就啟動，在</a:t>
             </a:r>
             <a:r>
               <a:rPr lang="en-US" altLang="zh-TW" dirty="0">
@@ -23680,7 +23147,25 @@
                 </a:solidFill>
                 <a:ea typeface="標楷體" panose="03000509000000000000" pitchFamily="65" charset="-120"/>
               </a:rPr>
-              <a:t>Do NOT use this skill when user is just asking for code explanation or refactoring. </a:t>
+              <a:t>description</a:t>
+            </a:r>
+            <a:r>
+              <a:rPr lang="zh-TW" altLang="en-US" dirty="0">
+                <a:solidFill>
+                  <a:schemeClr val="tx1"/>
+                </a:solidFill>
+                <a:ea typeface="標楷體" panose="03000509000000000000" pitchFamily="65" charset="-120"/>
+              </a:rPr>
+              <a:t>加上</a:t>
+            </a:r>
+            <a:r>
+              <a:rPr lang="en-US" altLang="zh-TW" dirty="0">
+                <a:solidFill>
+                  <a:schemeClr val="tx1"/>
+                </a:solidFill>
+                <a:ea typeface="標楷體" panose="03000509000000000000" pitchFamily="65" charset="-120"/>
+              </a:rPr>
+              <a:t>“Do NOT use this skill when user is just asking for code explanation or refactoring. “</a:t>
             </a:r>
             <a:r>
               <a:rPr lang="zh-TW" altLang="en-US" dirty="0">
@@ -23745,6 +23230,49 @@
           </a:p>
         </p:txBody>
       </p:sp>
+      <p:sp>
+        <p:nvSpPr>
+          <p:cNvPr id="3" name="Google Shape;98;p2">
+            <a:extLst>
+              <a:ext uri="{FF2B5EF4-FFF2-40B4-BE49-F238E27FC236}">
+                <a16:creationId xmlns:a16="http://schemas.microsoft.com/office/drawing/2014/main" id="{E4025807-8549-2078-15F0-3B9A43D081DA}"/>
+              </a:ext>
+            </a:extLst>
+          </p:cNvPr>
+          <p:cNvSpPr txBox="1">
+            <a:spLocks noGrp="1"/>
+          </p:cNvSpPr>
+          <p:nvPr>
+            <p:ph type="dt" idx="10"/>
+          </p:nvPr>
+        </p:nvSpPr>
+        <p:spPr>
+          <a:xfrm>
+            <a:off x="609600" y="6356351"/>
+            <a:ext cx="2844800" cy="365125"/>
+          </a:xfrm>
+          <a:prstGeom prst="rect">
+            <a:avLst/>
+          </a:prstGeom>
+          <a:noFill/>
+          <a:ln>
+            <a:noFill/>
+          </a:ln>
+        </p:spPr>
+        <p:txBody>
+          <a:bodyPr spcFirstLastPara="1" wrap="square" lIns="91425" tIns="45700" rIns="91425" bIns="45700" anchor="ctr" anchorCtr="0">
+            <a:noAutofit/>
+          </a:bodyPr>
+          <a:lstStyle/>
+          <a:p>
+            <a:pPr lvl="0"/>
+            <a:r>
+              <a:rPr lang="en-US" altLang="zh-TW" dirty="0"/>
+              <a:t>2026/03/24</a:t>
+            </a:r>
+          </a:p>
+        </p:txBody>
+      </p:sp>
     </p:spTree>
     <p:extLst>
       <p:ext uri="{BB962C8B-B14F-4D97-AF65-F5344CB8AC3E}">
@@ -23758,7 +23286,7 @@
 </p:sld>
 </file>
 
-<file path=ppt/slides/slide18.xml><?xml version="1.0" encoding="utf-8"?>
+<file path=ppt/slides/slide17.xml><?xml version="1.0" encoding="utf-8"?>
 <p:sld xmlns:a="http://schemas.openxmlformats.org/drawingml/2006/main" xmlns:r="http://schemas.openxmlformats.org/officeDocument/2006/relationships" xmlns:p="http://schemas.openxmlformats.org/presentationml/2006/main">
   <p:cSld>
     <p:spTree>
@@ -23835,7 +23363,7 @@
                 <a:cs typeface="Calibri"/>
                 <a:sym typeface="Calibri"/>
               </a:rPr>
-              <a:t>18</a:t>
+              <a:t>17</a:t>
             </a:fld>
             <a:endParaRPr sz="1200" b="0" i="0" u="none" strike="noStrike" cap="none" dirty="0">
               <a:solidFill>
@@ -23846,49 +23374,6 @@
               <a:cs typeface="Calibri"/>
               <a:sym typeface="Calibri"/>
             </a:endParaRPr>
-          </a:p>
-        </p:txBody>
-      </p:sp>
-      <p:sp>
-        <p:nvSpPr>
-          <p:cNvPr id="98" name="Google Shape;98;p2">
-            <a:extLst>
-              <a:ext uri="{FF2B5EF4-FFF2-40B4-BE49-F238E27FC236}">
-                <a16:creationId xmlns:a16="http://schemas.microsoft.com/office/drawing/2014/main" id="{11000B80-321C-F8FA-07B1-DF4CD0712DFF}"/>
-              </a:ext>
-            </a:extLst>
-          </p:cNvPr>
-          <p:cNvSpPr txBox="1">
-            <a:spLocks noGrp="1"/>
-          </p:cNvSpPr>
-          <p:nvPr>
-            <p:ph type="dt" idx="10"/>
-          </p:nvPr>
-        </p:nvSpPr>
-        <p:spPr>
-          <a:xfrm>
-            <a:off x="609600" y="6356351"/>
-            <a:ext cx="2844800" cy="365125"/>
-          </a:xfrm>
-          <a:prstGeom prst="rect">
-            <a:avLst/>
-          </a:prstGeom>
-          <a:noFill/>
-          <a:ln>
-            <a:noFill/>
-          </a:ln>
-        </p:spPr>
-        <p:txBody>
-          <a:bodyPr spcFirstLastPara="1" wrap="square" lIns="91425" tIns="45700" rIns="91425" bIns="45700" anchor="ctr" anchorCtr="0">
-            <a:noAutofit/>
-          </a:bodyPr>
-          <a:lstStyle/>
-          <a:p>
-            <a:pPr lvl="0"/>
-            <a:r>
-              <a:rPr lang="en-US" altLang="zh-TW" dirty="0"/>
-              <a:t>2025/11/25</a:t>
-            </a:r>
           </a:p>
         </p:txBody>
       </p:sp>
@@ -24599,6 +24084,49 @@
           </a:p>
         </p:txBody>
       </p:sp>
+      <p:sp>
+        <p:nvSpPr>
+          <p:cNvPr id="3" name="Google Shape;98;p2">
+            <a:extLst>
+              <a:ext uri="{FF2B5EF4-FFF2-40B4-BE49-F238E27FC236}">
+                <a16:creationId xmlns:a16="http://schemas.microsoft.com/office/drawing/2014/main" id="{A51C69FD-F98D-8C54-DCE5-198FE29374ED}"/>
+              </a:ext>
+            </a:extLst>
+          </p:cNvPr>
+          <p:cNvSpPr txBox="1">
+            <a:spLocks noGrp="1"/>
+          </p:cNvSpPr>
+          <p:nvPr>
+            <p:ph type="dt" idx="10"/>
+          </p:nvPr>
+        </p:nvSpPr>
+        <p:spPr>
+          <a:xfrm>
+            <a:off x="609600" y="6356351"/>
+            <a:ext cx="2844800" cy="365125"/>
+          </a:xfrm>
+          <a:prstGeom prst="rect">
+            <a:avLst/>
+          </a:prstGeom>
+          <a:noFill/>
+          <a:ln>
+            <a:noFill/>
+          </a:ln>
+        </p:spPr>
+        <p:txBody>
+          <a:bodyPr spcFirstLastPara="1" wrap="square" lIns="91425" tIns="45700" rIns="91425" bIns="45700" anchor="ctr" anchorCtr="0">
+            <a:noAutofit/>
+          </a:bodyPr>
+          <a:lstStyle/>
+          <a:p>
+            <a:pPr lvl="0"/>
+            <a:r>
+              <a:rPr lang="en-US" altLang="zh-TW" dirty="0"/>
+              <a:t>2026/03/24</a:t>
+            </a:r>
+          </a:p>
+        </p:txBody>
+      </p:sp>
     </p:spTree>
     <p:extLst>
       <p:ext uri="{BB962C8B-B14F-4D97-AF65-F5344CB8AC3E}">
@@ -24612,7 +24140,7 @@
 </p:sld>
 </file>
 
-<file path=ppt/slides/slide19.xml><?xml version="1.0" encoding="utf-8"?>
+<file path=ppt/slides/slide18.xml><?xml version="1.0" encoding="utf-8"?>
 <p:sld xmlns:a="http://schemas.openxmlformats.org/drawingml/2006/main" xmlns:r="http://schemas.openxmlformats.org/officeDocument/2006/relationships" xmlns:p="http://schemas.openxmlformats.org/presentationml/2006/main">
   <p:cSld>
     <p:spTree>
@@ -24689,7 +24217,7 @@
                 <a:cs typeface="Calibri"/>
                 <a:sym typeface="Calibri"/>
               </a:rPr>
-              <a:t>19</a:t>
+              <a:t>18</a:t>
             </a:fld>
             <a:endParaRPr sz="1200" b="0" i="0" u="none" strike="noStrike" cap="none" dirty="0">
               <a:solidFill>
@@ -24700,49 +24228,6 @@
               <a:cs typeface="Calibri"/>
               <a:sym typeface="Calibri"/>
             </a:endParaRPr>
-          </a:p>
-        </p:txBody>
-      </p:sp>
-      <p:sp>
-        <p:nvSpPr>
-          <p:cNvPr id="98" name="Google Shape;98;p2">
-            <a:extLst>
-              <a:ext uri="{FF2B5EF4-FFF2-40B4-BE49-F238E27FC236}">
-                <a16:creationId xmlns:a16="http://schemas.microsoft.com/office/drawing/2014/main" id="{1274AB9E-AFEA-F4A7-92E3-72BDD237F800}"/>
-              </a:ext>
-            </a:extLst>
-          </p:cNvPr>
-          <p:cNvSpPr txBox="1">
-            <a:spLocks noGrp="1"/>
-          </p:cNvSpPr>
-          <p:nvPr>
-            <p:ph type="dt" idx="10"/>
-          </p:nvPr>
-        </p:nvSpPr>
-        <p:spPr>
-          <a:xfrm>
-            <a:off x="609600" y="6356351"/>
-            <a:ext cx="2844800" cy="365125"/>
-          </a:xfrm>
-          <a:prstGeom prst="rect">
-            <a:avLst/>
-          </a:prstGeom>
-          <a:noFill/>
-          <a:ln>
-            <a:noFill/>
-          </a:ln>
-        </p:spPr>
-        <p:txBody>
-          <a:bodyPr spcFirstLastPara="1" wrap="square" lIns="91425" tIns="45700" rIns="91425" bIns="45700" anchor="ctr" anchorCtr="0">
-            <a:noAutofit/>
-          </a:bodyPr>
-          <a:lstStyle/>
-          <a:p>
-            <a:pPr lvl="0"/>
-            <a:r>
-              <a:rPr lang="en-US" altLang="zh-TW" dirty="0"/>
-              <a:t>2025/11/25</a:t>
-            </a:r>
           </a:p>
         </p:txBody>
       </p:sp>
@@ -25164,7 +24649,16 @@
                 </a:solidFill>
                 <a:ea typeface="標楷體" panose="03000509000000000000" pitchFamily="65" charset="-120"/>
               </a:rPr>
-              <a:t>三層漸進式揭露：JIT</a:t>
+              <a:t>三層漸進式揭露</a:t>
+            </a:r>
+            <a:r>
+              <a:rPr lang="en-US" altLang="zh-TW" dirty="0">
+                <a:solidFill>
+                  <a:schemeClr val="tx1"/>
+                </a:solidFill>
+                <a:ea typeface="標楷體" panose="03000509000000000000" pitchFamily="65" charset="-120"/>
+              </a:rPr>
+              <a:t>：</a:t>
             </a:r>
             <a:r>
               <a:rPr lang="zh-TW" altLang="en-US" dirty="0">
@@ -25173,7 +24667,7 @@
                 </a:solidFill>
                 <a:ea typeface="標楷體" panose="03000509000000000000" pitchFamily="65" charset="-120"/>
               </a:rPr>
-              <a:t>機制減少</a:t>
+              <a:t>控制資訊的載入時機與範圍，減少不必要的</a:t>
             </a:r>
             <a:r>
               <a:rPr lang="en-US" altLang="zh-TW" dirty="0">
@@ -25192,42 +24686,6 @@
                 <a:ea typeface="標楷體" panose="03000509000000000000" pitchFamily="65" charset="-120"/>
               </a:rPr>
               <a:t>消耗</a:t>
-            </a:r>
-            <a:r>
-              <a:rPr lang="en-US" altLang="zh-TW" dirty="0">
-                <a:solidFill>
-                  <a:schemeClr val="tx1"/>
-                </a:solidFill>
-                <a:ea typeface="標楷體" panose="03000509000000000000" pitchFamily="65" charset="-120"/>
-              </a:rPr>
-              <a:t>與</a:t>
-            </a:r>
-            <a:r>
-              <a:rPr lang="zh-TW" altLang="en-US" dirty="0">
-                <a:solidFill>
-                  <a:schemeClr val="tx1"/>
-                </a:solidFill>
-                <a:ea typeface="標楷體" panose="03000509000000000000" pitchFamily="65" charset="-120"/>
-              </a:rPr>
-              <a:t>把專業</a:t>
-            </a:r>
-            <a:r>
-              <a:rPr lang="en-US" altLang="zh-TW" dirty="0" err="1">
-                <a:solidFill>
-                  <a:schemeClr val="tx1"/>
-                </a:solidFill>
-                <a:ea typeface="標楷體" panose="03000509000000000000" pitchFamily="65" charset="-120"/>
-              </a:rPr>
-              <a:t>深度</a:t>
-            </a:r>
-            <a:r>
-              <a:rPr lang="zh-TW" altLang="en-US" dirty="0">
-                <a:solidFill>
-                  <a:schemeClr val="tx1"/>
-                </a:solidFill>
-                <a:ea typeface="標楷體" panose="03000509000000000000" pitchFamily="65" charset="-120"/>
-              </a:rPr>
-              <a:t>抽象化</a:t>
             </a:r>
             <a:endParaRPr lang="en-US" altLang="zh-TW" dirty="0">
               <a:solidFill>
@@ -25238,6 +24696,15 @@
           </a:p>
           <a:p>
             <a:r>
+              <a:rPr lang="zh-TW" altLang="en-US" dirty="0">
+                <a:solidFill>
+                  <a:schemeClr val="tx1"/>
+                </a:solidFill>
+                <a:ea typeface="標楷體" panose="03000509000000000000" pitchFamily="65" charset="-120"/>
+              </a:rPr>
+              <a:t>鼓勵 </a:t>
+            </a:r>
+            <a:r>
               <a:rPr lang="en-US" altLang="zh-TW" dirty="0">
                 <a:solidFill>
                   <a:schemeClr val="tx1"/>
@@ -25325,24 +24792,6 @@
                 <a:ea typeface="標楷體" panose="03000509000000000000" pitchFamily="65" charset="-120"/>
               </a:rPr>
               <a:t>Description </a:t>
-            </a:r>
-            <a:r>
-              <a:rPr lang="en-US" altLang="zh-TW" dirty="0" err="1">
-                <a:solidFill>
-                  <a:schemeClr val="tx1"/>
-                </a:solidFill>
-                <a:ea typeface="標楷體" panose="03000509000000000000" pitchFamily="65" charset="-120"/>
-              </a:rPr>
-              <a:t>是成敗關鍵</a:t>
-            </a:r>
-            <a:r>
-              <a:rPr lang="en-US" altLang="zh-TW" dirty="0">
-                <a:solidFill>
-                  <a:schemeClr val="tx1"/>
-                </a:solidFill>
-                <a:ea typeface="標楷體" panose="03000509000000000000" pitchFamily="65" charset="-120"/>
-              </a:rPr>
-              <a:t> — </a:t>
             </a:r>
             <a:r>
               <a:rPr lang="en-US" altLang="zh-TW" dirty="0" err="1">
@@ -25415,12 +24864,447 @@
           </a:p>
         </p:txBody>
       </p:sp>
+      <p:sp>
+        <p:nvSpPr>
+          <p:cNvPr id="3" name="Google Shape;98;p2">
+            <a:extLst>
+              <a:ext uri="{FF2B5EF4-FFF2-40B4-BE49-F238E27FC236}">
+                <a16:creationId xmlns:a16="http://schemas.microsoft.com/office/drawing/2014/main" id="{1CEEF935-ED0B-7C58-5A7F-CD602E3CC2E1}"/>
+              </a:ext>
+            </a:extLst>
+          </p:cNvPr>
+          <p:cNvSpPr txBox="1">
+            <a:spLocks noGrp="1"/>
+          </p:cNvSpPr>
+          <p:nvPr>
+            <p:ph type="dt" idx="10"/>
+          </p:nvPr>
+        </p:nvSpPr>
+        <p:spPr>
+          <a:xfrm>
+            <a:off x="609600" y="6356351"/>
+            <a:ext cx="2844800" cy="365125"/>
+          </a:xfrm>
+          <a:prstGeom prst="rect">
+            <a:avLst/>
+          </a:prstGeom>
+          <a:noFill/>
+          <a:ln>
+            <a:noFill/>
+          </a:ln>
+        </p:spPr>
+        <p:txBody>
+          <a:bodyPr spcFirstLastPara="1" wrap="square" lIns="91425" tIns="45700" rIns="91425" bIns="45700" anchor="ctr" anchorCtr="0">
+            <a:noAutofit/>
+          </a:bodyPr>
+          <a:lstStyle/>
+          <a:p>
+            <a:pPr lvl="0"/>
+            <a:r>
+              <a:rPr lang="en-US" altLang="zh-TW" dirty="0"/>
+              <a:t>2026/03/24</a:t>
+            </a:r>
+          </a:p>
+        </p:txBody>
+      </p:sp>
     </p:spTree>
     <p:extLst>
       <p:ext uri="{BB962C8B-B14F-4D97-AF65-F5344CB8AC3E}">
         <p14:creationId xmlns:p14="http://schemas.microsoft.com/office/powerpoint/2010/main" val="739506005"/>
       </p:ext>
     </p:extLst>
+  </p:cSld>
+  <p:clrMapOvr>
+    <a:masterClrMapping/>
+  </p:clrMapOvr>
+</p:sld>
+</file>
+
+<file path=ppt/slides/slide19.xml><?xml version="1.0" encoding="utf-8"?>
+<p:sld xmlns:a="http://schemas.openxmlformats.org/drawingml/2006/main" xmlns:r="http://schemas.openxmlformats.org/officeDocument/2006/relationships" xmlns:p="http://schemas.openxmlformats.org/presentationml/2006/main">
+  <p:cSld>
+    <p:spTree>
+      <p:nvGrpSpPr>
+        <p:cNvPr id="1" name="Shape 221"/>
+        <p:cNvGrpSpPr/>
+        <p:nvPr/>
+      </p:nvGrpSpPr>
+      <p:grpSpPr>
+        <a:xfrm>
+          <a:off x="0" y="0"/>
+          <a:ext cx="0" cy="0"/>
+          <a:chOff x="0" y="0"/>
+          <a:chExt cx="0" cy="0"/>
+        </a:xfrm>
+      </p:grpSpPr>
+      <p:sp>
+        <p:nvSpPr>
+          <p:cNvPr id="223" name="Google Shape;223;p15"/>
+          <p:cNvSpPr txBox="1">
+            <a:spLocks noGrp="1"/>
+          </p:cNvSpPr>
+          <p:nvPr>
+            <p:ph type="ftr" idx="11"/>
+          </p:nvPr>
+        </p:nvSpPr>
+        <p:spPr>
+          <a:xfrm>
+            <a:off x="4165600" y="6356351"/>
+            <a:ext cx="3860800" cy="365125"/>
+          </a:xfrm>
+          <a:prstGeom prst="rect">
+            <a:avLst/>
+          </a:prstGeom>
+          <a:noFill/>
+          <a:ln>
+            <a:noFill/>
+          </a:ln>
+        </p:spPr>
+        <p:txBody>
+          <a:bodyPr spcFirstLastPara="1" wrap="square" lIns="91425" tIns="45700" rIns="91425" bIns="45700" anchor="ctr" anchorCtr="0">
+            <a:noAutofit/>
+          </a:bodyPr>
+          <a:lstStyle/>
+          <a:p>
+            <a:pPr marL="0" lvl="0" indent="0" algn="ctr" rtl="0">
+              <a:spcBef>
+                <a:spcPts val="0"/>
+              </a:spcBef>
+              <a:spcAft>
+                <a:spcPts val="0"/>
+              </a:spcAft>
+              <a:buNone/>
+            </a:pPr>
+            <a:r>
+              <a:rPr lang="en-US"/>
+              <a:t>軟體系統實驗室</a:t>
+            </a:r>
+            <a:endParaRPr/>
+          </a:p>
+        </p:txBody>
+      </p:sp>
+      <p:sp>
+        <p:nvSpPr>
+          <p:cNvPr id="224" name="Google Shape;224;p15"/>
+          <p:cNvSpPr txBox="1">
+            <a:spLocks noGrp="1"/>
+          </p:cNvSpPr>
+          <p:nvPr>
+            <p:ph type="sldNum" idx="12"/>
+          </p:nvPr>
+        </p:nvSpPr>
+        <p:spPr>
+          <a:xfrm>
+            <a:off x="8737600" y="6356351"/>
+            <a:ext cx="2844800" cy="365125"/>
+          </a:xfrm>
+          <a:prstGeom prst="rect">
+            <a:avLst/>
+          </a:prstGeom>
+          <a:noFill/>
+          <a:ln>
+            <a:noFill/>
+          </a:ln>
+        </p:spPr>
+        <p:txBody>
+          <a:bodyPr spcFirstLastPara="1" wrap="square" lIns="91425" tIns="45700" rIns="91425" bIns="45700" anchor="ctr" anchorCtr="0">
+            <a:noAutofit/>
+          </a:bodyPr>
+          <a:lstStyle/>
+          <a:p>
+            <a:pPr marL="0" lvl="0" indent="0" algn="r" rtl="0">
+              <a:spcBef>
+                <a:spcPts val="0"/>
+              </a:spcBef>
+              <a:spcAft>
+                <a:spcPts val="0"/>
+              </a:spcAft>
+              <a:buNone/>
+            </a:pPr>
+            <a:fld id="{00000000-1234-1234-1234-123412341234}" type="slidenum">
+              <a:rPr lang="en-US"/>
+              <a:t>19</a:t>
+            </a:fld>
+            <a:endParaRPr/>
+          </a:p>
+        </p:txBody>
+      </p:sp>
+      <p:sp>
+        <p:nvSpPr>
+          <p:cNvPr id="225" name="Google Shape;225;p15"/>
+          <p:cNvSpPr txBox="1">
+            <a:spLocks noGrp="1"/>
+          </p:cNvSpPr>
+          <p:nvPr>
+            <p:ph type="title"/>
+          </p:nvPr>
+        </p:nvSpPr>
+        <p:spPr>
+          <a:xfrm>
+            <a:off x="609600" y="274638"/>
+            <a:ext cx="10972800" cy="1143000"/>
+          </a:xfrm>
+          <a:prstGeom prst="rect">
+            <a:avLst/>
+          </a:prstGeom>
+          <a:noFill/>
+          <a:ln>
+            <a:noFill/>
+          </a:ln>
+        </p:spPr>
+        <p:txBody>
+          <a:bodyPr spcFirstLastPara="1" wrap="square" lIns="91425" tIns="45700" rIns="91425" bIns="45700" anchor="ctr" anchorCtr="0">
+            <a:noAutofit/>
+          </a:bodyPr>
+          <a:lstStyle/>
+          <a:p>
+            <a:pPr marL="0" lvl="0" indent="0" algn="ctr" rtl="0">
+              <a:spcBef>
+                <a:spcPts val="0"/>
+              </a:spcBef>
+              <a:spcAft>
+                <a:spcPts val="0"/>
+              </a:spcAft>
+              <a:buNone/>
+            </a:pPr>
+            <a:r>
+              <a:rPr lang="en-US" dirty="0">
+                <a:latin typeface="Times New Roman" panose="02020603050405020304" pitchFamily="18" charset="0"/>
+                <a:cs typeface="Times New Roman" panose="02020603050405020304" pitchFamily="18" charset="0"/>
+              </a:rPr>
+              <a:t>Reference</a:t>
+            </a:r>
+            <a:endParaRPr dirty="0">
+              <a:latin typeface="Times New Roman" panose="02020603050405020304" pitchFamily="18" charset="0"/>
+              <a:cs typeface="Times New Roman" panose="02020603050405020304" pitchFamily="18" charset="0"/>
+            </a:endParaRPr>
+          </a:p>
+        </p:txBody>
+      </p:sp>
+      <p:sp>
+        <p:nvSpPr>
+          <p:cNvPr id="226" name="Google Shape;226;p15"/>
+          <p:cNvSpPr txBox="1">
+            <a:spLocks noGrp="1"/>
+          </p:cNvSpPr>
+          <p:nvPr>
+            <p:ph type="body" idx="1"/>
+          </p:nvPr>
+        </p:nvSpPr>
+        <p:spPr>
+          <a:xfrm>
+            <a:off x="737327" y="2346639"/>
+            <a:ext cx="10717345" cy="2736304"/>
+          </a:xfrm>
+          <a:prstGeom prst="rect">
+            <a:avLst/>
+          </a:prstGeom>
+          <a:noFill/>
+          <a:ln>
+            <a:noFill/>
+          </a:ln>
+        </p:spPr>
+        <p:txBody>
+          <a:bodyPr spcFirstLastPara="1" wrap="square" lIns="91425" tIns="45700" rIns="91425" bIns="45700" anchor="t" anchorCtr="0">
+            <a:noAutofit/>
+          </a:bodyPr>
+          <a:lstStyle/>
+          <a:p>
+            <a:r>
+              <a:rPr lang="en-US" altLang="zh-TW" dirty="0">
+                <a:ea typeface="標楷體" panose="03000509000000000000" pitchFamily="65" charset="-120"/>
+                <a:hlinkClick r:id="rId3"/>
+              </a:rPr>
+              <a:t>The Complete Guide to Building Skills for Claude</a:t>
+            </a:r>
+          </a:p>
+          <a:p>
+            <a:r>
+              <a:rPr lang="zh-TW" altLang="en-US" dirty="0">
+                <a:ea typeface="標楷體" panose="03000509000000000000" pitchFamily="65" charset="-120"/>
+                <a:hlinkClick r:id="rId4"/>
+              </a:rPr>
+              <a:t>什麼是 </a:t>
+            </a:r>
+            <a:r>
+              <a:rPr lang="en-US" altLang="zh-TW" dirty="0">
+                <a:ea typeface="標楷體" panose="03000509000000000000" pitchFamily="65" charset="-120"/>
+                <a:hlinkClick r:id="rId4"/>
+              </a:rPr>
+              <a:t>ETL</a:t>
+            </a:r>
+            <a:r>
+              <a:rPr lang="zh-TW" altLang="en-US" dirty="0">
+                <a:ea typeface="標楷體" panose="03000509000000000000" pitchFamily="65" charset="-120"/>
+                <a:hlinkClick r:id="rId4"/>
+              </a:rPr>
+              <a:t>？</a:t>
+            </a:r>
+            <a:endParaRPr lang="zh-TW" altLang="en-US" dirty="0">
+              <a:ea typeface="標楷體" panose="03000509000000000000" pitchFamily="65" charset="-120"/>
+            </a:endParaRPr>
+          </a:p>
+          <a:p>
+            <a:r>
+              <a:rPr lang="en-US" altLang="zh-TW" dirty="0">
+                <a:ea typeface="標楷體" panose="03000509000000000000" pitchFamily="65" charset="-120"/>
+                <a:hlinkClick r:id="rId5"/>
+              </a:rPr>
+              <a:t>https://github.com/anthropics/skills</a:t>
+            </a:r>
+            <a:endParaRPr lang="en-US" altLang="zh-TW" u="sng" dirty="0">
+              <a:solidFill>
+                <a:schemeClr val="hlink"/>
+              </a:solidFill>
+              <a:ea typeface="標楷體" panose="03000509000000000000" pitchFamily="65" charset="-120"/>
+            </a:endParaRPr>
+          </a:p>
+          <a:p>
+            <a:r>
+              <a:rPr lang="en-US" altLang="zh-TW" dirty="0">
+                <a:ea typeface="標楷體" panose="03000509000000000000" pitchFamily="65" charset="-120"/>
+                <a:hlinkClick r:id="rId6"/>
+              </a:rPr>
+              <a:t>Claude API Docs -- Agent Skills</a:t>
+            </a:r>
+            <a:endParaRPr lang="en-US" altLang="zh-TW" dirty="0">
+              <a:ea typeface="標楷體" panose="03000509000000000000" pitchFamily="65" charset="-120"/>
+            </a:endParaRPr>
+          </a:p>
+          <a:p>
+            <a:pPr marL="342900" lvl="0" indent="-342900" algn="just" rtl="0">
+              <a:spcBef>
+                <a:spcPts val="640"/>
+              </a:spcBef>
+              <a:spcAft>
+                <a:spcPts val="0"/>
+              </a:spcAft>
+              <a:buClr>
+                <a:srgbClr val="0F243E"/>
+              </a:buClr>
+              <a:buSzPts val="3200"/>
+              <a:buChar char="•"/>
+            </a:pPr>
+            <a:endParaRPr lang="zh-TW" altLang="en-US" dirty="0"/>
+          </a:p>
+          <a:p>
+            <a:pPr marL="342900" lvl="0" indent="-139700" algn="just" rtl="0">
+              <a:spcBef>
+                <a:spcPts val="640"/>
+              </a:spcBef>
+              <a:spcAft>
+                <a:spcPts val="0"/>
+              </a:spcAft>
+              <a:buClr>
+                <a:srgbClr val="0F243E"/>
+              </a:buClr>
+              <a:buSzPts val="3200"/>
+              <a:buNone/>
+            </a:pPr>
+            <a:endParaRPr lang="zh-TW" altLang="en-US" i="0" dirty="0">
+              <a:solidFill>
+                <a:srgbClr val="000100"/>
+              </a:solidFill>
+              <a:latin typeface="Helvetica Neue"/>
+              <a:ea typeface="Helvetica Neue"/>
+              <a:cs typeface="Helvetica Neue"/>
+              <a:sym typeface="Helvetica Neue"/>
+            </a:endParaRPr>
+          </a:p>
+          <a:p>
+            <a:pPr marL="342900" lvl="0" indent="-139700" algn="l" rtl="0">
+              <a:spcBef>
+                <a:spcPts val="1050"/>
+              </a:spcBef>
+              <a:spcAft>
+                <a:spcPts val="0"/>
+              </a:spcAft>
+              <a:buClr>
+                <a:srgbClr val="0F243E"/>
+              </a:buClr>
+              <a:buSzPts val="3200"/>
+              <a:buNone/>
+            </a:pPr>
+            <a:endParaRPr lang="zh-TW" altLang="en-US" b="1" i="0" dirty="0">
+              <a:solidFill>
+                <a:srgbClr val="000100"/>
+              </a:solidFill>
+              <a:latin typeface="Helvetica Neue"/>
+              <a:ea typeface="Helvetica Neue"/>
+              <a:cs typeface="Helvetica Neue"/>
+              <a:sym typeface="Helvetica Neue"/>
+            </a:endParaRPr>
+          </a:p>
+          <a:p>
+            <a:pPr marL="342900" lvl="0" indent="-139700" algn="l" rtl="0">
+              <a:spcBef>
+                <a:spcPts val="1800"/>
+              </a:spcBef>
+              <a:spcAft>
+                <a:spcPts val="0"/>
+              </a:spcAft>
+              <a:buClr>
+                <a:srgbClr val="0F243E"/>
+              </a:buClr>
+              <a:buSzPts val="3200"/>
+              <a:buNone/>
+            </a:pPr>
+            <a:endParaRPr lang="zh-TW" altLang="en-US" b="1" i="0" dirty="0">
+              <a:solidFill>
+                <a:srgbClr val="000100"/>
+              </a:solidFill>
+              <a:latin typeface="Helvetica Neue"/>
+              <a:ea typeface="Helvetica Neue"/>
+              <a:cs typeface="Helvetica Neue"/>
+              <a:sym typeface="Helvetica Neue"/>
+            </a:endParaRPr>
+          </a:p>
+        </p:txBody>
+      </p:sp>
+      <p:sp>
+        <p:nvSpPr>
+          <p:cNvPr id="2" name="Google Shape;98;p2">
+            <a:extLst>
+              <a:ext uri="{FF2B5EF4-FFF2-40B4-BE49-F238E27FC236}">
+                <a16:creationId xmlns:a16="http://schemas.microsoft.com/office/drawing/2014/main" id="{0891A011-80EB-A4FB-F340-EC496489B970}"/>
+              </a:ext>
+            </a:extLst>
+          </p:cNvPr>
+          <p:cNvSpPr txBox="1">
+            <a:spLocks noGrp="1"/>
+          </p:cNvSpPr>
+          <p:nvPr>
+            <p:ph type="dt" idx="10"/>
+          </p:nvPr>
+        </p:nvSpPr>
+        <p:spPr>
+          <a:xfrm>
+            <a:off x="609600" y="6356351"/>
+            <a:ext cx="2844800" cy="365125"/>
+          </a:xfrm>
+          <a:prstGeom prst="rect">
+            <a:avLst/>
+          </a:prstGeom>
+          <a:noFill/>
+          <a:ln>
+            <a:noFill/>
+          </a:ln>
+        </p:spPr>
+        <p:txBody>
+          <a:bodyPr spcFirstLastPara="1" wrap="square" lIns="91425" tIns="45700" rIns="91425" bIns="45700" anchor="ctr" anchorCtr="0">
+            <a:noAutofit/>
+          </a:bodyPr>
+          <a:lstStyle/>
+          <a:p>
+            <a:pPr lvl="0"/>
+            <a:r>
+              <a:rPr lang="en-US" altLang="zh-TW" dirty="0"/>
+              <a:t>2026/03/24</a:t>
+            </a:r>
+          </a:p>
+        </p:txBody>
+      </p:sp>
+    </p:spTree>
   </p:cSld>
   <p:clrMapOvr>
     <a:masterClrMapping/>
@@ -25539,7 +25423,7 @@
             <a:pPr lvl="0"/>
             <a:r>
               <a:rPr lang="en-US" altLang="zh-TW" dirty="0"/>
-              <a:t>2025/11/25</a:t>
+              <a:t>2026/03/24</a:t>
             </a:r>
           </a:p>
         </p:txBody>
@@ -26057,401 +25941,6 @@
 </file>
 
 <file path=ppt/slides/slide20.xml><?xml version="1.0" encoding="utf-8"?>
-<p:sld xmlns:a="http://schemas.openxmlformats.org/drawingml/2006/main" xmlns:r="http://schemas.openxmlformats.org/officeDocument/2006/relationships" xmlns:p="http://schemas.openxmlformats.org/presentationml/2006/main">
-  <p:cSld>
-    <p:spTree>
-      <p:nvGrpSpPr>
-        <p:cNvPr id="1" name="Shape 221"/>
-        <p:cNvGrpSpPr/>
-        <p:nvPr/>
-      </p:nvGrpSpPr>
-      <p:grpSpPr>
-        <a:xfrm>
-          <a:off x="0" y="0"/>
-          <a:ext cx="0" cy="0"/>
-          <a:chOff x="0" y="0"/>
-          <a:chExt cx="0" cy="0"/>
-        </a:xfrm>
-      </p:grpSpPr>
-      <p:sp>
-        <p:nvSpPr>
-          <p:cNvPr id="222" name="Google Shape;222;p15"/>
-          <p:cNvSpPr txBox="1">
-            <a:spLocks noGrp="1"/>
-          </p:cNvSpPr>
-          <p:nvPr>
-            <p:ph type="dt" idx="10"/>
-          </p:nvPr>
-        </p:nvSpPr>
-        <p:spPr>
-          <a:xfrm>
-            <a:off x="609600" y="6356351"/>
-            <a:ext cx="2844800" cy="365125"/>
-          </a:xfrm>
-          <a:prstGeom prst="rect">
-            <a:avLst/>
-          </a:prstGeom>
-          <a:noFill/>
-          <a:ln>
-            <a:noFill/>
-          </a:ln>
-        </p:spPr>
-        <p:txBody>
-          <a:bodyPr spcFirstLastPara="1" wrap="square" lIns="91425" tIns="45700" rIns="91425" bIns="45700" anchor="ctr" anchorCtr="0">
-            <a:noAutofit/>
-          </a:bodyPr>
-          <a:lstStyle/>
-          <a:p>
-            <a:pPr marL="0" lvl="0" indent="0" algn="l" rtl="0">
-              <a:spcBef>
-                <a:spcPts val="0"/>
-              </a:spcBef>
-              <a:spcAft>
-                <a:spcPts val="0"/>
-              </a:spcAft>
-              <a:buNone/>
-            </a:pPr>
-            <a:r>
-              <a:rPr lang="en-US" dirty="0"/>
-              <a:t>2025/11/25</a:t>
-            </a:r>
-            <a:endParaRPr dirty="0"/>
-          </a:p>
-        </p:txBody>
-      </p:sp>
-      <p:sp>
-        <p:nvSpPr>
-          <p:cNvPr id="223" name="Google Shape;223;p15"/>
-          <p:cNvSpPr txBox="1">
-            <a:spLocks noGrp="1"/>
-          </p:cNvSpPr>
-          <p:nvPr>
-            <p:ph type="ftr" idx="11"/>
-          </p:nvPr>
-        </p:nvSpPr>
-        <p:spPr>
-          <a:xfrm>
-            <a:off x="4165600" y="6356351"/>
-            <a:ext cx="3860800" cy="365125"/>
-          </a:xfrm>
-          <a:prstGeom prst="rect">
-            <a:avLst/>
-          </a:prstGeom>
-          <a:noFill/>
-          <a:ln>
-            <a:noFill/>
-          </a:ln>
-        </p:spPr>
-        <p:txBody>
-          <a:bodyPr spcFirstLastPara="1" wrap="square" lIns="91425" tIns="45700" rIns="91425" bIns="45700" anchor="ctr" anchorCtr="0">
-            <a:noAutofit/>
-          </a:bodyPr>
-          <a:lstStyle/>
-          <a:p>
-            <a:pPr marL="0" lvl="0" indent="0" algn="ctr" rtl="0">
-              <a:spcBef>
-                <a:spcPts val="0"/>
-              </a:spcBef>
-              <a:spcAft>
-                <a:spcPts val="0"/>
-              </a:spcAft>
-              <a:buNone/>
-            </a:pPr>
-            <a:r>
-              <a:rPr lang="en-US"/>
-              <a:t>軟體系統實驗室</a:t>
-            </a:r>
-            <a:endParaRPr/>
-          </a:p>
-        </p:txBody>
-      </p:sp>
-      <p:sp>
-        <p:nvSpPr>
-          <p:cNvPr id="224" name="Google Shape;224;p15"/>
-          <p:cNvSpPr txBox="1">
-            <a:spLocks noGrp="1"/>
-          </p:cNvSpPr>
-          <p:nvPr>
-            <p:ph type="sldNum" idx="12"/>
-          </p:nvPr>
-        </p:nvSpPr>
-        <p:spPr>
-          <a:xfrm>
-            <a:off x="8737600" y="6356351"/>
-            <a:ext cx="2844800" cy="365125"/>
-          </a:xfrm>
-          <a:prstGeom prst="rect">
-            <a:avLst/>
-          </a:prstGeom>
-          <a:noFill/>
-          <a:ln>
-            <a:noFill/>
-          </a:ln>
-        </p:spPr>
-        <p:txBody>
-          <a:bodyPr spcFirstLastPara="1" wrap="square" lIns="91425" tIns="45700" rIns="91425" bIns="45700" anchor="ctr" anchorCtr="0">
-            <a:noAutofit/>
-          </a:bodyPr>
-          <a:lstStyle/>
-          <a:p>
-            <a:pPr marL="0" lvl="0" indent="0" algn="r" rtl="0">
-              <a:spcBef>
-                <a:spcPts val="0"/>
-              </a:spcBef>
-              <a:spcAft>
-                <a:spcPts val="0"/>
-              </a:spcAft>
-              <a:buNone/>
-            </a:pPr>
-            <a:fld id="{00000000-1234-1234-1234-123412341234}" type="slidenum">
-              <a:rPr lang="en-US"/>
-              <a:t>20</a:t>
-            </a:fld>
-            <a:endParaRPr/>
-          </a:p>
-        </p:txBody>
-      </p:sp>
-      <p:sp>
-        <p:nvSpPr>
-          <p:cNvPr id="225" name="Google Shape;225;p15"/>
-          <p:cNvSpPr txBox="1">
-            <a:spLocks noGrp="1"/>
-          </p:cNvSpPr>
-          <p:nvPr>
-            <p:ph type="title"/>
-          </p:nvPr>
-        </p:nvSpPr>
-        <p:spPr>
-          <a:xfrm>
-            <a:off x="609600" y="274638"/>
-            <a:ext cx="10972800" cy="1143000"/>
-          </a:xfrm>
-          <a:prstGeom prst="rect">
-            <a:avLst/>
-          </a:prstGeom>
-          <a:noFill/>
-          <a:ln>
-            <a:noFill/>
-          </a:ln>
-        </p:spPr>
-        <p:txBody>
-          <a:bodyPr spcFirstLastPara="1" wrap="square" lIns="91425" tIns="45700" rIns="91425" bIns="45700" anchor="ctr" anchorCtr="0">
-            <a:noAutofit/>
-          </a:bodyPr>
-          <a:lstStyle/>
-          <a:p>
-            <a:pPr marL="0" lvl="0" indent="0" algn="ctr" rtl="0">
-              <a:spcBef>
-                <a:spcPts val="0"/>
-              </a:spcBef>
-              <a:spcAft>
-                <a:spcPts val="0"/>
-              </a:spcAft>
-              <a:buNone/>
-            </a:pPr>
-            <a:r>
-              <a:rPr lang="en-US" dirty="0">
-                <a:latin typeface="Times New Roman" panose="02020603050405020304" pitchFamily="18" charset="0"/>
-                <a:cs typeface="Times New Roman" panose="02020603050405020304" pitchFamily="18" charset="0"/>
-              </a:rPr>
-              <a:t>Reference</a:t>
-            </a:r>
-            <a:endParaRPr dirty="0">
-              <a:latin typeface="Times New Roman" panose="02020603050405020304" pitchFamily="18" charset="0"/>
-              <a:cs typeface="Times New Roman" panose="02020603050405020304" pitchFamily="18" charset="0"/>
-            </a:endParaRPr>
-          </a:p>
-        </p:txBody>
-      </p:sp>
-      <p:sp>
-        <p:nvSpPr>
-          <p:cNvPr id="226" name="Google Shape;226;p15"/>
-          <p:cNvSpPr txBox="1">
-            <a:spLocks noGrp="1"/>
-          </p:cNvSpPr>
-          <p:nvPr>
-            <p:ph type="body" idx="1"/>
-          </p:nvPr>
-        </p:nvSpPr>
-        <p:spPr>
-          <a:xfrm>
-            <a:off x="737327" y="1557745"/>
-            <a:ext cx="10717345" cy="2736304"/>
-          </a:xfrm>
-          <a:prstGeom prst="rect">
-            <a:avLst/>
-          </a:prstGeom>
-          <a:noFill/>
-          <a:ln>
-            <a:noFill/>
-          </a:ln>
-        </p:spPr>
-        <p:txBody>
-          <a:bodyPr spcFirstLastPara="1" wrap="square" lIns="91425" tIns="45700" rIns="91425" bIns="45700" anchor="t" anchorCtr="0">
-            <a:noAutofit/>
-          </a:bodyPr>
-          <a:lstStyle/>
-          <a:p>
-            <a:r>
-              <a:rPr lang="en-US" altLang="zh-TW" dirty="0">
-                <a:ea typeface="標楷體" panose="03000509000000000000" pitchFamily="65" charset="-120"/>
-                <a:hlinkClick r:id="rId3"/>
-              </a:rPr>
-              <a:t>The Complete Guide to Building Skills for Claude</a:t>
-            </a:r>
-          </a:p>
-          <a:p>
-            <a:r>
-              <a:rPr lang="zh-TW" altLang="en-US" dirty="0">
-                <a:ea typeface="標楷體" panose="03000509000000000000" pitchFamily="65" charset="-120"/>
-                <a:hlinkClick r:id="rId4"/>
-              </a:rPr>
-              <a:t>什麼是 </a:t>
-            </a:r>
-            <a:r>
-              <a:rPr lang="en-US" altLang="zh-TW" dirty="0">
-                <a:ea typeface="標楷體" panose="03000509000000000000" pitchFamily="65" charset="-120"/>
-                <a:hlinkClick r:id="rId4"/>
-              </a:rPr>
-              <a:t>ETL</a:t>
-            </a:r>
-            <a:r>
-              <a:rPr lang="zh-TW" altLang="en-US" dirty="0">
-                <a:ea typeface="標楷體" panose="03000509000000000000" pitchFamily="65" charset="-120"/>
-                <a:hlinkClick r:id="rId4"/>
-              </a:rPr>
-              <a:t>？</a:t>
-            </a:r>
-            <a:endParaRPr lang="zh-TW" altLang="en-US" dirty="0">
-              <a:ea typeface="標楷體" panose="03000509000000000000" pitchFamily="65" charset="-120"/>
-            </a:endParaRPr>
-          </a:p>
-          <a:p>
-            <a:r>
-              <a:rPr lang="en-US" altLang="zh-TW" dirty="0">
-                <a:ea typeface="標楷體" panose="03000509000000000000" pitchFamily="65" charset="-120"/>
-                <a:hlinkClick r:id="rId5"/>
-              </a:rPr>
-              <a:t>https://github.com/anthropics/skills</a:t>
-            </a:r>
-            <a:endParaRPr lang="en-US" altLang="zh-TW" u="sng" dirty="0">
-              <a:solidFill>
-                <a:schemeClr val="hlink"/>
-              </a:solidFill>
-              <a:ea typeface="標楷體" panose="03000509000000000000" pitchFamily="65" charset="-120"/>
-            </a:endParaRPr>
-          </a:p>
-          <a:p>
-            <a:r>
-              <a:rPr lang="en-US" altLang="zh-TW" dirty="0">
-                <a:ea typeface="標楷體" panose="03000509000000000000" pitchFamily="65" charset="-120"/>
-                <a:hlinkClick r:id="rId6"/>
-              </a:rPr>
-              <a:t>Claude API Docs -- Agent Skills</a:t>
-            </a:r>
-            <a:endParaRPr lang="en-US" altLang="zh-TW" dirty="0">
-              <a:ea typeface="標楷體" panose="03000509000000000000" pitchFamily="65" charset="-120"/>
-            </a:endParaRPr>
-          </a:p>
-          <a:p>
-            <a:pPr marL="342900" lvl="0" indent="-342900" algn="just" rtl="0">
-              <a:spcBef>
-                <a:spcPts val="640"/>
-              </a:spcBef>
-              <a:spcAft>
-                <a:spcPts val="0"/>
-              </a:spcAft>
-              <a:buClr>
-                <a:srgbClr val="0F243E"/>
-              </a:buClr>
-              <a:buSzPts val="3200"/>
-              <a:buChar char="•"/>
-            </a:pPr>
-            <a:endParaRPr lang="zh-TW" altLang="en-US" dirty="0"/>
-          </a:p>
-          <a:p>
-            <a:pPr marL="342900" lvl="0" indent="-139700" algn="just" rtl="0">
-              <a:spcBef>
-                <a:spcPts val="640"/>
-              </a:spcBef>
-              <a:spcAft>
-                <a:spcPts val="0"/>
-              </a:spcAft>
-              <a:buClr>
-                <a:srgbClr val="0F243E"/>
-              </a:buClr>
-              <a:buSzPts val="3200"/>
-              <a:buNone/>
-            </a:pPr>
-            <a:endParaRPr lang="zh-TW" altLang="en-US" i="0" dirty="0">
-              <a:solidFill>
-                <a:srgbClr val="000100"/>
-              </a:solidFill>
-              <a:latin typeface="Helvetica Neue"/>
-              <a:ea typeface="Helvetica Neue"/>
-              <a:cs typeface="Helvetica Neue"/>
-              <a:sym typeface="Helvetica Neue"/>
-            </a:endParaRPr>
-          </a:p>
-          <a:p>
-            <a:pPr marL="342900" lvl="0" indent="-139700" algn="l" rtl="0">
-              <a:spcBef>
-                <a:spcPts val="1050"/>
-              </a:spcBef>
-              <a:spcAft>
-                <a:spcPts val="0"/>
-              </a:spcAft>
-              <a:buClr>
-                <a:srgbClr val="0F243E"/>
-              </a:buClr>
-              <a:buSzPts val="3200"/>
-              <a:buNone/>
-            </a:pPr>
-            <a:endParaRPr lang="zh-TW" altLang="en-US" b="1" i="0" dirty="0">
-              <a:solidFill>
-                <a:srgbClr val="000100"/>
-              </a:solidFill>
-              <a:latin typeface="Helvetica Neue"/>
-              <a:ea typeface="Helvetica Neue"/>
-              <a:cs typeface="Helvetica Neue"/>
-              <a:sym typeface="Helvetica Neue"/>
-            </a:endParaRPr>
-          </a:p>
-          <a:p>
-            <a:pPr marL="342900" lvl="0" indent="-139700" algn="l" rtl="0">
-              <a:spcBef>
-                <a:spcPts val="1800"/>
-              </a:spcBef>
-              <a:spcAft>
-                <a:spcPts val="0"/>
-              </a:spcAft>
-              <a:buClr>
-                <a:srgbClr val="0F243E"/>
-              </a:buClr>
-              <a:buSzPts val="3200"/>
-              <a:buNone/>
-            </a:pPr>
-            <a:endParaRPr lang="zh-TW" altLang="en-US" b="1" i="0" dirty="0">
-              <a:solidFill>
-                <a:srgbClr val="000100"/>
-              </a:solidFill>
-              <a:latin typeface="Helvetica Neue"/>
-              <a:ea typeface="Helvetica Neue"/>
-              <a:cs typeface="Helvetica Neue"/>
-              <a:sym typeface="Helvetica Neue"/>
-            </a:endParaRPr>
-          </a:p>
-        </p:txBody>
-      </p:sp>
-    </p:spTree>
-  </p:cSld>
-  <p:clrMapOvr>
-    <a:masterClrMapping/>
-  </p:clrMapOvr>
-</p:sld>
-</file>
-
-<file path=ppt/slides/slide21.xml><?xml version="1.0" encoding="utf-8"?>
 <p:sld xmlns:a="http://schemas.openxmlformats.org/drawingml/2006/main" xmlns:r="http://schemas.openxmlformats.org/officeDocument/2006/relationships" xmlns:p="http://schemas.openxmlformats.org/presentationml/2006/main">
   <p:cSld>
     <p:spTree>
@@ -26522,52 +26011,6 @@
       </p:sp>
       <p:sp>
         <p:nvSpPr>
-          <p:cNvPr id="232" name="Google Shape;232;p16"/>
-          <p:cNvSpPr txBox="1">
-            <a:spLocks noGrp="1"/>
-          </p:cNvSpPr>
-          <p:nvPr>
-            <p:ph type="dt" idx="10"/>
-          </p:nvPr>
-        </p:nvSpPr>
-        <p:spPr>
-          <a:xfrm>
-            <a:off x="609600" y="6356351"/>
-            <a:ext cx="2844800" cy="365125"/>
-          </a:xfrm>
-          <a:prstGeom prst="rect">
-            <a:avLst/>
-          </a:prstGeom>
-          <a:noFill/>
-          <a:ln>
-            <a:noFill/>
-          </a:ln>
-        </p:spPr>
-        <p:txBody>
-          <a:bodyPr spcFirstLastPara="1" wrap="square" lIns="91425" tIns="45700" rIns="91425" bIns="45700" anchor="ctr" anchorCtr="0">
-            <a:noAutofit/>
-          </a:bodyPr>
-          <a:lstStyle/>
-          <a:p>
-            <a:pPr marL="0" lvl="0" indent="0" algn="l" rtl="0">
-              <a:spcBef>
-                <a:spcPts val="0"/>
-              </a:spcBef>
-              <a:spcAft>
-                <a:spcPts val="0"/>
-              </a:spcAft>
-              <a:buNone/>
-            </a:pPr>
-            <a:r>
-              <a:rPr lang="en-US" dirty="0"/>
-              <a:t>2025/11/25</a:t>
-            </a:r>
-            <a:endParaRPr dirty="0"/>
-          </a:p>
-        </p:txBody>
-      </p:sp>
-      <p:sp>
-        <p:nvSpPr>
           <p:cNvPr id="233" name="Google Shape;233;p16"/>
           <p:cNvSpPr txBox="1">
             <a:spLocks noGrp="1"/>
@@ -26652,7 +26095,7 @@
             </a:pPr>
             <a:fld id="{00000000-1234-1234-1234-123412341234}" type="slidenum">
               <a:rPr lang="en-US"/>
-              <a:t>21</a:t>
+              <a:t>20</a:t>
             </a:fld>
             <a:endParaRPr/>
           </a:p>
@@ -26685,6 +26128,49 @@
           </a:ln>
         </p:spPr>
       </p:pic>
+      <p:sp>
+        <p:nvSpPr>
+          <p:cNvPr id="2" name="Google Shape;98;p2">
+            <a:extLst>
+              <a:ext uri="{FF2B5EF4-FFF2-40B4-BE49-F238E27FC236}">
+                <a16:creationId xmlns:a16="http://schemas.microsoft.com/office/drawing/2014/main" id="{8E7333C1-0E27-8AB7-6DC6-F3EBFE87E612}"/>
+              </a:ext>
+            </a:extLst>
+          </p:cNvPr>
+          <p:cNvSpPr txBox="1">
+            <a:spLocks noGrp="1"/>
+          </p:cNvSpPr>
+          <p:nvPr>
+            <p:ph type="dt" idx="10"/>
+          </p:nvPr>
+        </p:nvSpPr>
+        <p:spPr>
+          <a:xfrm>
+            <a:off x="609600" y="6356351"/>
+            <a:ext cx="2844800" cy="365125"/>
+          </a:xfrm>
+          <a:prstGeom prst="rect">
+            <a:avLst/>
+          </a:prstGeom>
+          <a:noFill/>
+          <a:ln>
+            <a:noFill/>
+          </a:ln>
+        </p:spPr>
+        <p:txBody>
+          <a:bodyPr spcFirstLastPara="1" wrap="square" lIns="91425" tIns="45700" rIns="91425" bIns="45700" anchor="ctr" anchorCtr="0">
+            <a:noAutofit/>
+          </a:bodyPr>
+          <a:lstStyle/>
+          <a:p>
+            <a:pPr lvl="0"/>
+            <a:r>
+              <a:rPr lang="en-US" altLang="zh-TW" dirty="0"/>
+              <a:t>2026/03/24</a:t>
+            </a:r>
+          </a:p>
+        </p:txBody>
+      </p:sp>
     </p:spTree>
   </p:cSld>
   <p:clrMapOvr>
@@ -26786,49 +26272,6 @@
       </p:sp>
       <p:sp>
         <p:nvSpPr>
-          <p:cNvPr id="98" name="Google Shape;98;p2">
-            <a:extLst>
-              <a:ext uri="{FF2B5EF4-FFF2-40B4-BE49-F238E27FC236}">
-                <a16:creationId xmlns:a16="http://schemas.microsoft.com/office/drawing/2014/main" id="{1304085C-E733-8A6D-CBC4-EDD7FB3546B7}"/>
-              </a:ext>
-            </a:extLst>
-          </p:cNvPr>
-          <p:cNvSpPr txBox="1">
-            <a:spLocks noGrp="1"/>
-          </p:cNvSpPr>
-          <p:nvPr>
-            <p:ph type="dt" idx="10"/>
-          </p:nvPr>
-        </p:nvSpPr>
-        <p:spPr>
-          <a:xfrm>
-            <a:off x="609600" y="6356351"/>
-            <a:ext cx="2844800" cy="365125"/>
-          </a:xfrm>
-          <a:prstGeom prst="rect">
-            <a:avLst/>
-          </a:prstGeom>
-          <a:noFill/>
-          <a:ln>
-            <a:noFill/>
-          </a:ln>
-        </p:spPr>
-        <p:txBody>
-          <a:bodyPr spcFirstLastPara="1" wrap="square" lIns="91425" tIns="45700" rIns="91425" bIns="45700" anchor="ctr" anchorCtr="0">
-            <a:noAutofit/>
-          </a:bodyPr>
-          <a:lstStyle/>
-          <a:p>
-            <a:pPr lvl="0"/>
-            <a:r>
-              <a:rPr lang="en-US" altLang="zh-TW" dirty="0"/>
-              <a:t>2025/11/25</a:t>
-            </a:r>
-          </a:p>
-        </p:txBody>
-      </p:sp>
-      <p:sp>
-        <p:nvSpPr>
           <p:cNvPr id="99" name="Google Shape;99;p2">
             <a:extLst>
               <a:ext uri="{FF2B5EF4-FFF2-40B4-BE49-F238E27FC236}">
@@ -27300,6 +26743,49 @@
           </a:p>
         </p:txBody>
       </p:sp>
+      <p:sp>
+        <p:nvSpPr>
+          <p:cNvPr id="2" name="Google Shape;98;p2">
+            <a:extLst>
+              <a:ext uri="{FF2B5EF4-FFF2-40B4-BE49-F238E27FC236}">
+                <a16:creationId xmlns:a16="http://schemas.microsoft.com/office/drawing/2014/main" id="{CBB7607C-7185-53CB-8AB2-BA64B0F8AE8C}"/>
+              </a:ext>
+            </a:extLst>
+          </p:cNvPr>
+          <p:cNvSpPr txBox="1">
+            <a:spLocks noGrp="1"/>
+          </p:cNvSpPr>
+          <p:nvPr>
+            <p:ph type="dt" idx="10"/>
+          </p:nvPr>
+        </p:nvSpPr>
+        <p:spPr>
+          <a:xfrm>
+            <a:off x="609600" y="6356351"/>
+            <a:ext cx="2844800" cy="365125"/>
+          </a:xfrm>
+          <a:prstGeom prst="rect">
+            <a:avLst/>
+          </a:prstGeom>
+          <a:noFill/>
+          <a:ln>
+            <a:noFill/>
+          </a:ln>
+        </p:spPr>
+        <p:txBody>
+          <a:bodyPr spcFirstLastPara="1" wrap="square" lIns="91425" tIns="45700" rIns="91425" bIns="45700" anchor="ctr" anchorCtr="0">
+            <a:noAutofit/>
+          </a:bodyPr>
+          <a:lstStyle/>
+          <a:p>
+            <a:pPr lvl="0"/>
+            <a:r>
+              <a:rPr lang="en-US" altLang="zh-TW" dirty="0"/>
+              <a:t>2026/03/24</a:t>
+            </a:r>
+          </a:p>
+        </p:txBody>
+      </p:sp>
     </p:spTree>
     <p:extLst>
       <p:ext uri="{BB962C8B-B14F-4D97-AF65-F5344CB8AC3E}">
@@ -27321,7 +26807,7 @@
         <p:cNvPr id="1" name="Shape 96">
           <a:extLst>
             <a:ext uri="{FF2B5EF4-FFF2-40B4-BE49-F238E27FC236}">
-              <a16:creationId xmlns:a16="http://schemas.microsoft.com/office/drawing/2014/main" id="{692567C0-4E8D-4687-36CB-74FCE77F1585}"/>
+              <a16:creationId xmlns:a16="http://schemas.microsoft.com/office/drawing/2014/main" id="{032DCAF7-4575-CEB3-520A-D3BAD2EC4BDA}"/>
             </a:ext>
           </a:extLst>
         </p:cNvPr>
@@ -27341,7 +26827,7 @@
           <p:cNvPr id="97" name="Google Shape;97;p2">
             <a:extLst>
               <a:ext uri="{FF2B5EF4-FFF2-40B4-BE49-F238E27FC236}">
-                <a16:creationId xmlns:a16="http://schemas.microsoft.com/office/drawing/2014/main" id="{51D3E070-05C3-403F-F949-0C901E057A2E}"/>
+                <a16:creationId xmlns:a16="http://schemas.microsoft.com/office/drawing/2014/main" id="{57E7AF9A-DD62-D697-B6B7-DABF45AD10F7}"/>
               </a:ext>
             </a:extLst>
           </p:cNvPr>
@@ -27406,10 +26892,187 @@
       </p:sp>
       <p:sp>
         <p:nvSpPr>
-          <p:cNvPr id="98" name="Google Shape;98;p2">
+          <p:cNvPr id="99" name="Google Shape;99;p2">
             <a:extLst>
               <a:ext uri="{FF2B5EF4-FFF2-40B4-BE49-F238E27FC236}">
-                <a16:creationId xmlns:a16="http://schemas.microsoft.com/office/drawing/2014/main" id="{E3CA4FB9-BA4D-9ED9-FF3D-6B0DB422135E}"/>
+                <a16:creationId xmlns:a16="http://schemas.microsoft.com/office/drawing/2014/main" id="{5193EBCC-AE01-E435-C57C-6CA84CA29CDA}"/>
+              </a:ext>
+            </a:extLst>
+          </p:cNvPr>
+          <p:cNvSpPr txBox="1">
+            <a:spLocks noGrp="1"/>
+          </p:cNvSpPr>
+          <p:nvPr>
+            <p:ph type="ftr" idx="11"/>
+          </p:nvPr>
+        </p:nvSpPr>
+        <p:spPr>
+          <a:xfrm>
+            <a:off x="4165600" y="6356351"/>
+            <a:ext cx="3860800" cy="365125"/>
+          </a:xfrm>
+          <a:prstGeom prst="rect">
+            <a:avLst/>
+          </a:prstGeom>
+          <a:noFill/>
+          <a:ln>
+            <a:noFill/>
+          </a:ln>
+        </p:spPr>
+        <p:txBody>
+          <a:bodyPr spcFirstLastPara="1" wrap="square" lIns="91425" tIns="45700" rIns="91425" bIns="45700" anchor="ctr" anchorCtr="0">
+            <a:noAutofit/>
+          </a:bodyPr>
+          <a:lstStyle/>
+          <a:p>
+            <a:pPr marL="0" lvl="0" indent="0" algn="ctr" rtl="0">
+              <a:spcBef>
+                <a:spcPts val="0"/>
+              </a:spcBef>
+              <a:spcAft>
+                <a:spcPts val="0"/>
+              </a:spcAft>
+              <a:buNone/>
+            </a:pPr>
+            <a:r>
+              <a:rPr lang="en-US" dirty="0" err="1"/>
+              <a:t>軟體系統實驗室</a:t>
+            </a:r>
+            <a:endParaRPr dirty="0"/>
+          </a:p>
+        </p:txBody>
+      </p:sp>
+      <p:sp>
+        <p:nvSpPr>
+          <p:cNvPr id="100" name="Google Shape;100;p2">
+            <a:extLst>
+              <a:ext uri="{FF2B5EF4-FFF2-40B4-BE49-F238E27FC236}">
+                <a16:creationId xmlns:a16="http://schemas.microsoft.com/office/drawing/2014/main" id="{A8012401-0DB2-E0D0-C697-1A6AF5E5BA7A}"/>
+              </a:ext>
+            </a:extLst>
+          </p:cNvPr>
+          <p:cNvSpPr txBox="1">
+            <a:spLocks noGrp="1"/>
+          </p:cNvSpPr>
+          <p:nvPr>
+            <p:ph type="title"/>
+          </p:nvPr>
+        </p:nvSpPr>
+        <p:spPr>
+          <a:xfrm>
+            <a:off x="609600" y="274638"/>
+            <a:ext cx="10972800" cy="1143000"/>
+          </a:xfrm>
+          <a:prstGeom prst="rect">
+            <a:avLst/>
+          </a:prstGeom>
+          <a:noFill/>
+          <a:ln>
+            <a:noFill/>
+          </a:ln>
+        </p:spPr>
+        <p:txBody>
+          <a:bodyPr spcFirstLastPara="1" wrap="square" lIns="91425" tIns="45700" rIns="91425" bIns="45700" anchor="ctr" anchorCtr="0">
+            <a:noAutofit/>
+          </a:bodyPr>
+          <a:lstStyle/>
+          <a:p>
+            <a:r>
+              <a:rPr lang="en-US" altLang="zh-TW" dirty="0">
+                <a:latin typeface="Times New Roman" panose="02020603050405020304" pitchFamily="18" charset="0"/>
+                <a:cs typeface="Times New Roman" panose="02020603050405020304" pitchFamily="18" charset="0"/>
+              </a:rPr>
+              <a:t>Fundamentals</a:t>
+            </a:r>
+            <a:endParaRPr dirty="0">
+              <a:latin typeface="Times New Roman" panose="02020603050405020304" pitchFamily="18" charset="0"/>
+              <a:ea typeface="標楷體" panose="03000509000000000000" pitchFamily="65" charset="-120"/>
+              <a:cs typeface="Times New Roman" panose="02020603050405020304" pitchFamily="18" charset="0"/>
+            </a:endParaRPr>
+          </a:p>
+        </p:txBody>
+      </p:sp>
+      <p:sp>
+        <p:nvSpPr>
+          <p:cNvPr id="6" name="文字方塊 5">
+            <a:extLst>
+              <a:ext uri="{FF2B5EF4-FFF2-40B4-BE49-F238E27FC236}">
+                <a16:creationId xmlns:a16="http://schemas.microsoft.com/office/drawing/2014/main" id="{CDC6F7EE-2FD4-73C0-249A-2D80DE7EE744}"/>
+              </a:ext>
+            </a:extLst>
+          </p:cNvPr>
+          <p:cNvSpPr txBox="1"/>
+          <p:nvPr/>
+        </p:nvSpPr>
+        <p:spPr>
+          <a:xfrm>
+            <a:off x="609600" y="1418295"/>
+            <a:ext cx="11555506" cy="430887"/>
+          </a:xfrm>
+          <a:prstGeom prst="rect">
+            <a:avLst/>
+          </a:prstGeom>
+          <a:noFill/>
+        </p:spPr>
+        <p:txBody>
+          <a:bodyPr wrap="square">
+            <a:spAutoFit/>
+          </a:bodyPr>
+          <a:lstStyle/>
+          <a:p>
+            <a:pPr>
+              <a:buNone/>
+            </a:pPr>
+            <a:r>
+              <a:rPr lang="en-US" altLang="zh-TW" sz="2200" dirty="0">
+                <a:latin typeface="Times New Roman" panose="02020603050405020304" pitchFamily="18" charset="0"/>
+                <a:ea typeface="標楷體" panose="03000509000000000000" pitchFamily="65" charset="-120"/>
+              </a:rPr>
+              <a:t>File structure</a:t>
+            </a:r>
+            <a:endParaRPr lang="zh-TW" altLang="en-US" sz="2200" dirty="0">
+              <a:latin typeface="Times New Roman" panose="02020603050405020304" pitchFamily="18" charset="0"/>
+              <a:ea typeface="標楷體" panose="03000509000000000000" pitchFamily="65" charset="-120"/>
+            </a:endParaRPr>
+          </a:p>
+        </p:txBody>
+      </p:sp>
+      <p:pic>
+        <p:nvPicPr>
+          <p:cNvPr id="4" name="圖片 3">
+            <a:extLst>
+              <a:ext uri="{FF2B5EF4-FFF2-40B4-BE49-F238E27FC236}">
+                <a16:creationId xmlns:a16="http://schemas.microsoft.com/office/drawing/2014/main" id="{53FD0FB9-175D-AA99-879D-70D38AE0298A}"/>
+              </a:ext>
+            </a:extLst>
+          </p:cNvPr>
+          <p:cNvPicPr>
+            <a:picLocks noChangeAspect="1"/>
+          </p:cNvPicPr>
+          <p:nvPr/>
+        </p:nvPicPr>
+        <p:blipFill>
+          <a:blip r:embed="rId3"/>
+          <a:stretch>
+            <a:fillRect/>
+          </a:stretch>
+        </p:blipFill>
+        <p:spPr>
+          <a:xfrm>
+            <a:off x="2208445" y="2071498"/>
+            <a:ext cx="7611505" cy="3746596"/>
+          </a:xfrm>
+          <a:prstGeom prst="rect">
+            <a:avLst/>
+          </a:prstGeom>
+        </p:spPr>
+      </p:pic>
+      <p:sp>
+        <p:nvSpPr>
+          <p:cNvPr id="2" name="Google Shape;98;p2">
+            <a:extLst>
+              <a:ext uri="{FF2B5EF4-FFF2-40B4-BE49-F238E27FC236}">
+                <a16:creationId xmlns:a16="http://schemas.microsoft.com/office/drawing/2014/main" id="{10BF2E25-64F7-EF86-74C6-90A09BF43D9B}"/>
               </a:ext>
             </a:extLst>
           </p:cNvPr>
@@ -27442,473 +27105,21 @@
             <a:pPr lvl="0"/>
             <a:r>
               <a:rPr lang="en-US" altLang="zh-TW" dirty="0"/>
-              <a:t>2025/11/25</a:t>
-            </a:r>
-          </a:p>
-        </p:txBody>
-      </p:sp>
-      <p:sp>
-        <p:nvSpPr>
-          <p:cNvPr id="99" name="Google Shape;99;p2">
-            <a:extLst>
-              <a:ext uri="{FF2B5EF4-FFF2-40B4-BE49-F238E27FC236}">
-                <a16:creationId xmlns:a16="http://schemas.microsoft.com/office/drawing/2014/main" id="{BA2441B9-11FD-F131-CCFE-DA1C54C29BA5}"/>
-              </a:ext>
-            </a:extLst>
-          </p:cNvPr>
-          <p:cNvSpPr txBox="1">
-            <a:spLocks noGrp="1"/>
-          </p:cNvSpPr>
-          <p:nvPr>
-            <p:ph type="ftr" idx="11"/>
-          </p:nvPr>
-        </p:nvSpPr>
-        <p:spPr>
-          <a:xfrm>
-            <a:off x="4165600" y="6356351"/>
-            <a:ext cx="3860800" cy="365125"/>
-          </a:xfrm>
-          <a:prstGeom prst="rect">
-            <a:avLst/>
-          </a:prstGeom>
-          <a:noFill/>
-          <a:ln>
-            <a:noFill/>
-          </a:ln>
-        </p:spPr>
-        <p:txBody>
-          <a:bodyPr spcFirstLastPara="1" wrap="square" lIns="91425" tIns="45700" rIns="91425" bIns="45700" anchor="ctr" anchorCtr="0">
-            <a:noAutofit/>
-          </a:bodyPr>
-          <a:lstStyle/>
-          <a:p>
-            <a:pPr marL="0" lvl="0" indent="0" algn="ctr" rtl="0">
-              <a:spcBef>
-                <a:spcPts val="0"/>
-              </a:spcBef>
-              <a:spcAft>
-                <a:spcPts val="0"/>
-              </a:spcAft>
-              <a:buNone/>
-            </a:pPr>
-            <a:r>
-              <a:rPr lang="en-US" dirty="0" err="1"/>
-              <a:t>軟體系統實驗室</a:t>
-            </a:r>
-            <a:endParaRPr dirty="0"/>
-          </a:p>
-        </p:txBody>
-      </p:sp>
-      <p:sp>
-        <p:nvSpPr>
-          <p:cNvPr id="100" name="Google Shape;100;p2">
-            <a:extLst>
-              <a:ext uri="{FF2B5EF4-FFF2-40B4-BE49-F238E27FC236}">
-                <a16:creationId xmlns:a16="http://schemas.microsoft.com/office/drawing/2014/main" id="{3585EE7E-6CAF-53F7-DB72-89C142C9F129}"/>
-              </a:ext>
-            </a:extLst>
-          </p:cNvPr>
-          <p:cNvSpPr txBox="1">
-            <a:spLocks noGrp="1"/>
-          </p:cNvSpPr>
-          <p:nvPr>
-            <p:ph type="title"/>
-          </p:nvPr>
-        </p:nvSpPr>
-        <p:spPr>
-          <a:xfrm>
-            <a:off x="609600" y="274638"/>
-            <a:ext cx="10972800" cy="1143000"/>
-          </a:xfrm>
-          <a:prstGeom prst="rect">
-            <a:avLst/>
-          </a:prstGeom>
-          <a:noFill/>
-          <a:ln>
-            <a:noFill/>
-          </a:ln>
-        </p:spPr>
-        <p:txBody>
-          <a:bodyPr spcFirstLastPara="1" wrap="square" lIns="91425" tIns="45700" rIns="91425" bIns="45700" anchor="ctr" anchorCtr="0">
-            <a:noAutofit/>
-          </a:bodyPr>
-          <a:lstStyle/>
-          <a:p>
-            <a:r>
-              <a:rPr lang="en-US" altLang="zh-TW" dirty="0">
-                <a:latin typeface="Times New Roman" panose="02020603050405020304" pitchFamily="18" charset="0"/>
-                <a:cs typeface="Times New Roman" panose="02020603050405020304" pitchFamily="18" charset="0"/>
-              </a:rPr>
-              <a:t>Fundamentals</a:t>
-            </a:r>
-            <a:endParaRPr dirty="0">
-              <a:latin typeface="Times New Roman" panose="02020603050405020304" pitchFamily="18" charset="0"/>
-              <a:ea typeface="標楷體" panose="03000509000000000000" pitchFamily="65" charset="-120"/>
-              <a:cs typeface="Times New Roman" panose="02020603050405020304" pitchFamily="18" charset="0"/>
-            </a:endParaRPr>
-          </a:p>
-        </p:txBody>
-      </p:sp>
-      <p:pic>
-        <p:nvPicPr>
-          <p:cNvPr id="3" name="圖片 2">
-            <a:extLst>
-              <a:ext uri="{FF2B5EF4-FFF2-40B4-BE49-F238E27FC236}">
-                <a16:creationId xmlns:a16="http://schemas.microsoft.com/office/drawing/2014/main" id="{ED785AE4-BEEF-FD45-32E1-71F33C503BEC}"/>
-              </a:ext>
-            </a:extLst>
-          </p:cNvPr>
-          <p:cNvPicPr>
-            <a:picLocks noChangeAspect="1"/>
-          </p:cNvPicPr>
-          <p:nvPr/>
-        </p:nvPicPr>
-        <p:blipFill>
-          <a:blip r:embed="rId3"/>
-          <a:stretch>
-            <a:fillRect/>
-          </a:stretch>
-        </p:blipFill>
-        <p:spPr>
-          <a:xfrm>
-            <a:off x="798785" y="1600199"/>
-            <a:ext cx="10594429" cy="3657601"/>
-          </a:xfrm>
-          <a:prstGeom prst="rect">
-            <a:avLst/>
-          </a:prstGeom>
-        </p:spPr>
-      </p:pic>
-      <p:sp>
-        <p:nvSpPr>
-          <p:cNvPr id="2" name="矩形 1">
-            <a:extLst>
-              <a:ext uri="{FF2B5EF4-FFF2-40B4-BE49-F238E27FC236}">
-                <a16:creationId xmlns:a16="http://schemas.microsoft.com/office/drawing/2014/main" id="{4A0CA56A-C63F-3B1B-8484-1CDB348D4F66}"/>
-              </a:ext>
-            </a:extLst>
-          </p:cNvPr>
-          <p:cNvSpPr/>
-          <p:nvPr/>
-        </p:nvSpPr>
-        <p:spPr>
-          <a:xfrm>
-            <a:off x="914399" y="4222378"/>
-            <a:ext cx="2357719" cy="824752"/>
-          </a:xfrm>
-          <a:prstGeom prst="rect">
-            <a:avLst/>
-          </a:prstGeom>
-          <a:noFill/>
-          <a:ln>
-            <a:solidFill>
-              <a:srgbClr val="FF0000"/>
-            </a:solidFill>
-          </a:ln>
-        </p:spPr>
-        <p:style>
-          <a:lnRef idx="2">
-            <a:schemeClr val="accent1">
-              <a:shade val="15000"/>
-            </a:schemeClr>
-          </a:lnRef>
-          <a:fillRef idx="1">
-            <a:schemeClr val="accent1"/>
-          </a:fillRef>
-          <a:effectRef idx="0">
-            <a:schemeClr val="accent1"/>
-          </a:effectRef>
-          <a:fontRef idx="minor">
-            <a:schemeClr val="lt1"/>
-          </a:fontRef>
-        </p:style>
-        <p:txBody>
-          <a:bodyPr rtlCol="0" anchor="ctr"/>
-          <a:lstStyle/>
-          <a:p>
-            <a:pPr algn="ctr"/>
-            <a:endParaRPr lang="zh-TW" altLang="en-US"/>
-          </a:p>
-        </p:txBody>
-      </p:sp>
-      <p:sp>
-        <p:nvSpPr>
-          <p:cNvPr id="4" name="矩形 3">
-            <a:extLst>
-              <a:ext uri="{FF2B5EF4-FFF2-40B4-BE49-F238E27FC236}">
-                <a16:creationId xmlns:a16="http://schemas.microsoft.com/office/drawing/2014/main" id="{4A34806F-0006-2D1A-C543-44F17344427E}"/>
-              </a:ext>
-            </a:extLst>
-          </p:cNvPr>
-          <p:cNvSpPr/>
-          <p:nvPr/>
-        </p:nvSpPr>
-        <p:spPr>
-          <a:xfrm>
-            <a:off x="3454400" y="4222378"/>
-            <a:ext cx="7823201" cy="824752"/>
-          </a:xfrm>
-          <a:prstGeom prst="rect">
-            <a:avLst/>
-          </a:prstGeom>
-          <a:noFill/>
-          <a:ln>
-            <a:solidFill>
-              <a:srgbClr val="FF0000"/>
-            </a:solidFill>
-          </a:ln>
-        </p:spPr>
-        <p:style>
-          <a:lnRef idx="2">
-            <a:schemeClr val="accent1">
-              <a:shade val="15000"/>
-            </a:schemeClr>
-          </a:lnRef>
-          <a:fillRef idx="1">
-            <a:schemeClr val="accent1"/>
-          </a:fillRef>
-          <a:effectRef idx="0">
-            <a:schemeClr val="accent1"/>
-          </a:effectRef>
-          <a:fontRef idx="minor">
-            <a:schemeClr val="lt1"/>
-          </a:fontRef>
-        </p:style>
-        <p:txBody>
-          <a:bodyPr rtlCol="0" anchor="ctr"/>
-          <a:lstStyle/>
-          <a:p>
-            <a:pPr algn="ctr"/>
-            <a:endParaRPr lang="zh-TW" altLang="en-US" dirty="0"/>
+              <a:t>2026/03/24</a:t>
+            </a:r>
           </a:p>
         </p:txBody>
       </p:sp>
     </p:spTree>
     <p:extLst>
       <p:ext uri="{BB962C8B-B14F-4D97-AF65-F5344CB8AC3E}">
-        <p14:creationId xmlns:p14="http://schemas.microsoft.com/office/powerpoint/2010/main" val="309194732"/>
+        <p14:creationId xmlns:p14="http://schemas.microsoft.com/office/powerpoint/2010/main" val="1624660288"/>
       </p:ext>
     </p:extLst>
   </p:cSld>
   <p:clrMapOvr>
     <a:masterClrMapping/>
   </p:clrMapOvr>
-  <p:timing>
-    <p:tnLst>
-      <p:par>
-        <p:cTn id="1" dur="indefinite" restart="never" nodeType="tmRoot">
-          <p:childTnLst>
-            <p:seq concurrent="1" nextAc="seek">
-              <p:cTn id="2" dur="indefinite" nodeType="mainSeq">
-                <p:childTnLst>
-                  <p:par>
-                    <p:cTn id="3" fill="hold">
-                      <p:stCondLst>
-                        <p:cond delay="indefinite"/>
-                      </p:stCondLst>
-                      <p:childTnLst>
-                        <p:par>
-                          <p:cTn id="4" fill="hold">
-                            <p:stCondLst>
-                              <p:cond delay="0"/>
-                            </p:stCondLst>
-                            <p:childTnLst>
-                              <p:par>
-                                <p:cTn id="5" presetID="2" presetClass="entr" presetSubtype="4" fill="hold" grpId="0" nodeType="clickEffect">
-                                  <p:stCondLst>
-                                    <p:cond delay="0"/>
-                                  </p:stCondLst>
-                                  <p:childTnLst>
-                                    <p:set>
-                                      <p:cBhvr>
-                                        <p:cTn id="6" dur="1" fill="hold">
-                                          <p:stCondLst>
-                                            <p:cond delay="0"/>
-                                          </p:stCondLst>
-                                        </p:cTn>
-                                        <p:tgtEl>
-                                          <p:spTgt spid="2"/>
-                                        </p:tgtEl>
-                                        <p:attrNameLst>
-                                          <p:attrName>style.visibility</p:attrName>
-                                        </p:attrNameLst>
-                                      </p:cBhvr>
-                                      <p:to>
-                                        <p:strVal val="visible"/>
-                                      </p:to>
-                                    </p:set>
-                                    <p:anim calcmode="lin" valueType="num">
-                                      <p:cBhvr additive="base">
-                                        <p:cTn id="7" dur="500" fill="hold"/>
-                                        <p:tgtEl>
-                                          <p:spTgt spid="2"/>
-                                        </p:tgtEl>
-                                        <p:attrNameLst>
-                                          <p:attrName>ppt_x</p:attrName>
-                                        </p:attrNameLst>
-                                      </p:cBhvr>
-                                      <p:tavLst>
-                                        <p:tav tm="0">
-                                          <p:val>
-                                            <p:strVal val="#ppt_x"/>
-                                          </p:val>
-                                        </p:tav>
-                                        <p:tav tm="100000">
-                                          <p:val>
-                                            <p:strVal val="#ppt_x"/>
-                                          </p:val>
-                                        </p:tav>
-                                      </p:tavLst>
-                                    </p:anim>
-                                    <p:anim calcmode="lin" valueType="num">
-                                      <p:cBhvr additive="base">
-                                        <p:cTn id="8" dur="500" fill="hold"/>
-                                        <p:tgtEl>
-                                          <p:spTgt spid="2"/>
-                                        </p:tgtEl>
-                                        <p:attrNameLst>
-                                          <p:attrName>ppt_y</p:attrName>
-                                        </p:attrNameLst>
-                                      </p:cBhvr>
-                                      <p:tavLst>
-                                        <p:tav tm="0">
-                                          <p:val>
-                                            <p:strVal val="1+#ppt_h/2"/>
-                                          </p:val>
-                                        </p:tav>
-                                        <p:tav tm="100000">
-                                          <p:val>
-                                            <p:strVal val="#ppt_y"/>
-                                          </p:val>
-                                        </p:tav>
-                                      </p:tavLst>
-                                    </p:anim>
-                                  </p:childTnLst>
-                                </p:cTn>
-                              </p:par>
-                            </p:childTnLst>
-                          </p:cTn>
-                        </p:par>
-                      </p:childTnLst>
-                    </p:cTn>
-                  </p:par>
-                  <p:par>
-                    <p:cTn id="9" fill="hold">
-                      <p:stCondLst>
-                        <p:cond delay="indefinite"/>
-                      </p:stCondLst>
-                      <p:childTnLst>
-                        <p:par>
-                          <p:cTn id="10" fill="hold">
-                            <p:stCondLst>
-                              <p:cond delay="0"/>
-                            </p:stCondLst>
-                            <p:childTnLst>
-                              <p:par>
-                                <p:cTn id="11" presetID="2" presetClass="entr" presetSubtype="4" fill="hold" grpId="0" nodeType="clickEffect">
-                                  <p:stCondLst>
-                                    <p:cond delay="0"/>
-                                  </p:stCondLst>
-                                  <p:childTnLst>
-                                    <p:set>
-                                      <p:cBhvr>
-                                        <p:cTn id="12" dur="1" fill="hold">
-                                          <p:stCondLst>
-                                            <p:cond delay="0"/>
-                                          </p:stCondLst>
-                                        </p:cTn>
-                                        <p:tgtEl>
-                                          <p:spTgt spid="4"/>
-                                        </p:tgtEl>
-                                        <p:attrNameLst>
-                                          <p:attrName>style.visibility</p:attrName>
-                                        </p:attrNameLst>
-                                      </p:cBhvr>
-                                      <p:to>
-                                        <p:strVal val="visible"/>
-                                      </p:to>
-                                    </p:set>
-                                    <p:anim calcmode="lin" valueType="num">
-                                      <p:cBhvr additive="base">
-                                        <p:cTn id="13" dur="500" fill="hold"/>
-                                        <p:tgtEl>
-                                          <p:spTgt spid="4"/>
-                                        </p:tgtEl>
-                                        <p:attrNameLst>
-                                          <p:attrName>ppt_x</p:attrName>
-                                        </p:attrNameLst>
-                                      </p:cBhvr>
-                                      <p:tavLst>
-                                        <p:tav tm="0">
-                                          <p:val>
-                                            <p:strVal val="#ppt_x"/>
-                                          </p:val>
-                                        </p:tav>
-                                        <p:tav tm="100000">
-                                          <p:val>
-                                            <p:strVal val="#ppt_x"/>
-                                          </p:val>
-                                        </p:tav>
-                                      </p:tavLst>
-                                    </p:anim>
-                                    <p:anim calcmode="lin" valueType="num">
-                                      <p:cBhvr additive="base">
-                                        <p:cTn id="14" dur="500" fill="hold"/>
-                                        <p:tgtEl>
-                                          <p:spTgt spid="4"/>
-                                        </p:tgtEl>
-                                        <p:attrNameLst>
-                                          <p:attrName>ppt_y</p:attrName>
-                                        </p:attrNameLst>
-                                      </p:cBhvr>
-                                      <p:tavLst>
-                                        <p:tav tm="0">
-                                          <p:val>
-                                            <p:strVal val="1+#ppt_h/2"/>
-                                          </p:val>
-                                        </p:tav>
-                                        <p:tav tm="100000">
-                                          <p:val>
-                                            <p:strVal val="#ppt_y"/>
-                                          </p:val>
-                                        </p:tav>
-                                      </p:tavLst>
-                                    </p:anim>
-                                  </p:childTnLst>
-                                </p:cTn>
-                              </p:par>
-                            </p:childTnLst>
-                          </p:cTn>
-                        </p:par>
-                      </p:childTnLst>
-                    </p:cTn>
-                  </p:par>
-                </p:childTnLst>
-              </p:cTn>
-              <p:prevCondLst>
-                <p:cond evt="onPrev" delay="0">
-                  <p:tgtEl>
-                    <p:sldTgt/>
-                  </p:tgtEl>
-                </p:cond>
-              </p:prevCondLst>
-              <p:nextCondLst>
-                <p:cond evt="onNext" delay="0">
-                  <p:tgtEl>
-                    <p:sldTgt/>
-                  </p:tgtEl>
-                </p:cond>
-              </p:nextCondLst>
-            </p:seq>
-          </p:childTnLst>
-        </p:cTn>
-      </p:par>
-    </p:tnLst>
-    <p:bldLst>
-      <p:bldP spid="2" grpId="0" animBg="1"/>
-      <p:bldP spid="4" grpId="0" animBg="1"/>
-    </p:bldLst>
-  </p:timing>
 </p:sld>
 </file>
 
@@ -28005,49 +27216,6 @@
       </p:sp>
       <p:sp>
         <p:nvSpPr>
-          <p:cNvPr id="98" name="Google Shape;98;p2">
-            <a:extLst>
-              <a:ext uri="{FF2B5EF4-FFF2-40B4-BE49-F238E27FC236}">
-                <a16:creationId xmlns:a16="http://schemas.microsoft.com/office/drawing/2014/main" id="{E080A9C2-CC12-E854-C5C4-E155546973AC}"/>
-              </a:ext>
-            </a:extLst>
-          </p:cNvPr>
-          <p:cNvSpPr txBox="1">
-            <a:spLocks noGrp="1"/>
-          </p:cNvSpPr>
-          <p:nvPr>
-            <p:ph type="dt" idx="10"/>
-          </p:nvPr>
-        </p:nvSpPr>
-        <p:spPr>
-          <a:xfrm>
-            <a:off x="609600" y="6356351"/>
-            <a:ext cx="2844800" cy="365125"/>
-          </a:xfrm>
-          <a:prstGeom prst="rect">
-            <a:avLst/>
-          </a:prstGeom>
-          <a:noFill/>
-          <a:ln>
-            <a:noFill/>
-          </a:ln>
-        </p:spPr>
-        <p:txBody>
-          <a:bodyPr spcFirstLastPara="1" wrap="square" lIns="91425" tIns="45700" rIns="91425" bIns="45700" anchor="ctr" anchorCtr="0">
-            <a:noAutofit/>
-          </a:bodyPr>
-          <a:lstStyle/>
-          <a:p>
-            <a:pPr lvl="0"/>
-            <a:r>
-              <a:rPr lang="en-US" altLang="zh-TW" dirty="0"/>
-              <a:t>2025/11/25</a:t>
-            </a:r>
-          </a:p>
-        </p:txBody>
-      </p:sp>
-      <p:sp>
-        <p:nvSpPr>
           <p:cNvPr id="99" name="Google Shape;99;p2">
             <a:extLst>
               <a:ext uri="{FF2B5EF4-FFF2-40B4-BE49-F238E27FC236}">
@@ -28178,6 +27346,49 @@
           </a:prstGeom>
         </p:spPr>
       </p:pic>
+      <p:sp>
+        <p:nvSpPr>
+          <p:cNvPr id="2" name="Google Shape;98;p2">
+            <a:extLst>
+              <a:ext uri="{FF2B5EF4-FFF2-40B4-BE49-F238E27FC236}">
+                <a16:creationId xmlns:a16="http://schemas.microsoft.com/office/drawing/2014/main" id="{5F9ED7ED-3088-D917-17D1-4C8CDF2C3F7A}"/>
+              </a:ext>
+            </a:extLst>
+          </p:cNvPr>
+          <p:cNvSpPr txBox="1">
+            <a:spLocks noGrp="1"/>
+          </p:cNvSpPr>
+          <p:nvPr>
+            <p:ph type="dt" idx="10"/>
+          </p:nvPr>
+        </p:nvSpPr>
+        <p:spPr>
+          <a:xfrm>
+            <a:off x="609600" y="6356351"/>
+            <a:ext cx="2844800" cy="365125"/>
+          </a:xfrm>
+          <a:prstGeom prst="rect">
+            <a:avLst/>
+          </a:prstGeom>
+          <a:noFill/>
+          <a:ln>
+            <a:noFill/>
+          </a:ln>
+        </p:spPr>
+        <p:txBody>
+          <a:bodyPr spcFirstLastPara="1" wrap="square" lIns="91425" tIns="45700" rIns="91425" bIns="45700" anchor="ctr" anchorCtr="0">
+            <a:noAutofit/>
+          </a:bodyPr>
+          <a:lstStyle/>
+          <a:p>
+            <a:pPr lvl="0"/>
+            <a:r>
+              <a:rPr lang="en-US" altLang="zh-TW" dirty="0"/>
+              <a:t>2026/03/24</a:t>
+            </a:r>
+          </a:p>
+        </p:txBody>
+      </p:sp>
     </p:spTree>
     <p:extLst>
       <p:ext uri="{BB962C8B-B14F-4D97-AF65-F5344CB8AC3E}">
@@ -28284,49 +27495,6 @@
       </p:sp>
       <p:sp>
         <p:nvSpPr>
-          <p:cNvPr id="98" name="Google Shape;98;p2">
-            <a:extLst>
-              <a:ext uri="{FF2B5EF4-FFF2-40B4-BE49-F238E27FC236}">
-                <a16:creationId xmlns:a16="http://schemas.microsoft.com/office/drawing/2014/main" id="{0A741222-D37E-D4E1-D0A0-6168103EF09E}"/>
-              </a:ext>
-            </a:extLst>
-          </p:cNvPr>
-          <p:cNvSpPr txBox="1">
-            <a:spLocks noGrp="1"/>
-          </p:cNvSpPr>
-          <p:nvPr>
-            <p:ph type="dt" idx="10"/>
-          </p:nvPr>
-        </p:nvSpPr>
-        <p:spPr>
-          <a:xfrm>
-            <a:off x="609600" y="6356351"/>
-            <a:ext cx="2844800" cy="365125"/>
-          </a:xfrm>
-          <a:prstGeom prst="rect">
-            <a:avLst/>
-          </a:prstGeom>
-          <a:noFill/>
-          <a:ln>
-            <a:noFill/>
-          </a:ln>
-        </p:spPr>
-        <p:txBody>
-          <a:bodyPr spcFirstLastPara="1" wrap="square" lIns="91425" tIns="45700" rIns="91425" bIns="45700" anchor="ctr" anchorCtr="0">
-            <a:noAutofit/>
-          </a:bodyPr>
-          <a:lstStyle/>
-          <a:p>
-            <a:pPr lvl="0"/>
-            <a:r>
-              <a:rPr lang="en-US" altLang="zh-TW" dirty="0"/>
-              <a:t>2025/11/25</a:t>
-            </a:r>
-          </a:p>
-        </p:txBody>
-      </p:sp>
-      <p:sp>
-        <p:nvSpPr>
           <p:cNvPr id="99" name="Google Shape;99;p2">
             <a:extLst>
               <a:ext uri="{FF2B5EF4-FFF2-40B4-BE49-F238E27FC236}">
@@ -28501,6 +27669,49 @@
                 <a:ea typeface="標楷體" panose="03000509000000000000" pitchFamily="65" charset="-120"/>
               </a:rPr>
               <a:t>它​是​一​種​「只​在​需要​時才​提供​資訊」​的​機制。​這​就​像​是​在​​廚​房裡，​廚師​不​會​一​開始​就​把​幾百本​食譜​全部​攤開​在​桌上，​而​是​先​看​菜單​標題，​等​到​要​煮​那​道​菜時，​才​去​翻開​詳細​的​步驟。​</a:t>
+            </a:r>
+          </a:p>
+        </p:txBody>
+      </p:sp>
+      <p:sp>
+        <p:nvSpPr>
+          <p:cNvPr id="2" name="Google Shape;98;p2">
+            <a:extLst>
+              <a:ext uri="{FF2B5EF4-FFF2-40B4-BE49-F238E27FC236}">
+                <a16:creationId xmlns:a16="http://schemas.microsoft.com/office/drawing/2014/main" id="{348E6D86-39C6-B6E9-033B-B73626F938FD}"/>
+              </a:ext>
+            </a:extLst>
+          </p:cNvPr>
+          <p:cNvSpPr txBox="1">
+            <a:spLocks noGrp="1"/>
+          </p:cNvSpPr>
+          <p:nvPr>
+            <p:ph type="dt" idx="10"/>
+          </p:nvPr>
+        </p:nvSpPr>
+        <p:spPr>
+          <a:xfrm>
+            <a:off x="609600" y="6356351"/>
+            <a:ext cx="2844800" cy="365125"/>
+          </a:xfrm>
+          <a:prstGeom prst="rect">
+            <a:avLst/>
+          </a:prstGeom>
+          <a:noFill/>
+          <a:ln>
+            <a:noFill/>
+          </a:ln>
+        </p:spPr>
+        <p:txBody>
+          <a:bodyPr spcFirstLastPara="1" wrap="square" lIns="91425" tIns="45700" rIns="91425" bIns="45700" anchor="ctr" anchorCtr="0">
+            <a:noAutofit/>
+          </a:bodyPr>
+          <a:lstStyle/>
+          <a:p>
+            <a:pPr lvl="0"/>
+            <a:r>
+              <a:rPr lang="en-US" altLang="zh-TW" dirty="0"/>
+              <a:t>2026/03/24</a:t>
             </a:r>
           </a:p>
         </p:txBody>
@@ -28606,49 +27817,6 @@
               <a:cs typeface="Calibri"/>
               <a:sym typeface="Calibri"/>
             </a:endParaRPr>
-          </a:p>
-        </p:txBody>
-      </p:sp>
-      <p:sp>
-        <p:nvSpPr>
-          <p:cNvPr id="98" name="Google Shape;98;p2">
-            <a:extLst>
-              <a:ext uri="{FF2B5EF4-FFF2-40B4-BE49-F238E27FC236}">
-                <a16:creationId xmlns:a16="http://schemas.microsoft.com/office/drawing/2014/main" id="{81E557C8-531D-7E44-129B-55EBC71FE7B7}"/>
-              </a:ext>
-            </a:extLst>
-          </p:cNvPr>
-          <p:cNvSpPr txBox="1">
-            <a:spLocks noGrp="1"/>
-          </p:cNvSpPr>
-          <p:nvPr>
-            <p:ph type="dt" idx="10"/>
-          </p:nvPr>
-        </p:nvSpPr>
-        <p:spPr>
-          <a:xfrm>
-            <a:off x="609600" y="6356351"/>
-            <a:ext cx="2844800" cy="365125"/>
-          </a:xfrm>
-          <a:prstGeom prst="rect">
-            <a:avLst/>
-          </a:prstGeom>
-          <a:noFill/>
-          <a:ln>
-            <a:noFill/>
-          </a:ln>
-        </p:spPr>
-        <p:txBody>
-          <a:bodyPr spcFirstLastPara="1" wrap="square" lIns="91425" tIns="45700" rIns="91425" bIns="45700" anchor="ctr" anchorCtr="0">
-            <a:noAutofit/>
-          </a:bodyPr>
-          <a:lstStyle/>
-          <a:p>
-            <a:pPr lvl="0"/>
-            <a:r>
-              <a:rPr lang="en-US" altLang="zh-TW" dirty="0"/>
-              <a:t>2025/11/25</a:t>
-            </a:r>
           </a:p>
         </p:txBody>
       </p:sp>
@@ -28986,116 +28154,12 @@
           </a:fontRef>
         </p:style>
       </p:cxnSp>
-    </p:spTree>
-    <p:extLst>
-      <p:ext uri="{BB962C8B-B14F-4D97-AF65-F5344CB8AC3E}">
-        <p14:creationId xmlns:p14="http://schemas.microsoft.com/office/powerpoint/2010/main" val="2167654207"/>
-      </p:ext>
-    </p:extLst>
-  </p:cSld>
-  <p:clrMapOvr>
-    <a:masterClrMapping/>
-  </p:clrMapOvr>
-</p:sld>
-</file>
-
-<file path=ppt/slides/slide8.xml><?xml version="1.0" encoding="utf-8"?>
-<p:sld xmlns:a="http://schemas.openxmlformats.org/drawingml/2006/main" xmlns:r="http://schemas.openxmlformats.org/officeDocument/2006/relationships" xmlns:p="http://schemas.openxmlformats.org/presentationml/2006/main">
-  <p:cSld>
-    <p:spTree>
-      <p:nvGrpSpPr>
-        <p:cNvPr id="1" name="Shape 96">
-          <a:extLst>
-            <a:ext uri="{FF2B5EF4-FFF2-40B4-BE49-F238E27FC236}">
-              <a16:creationId xmlns:a16="http://schemas.microsoft.com/office/drawing/2014/main" id="{032DCAF7-4575-CEB3-520A-D3BAD2EC4BDA}"/>
-            </a:ext>
-          </a:extLst>
-        </p:cNvPr>
-        <p:cNvGrpSpPr/>
-        <p:nvPr/>
-      </p:nvGrpSpPr>
-      <p:grpSpPr>
-        <a:xfrm>
-          <a:off x="0" y="0"/>
-          <a:ext cx="0" cy="0"/>
-          <a:chOff x="0" y="0"/>
-          <a:chExt cx="0" cy="0"/>
-        </a:xfrm>
-      </p:grpSpPr>
       <p:sp>
         <p:nvSpPr>
-          <p:cNvPr id="97" name="Google Shape;97;p2">
+          <p:cNvPr id="3" name="Google Shape;98;p2">
             <a:extLst>
               <a:ext uri="{FF2B5EF4-FFF2-40B4-BE49-F238E27FC236}">
-                <a16:creationId xmlns:a16="http://schemas.microsoft.com/office/drawing/2014/main" id="{57E7AF9A-DD62-D697-B6B7-DABF45AD10F7}"/>
-              </a:ext>
-            </a:extLst>
-          </p:cNvPr>
-          <p:cNvSpPr txBox="1">
-            <a:spLocks noGrp="1"/>
-          </p:cNvSpPr>
-          <p:nvPr>
-            <p:ph type="sldNum" idx="12"/>
-          </p:nvPr>
-        </p:nvSpPr>
-        <p:spPr>
-          <a:xfrm>
-            <a:off x="8737600" y="6356351"/>
-            <a:ext cx="2844800" cy="365125"/>
-          </a:xfrm>
-          <a:prstGeom prst="rect">
-            <a:avLst/>
-          </a:prstGeom>
-          <a:noFill/>
-          <a:ln>
-            <a:noFill/>
-          </a:ln>
-        </p:spPr>
-        <p:txBody>
-          <a:bodyPr spcFirstLastPara="1" wrap="square" lIns="91425" tIns="45700" rIns="91425" bIns="45700" anchor="ctr" anchorCtr="0">
-            <a:noAutofit/>
-          </a:bodyPr>
-          <a:lstStyle/>
-          <a:p>
-            <a:pPr marL="0" marR="0" lvl="0" indent="0" algn="r" rtl="0">
-              <a:spcBef>
-                <a:spcPts val="0"/>
-              </a:spcBef>
-              <a:spcAft>
-                <a:spcPts val="0"/>
-              </a:spcAft>
-              <a:buNone/>
-            </a:pPr>
-            <a:fld id="{00000000-1234-1234-1234-123412341234}" type="slidenum">
-              <a:rPr lang="en-US" sz="1200" b="0" i="0" u="none" strike="noStrike" cap="none">
-                <a:solidFill>
-                  <a:srgbClr val="10253F"/>
-                </a:solidFill>
-                <a:latin typeface="Calibri"/>
-                <a:ea typeface="Calibri"/>
-                <a:cs typeface="Calibri"/>
-                <a:sym typeface="Calibri"/>
-              </a:rPr>
-              <a:t>8</a:t>
-            </a:fld>
-            <a:endParaRPr sz="1200" b="0" i="0" u="none" strike="noStrike" cap="none" dirty="0">
-              <a:solidFill>
-                <a:srgbClr val="10253F"/>
-              </a:solidFill>
-              <a:latin typeface="Calibri"/>
-              <a:ea typeface="Calibri"/>
-              <a:cs typeface="Calibri"/>
-              <a:sym typeface="Calibri"/>
-            </a:endParaRPr>
-          </a:p>
-        </p:txBody>
-      </p:sp>
-      <p:sp>
-        <p:nvSpPr>
-          <p:cNvPr id="98" name="Google Shape;98;p2">
-            <a:extLst>
-              <a:ext uri="{FF2B5EF4-FFF2-40B4-BE49-F238E27FC236}">
-                <a16:creationId xmlns:a16="http://schemas.microsoft.com/office/drawing/2014/main" id="{9A557A37-29EC-91F6-32CD-A1BC4AB9AED3}"/>
+                <a16:creationId xmlns:a16="http://schemas.microsoft.com/office/drawing/2014/main" id="{B289ADD8-9651-0161-E043-A6C94030DBFA}"/>
               </a:ext>
             </a:extLst>
           </p:cNvPr>
@@ -29128,192 +28192,15 @@
             <a:pPr lvl="0"/>
             <a:r>
               <a:rPr lang="en-US" altLang="zh-TW" dirty="0"/>
-              <a:t>2025/11/25</a:t>
+              <a:t>2026/03/24</a:t>
             </a:r>
           </a:p>
         </p:txBody>
       </p:sp>
-      <p:sp>
-        <p:nvSpPr>
-          <p:cNvPr id="99" name="Google Shape;99;p2">
-            <a:extLst>
-              <a:ext uri="{FF2B5EF4-FFF2-40B4-BE49-F238E27FC236}">
-                <a16:creationId xmlns:a16="http://schemas.microsoft.com/office/drawing/2014/main" id="{5193EBCC-AE01-E435-C57C-6CA84CA29CDA}"/>
-              </a:ext>
-            </a:extLst>
-          </p:cNvPr>
-          <p:cNvSpPr txBox="1">
-            <a:spLocks noGrp="1"/>
-          </p:cNvSpPr>
-          <p:nvPr>
-            <p:ph type="ftr" idx="11"/>
-          </p:nvPr>
-        </p:nvSpPr>
-        <p:spPr>
-          <a:xfrm>
-            <a:off x="4165600" y="6356351"/>
-            <a:ext cx="3860800" cy="365125"/>
-          </a:xfrm>
-          <a:prstGeom prst="rect">
-            <a:avLst/>
-          </a:prstGeom>
-          <a:noFill/>
-          <a:ln>
-            <a:noFill/>
-          </a:ln>
-        </p:spPr>
-        <p:txBody>
-          <a:bodyPr spcFirstLastPara="1" wrap="square" lIns="91425" tIns="45700" rIns="91425" bIns="45700" anchor="ctr" anchorCtr="0">
-            <a:noAutofit/>
-          </a:bodyPr>
-          <a:lstStyle/>
-          <a:p>
-            <a:pPr marL="0" lvl="0" indent="0" algn="ctr" rtl="0">
-              <a:spcBef>
-                <a:spcPts val="0"/>
-              </a:spcBef>
-              <a:spcAft>
-                <a:spcPts val="0"/>
-              </a:spcAft>
-              <a:buNone/>
-            </a:pPr>
-            <a:r>
-              <a:rPr lang="en-US" dirty="0" err="1"/>
-              <a:t>軟體系統實驗室</a:t>
-            </a:r>
-            <a:endParaRPr dirty="0"/>
-          </a:p>
-        </p:txBody>
-      </p:sp>
-      <p:sp>
-        <p:nvSpPr>
-          <p:cNvPr id="100" name="Google Shape;100;p2">
-            <a:extLst>
-              <a:ext uri="{FF2B5EF4-FFF2-40B4-BE49-F238E27FC236}">
-                <a16:creationId xmlns:a16="http://schemas.microsoft.com/office/drawing/2014/main" id="{A8012401-0DB2-E0D0-C697-1A6AF5E5BA7A}"/>
-              </a:ext>
-            </a:extLst>
-          </p:cNvPr>
-          <p:cNvSpPr txBox="1">
-            <a:spLocks noGrp="1"/>
-          </p:cNvSpPr>
-          <p:nvPr>
-            <p:ph type="title"/>
-          </p:nvPr>
-        </p:nvSpPr>
-        <p:spPr>
-          <a:xfrm>
-            <a:off x="609600" y="274638"/>
-            <a:ext cx="10972800" cy="1143000"/>
-          </a:xfrm>
-          <a:prstGeom prst="rect">
-            <a:avLst/>
-          </a:prstGeom>
-          <a:noFill/>
-          <a:ln>
-            <a:noFill/>
-          </a:ln>
-        </p:spPr>
-        <p:txBody>
-          <a:bodyPr spcFirstLastPara="1" wrap="square" lIns="91425" tIns="45700" rIns="91425" bIns="45700" anchor="ctr" anchorCtr="0">
-            <a:noAutofit/>
-          </a:bodyPr>
-          <a:lstStyle/>
-          <a:p>
-            <a:r>
-              <a:rPr lang="en-US" altLang="zh-TW" dirty="0">
-                <a:latin typeface="Times New Roman" panose="02020603050405020304" pitchFamily="18" charset="0"/>
-                <a:cs typeface="Times New Roman" panose="02020603050405020304" pitchFamily="18" charset="0"/>
-              </a:rPr>
-              <a:t>Fundamentals</a:t>
-            </a:r>
-            <a:endParaRPr dirty="0">
-              <a:latin typeface="Times New Roman" panose="02020603050405020304" pitchFamily="18" charset="0"/>
-              <a:ea typeface="標楷體" panose="03000509000000000000" pitchFamily="65" charset="-120"/>
-              <a:cs typeface="Times New Roman" panose="02020603050405020304" pitchFamily="18" charset="0"/>
-            </a:endParaRPr>
-          </a:p>
-        </p:txBody>
-      </p:sp>
-      <p:sp>
-        <p:nvSpPr>
-          <p:cNvPr id="6" name="文字方塊 5">
-            <a:extLst>
-              <a:ext uri="{FF2B5EF4-FFF2-40B4-BE49-F238E27FC236}">
-                <a16:creationId xmlns:a16="http://schemas.microsoft.com/office/drawing/2014/main" id="{CDC6F7EE-2FD4-73C0-249A-2D80DE7EE744}"/>
-              </a:ext>
-            </a:extLst>
-          </p:cNvPr>
-          <p:cNvSpPr txBox="1"/>
-          <p:nvPr/>
-        </p:nvSpPr>
-        <p:spPr>
-          <a:xfrm>
-            <a:off x="609600" y="1418295"/>
-            <a:ext cx="11555506" cy="430887"/>
-          </a:xfrm>
-          <a:prstGeom prst="rect">
-            <a:avLst/>
-          </a:prstGeom>
-          <a:noFill/>
-        </p:spPr>
-        <p:txBody>
-          <a:bodyPr wrap="square">
-            <a:spAutoFit/>
-          </a:bodyPr>
-          <a:lstStyle/>
-          <a:p>
-            <a:pPr>
-              <a:buNone/>
-            </a:pPr>
-            <a:r>
-              <a:rPr lang="en-US" altLang="zh-TW" sz="2200" dirty="0">
-                <a:latin typeface="Times New Roman" panose="02020603050405020304" pitchFamily="18" charset="0"/>
-                <a:ea typeface="標楷體" panose="03000509000000000000" pitchFamily="65" charset="-120"/>
-              </a:rPr>
-              <a:t>File structure</a:t>
-            </a:r>
-            <a:endParaRPr lang="zh-TW" altLang="en-US" sz="2200" dirty="0">
-              <a:latin typeface="Times New Roman" panose="02020603050405020304" pitchFamily="18" charset="0"/>
-              <a:ea typeface="標楷體" panose="03000509000000000000" pitchFamily="65" charset="-120"/>
-            </a:endParaRPr>
-          </a:p>
-        </p:txBody>
-      </p:sp>
-      <p:pic>
-        <p:nvPicPr>
-          <p:cNvPr id="4" name="圖片 3">
-            <a:extLst>
-              <a:ext uri="{FF2B5EF4-FFF2-40B4-BE49-F238E27FC236}">
-                <a16:creationId xmlns:a16="http://schemas.microsoft.com/office/drawing/2014/main" id="{53FD0FB9-175D-AA99-879D-70D38AE0298A}"/>
-              </a:ext>
-            </a:extLst>
-          </p:cNvPr>
-          <p:cNvPicPr>
-            <a:picLocks noChangeAspect="1"/>
-          </p:cNvPicPr>
-          <p:nvPr/>
-        </p:nvPicPr>
-        <p:blipFill>
-          <a:blip r:embed="rId3"/>
-          <a:stretch>
-            <a:fillRect/>
-          </a:stretch>
-        </p:blipFill>
-        <p:spPr>
-          <a:xfrm>
-            <a:off x="2208445" y="2071498"/>
-            <a:ext cx="7611505" cy="3746596"/>
-          </a:xfrm>
-          <a:prstGeom prst="rect">
-            <a:avLst/>
-          </a:prstGeom>
-        </p:spPr>
-      </p:pic>
     </p:spTree>
     <p:extLst>
       <p:ext uri="{BB962C8B-B14F-4D97-AF65-F5344CB8AC3E}">
-        <p14:creationId xmlns:p14="http://schemas.microsoft.com/office/powerpoint/2010/main" val="1624660288"/>
+        <p14:creationId xmlns:p14="http://schemas.microsoft.com/office/powerpoint/2010/main" val="2167654207"/>
       </p:ext>
     </p:extLst>
   </p:cSld>
@@ -29323,7 +28210,7 @@
 </p:sld>
 </file>
 
-<file path=ppt/slides/slide9.xml><?xml version="1.0" encoding="utf-8"?>
+<file path=ppt/slides/slide8.xml><?xml version="1.0" encoding="utf-8"?>
 <p:sld xmlns:a="http://schemas.openxmlformats.org/drawingml/2006/main" xmlns:r="http://schemas.openxmlformats.org/officeDocument/2006/relationships" xmlns:p="http://schemas.openxmlformats.org/presentationml/2006/main">
   <p:cSld>
     <p:spTree>
@@ -29400,7 +28287,7 @@
                 <a:cs typeface="Calibri"/>
                 <a:sym typeface="Calibri"/>
               </a:rPr>
-              <a:t>9</a:t>
+              <a:t>8</a:t>
             </a:fld>
             <a:endParaRPr sz="1200" b="0" i="0" u="none" strike="noStrike" cap="none" dirty="0">
               <a:solidFill>
@@ -29411,49 +28298,6 @@
               <a:cs typeface="Calibri"/>
               <a:sym typeface="Calibri"/>
             </a:endParaRPr>
-          </a:p>
-        </p:txBody>
-      </p:sp>
-      <p:sp>
-        <p:nvSpPr>
-          <p:cNvPr id="98" name="Google Shape;98;p2">
-            <a:extLst>
-              <a:ext uri="{FF2B5EF4-FFF2-40B4-BE49-F238E27FC236}">
-                <a16:creationId xmlns:a16="http://schemas.microsoft.com/office/drawing/2014/main" id="{CE30E5BD-4812-62C6-8B73-35E9B21A16FC}"/>
-              </a:ext>
-            </a:extLst>
-          </p:cNvPr>
-          <p:cNvSpPr txBox="1">
-            <a:spLocks noGrp="1"/>
-          </p:cNvSpPr>
-          <p:nvPr>
-            <p:ph type="dt" idx="10"/>
-          </p:nvPr>
-        </p:nvSpPr>
-        <p:spPr>
-          <a:xfrm>
-            <a:off x="609600" y="6356351"/>
-            <a:ext cx="2844800" cy="365125"/>
-          </a:xfrm>
-          <a:prstGeom prst="rect">
-            <a:avLst/>
-          </a:prstGeom>
-          <a:noFill/>
-          <a:ln>
-            <a:noFill/>
-          </a:ln>
-        </p:spPr>
-        <p:txBody>
-          <a:bodyPr spcFirstLastPara="1" wrap="square" lIns="91425" tIns="45700" rIns="91425" bIns="45700" anchor="ctr" anchorCtr="0">
-            <a:noAutofit/>
-          </a:bodyPr>
-          <a:lstStyle/>
-          <a:p>
-            <a:pPr lvl="0"/>
-            <a:r>
-              <a:rPr lang="en-US" altLang="zh-TW" dirty="0"/>
-              <a:t>2025/11/25</a:t>
-            </a:r>
           </a:p>
         </p:txBody>
       </p:sp>
@@ -29962,10 +28806,393 @@
           </a:p>
         </p:txBody>
       </p:sp>
+      <p:sp>
+        <p:nvSpPr>
+          <p:cNvPr id="3" name="Google Shape;98;p2">
+            <a:extLst>
+              <a:ext uri="{FF2B5EF4-FFF2-40B4-BE49-F238E27FC236}">
+                <a16:creationId xmlns:a16="http://schemas.microsoft.com/office/drawing/2014/main" id="{CDAD7699-1C80-0B20-6558-5D852E7B4892}"/>
+              </a:ext>
+            </a:extLst>
+          </p:cNvPr>
+          <p:cNvSpPr txBox="1">
+            <a:spLocks noGrp="1"/>
+          </p:cNvSpPr>
+          <p:nvPr>
+            <p:ph type="dt" idx="10"/>
+          </p:nvPr>
+        </p:nvSpPr>
+        <p:spPr>
+          <a:xfrm>
+            <a:off x="609600" y="6356351"/>
+            <a:ext cx="2844800" cy="365125"/>
+          </a:xfrm>
+          <a:prstGeom prst="rect">
+            <a:avLst/>
+          </a:prstGeom>
+          <a:noFill/>
+          <a:ln>
+            <a:noFill/>
+          </a:ln>
+        </p:spPr>
+        <p:txBody>
+          <a:bodyPr spcFirstLastPara="1" wrap="square" lIns="91425" tIns="45700" rIns="91425" bIns="45700" anchor="ctr" anchorCtr="0">
+            <a:noAutofit/>
+          </a:bodyPr>
+          <a:lstStyle/>
+          <a:p>
+            <a:pPr lvl="0"/>
+            <a:r>
+              <a:rPr lang="en-US" altLang="zh-TW" dirty="0"/>
+              <a:t>2026/03/24</a:t>
+            </a:r>
+          </a:p>
+        </p:txBody>
+      </p:sp>
     </p:spTree>
     <p:extLst>
       <p:ext uri="{BB962C8B-B14F-4D97-AF65-F5344CB8AC3E}">
         <p14:creationId xmlns:p14="http://schemas.microsoft.com/office/powerpoint/2010/main" val="212039844"/>
+      </p:ext>
+    </p:extLst>
+  </p:cSld>
+  <p:clrMapOvr>
+    <a:masterClrMapping/>
+  </p:clrMapOvr>
+</p:sld>
+</file>
+
+<file path=ppt/slides/slide9.xml><?xml version="1.0" encoding="utf-8"?>
+<p:sld xmlns:a="http://schemas.openxmlformats.org/drawingml/2006/main" xmlns:r="http://schemas.openxmlformats.org/officeDocument/2006/relationships" xmlns:p="http://schemas.openxmlformats.org/presentationml/2006/main">
+  <p:cSld>
+    <p:spTree>
+      <p:nvGrpSpPr>
+        <p:cNvPr id="1" name="Shape 96">
+          <a:extLst>
+            <a:ext uri="{FF2B5EF4-FFF2-40B4-BE49-F238E27FC236}">
+              <a16:creationId xmlns:a16="http://schemas.microsoft.com/office/drawing/2014/main" id="{2AE80049-1707-06C5-213E-D93DA334F4CA}"/>
+            </a:ext>
+          </a:extLst>
+        </p:cNvPr>
+        <p:cNvGrpSpPr/>
+        <p:nvPr/>
+      </p:nvGrpSpPr>
+      <p:grpSpPr>
+        <a:xfrm>
+          <a:off x="0" y="0"/>
+          <a:ext cx="0" cy="0"/>
+          <a:chOff x="0" y="0"/>
+          <a:chExt cx="0" cy="0"/>
+        </a:xfrm>
+      </p:grpSpPr>
+      <p:sp>
+        <p:nvSpPr>
+          <p:cNvPr id="97" name="Google Shape;97;p2">
+            <a:extLst>
+              <a:ext uri="{FF2B5EF4-FFF2-40B4-BE49-F238E27FC236}">
+                <a16:creationId xmlns:a16="http://schemas.microsoft.com/office/drawing/2014/main" id="{ED722555-D2CF-5A6A-CC0B-A05A22AE1AD3}"/>
+              </a:ext>
+            </a:extLst>
+          </p:cNvPr>
+          <p:cNvSpPr txBox="1">
+            <a:spLocks noGrp="1"/>
+          </p:cNvSpPr>
+          <p:nvPr>
+            <p:ph type="sldNum" idx="12"/>
+          </p:nvPr>
+        </p:nvSpPr>
+        <p:spPr>
+          <a:xfrm>
+            <a:off x="8737600" y="6356351"/>
+            <a:ext cx="2844800" cy="365125"/>
+          </a:xfrm>
+          <a:prstGeom prst="rect">
+            <a:avLst/>
+          </a:prstGeom>
+          <a:noFill/>
+          <a:ln>
+            <a:noFill/>
+          </a:ln>
+        </p:spPr>
+        <p:txBody>
+          <a:bodyPr spcFirstLastPara="1" wrap="square" lIns="91425" tIns="45700" rIns="91425" bIns="45700" anchor="ctr" anchorCtr="0">
+            <a:noAutofit/>
+          </a:bodyPr>
+          <a:lstStyle/>
+          <a:p>
+            <a:pPr marL="0" marR="0" lvl="0" indent="0" algn="r" rtl="0">
+              <a:spcBef>
+                <a:spcPts val="0"/>
+              </a:spcBef>
+              <a:spcAft>
+                <a:spcPts val="0"/>
+              </a:spcAft>
+              <a:buNone/>
+            </a:pPr>
+            <a:fld id="{00000000-1234-1234-1234-123412341234}" type="slidenum">
+              <a:rPr lang="en-US" sz="1200" b="0" i="0" u="none" strike="noStrike" cap="none">
+                <a:solidFill>
+                  <a:srgbClr val="10253F"/>
+                </a:solidFill>
+                <a:latin typeface="Calibri"/>
+                <a:ea typeface="Calibri"/>
+                <a:cs typeface="Calibri"/>
+                <a:sym typeface="Calibri"/>
+              </a:rPr>
+              <a:t>9</a:t>
+            </a:fld>
+            <a:endParaRPr sz="1200" b="0" i="0" u="none" strike="noStrike" cap="none" dirty="0">
+              <a:solidFill>
+                <a:srgbClr val="10253F"/>
+              </a:solidFill>
+              <a:latin typeface="Calibri"/>
+              <a:ea typeface="Calibri"/>
+              <a:cs typeface="Calibri"/>
+              <a:sym typeface="Calibri"/>
+            </a:endParaRPr>
+          </a:p>
+        </p:txBody>
+      </p:sp>
+      <p:sp>
+        <p:nvSpPr>
+          <p:cNvPr id="99" name="Google Shape;99;p2">
+            <a:extLst>
+              <a:ext uri="{FF2B5EF4-FFF2-40B4-BE49-F238E27FC236}">
+                <a16:creationId xmlns:a16="http://schemas.microsoft.com/office/drawing/2014/main" id="{0AE457D0-2A56-E3E3-A8E2-526949371D29}"/>
+              </a:ext>
+            </a:extLst>
+          </p:cNvPr>
+          <p:cNvSpPr txBox="1">
+            <a:spLocks noGrp="1"/>
+          </p:cNvSpPr>
+          <p:nvPr>
+            <p:ph type="ftr" idx="11"/>
+          </p:nvPr>
+        </p:nvSpPr>
+        <p:spPr>
+          <a:xfrm>
+            <a:off x="4165600" y="6356351"/>
+            <a:ext cx="3860800" cy="365125"/>
+          </a:xfrm>
+          <a:prstGeom prst="rect">
+            <a:avLst/>
+          </a:prstGeom>
+          <a:noFill/>
+          <a:ln>
+            <a:noFill/>
+          </a:ln>
+        </p:spPr>
+        <p:txBody>
+          <a:bodyPr spcFirstLastPara="1" wrap="square" lIns="91425" tIns="45700" rIns="91425" bIns="45700" anchor="ctr" anchorCtr="0">
+            <a:noAutofit/>
+          </a:bodyPr>
+          <a:lstStyle/>
+          <a:p>
+            <a:pPr marL="0" lvl="0" indent="0" algn="ctr" rtl="0">
+              <a:spcBef>
+                <a:spcPts val="0"/>
+              </a:spcBef>
+              <a:spcAft>
+                <a:spcPts val="0"/>
+              </a:spcAft>
+              <a:buNone/>
+            </a:pPr>
+            <a:r>
+              <a:rPr lang="en-US" dirty="0" err="1"/>
+              <a:t>軟體系統實驗室</a:t>
+            </a:r>
+            <a:endParaRPr dirty="0"/>
+          </a:p>
+        </p:txBody>
+      </p:sp>
+      <p:sp>
+        <p:nvSpPr>
+          <p:cNvPr id="7" name="Google Shape;100;p2">
+            <a:extLst>
+              <a:ext uri="{FF2B5EF4-FFF2-40B4-BE49-F238E27FC236}">
+                <a16:creationId xmlns:a16="http://schemas.microsoft.com/office/drawing/2014/main" id="{59C2EDC7-DD00-D1FD-EC94-9A42B1A7AC0D}"/>
+              </a:ext>
+            </a:extLst>
+          </p:cNvPr>
+          <p:cNvSpPr txBox="1">
+            <a:spLocks noGrp="1"/>
+          </p:cNvSpPr>
+          <p:nvPr>
+            <p:ph type="title"/>
+          </p:nvPr>
+        </p:nvSpPr>
+        <p:spPr>
+          <a:xfrm>
+            <a:off x="609600" y="274638"/>
+            <a:ext cx="10972800" cy="1143000"/>
+          </a:xfrm>
+          <a:prstGeom prst="rect">
+            <a:avLst/>
+          </a:prstGeom>
+          <a:noFill/>
+          <a:ln>
+            <a:noFill/>
+          </a:ln>
+        </p:spPr>
+        <p:txBody>
+          <a:bodyPr spcFirstLastPara="1" wrap="square" lIns="91425" tIns="45700" rIns="91425" bIns="45700" anchor="ctr" anchorCtr="0">
+            <a:noAutofit/>
+          </a:bodyPr>
+          <a:lstStyle/>
+          <a:p>
+            <a:r>
+              <a:rPr lang="en-US" altLang="zh-TW" dirty="0">
+                <a:latin typeface="Times New Roman" panose="02020603050405020304" pitchFamily="18" charset="0"/>
+                <a:ea typeface="標楷體" panose="03000509000000000000" pitchFamily="65" charset="-120"/>
+                <a:cs typeface="Times New Roman" panose="02020603050405020304" pitchFamily="18" charset="0"/>
+              </a:rPr>
+              <a:t>Common </a:t>
+            </a:r>
+            <a:r>
+              <a:rPr lang="en-US" altLang="zh-TW" dirty="0" err="1">
+                <a:latin typeface="Times New Roman" panose="02020603050405020304" pitchFamily="18" charset="0"/>
+                <a:ea typeface="標楷體" panose="03000509000000000000" pitchFamily="65" charset="-120"/>
+                <a:cs typeface="Times New Roman" panose="02020603050405020304" pitchFamily="18" charset="0"/>
+              </a:rPr>
+              <a:t>UseCase</a:t>
+            </a:r>
+            <a:endParaRPr dirty="0">
+              <a:latin typeface="Times New Roman" panose="02020603050405020304" pitchFamily="18" charset="0"/>
+              <a:ea typeface="標楷體" panose="03000509000000000000" pitchFamily="65" charset="-120"/>
+              <a:cs typeface="Times New Roman" panose="02020603050405020304" pitchFamily="18" charset="0"/>
+            </a:endParaRPr>
+          </a:p>
+        </p:txBody>
+      </p:sp>
+      <p:pic>
+        <p:nvPicPr>
+          <p:cNvPr id="11" name="圖片 10">
+            <a:extLst>
+              <a:ext uri="{FF2B5EF4-FFF2-40B4-BE49-F238E27FC236}">
+                <a16:creationId xmlns:a16="http://schemas.microsoft.com/office/drawing/2014/main" id="{25DC425D-77C1-93F0-07C9-9DDEB71B4F6B}"/>
+              </a:ext>
+            </a:extLst>
+          </p:cNvPr>
+          <p:cNvPicPr>
+            <a:picLocks noChangeAspect="1"/>
+          </p:cNvPicPr>
+          <p:nvPr/>
+        </p:nvPicPr>
+        <p:blipFill>
+          <a:blip r:embed="rId3"/>
+          <a:stretch>
+            <a:fillRect/>
+          </a:stretch>
+        </p:blipFill>
+        <p:spPr>
+          <a:xfrm>
+            <a:off x="609600" y="1417638"/>
+            <a:ext cx="11015713" cy="4938713"/>
+          </a:xfrm>
+          <a:prstGeom prst="rect">
+            <a:avLst/>
+          </a:prstGeom>
+        </p:spPr>
+      </p:pic>
+      <p:sp>
+        <p:nvSpPr>
+          <p:cNvPr id="2" name="矩形 1">
+            <a:extLst>
+              <a:ext uri="{FF2B5EF4-FFF2-40B4-BE49-F238E27FC236}">
+                <a16:creationId xmlns:a16="http://schemas.microsoft.com/office/drawing/2014/main" id="{09A204A5-8391-FB87-1F87-6CF64CACF63D}"/>
+              </a:ext>
+            </a:extLst>
+          </p:cNvPr>
+          <p:cNvSpPr/>
+          <p:nvPr/>
+        </p:nvSpPr>
+        <p:spPr>
+          <a:xfrm>
+            <a:off x="1210235" y="2160494"/>
+            <a:ext cx="10219765" cy="2985247"/>
+          </a:xfrm>
+          <a:prstGeom prst="rect">
+            <a:avLst/>
+          </a:prstGeom>
+          <a:noFill/>
+          <a:ln>
+            <a:solidFill>
+              <a:srgbClr val="FF0000"/>
+            </a:solidFill>
+          </a:ln>
+        </p:spPr>
+        <p:style>
+          <a:lnRef idx="2">
+            <a:schemeClr val="accent1">
+              <a:shade val="15000"/>
+            </a:schemeClr>
+          </a:lnRef>
+          <a:fillRef idx="1">
+            <a:schemeClr val="accent1"/>
+          </a:fillRef>
+          <a:effectRef idx="0">
+            <a:schemeClr val="accent1"/>
+          </a:effectRef>
+          <a:fontRef idx="minor">
+            <a:schemeClr val="lt1"/>
+          </a:fontRef>
+        </p:style>
+        <p:txBody>
+          <a:bodyPr rtlCol="0" anchor="ctr"/>
+          <a:lstStyle/>
+          <a:p>
+            <a:pPr algn="ctr"/>
+            <a:endParaRPr lang="zh-TW" altLang="en-US"/>
+          </a:p>
+        </p:txBody>
+      </p:sp>
+      <p:sp>
+        <p:nvSpPr>
+          <p:cNvPr id="3" name="Google Shape;98;p2">
+            <a:extLst>
+              <a:ext uri="{FF2B5EF4-FFF2-40B4-BE49-F238E27FC236}">
+                <a16:creationId xmlns:a16="http://schemas.microsoft.com/office/drawing/2014/main" id="{A86C946A-04B3-CE5E-1C54-E5A8B96335A6}"/>
+              </a:ext>
+            </a:extLst>
+          </p:cNvPr>
+          <p:cNvSpPr txBox="1">
+            <a:spLocks noGrp="1"/>
+          </p:cNvSpPr>
+          <p:nvPr>
+            <p:ph type="dt" idx="10"/>
+          </p:nvPr>
+        </p:nvSpPr>
+        <p:spPr>
+          <a:xfrm>
+            <a:off x="609600" y="6356351"/>
+            <a:ext cx="2844800" cy="365125"/>
+          </a:xfrm>
+          <a:prstGeom prst="rect">
+            <a:avLst/>
+          </a:prstGeom>
+          <a:noFill/>
+          <a:ln>
+            <a:noFill/>
+          </a:ln>
+        </p:spPr>
+        <p:txBody>
+          <a:bodyPr spcFirstLastPara="1" wrap="square" lIns="91425" tIns="45700" rIns="91425" bIns="45700" anchor="ctr" anchorCtr="0">
+            <a:noAutofit/>
+          </a:bodyPr>
+          <a:lstStyle/>
+          <a:p>
+            <a:pPr lvl="0"/>
+            <a:r>
+              <a:rPr lang="en-US" altLang="zh-TW" dirty="0"/>
+              <a:t>2026/03/24</a:t>
+            </a:r>
+          </a:p>
+        </p:txBody>
+      </p:sp>
+    </p:spTree>
+    <p:extLst>
+      <p:ext uri="{BB962C8B-B14F-4D97-AF65-F5344CB8AC3E}">
+        <p14:creationId xmlns:p14="http://schemas.microsoft.com/office/powerpoint/2010/main" val="3270234014"/>
       </p:ext>
     </p:extLst>
   </p:cSld>
